--- a/output/PP_Research_Detailed_v2.pptx
+++ b/output/PP_Research_Detailed_v2.pptx
@@ -35467,7 +35467,7 @@
                 <a:latin typeface="AppleGothic"/>
                 <a:ea typeface="AppleGothic"/>
               </a:rPr>
-              <a:t>ppt/pp/PP_Research_Detailed_v2.pptx</a:t>
+              <a:t>pp_pae_total/output/PP_Research_Detailed_v2.pptx</a:t>
             </a:r>
           </a:p>
         </p:txBody>
@@ -69006,7 +69006,7 @@
                 <a:latin typeface="AppleGothic"/>
                 <a:ea typeface="AppleGothic"/>
               </a:rPr>
-              <a:t>고정본 파일: ppt/pp/PP_Research_Detailed_v2.pptx</a:t>
+              <a:t>고정본(단일): pp_pae_total/output/PP_Research_Detailed_v2.pptx</a:t>
             </a:r>
           </a:p>
           <a:p>

--- a/output/PP_Research_Detailed_v2.pptx
+++ b/output/PP_Research_Detailed_v2.pptx
@@ -17,21 +17,6 @@
     <p:sldId id="265" r:id="rId16"/>
     <p:sldId id="266" r:id="rId17"/>
     <p:sldId id="267" r:id="rId18"/>
-    <p:sldId id="268" r:id="rId19"/>
-    <p:sldId id="269" r:id="rId20"/>
-    <p:sldId id="270" r:id="rId21"/>
-    <p:sldId id="271" r:id="rId22"/>
-    <p:sldId id="272" r:id="rId23"/>
-    <p:sldId id="273" r:id="rId24"/>
-    <p:sldId id="274" r:id="rId25"/>
-    <p:sldId id="275" r:id="rId26"/>
-    <p:sldId id="276" r:id="rId27"/>
-    <p:sldId id="277" r:id="rId28"/>
-    <p:sldId id="278" r:id="rId29"/>
-    <p:sldId id="279" r:id="rId30"/>
-    <p:sldId id="280" r:id="rId31"/>
-    <p:sldId id="281" r:id="rId32"/>
-    <p:sldId id="282" r:id="rId33"/>
   </p:sldIdLst>
   <p:sldSz cx="12192000" cy="6858000" type="screen4x3"/>
   <p:notesSz cx="6858000" cy="9144000"/>
@@ -3165,16 +3150,16 @@
         </p:nvSpPr>
         <p:spPr>
           <a:xfrm>
-            <a:off x="342900" y="266700"/>
-            <a:ext cx="11506200" cy="6324600"/>
+            <a:off x="381000" y="304800"/>
+            <a:ext cx="11430000" cy="6248400"/>
           </a:xfrm>
           <a:prstGeom prst="rect">
             <a:avLst/>
           </a:prstGeom>
           <a:noFill/>
-          <a:ln w="12700">
+          <a:ln w="15875">
             <a:solidFill>
-              <a:srgbClr val="333333"/>
+              <a:srgbClr val="222222"/>
             </a:solidFill>
           </a:ln>
         </p:spPr>
@@ -3216,8 +3201,8 @@
         </p:blipFill>
         <p:spPr>
           <a:xfrm>
-            <a:off x="8191500" y="533400"/>
-            <a:ext cx="3238500" cy="647700"/>
+            <a:off x="8191500" y="552450"/>
+            <a:ext cx="3048000" cy="609600"/>
           </a:xfrm>
           <a:prstGeom prst="rect">
             <a:avLst/>
@@ -3232,8 +3217,8 @@
         </p:nvSpPr>
         <p:spPr>
           <a:xfrm>
-            <a:off x="1143000" y="2381250"/>
-            <a:ext cx="9906000" cy="457200"/>
+            <a:off x="952500" y="2286000"/>
+            <a:ext cx="10287000" cy="457200"/>
           </a:xfrm>
           <a:prstGeom prst="rect">
             <a:avLst/>
@@ -3248,9 +3233,9 @@
           <a:p>
             <a:pPr algn="ctr"/>
             <a:r>
-              <a:rPr sz="3400" b="1">
+              <a:rPr sz="3600" b="1">
                 <a:solidFill>
-                  <a:srgbClr val="1C1C1C"/>
+                  <a:srgbClr val="111111"/>
                 </a:solidFill>
                 <a:latin typeface="AppleGothic"/>
                 <a:ea typeface="AppleGothic"/>
@@ -3268,8 +3253,8 @@
         </p:nvSpPr>
         <p:spPr>
           <a:xfrm>
-            <a:off x="1143000" y="2952750"/>
-            <a:ext cx="9906000" cy="266700"/>
+            <a:off x="952500" y="2857500"/>
+            <a:ext cx="10287000" cy="266700"/>
           </a:xfrm>
           <a:prstGeom prst="rect">
             <a:avLst/>
@@ -3286,7 +3271,7 @@
             <a:r>
               <a:rPr sz="1600" b="0">
                 <a:solidFill>
-                  <a:srgbClr val="6A6A6A"/>
+                  <a:srgbClr val="555555"/>
                 </a:solidFill>
                 <a:latin typeface="AppleGothic"/>
                 <a:ea typeface="AppleGothic"/>
@@ -3304,8 +3289,8 @@
         </p:nvSpPr>
         <p:spPr>
           <a:xfrm>
-            <a:off x="1143000" y="3524250"/>
-            <a:ext cx="9906000" cy="266700"/>
+            <a:off x="952500" y="3429000"/>
+            <a:ext cx="10287000" cy="266700"/>
           </a:xfrm>
           <a:prstGeom prst="rect">
             <a:avLst/>
@@ -3320,9 +3305,9 @@
           <a:p>
             <a:pPr algn="ctr"/>
             <a:r>
-              <a:rPr sz="1500" b="1">
+              <a:rPr sz="1600" b="1">
                 <a:solidFill>
-                  <a:srgbClr val="0F5C5C"/>
+                  <a:srgbClr val="0A5C5C"/>
                 </a:solidFill>
                 <a:latin typeface="AppleGothic"/>
                 <a:ea typeface="AppleGothic"/>
@@ -3340,8 +3325,8 @@
         </p:nvSpPr>
         <p:spPr>
           <a:xfrm>
-            <a:off x="1143000" y="4476750"/>
-            <a:ext cx="9906000" cy="228600"/>
+            <a:off x="952500" y="4381500"/>
+            <a:ext cx="10287000" cy="228600"/>
           </a:xfrm>
           <a:prstGeom prst="rect">
             <a:avLst/>
@@ -3358,7 +3343,7 @@
             <a:r>
               <a:rPr sz="1400" b="0">
                 <a:solidFill>
-                  <a:srgbClr val="1C1C1C"/>
+                  <a:srgbClr val="111111"/>
                 </a:solidFill>
                 <a:latin typeface="AppleGothic"/>
                 <a:ea typeface="AppleGothic"/>
@@ -3376,8 +3361,8 @@
         </p:nvSpPr>
         <p:spPr>
           <a:xfrm>
-            <a:off x="1143000" y="4953000"/>
-            <a:ext cx="9906000" cy="209550"/>
+            <a:off x="952500" y="4857750"/>
+            <a:ext cx="10287000" cy="209550"/>
           </a:xfrm>
           <a:prstGeom prst="rect">
             <a:avLst/>
@@ -3394,7 +3379,7 @@
             <a:r>
               <a:rPr sz="1300" b="0">
                 <a:solidFill>
-                  <a:srgbClr val="6A6A6A"/>
+                  <a:srgbClr val="555555"/>
                 </a:solidFill>
                 <a:latin typeface="AppleGothic"/>
                 <a:ea typeface="AppleGothic"/>
@@ -3474,13 +3459,13 @@
         <p:spPr>
           <a:xfrm>
             <a:off x="0" y="0"/>
-            <a:ext cx="12192000" cy="28575"/>
+            <a:ext cx="12192000" cy="38100"/>
           </a:xfrm>
           <a:prstGeom prst="rect">
             <a:avLst/>
           </a:prstGeom>
           <a:solidFill>
-            <a:srgbClr val="0F5C5C"/>
+            <a:srgbClr val="0A5C5C"/>
           </a:solidFill>
           <a:ln>
             <a:noFill/>
@@ -3516,8 +3501,8 @@
         </p:nvSpPr>
         <p:spPr>
           <a:xfrm>
-            <a:off x="533400" y="266700"/>
-            <a:ext cx="10477500" cy="342900"/>
+            <a:off x="457200" y="209550"/>
+            <a:ext cx="11239500" cy="323850"/>
           </a:xfrm>
           <a:prstGeom prst="rect">
             <a:avLst/>
@@ -3534,12 +3519,12 @@
             <a:r>
               <a:rPr sz="2200" b="1">
                 <a:solidFill>
-                  <a:srgbClr val="1C1C1C"/>
+                  <a:srgbClr val="111111"/>
                 </a:solidFill>
                 <a:latin typeface="AppleGothic"/>
                 <a:ea typeface="AppleGothic"/>
               </a:rPr>
-              <a:t>검증</a:t>
+              <a:t>안정성</a:t>
             </a:r>
           </a:p>
         </p:txBody>
@@ -3552,8 +3537,8 @@
         </p:nvSpPr>
         <p:spPr>
           <a:xfrm>
-            <a:off x="533400" y="609600"/>
-            <a:ext cx="10477500" cy="209550"/>
+            <a:off x="457200" y="533400"/>
+            <a:ext cx="11239500" cy="190500"/>
           </a:xfrm>
           <a:prstGeom prst="rect">
             <a:avLst/>
@@ -3570,19 +3555,19 @@
             <a:r>
               <a:rPr sz="1200" b="0">
                 <a:solidFill>
-                  <a:srgbClr val="6A6A6A"/>
+                  <a:srgbClr val="555555"/>
                 </a:solidFill>
                 <a:latin typeface="AppleGothic"/>
                 <a:ea typeface="AppleGothic"/>
               </a:rPr>
-              <a:t>unit 분리 · hull-out · val-only 선택 · test는 한 번만</a:t>
+              <a:t>bootstrap CI  ·  MICH unit $R^2$</a:t>
             </a:r>
           </a:p>
         </p:txBody>
       </p:sp>
       <p:pic>
         <p:nvPicPr>
-          <p:cNvPr id="6" name="Picture 5" descr="protocol_flow.png"/>
+          <p:cNvPr id="6" name="Picture 5" descr="robustness_panel.png"/>
           <p:cNvPicPr>
             <a:picLocks noChangeAspect="1"/>
           </p:cNvPicPr>
@@ -3596,8 +3581,8 @@
         </p:blipFill>
         <p:spPr>
           <a:xfrm>
-            <a:off x="381000" y="1238250"/>
-            <a:ext cx="11430000" cy="4000500"/>
+            <a:off x="285750" y="857250"/>
+            <a:ext cx="11620500" cy="5048250"/>
           </a:xfrm>
           <a:prstGeom prst="rect">
             <a:avLst/>
@@ -3612,15 +3597,15 @@
         </p:nvCxnSpPr>
         <p:spPr>
           <a:xfrm>
-            <a:off x="533400" y="6457950"/>
-            <a:ext cx="11125200" cy="0"/>
+            <a:off x="457200" y="6477000"/>
+            <a:ext cx="11277600" cy="0"/>
           </a:xfrm>
           <a:prstGeom prst="line">
             <a:avLst/>
           </a:prstGeom>
           <a:ln w="9525">
             <a:solidFill>
-              <a:srgbClr val="E6E6E6"/>
+              <a:srgbClr val="D0D0D0"/>
             </a:solidFill>
           </a:ln>
         </p:spPr>
@@ -3647,8 +3632,8 @@
         </p:nvSpPr>
         <p:spPr>
           <a:xfrm>
-            <a:off x="533400" y="6515100"/>
-            <a:ext cx="6667500" cy="133350"/>
+            <a:off x="457200" y="6534150"/>
+            <a:ext cx="7620000" cy="133350"/>
           </a:xfrm>
           <a:prstGeom prst="rect">
             <a:avLst/>
@@ -3665,12 +3650,12 @@
             <a:r>
               <a:rPr sz="900" b="0">
                 <a:solidFill>
-                  <a:srgbClr val="6A6A6A"/>
+                  <a:srgbClr val="555555"/>
                 </a:solidFill>
                 <a:latin typeface="AppleGothic"/>
                 <a:ea typeface="AppleGothic"/>
               </a:rPr>
-              <a:t>SPS Lab  ·  Assumption-Aware Extrapolation</a:t>
+              <a:t>SPS Lab  ·  Assumption-Aware Extrapolation  ·  SAAR</a:t>
             </a:r>
           </a:p>
         </p:txBody>
@@ -3683,8 +3668,8 @@
         </p:nvSpPr>
         <p:spPr>
           <a:xfrm>
-            <a:off x="10858500" y="6496050"/>
-            <a:ext cx="571500" cy="152400"/>
+            <a:off x="10477500" y="6515100"/>
+            <a:ext cx="952500" cy="152400"/>
           </a:xfrm>
           <a:prstGeom prst="rect">
             <a:avLst/>
@@ -3701,12 +3686,12 @@
             <a:r>
               <a:rPr sz="1000" b="1">
                 <a:solidFill>
-                  <a:srgbClr val="6A6A6A"/>
+                  <a:srgbClr val="555555"/>
                 </a:solidFill>
                 <a:latin typeface="AppleGothic"/>
                 <a:ea typeface="AppleGothic"/>
               </a:rPr>
-              <a:t>10</a:t>
+              <a:t>10/12</a:t>
             </a:r>
           </a:p>
         </p:txBody>
@@ -3781,13 +3766,13 @@
         <p:spPr>
           <a:xfrm>
             <a:off x="0" y="0"/>
-            <a:ext cx="12192000" cy="28575"/>
+            <a:ext cx="12192000" cy="38100"/>
           </a:xfrm>
           <a:prstGeom prst="rect">
             <a:avLst/>
           </a:prstGeom>
           <a:solidFill>
-            <a:srgbClr val="0F5C5C"/>
+            <a:srgbClr val="0A5C5C"/>
           </a:solidFill>
           <a:ln>
             <a:noFill/>
@@ -3823,8 +3808,8 @@
         </p:nvSpPr>
         <p:spPr>
           <a:xfrm>
-            <a:off x="533400" y="266700"/>
-            <a:ext cx="10477500" cy="342900"/>
+            <a:off x="457200" y="209550"/>
+            <a:ext cx="11239500" cy="323850"/>
           </a:xfrm>
           <a:prstGeom prst="rect">
             <a:avLst/>
@@ -3841,12 +3826,12 @@
             <a:r>
               <a:rPr sz="2200" b="1">
                 <a:solidFill>
-                  <a:srgbClr val="1C1C1C"/>
+                  <a:srgbClr val="111111"/>
                 </a:solidFill>
                 <a:latin typeface="AppleGothic"/>
                 <a:ea typeface="AppleGothic"/>
               </a:rPr>
-              <a:t>주 결과</a:t>
+              <a:t>실패 · 경계</a:t>
             </a:r>
           </a:p>
         </p:txBody>
@@ -3859,8 +3844,8 @@
         </p:nvSpPr>
         <p:spPr>
           <a:xfrm>
-            <a:off x="533400" y="609600"/>
-            <a:ext cx="10477500" cy="209550"/>
+            <a:off x="457200" y="533400"/>
+            <a:ext cx="11239500" cy="190500"/>
           </a:xfrm>
           <a:prstGeom prst="rect">
             <a:avLst/>
@@ -3877,19 +3862,19 @@
             <a:r>
               <a:rPr sz="1200" b="0">
                 <a:solidFill>
-                  <a:srgbClr val="6A6A6A"/>
+                  <a:srgbClr val="555555"/>
                 </a:solidFill>
                 <a:latin typeface="AppleGothic"/>
                 <a:ea typeface="AppleGothic"/>
               </a:rPr>
-              <a:t>개발 3데이터  ·  최저점(MICH)을 살린 tradeoff</a:t>
+              <a:t>표로 남긴 한계  ·  주장 / 비주장</a:t>
             </a:r>
           </a:p>
         </p:txBody>
       </p:sp>
       <p:pic>
         <p:nvPicPr>
-          <p:cNvPr id="6" name="Picture 5" descr="results_panel.png"/>
+          <p:cNvPr id="6" name="Picture 5" descr="fail_cases.png"/>
           <p:cNvPicPr>
             <a:picLocks noChangeAspect="1"/>
           </p:cNvPicPr>
@@ -3903,8 +3888,32 @@
         </p:blipFill>
         <p:spPr>
           <a:xfrm>
-            <a:off x="381000" y="952500"/>
-            <a:ext cx="11430000" cy="4953000"/>
+            <a:off x="285750" y="809625"/>
+            <a:ext cx="5905500" cy="4953000"/>
+          </a:xfrm>
+          <a:prstGeom prst="rect">
+            <a:avLst/>
+          </a:prstGeom>
+        </p:spPr>
+      </p:pic>
+      <p:pic>
+        <p:nvPicPr>
+          <p:cNvPr id="7" name="Picture 6" descr="status_compact.png"/>
+          <p:cNvPicPr>
+            <a:picLocks noChangeAspect="1"/>
+          </p:cNvPicPr>
+          <p:nvPr/>
+        </p:nvPicPr>
+        <p:blipFill>
+          <a:blip r:embed="rId3"/>
+          <a:stretch>
+            <a:fillRect/>
+          </a:stretch>
+        </p:blipFill>
+        <p:spPr>
+          <a:xfrm>
+            <a:off x="6286500" y="809625"/>
+            <a:ext cx="5334000" cy="4953000"/>
           </a:xfrm>
           <a:prstGeom prst="rect">
             <a:avLst/>
@@ -3913,21 +3922,21 @@
       </p:pic>
       <p:cxnSp>
         <p:nvCxnSpPr>
-          <p:cNvPr id="7" name="Connector 6"/>
+          <p:cNvPr id="8" name="Connector 7"/>
           <p:cNvCxnSpPr/>
           <p:nvPr/>
         </p:nvCxnSpPr>
         <p:spPr>
           <a:xfrm>
-            <a:off x="533400" y="6457950"/>
-            <a:ext cx="11125200" cy="0"/>
+            <a:off x="457200" y="6477000"/>
+            <a:ext cx="11277600" cy="0"/>
           </a:xfrm>
           <a:prstGeom prst="line">
             <a:avLst/>
           </a:prstGeom>
           <a:ln w="9525">
             <a:solidFill>
-              <a:srgbClr val="E6E6E6"/>
+              <a:srgbClr val="D0D0D0"/>
             </a:solidFill>
           </a:ln>
         </p:spPr>
@@ -3948,14 +3957,14 @@
       </p:cxnSp>
       <p:sp>
         <p:nvSpPr>
-          <p:cNvPr id="8" name="TextBox 7"/>
+          <p:cNvPr id="9" name="TextBox 8"/>
           <p:cNvSpPr txBox="1"/>
           <p:nvPr/>
         </p:nvSpPr>
         <p:spPr>
           <a:xfrm>
-            <a:off x="533400" y="6515100"/>
-            <a:ext cx="6667500" cy="133350"/>
+            <a:off x="457200" y="6534150"/>
+            <a:ext cx="7620000" cy="133350"/>
           </a:xfrm>
           <a:prstGeom prst="rect">
             <a:avLst/>
@@ -3972,26 +3981,26 @@
             <a:r>
               <a:rPr sz="900" b="0">
                 <a:solidFill>
-                  <a:srgbClr val="6A6A6A"/>
+                  <a:srgbClr val="555555"/>
                 </a:solidFill>
                 <a:latin typeface="AppleGothic"/>
                 <a:ea typeface="AppleGothic"/>
               </a:rPr>
-              <a:t>SPS Lab  ·  Assumption-Aware Extrapolation</a:t>
-            </a:r>
-          </a:p>
-        </p:txBody>
-      </p:sp>
-      <p:sp>
-        <p:nvSpPr>
-          <p:cNvPr id="9" name="TextBox 8"/>
+              <a:t>SPS Lab  ·  Assumption-Aware Extrapolation  ·  SAAR</a:t>
+            </a:r>
+          </a:p>
+        </p:txBody>
+      </p:sp>
+      <p:sp>
+        <p:nvSpPr>
+          <p:cNvPr id="10" name="TextBox 9"/>
           <p:cNvSpPr txBox="1"/>
           <p:nvPr/>
         </p:nvSpPr>
         <p:spPr>
           <a:xfrm>
-            <a:off x="10858500" y="6496050"/>
-            <a:ext cx="571500" cy="152400"/>
+            <a:off x="10477500" y="6515100"/>
+            <a:ext cx="952500" cy="152400"/>
           </a:xfrm>
           <a:prstGeom prst="rect">
             <a:avLst/>
@@ -4008,12 +4017,12 @@
             <a:r>
               <a:rPr sz="1000" b="1">
                 <a:solidFill>
-                  <a:srgbClr val="6A6A6A"/>
+                  <a:srgbClr val="555555"/>
                 </a:solidFill>
                 <a:latin typeface="AppleGothic"/>
                 <a:ea typeface="AppleGothic"/>
               </a:rPr>
-              <a:t>11</a:t>
+              <a:t>11/12</a:t>
             </a:r>
           </a:p>
         </p:txBody>
@@ -4088,13 +4097,13 @@
         <p:spPr>
           <a:xfrm>
             <a:off x="0" y="0"/>
-            <a:ext cx="12192000" cy="28575"/>
+            <a:ext cx="12192000" cy="38100"/>
           </a:xfrm>
           <a:prstGeom prst="rect">
             <a:avLst/>
           </a:prstGeom>
           <a:solidFill>
-            <a:srgbClr val="0F5C5C"/>
+            <a:srgbClr val="0A5C5C"/>
           </a:solidFill>
           <a:ln>
             <a:noFill/>
@@ -4130,8 +4139,8 @@
         </p:nvSpPr>
         <p:spPr>
           <a:xfrm>
-            <a:off x="533400" y="266700"/>
-            <a:ext cx="10477500" cy="342900"/>
+            <a:off x="457200" y="209550"/>
+            <a:ext cx="11239500" cy="323850"/>
           </a:xfrm>
           <a:prstGeom prst="rect">
             <a:avLst/>
@@ -4148,12 +4157,12 @@
             <a:r>
               <a:rPr sz="2200" b="1">
                 <a:solidFill>
-                  <a:srgbClr val="1C1C1C"/>
+                  <a:srgbClr val="111111"/>
                 </a:solidFill>
                 <a:latin typeface="AppleGothic"/>
                 <a:ea typeface="AppleGothic"/>
               </a:rPr>
-              <a:t>무엇이 움직였나</a:t>
+              <a:t>경로와 한 줄</a:t>
             </a:r>
           </a:p>
         </p:txBody>
@@ -4166,8 +4175,8 @@
         </p:nvSpPr>
         <p:spPr>
           <a:xfrm>
-            <a:off x="533400" y="609600"/>
-            <a:ext cx="10477500" cy="209550"/>
+            <a:off x="457200" y="533400"/>
+            <a:ext cx="11239500" cy="190500"/>
           </a:xfrm>
           <a:prstGeom prst="rect">
             <a:avLst/>
@@ -4184,19 +4193,19 @@
             <a:r>
               <a:rPr sz="1200" b="0">
                 <a:solidFill>
-                  <a:srgbClr val="6A6A6A"/>
+                  <a:srgbClr val="555555"/>
                 </a:solidFill>
                 <a:latin typeface="AppleGothic"/>
                 <a:ea typeface="AppleGothic"/>
               </a:rPr>
-              <a:t>고정 경계 → SAAR  ·  평균 vs 최저</a:t>
+              <a:t>PAE / SAAR  ·  오늘 가져갈 말</a:t>
             </a:r>
           </a:p>
         </p:txBody>
       </p:sp>
       <p:pic>
         <p:nvPicPr>
-          <p:cNvPr id="6" name="Picture 5" descr="ablation_slope.png"/>
+          <p:cNvPr id="6" name="Picture 5" descr="pp_vs_pae_split.png"/>
           <p:cNvPicPr>
             <a:picLocks noChangeAspect="1"/>
           </p:cNvPicPr>
@@ -4210,55 +4219,139 @@
         </p:blipFill>
         <p:spPr>
           <a:xfrm>
-            <a:off x="285750" y="952500"/>
-            <a:ext cx="5905500" cy="4762500"/>
+            <a:off x="381000" y="809625"/>
+            <a:ext cx="11430000" cy="3619500"/>
           </a:xfrm>
           <a:prstGeom prst="rect">
             <a:avLst/>
           </a:prstGeom>
         </p:spPr>
       </p:pic>
-      <p:pic>
-        <p:nvPicPr>
-          <p:cNvPr id="7" name="Picture 6" descr="model_tradeoff.png"/>
-          <p:cNvPicPr>
-            <a:picLocks noChangeAspect="1"/>
-          </p:cNvPicPr>
-          <p:nvPr/>
-        </p:nvPicPr>
-        <p:blipFill>
-          <a:blip r:embed="rId3"/>
-          <a:stretch>
-            <a:fillRect/>
-          </a:stretch>
-        </p:blipFill>
-        <p:spPr>
-          <a:xfrm>
-            <a:off x="6286500" y="952500"/>
-            <a:ext cx="5334000" cy="4762500"/>
-          </a:xfrm>
-          <a:prstGeom prst="rect">
-            <a:avLst/>
-          </a:prstGeom>
-        </p:spPr>
-      </p:pic>
+      <p:sp>
+        <p:nvSpPr>
+          <p:cNvPr id="7" name="TextBox 6"/>
+          <p:cNvSpPr txBox="1"/>
+          <p:nvPr/>
+        </p:nvSpPr>
+        <p:spPr>
+          <a:xfrm>
+            <a:off x="533400" y="4667250"/>
+            <a:ext cx="11049000" cy="266700"/>
+          </a:xfrm>
+          <a:prstGeom prst="rect">
+            <a:avLst/>
+          </a:prstGeom>
+          <a:noFill/>
+        </p:spPr>
+        <p:txBody>
+          <a:bodyPr wrap="square">
+            <a:spAutoFit/>
+          </a:bodyPr>
+          <a:lstStyle/>
+          <a:p>
+            <a:pPr algn="l"/>
+            <a:r>
+              <a:rPr sz="1400" b="0">
+                <a:solidFill>
+                  <a:srgbClr val="111111"/>
+                </a:solidFill>
+                <a:latin typeface="AppleGothic"/>
+                <a:ea typeface="AppleGothic"/>
+              </a:rPr>
+              <a:t>1  밖을 지탱하는 것은 가정이지만, 식만 넣으면 답이 아니다.</a:t>
+            </a:r>
+          </a:p>
+        </p:txBody>
+      </p:sp>
+      <p:sp>
+        <p:nvSpPr>
+          <p:cNvPr id="8" name="TextBox 7"/>
+          <p:cNvSpPr txBox="1"/>
+          <p:nvPr/>
+        </p:nvSpPr>
+        <p:spPr>
+          <a:xfrm>
+            <a:off x="533400" y="5048250"/>
+            <a:ext cx="11049000" cy="266700"/>
+          </a:xfrm>
+          <a:prstGeom prst="rect">
+            <a:avLst/>
+          </a:prstGeom>
+          <a:noFill/>
+        </p:spPr>
+        <p:txBody>
+          <a:bodyPr wrap="square">
+            <a:spAutoFit/>
+          </a:bodyPr>
+          <a:lstStyle/>
+          <a:p>
+            <a:pPr algn="l"/>
+            <a:r>
+              <a:rPr sz="1400" b="0">
+                <a:solidFill>
+                  <a:srgbClr val="111111"/>
+                </a:solidFill>
+                <a:latin typeface="AppleGothic"/>
+                <a:ea typeface="AppleGothic"/>
+              </a:rPr>
+              <a:t>2  식이 없으면 SAAR — 동결 affine + 제한 residual.  주표 0.934 / 0.842 / 0.751.</a:t>
+            </a:r>
+          </a:p>
+        </p:txBody>
+      </p:sp>
+      <p:sp>
+        <p:nvSpPr>
+          <p:cNvPr id="9" name="TextBox 8"/>
+          <p:cNvSpPr txBox="1"/>
+          <p:nvPr/>
+        </p:nvSpPr>
+        <p:spPr>
+          <a:xfrm>
+            <a:off x="533400" y="5429250"/>
+            <a:ext cx="11049000" cy="266700"/>
+          </a:xfrm>
+          <a:prstGeom prst="rect">
+            <a:avLst/>
+          </a:prstGeom>
+          <a:noFill/>
+        </p:spPr>
+        <p:txBody>
+          <a:bodyPr wrap="square">
+            <a:spAutoFit/>
+          </a:bodyPr>
+          <a:lstStyle/>
+          <a:p>
+            <a:pPr algn="l"/>
+            <a:r>
+              <a:rPr sz="1400" b="0">
+                <a:solidFill>
+                  <a:srgbClr val="111111"/>
+                </a:solidFill>
+                <a:latin typeface="AppleGothic"/>
+                <a:ea typeface="AppleGothic"/>
+              </a:rPr>
+              <a:t>3  실패·Zn·PAE는 한계/후속. 만능 SOTA를 주장하지 않는다.</a:t>
+            </a:r>
+          </a:p>
+        </p:txBody>
+      </p:sp>
       <p:cxnSp>
         <p:nvCxnSpPr>
-          <p:cNvPr id="8" name="Connector 7"/>
+          <p:cNvPr id="10" name="Connector 9"/>
           <p:cNvCxnSpPr/>
           <p:nvPr/>
         </p:nvCxnSpPr>
         <p:spPr>
           <a:xfrm>
-            <a:off x="533400" y="6457950"/>
-            <a:ext cx="11125200" cy="0"/>
+            <a:off x="457200" y="6477000"/>
+            <a:ext cx="11277600" cy="0"/>
           </a:xfrm>
           <a:prstGeom prst="line">
             <a:avLst/>
           </a:prstGeom>
           <a:ln w="9525">
             <a:solidFill>
-              <a:srgbClr val="E6E6E6"/>
+              <a:srgbClr val="D0D0D0"/>
             </a:solidFill>
           </a:ln>
         </p:spPr>
@@ -4279,14 +4372,14 @@
       </p:cxnSp>
       <p:sp>
         <p:nvSpPr>
-          <p:cNvPr id="9" name="TextBox 8"/>
+          <p:cNvPr id="11" name="TextBox 10"/>
           <p:cNvSpPr txBox="1"/>
           <p:nvPr/>
         </p:nvSpPr>
         <p:spPr>
           <a:xfrm>
-            <a:off x="533400" y="6515100"/>
-            <a:ext cx="6667500" cy="133350"/>
+            <a:off x="457200" y="6534150"/>
+            <a:ext cx="7620000" cy="133350"/>
           </a:xfrm>
           <a:prstGeom prst="rect">
             <a:avLst/>
@@ -4303,26 +4396,26 @@
             <a:r>
               <a:rPr sz="900" b="0">
                 <a:solidFill>
-                  <a:srgbClr val="6A6A6A"/>
+                  <a:srgbClr val="555555"/>
                 </a:solidFill>
                 <a:latin typeface="AppleGothic"/>
                 <a:ea typeface="AppleGothic"/>
               </a:rPr>
-              <a:t>SPS Lab  ·  Assumption-Aware Extrapolation</a:t>
-            </a:r>
-          </a:p>
-        </p:txBody>
-      </p:sp>
-      <p:sp>
-        <p:nvSpPr>
-          <p:cNvPr id="10" name="TextBox 9"/>
+              <a:t>SPS Lab  ·  Assumption-Aware Extrapolation  ·  SAAR</a:t>
+            </a:r>
+          </a:p>
+        </p:txBody>
+      </p:sp>
+      <p:sp>
+        <p:nvSpPr>
+          <p:cNvPr id="12" name="TextBox 11"/>
           <p:cNvSpPr txBox="1"/>
           <p:nvPr/>
         </p:nvSpPr>
         <p:spPr>
           <a:xfrm>
-            <a:off x="10858500" y="6496050"/>
-            <a:ext cx="571500" cy="152400"/>
+            <a:off x="10477500" y="6515100"/>
+            <a:ext cx="952500" cy="152400"/>
           </a:xfrm>
           <a:prstGeom prst="rect">
             <a:avLst/>
@@ -4339,2173 +4432,12 @@
             <a:r>
               <a:rPr sz="1000" b="1">
                 <a:solidFill>
-                  <a:srgbClr val="6A6A6A"/>
+                  <a:srgbClr val="555555"/>
                 </a:solidFill>
                 <a:latin typeface="AppleGothic"/>
                 <a:ea typeface="AppleGothic"/>
               </a:rPr>
-              <a:t>12</a:t>
-            </a:r>
-          </a:p>
-        </p:txBody>
-      </p:sp>
-    </p:spTree>
-  </p:cSld>
-  <p:clrMapOvr>
-    <a:masterClrMapping/>
-  </p:clrMapOvr>
-</p:sld>
-</file>
-
-<file path=ppt/slides/slide13.xml><?xml version="1.0" encoding="utf-8"?>
-<p:sld xmlns:a="http://schemas.openxmlformats.org/drawingml/2006/main" xmlns:p="http://schemas.openxmlformats.org/presentationml/2006/main" xmlns:r="http://schemas.openxmlformats.org/officeDocument/2006/relationships">
-  <p:cSld>
-    <p:spTree>
-      <p:nvGrpSpPr>
-        <p:cNvPr id="1" name=""/>
-        <p:cNvGrpSpPr/>
-        <p:nvPr/>
-      </p:nvGrpSpPr>
-      <p:grpSpPr/>
-      <p:sp>
-        <p:nvSpPr>
-          <p:cNvPr id="2" name="Rectangle 1"/>
-          <p:cNvSpPr/>
-          <p:nvPr/>
-        </p:nvSpPr>
-        <p:spPr>
-          <a:xfrm>
-            <a:off x="0" y="0"/>
-            <a:ext cx="12192000" cy="6858000"/>
-          </a:xfrm>
-          <a:prstGeom prst="rect">
-            <a:avLst/>
-          </a:prstGeom>
-          <a:solidFill>
-            <a:srgbClr val="FFFFFF"/>
-          </a:solidFill>
-          <a:ln>
-            <a:noFill/>
-          </a:ln>
-        </p:spPr>
-        <p:style>
-          <a:lnRef idx="1">
-            <a:schemeClr val="accent1"/>
-          </a:lnRef>
-          <a:fillRef idx="3">
-            <a:schemeClr val="accent1"/>
-          </a:fillRef>
-          <a:effectRef idx="2">
-            <a:schemeClr val="accent1"/>
-          </a:effectRef>
-          <a:fontRef idx="minor">
-            <a:schemeClr val="lt1"/>
-          </a:fontRef>
-        </p:style>
-        <p:txBody>
-          <a:bodyPr rtlCol="0" anchor="ctr"/>
-          <a:lstStyle/>
-          <a:p>
-            <a:pPr algn="ctr"/>
-          </a:p>
-        </p:txBody>
-      </p:sp>
-      <p:sp>
-        <p:nvSpPr>
-          <p:cNvPr id="3" name="Rectangle 2"/>
-          <p:cNvSpPr/>
-          <p:nvPr/>
-        </p:nvSpPr>
-        <p:spPr>
-          <a:xfrm>
-            <a:off x="0" y="0"/>
-            <a:ext cx="12192000" cy="28575"/>
-          </a:xfrm>
-          <a:prstGeom prst="rect">
-            <a:avLst/>
-          </a:prstGeom>
-          <a:solidFill>
-            <a:srgbClr val="0F5C5C"/>
-          </a:solidFill>
-          <a:ln>
-            <a:noFill/>
-          </a:ln>
-        </p:spPr>
-        <p:style>
-          <a:lnRef idx="1">
-            <a:schemeClr val="accent1"/>
-          </a:lnRef>
-          <a:fillRef idx="3">
-            <a:schemeClr val="accent1"/>
-          </a:fillRef>
-          <a:effectRef idx="2">
-            <a:schemeClr val="accent1"/>
-          </a:effectRef>
-          <a:fontRef idx="minor">
-            <a:schemeClr val="lt1"/>
-          </a:fontRef>
-        </p:style>
-        <p:txBody>
-          <a:bodyPr rtlCol="0" anchor="ctr"/>
-          <a:lstStyle/>
-          <a:p>
-            <a:pPr algn="ctr"/>
-          </a:p>
-        </p:txBody>
-      </p:sp>
-      <p:sp>
-        <p:nvSpPr>
-          <p:cNvPr id="4" name="TextBox 3"/>
-          <p:cNvSpPr txBox="1"/>
-          <p:nvPr/>
-        </p:nvSpPr>
-        <p:spPr>
-          <a:xfrm>
-            <a:off x="533400" y="266700"/>
-            <a:ext cx="10477500" cy="342900"/>
-          </a:xfrm>
-          <a:prstGeom prst="rect">
-            <a:avLst/>
-          </a:prstGeom>
-          <a:noFill/>
-        </p:spPr>
-        <p:txBody>
-          <a:bodyPr wrap="square">
-            <a:spAutoFit/>
-          </a:bodyPr>
-          <a:lstStyle/>
-          <a:p>
-            <a:pPr algn="l"/>
-            <a:r>
-              <a:rPr sz="2200" b="1">
-                <a:solidFill>
-                  <a:srgbClr val="1C1C1C"/>
-                </a:solidFill>
-                <a:latin typeface="AppleGothic"/>
-                <a:ea typeface="AppleGothic"/>
-              </a:rPr>
-              <a:t>비교 — 잘 된 8곳</a:t>
-            </a:r>
-          </a:p>
-        </p:txBody>
-      </p:sp>
-      <p:sp>
-        <p:nvSpPr>
-          <p:cNvPr id="5" name="TextBox 4"/>
-          <p:cNvSpPr txBox="1"/>
-          <p:nvPr/>
-        </p:nvSpPr>
-        <p:spPr>
-          <a:xfrm>
-            <a:off x="533400" y="609600"/>
-            <a:ext cx="10477500" cy="209550"/>
-          </a:xfrm>
-          <a:prstGeom prst="rect">
-            <a:avLst/>
-          </a:prstGeom>
-          <a:noFill/>
-        </p:spPr>
-        <p:txBody>
-          <a:bodyPr wrap="square">
-            <a:spAutoFit/>
-          </a:bodyPr>
-          <a:lstStyle/>
-          <a:p>
-            <a:pPr algn="l"/>
-            <a:r>
-              <a:rPr sz="1200" b="0">
-                <a:solidFill>
-                  <a:srgbClr val="6A6A6A"/>
-                </a:solidFill>
-                <a:latin typeface="AppleGothic"/>
-                <a:ea typeface="AppleGothic"/>
-              </a:rPr>
-              <a:t>행=데이터  ·  열=알고리즘  ·  SAAR 열 강조</a:t>
-            </a:r>
-          </a:p>
-        </p:txBody>
-      </p:sp>
-      <p:pic>
-        <p:nvPicPr>
-          <p:cNvPr id="6" name="Picture 5" descr="competitor_bars.png"/>
-          <p:cNvPicPr>
-            <a:picLocks noChangeAspect="1"/>
-          </p:cNvPicPr>
-          <p:nvPr/>
-        </p:nvPicPr>
-        <p:blipFill>
-          <a:blip r:embed="rId2"/>
-          <a:stretch>
-            <a:fillRect/>
-          </a:stretch>
-        </p:blipFill>
-        <p:spPr>
-          <a:xfrm>
-            <a:off x="381000" y="904875"/>
-            <a:ext cx="11430000" cy="4953000"/>
-          </a:xfrm>
-          <a:prstGeom prst="rect">
-            <a:avLst/>
-          </a:prstGeom>
-        </p:spPr>
-      </p:pic>
-      <p:cxnSp>
-        <p:nvCxnSpPr>
-          <p:cNvPr id="7" name="Connector 6"/>
-          <p:cNvCxnSpPr/>
-          <p:nvPr/>
-        </p:nvCxnSpPr>
-        <p:spPr>
-          <a:xfrm>
-            <a:off x="533400" y="6457950"/>
-            <a:ext cx="11125200" cy="0"/>
-          </a:xfrm>
-          <a:prstGeom prst="line">
-            <a:avLst/>
-          </a:prstGeom>
-          <a:ln w="9525">
-            <a:solidFill>
-              <a:srgbClr val="E6E6E6"/>
-            </a:solidFill>
-          </a:ln>
-        </p:spPr>
-        <p:style>
-          <a:lnRef idx="2">
-            <a:schemeClr val="accent1"/>
-          </a:lnRef>
-          <a:fillRef idx="0">
-            <a:schemeClr val="accent1"/>
-          </a:fillRef>
-          <a:effectRef idx="1">
-            <a:schemeClr val="accent1"/>
-          </a:effectRef>
-          <a:fontRef idx="minor">
-            <a:schemeClr val="tx1"/>
-          </a:fontRef>
-        </p:style>
-      </p:cxnSp>
-      <p:sp>
-        <p:nvSpPr>
-          <p:cNvPr id="8" name="TextBox 7"/>
-          <p:cNvSpPr txBox="1"/>
-          <p:nvPr/>
-        </p:nvSpPr>
-        <p:spPr>
-          <a:xfrm>
-            <a:off x="533400" y="6515100"/>
-            <a:ext cx="6667500" cy="133350"/>
-          </a:xfrm>
-          <a:prstGeom prst="rect">
-            <a:avLst/>
-          </a:prstGeom>
-          <a:noFill/>
-        </p:spPr>
-        <p:txBody>
-          <a:bodyPr wrap="square">
-            <a:spAutoFit/>
-          </a:bodyPr>
-          <a:lstStyle/>
-          <a:p>
-            <a:pPr algn="l"/>
-            <a:r>
-              <a:rPr sz="900" b="0">
-                <a:solidFill>
-                  <a:srgbClr val="6A6A6A"/>
-                </a:solidFill>
-                <a:latin typeface="AppleGothic"/>
-                <a:ea typeface="AppleGothic"/>
-              </a:rPr>
-              <a:t>SPS Lab  ·  Assumption-Aware Extrapolation</a:t>
-            </a:r>
-          </a:p>
-        </p:txBody>
-      </p:sp>
-      <p:sp>
-        <p:nvSpPr>
-          <p:cNvPr id="9" name="TextBox 8"/>
-          <p:cNvSpPr txBox="1"/>
-          <p:nvPr/>
-        </p:nvSpPr>
-        <p:spPr>
-          <a:xfrm>
-            <a:off x="10858500" y="6496050"/>
-            <a:ext cx="571500" cy="152400"/>
-          </a:xfrm>
-          <a:prstGeom prst="rect">
-            <a:avLst/>
-          </a:prstGeom>
-          <a:noFill/>
-        </p:spPr>
-        <p:txBody>
-          <a:bodyPr wrap="square">
-            <a:spAutoFit/>
-          </a:bodyPr>
-          <a:lstStyle/>
-          <a:p>
-            <a:pPr algn="r"/>
-            <a:r>
-              <a:rPr sz="1000" b="1">
-                <a:solidFill>
-                  <a:srgbClr val="6A6A6A"/>
-                </a:solidFill>
-                <a:latin typeface="AppleGothic"/>
-                <a:ea typeface="AppleGothic"/>
-              </a:rPr>
-              <a:t>13</a:t>
-            </a:r>
-          </a:p>
-        </p:txBody>
-      </p:sp>
-    </p:spTree>
-  </p:cSld>
-  <p:clrMapOvr>
-    <a:masterClrMapping/>
-  </p:clrMapOvr>
-</p:sld>
-</file>
-
-<file path=ppt/slides/slide14.xml><?xml version="1.0" encoding="utf-8"?>
-<p:sld xmlns:a="http://schemas.openxmlformats.org/drawingml/2006/main" xmlns:p="http://schemas.openxmlformats.org/presentationml/2006/main" xmlns:r="http://schemas.openxmlformats.org/officeDocument/2006/relationships">
-  <p:cSld>
-    <p:spTree>
-      <p:nvGrpSpPr>
-        <p:cNvPr id="1" name=""/>
-        <p:cNvGrpSpPr/>
-        <p:nvPr/>
-      </p:nvGrpSpPr>
-      <p:grpSpPr/>
-      <p:sp>
-        <p:nvSpPr>
-          <p:cNvPr id="2" name="Rectangle 1"/>
-          <p:cNvSpPr/>
-          <p:nvPr/>
-        </p:nvSpPr>
-        <p:spPr>
-          <a:xfrm>
-            <a:off x="0" y="0"/>
-            <a:ext cx="12192000" cy="6858000"/>
-          </a:xfrm>
-          <a:prstGeom prst="rect">
-            <a:avLst/>
-          </a:prstGeom>
-          <a:solidFill>
-            <a:srgbClr val="FFFFFF"/>
-          </a:solidFill>
-          <a:ln>
-            <a:noFill/>
-          </a:ln>
-        </p:spPr>
-        <p:style>
-          <a:lnRef idx="1">
-            <a:schemeClr val="accent1"/>
-          </a:lnRef>
-          <a:fillRef idx="3">
-            <a:schemeClr val="accent1"/>
-          </a:fillRef>
-          <a:effectRef idx="2">
-            <a:schemeClr val="accent1"/>
-          </a:effectRef>
-          <a:fontRef idx="minor">
-            <a:schemeClr val="lt1"/>
-          </a:fontRef>
-        </p:style>
-        <p:txBody>
-          <a:bodyPr rtlCol="0" anchor="ctr"/>
-          <a:lstStyle/>
-          <a:p>
-            <a:pPr algn="ctr"/>
-          </a:p>
-        </p:txBody>
-      </p:sp>
-      <p:sp>
-        <p:nvSpPr>
-          <p:cNvPr id="3" name="Rectangle 2"/>
-          <p:cNvSpPr/>
-          <p:nvPr/>
-        </p:nvSpPr>
-        <p:spPr>
-          <a:xfrm>
-            <a:off x="0" y="0"/>
-            <a:ext cx="12192000" cy="28575"/>
-          </a:xfrm>
-          <a:prstGeom prst="rect">
-            <a:avLst/>
-          </a:prstGeom>
-          <a:solidFill>
-            <a:srgbClr val="0F5C5C"/>
-          </a:solidFill>
-          <a:ln>
-            <a:noFill/>
-          </a:ln>
-        </p:spPr>
-        <p:style>
-          <a:lnRef idx="1">
-            <a:schemeClr val="accent1"/>
-          </a:lnRef>
-          <a:fillRef idx="3">
-            <a:schemeClr val="accent1"/>
-          </a:fillRef>
-          <a:effectRef idx="2">
-            <a:schemeClr val="accent1"/>
-          </a:effectRef>
-          <a:fontRef idx="minor">
-            <a:schemeClr val="lt1"/>
-          </a:fontRef>
-        </p:style>
-        <p:txBody>
-          <a:bodyPr rtlCol="0" anchor="ctr"/>
-          <a:lstStyle/>
-          <a:p>
-            <a:pPr algn="ctr"/>
-          </a:p>
-        </p:txBody>
-      </p:sp>
-      <p:sp>
-        <p:nvSpPr>
-          <p:cNvPr id="4" name="TextBox 3"/>
-          <p:cNvSpPr txBox="1"/>
-          <p:nvPr/>
-        </p:nvSpPr>
-        <p:spPr>
-          <a:xfrm>
-            <a:off x="533400" y="266700"/>
-            <a:ext cx="10477500" cy="342900"/>
-          </a:xfrm>
-          <a:prstGeom prst="rect">
-            <a:avLst/>
-          </a:prstGeom>
-          <a:noFill/>
-        </p:spPr>
-        <p:txBody>
-          <a:bodyPr wrap="square">
-            <a:spAutoFit/>
-          </a:bodyPr>
-          <a:lstStyle/>
-          <a:p>
-            <a:pPr algn="l"/>
-            <a:r>
-              <a:rPr sz="2200" b="1">
-                <a:solidFill>
-                  <a:srgbClr val="1C1C1C"/>
-                </a:solidFill>
-                <a:latin typeface="AppleGothic"/>
-                <a:ea typeface="AppleGothic"/>
-              </a:rPr>
-              <a:t>SAAR vs TabPFN</a:t>
-            </a:r>
-          </a:p>
-        </p:txBody>
-      </p:sp>
-      <p:sp>
-        <p:nvSpPr>
-          <p:cNvPr id="5" name="TextBox 4"/>
-          <p:cNvSpPr txBox="1"/>
-          <p:nvPr/>
-        </p:nvSpPr>
-        <p:spPr>
-          <a:xfrm>
-            <a:off x="533400" y="609600"/>
-            <a:ext cx="10477500" cy="209550"/>
-          </a:xfrm>
-          <a:prstGeom prst="rect">
-            <a:avLst/>
-          </a:prstGeom>
-          <a:noFill/>
-        </p:spPr>
-        <p:txBody>
-          <a:bodyPr wrap="square">
-            <a:spAutoFit/>
-          </a:bodyPr>
-          <a:lstStyle/>
-          <a:p>
-            <a:pPr algn="l"/>
-            <a:r>
-              <a:rPr sz="1200" b="0">
-                <a:solidFill>
-                  <a:srgbClr val="6A6A6A"/>
-                </a:solidFill>
-                <a:latin typeface="AppleGothic"/>
-                <a:ea typeface="AppleGothic"/>
-              </a:rPr>
-              <a:t>보조 비교(train 상한). MATRb2만으로 우위 주장하지 않음.</a:t>
-            </a:r>
-          </a:p>
-        </p:txBody>
-      </p:sp>
-      <p:pic>
-        <p:nvPicPr>
-          <p:cNvPr id="6" name="Picture 5" descr="pp_vs_tabpfn.png"/>
-          <p:cNvPicPr>
-            <a:picLocks noChangeAspect="1"/>
-          </p:cNvPicPr>
-          <p:nvPr/>
-        </p:nvPicPr>
-        <p:blipFill>
-          <a:blip r:embed="rId2"/>
-          <a:stretch>
-            <a:fillRect/>
-          </a:stretch>
-        </p:blipFill>
-        <p:spPr>
-          <a:xfrm>
-            <a:off x="381000" y="952500"/>
-            <a:ext cx="11430000" cy="4762500"/>
-          </a:xfrm>
-          <a:prstGeom prst="rect">
-            <a:avLst/>
-          </a:prstGeom>
-        </p:spPr>
-      </p:pic>
-      <p:cxnSp>
-        <p:nvCxnSpPr>
-          <p:cNvPr id="7" name="Connector 6"/>
-          <p:cNvCxnSpPr/>
-          <p:nvPr/>
-        </p:nvCxnSpPr>
-        <p:spPr>
-          <a:xfrm>
-            <a:off x="533400" y="6457950"/>
-            <a:ext cx="11125200" cy="0"/>
-          </a:xfrm>
-          <a:prstGeom prst="line">
-            <a:avLst/>
-          </a:prstGeom>
-          <a:ln w="9525">
-            <a:solidFill>
-              <a:srgbClr val="E6E6E6"/>
-            </a:solidFill>
-          </a:ln>
-        </p:spPr>
-        <p:style>
-          <a:lnRef idx="2">
-            <a:schemeClr val="accent1"/>
-          </a:lnRef>
-          <a:fillRef idx="0">
-            <a:schemeClr val="accent1"/>
-          </a:fillRef>
-          <a:effectRef idx="1">
-            <a:schemeClr val="accent1"/>
-          </a:effectRef>
-          <a:fontRef idx="minor">
-            <a:schemeClr val="tx1"/>
-          </a:fontRef>
-        </p:style>
-      </p:cxnSp>
-      <p:sp>
-        <p:nvSpPr>
-          <p:cNvPr id="8" name="TextBox 7"/>
-          <p:cNvSpPr txBox="1"/>
-          <p:nvPr/>
-        </p:nvSpPr>
-        <p:spPr>
-          <a:xfrm>
-            <a:off x="533400" y="6515100"/>
-            <a:ext cx="6667500" cy="133350"/>
-          </a:xfrm>
-          <a:prstGeom prst="rect">
-            <a:avLst/>
-          </a:prstGeom>
-          <a:noFill/>
-        </p:spPr>
-        <p:txBody>
-          <a:bodyPr wrap="square">
-            <a:spAutoFit/>
-          </a:bodyPr>
-          <a:lstStyle/>
-          <a:p>
-            <a:pPr algn="l"/>
-            <a:r>
-              <a:rPr sz="900" b="0">
-                <a:solidFill>
-                  <a:srgbClr val="6A6A6A"/>
-                </a:solidFill>
-                <a:latin typeface="AppleGothic"/>
-                <a:ea typeface="AppleGothic"/>
-              </a:rPr>
-              <a:t>SPS Lab  ·  Assumption-Aware Extrapolation</a:t>
-            </a:r>
-          </a:p>
-        </p:txBody>
-      </p:sp>
-      <p:sp>
-        <p:nvSpPr>
-          <p:cNvPr id="9" name="TextBox 8"/>
-          <p:cNvSpPr txBox="1"/>
-          <p:nvPr/>
-        </p:nvSpPr>
-        <p:spPr>
-          <a:xfrm>
-            <a:off x="10858500" y="6496050"/>
-            <a:ext cx="571500" cy="152400"/>
-          </a:xfrm>
-          <a:prstGeom prst="rect">
-            <a:avLst/>
-          </a:prstGeom>
-          <a:noFill/>
-        </p:spPr>
-        <p:txBody>
-          <a:bodyPr wrap="square">
-            <a:spAutoFit/>
-          </a:bodyPr>
-          <a:lstStyle/>
-          <a:p>
-            <a:pPr algn="r"/>
-            <a:r>
-              <a:rPr sz="1000" b="1">
-                <a:solidFill>
-                  <a:srgbClr val="6A6A6A"/>
-                </a:solidFill>
-                <a:latin typeface="AppleGothic"/>
-                <a:ea typeface="AppleGothic"/>
-              </a:rPr>
-              <a:t>14</a:t>
-            </a:r>
-          </a:p>
-        </p:txBody>
-      </p:sp>
-    </p:spTree>
-  </p:cSld>
-  <p:clrMapOvr>
-    <a:masterClrMapping/>
-  </p:clrMapOvr>
-</p:sld>
-</file>
-
-<file path=ppt/slides/slide15.xml><?xml version="1.0" encoding="utf-8"?>
-<p:sld xmlns:a="http://schemas.openxmlformats.org/drawingml/2006/main" xmlns:p="http://schemas.openxmlformats.org/presentationml/2006/main" xmlns:r="http://schemas.openxmlformats.org/officeDocument/2006/relationships">
-  <p:cSld>
-    <p:spTree>
-      <p:nvGrpSpPr>
-        <p:cNvPr id="1" name=""/>
-        <p:cNvGrpSpPr/>
-        <p:nvPr/>
-      </p:nvGrpSpPr>
-      <p:grpSpPr/>
-      <p:sp>
-        <p:nvSpPr>
-          <p:cNvPr id="2" name="Rectangle 1"/>
-          <p:cNvSpPr/>
-          <p:nvPr/>
-        </p:nvSpPr>
-        <p:spPr>
-          <a:xfrm>
-            <a:off x="0" y="0"/>
-            <a:ext cx="12192000" cy="6858000"/>
-          </a:xfrm>
-          <a:prstGeom prst="rect">
-            <a:avLst/>
-          </a:prstGeom>
-          <a:solidFill>
-            <a:srgbClr val="FFFFFF"/>
-          </a:solidFill>
-          <a:ln>
-            <a:noFill/>
-          </a:ln>
-        </p:spPr>
-        <p:style>
-          <a:lnRef idx="1">
-            <a:schemeClr val="accent1"/>
-          </a:lnRef>
-          <a:fillRef idx="3">
-            <a:schemeClr val="accent1"/>
-          </a:fillRef>
-          <a:effectRef idx="2">
-            <a:schemeClr val="accent1"/>
-          </a:effectRef>
-          <a:fontRef idx="minor">
-            <a:schemeClr val="lt1"/>
-          </a:fontRef>
-        </p:style>
-        <p:txBody>
-          <a:bodyPr rtlCol="0" anchor="ctr"/>
-          <a:lstStyle/>
-          <a:p>
-            <a:pPr algn="ctr"/>
-          </a:p>
-        </p:txBody>
-      </p:sp>
-      <p:sp>
-        <p:nvSpPr>
-          <p:cNvPr id="3" name="Rectangle 2"/>
-          <p:cNvSpPr/>
-          <p:nvPr/>
-        </p:nvSpPr>
-        <p:spPr>
-          <a:xfrm>
-            <a:off x="0" y="0"/>
-            <a:ext cx="12192000" cy="28575"/>
-          </a:xfrm>
-          <a:prstGeom prst="rect">
-            <a:avLst/>
-          </a:prstGeom>
-          <a:solidFill>
-            <a:srgbClr val="0F5C5C"/>
-          </a:solidFill>
-          <a:ln>
-            <a:noFill/>
-          </a:ln>
-        </p:spPr>
-        <p:style>
-          <a:lnRef idx="1">
-            <a:schemeClr val="accent1"/>
-          </a:lnRef>
-          <a:fillRef idx="3">
-            <a:schemeClr val="accent1"/>
-          </a:fillRef>
-          <a:effectRef idx="2">
-            <a:schemeClr val="accent1"/>
-          </a:effectRef>
-          <a:fontRef idx="minor">
-            <a:schemeClr val="lt1"/>
-          </a:fontRef>
-        </p:style>
-        <p:txBody>
-          <a:bodyPr rtlCol="0" anchor="ctr"/>
-          <a:lstStyle/>
-          <a:p>
-            <a:pPr algn="ctr"/>
-          </a:p>
-        </p:txBody>
-      </p:sp>
-      <p:sp>
-        <p:nvSpPr>
-          <p:cNvPr id="4" name="TextBox 3"/>
-          <p:cNvSpPr txBox="1"/>
-          <p:nvPr/>
-        </p:nvSpPr>
-        <p:spPr>
-          <a:xfrm>
-            <a:off x="533400" y="266700"/>
-            <a:ext cx="10477500" cy="342900"/>
-          </a:xfrm>
-          <a:prstGeom prst="rect">
-            <a:avLst/>
-          </a:prstGeom>
-          <a:noFill/>
-        </p:spPr>
-        <p:txBody>
-          <a:bodyPr wrap="square">
-            <a:spAutoFit/>
-          </a:bodyPr>
-          <a:lstStyle/>
-          <a:p>
-            <a:pPr algn="l"/>
-            <a:r>
-              <a:rPr sz="2200" b="1">
-                <a:solidFill>
-                  <a:srgbClr val="1C1C1C"/>
-                </a:solidFill>
-                <a:latin typeface="AppleGothic"/>
-                <a:ea typeface="AppleGothic"/>
-              </a:rPr>
-              <a:t>되는 곳 / 안 되는 곳</a:t>
-            </a:r>
-          </a:p>
-        </p:txBody>
-      </p:sp>
-      <p:pic>
-        <p:nvPicPr>
-          <p:cNvPr id="5" name="Picture 4" descr="experiment_map.png"/>
-          <p:cNvPicPr>
-            <a:picLocks noChangeAspect="1"/>
-          </p:cNvPicPr>
-          <p:nvPr/>
-        </p:nvPicPr>
-        <p:blipFill>
-          <a:blip r:embed="rId2"/>
-          <a:stretch>
-            <a:fillRect/>
-          </a:stretch>
-        </p:blipFill>
-        <p:spPr>
-          <a:xfrm>
-            <a:off x="762000" y="952500"/>
-            <a:ext cx="10668000" cy="4953000"/>
-          </a:xfrm>
-          <a:prstGeom prst="rect">
-            <a:avLst/>
-          </a:prstGeom>
-        </p:spPr>
-      </p:pic>
-      <p:cxnSp>
-        <p:nvCxnSpPr>
-          <p:cNvPr id="6" name="Connector 5"/>
-          <p:cNvCxnSpPr/>
-          <p:nvPr/>
-        </p:nvCxnSpPr>
-        <p:spPr>
-          <a:xfrm>
-            <a:off x="533400" y="6457950"/>
-            <a:ext cx="11125200" cy="0"/>
-          </a:xfrm>
-          <a:prstGeom prst="line">
-            <a:avLst/>
-          </a:prstGeom>
-          <a:ln w="9525">
-            <a:solidFill>
-              <a:srgbClr val="E6E6E6"/>
-            </a:solidFill>
-          </a:ln>
-        </p:spPr>
-        <p:style>
-          <a:lnRef idx="2">
-            <a:schemeClr val="accent1"/>
-          </a:lnRef>
-          <a:fillRef idx="0">
-            <a:schemeClr val="accent1"/>
-          </a:fillRef>
-          <a:effectRef idx="1">
-            <a:schemeClr val="accent1"/>
-          </a:effectRef>
-          <a:fontRef idx="minor">
-            <a:schemeClr val="tx1"/>
-          </a:fontRef>
-        </p:style>
-      </p:cxnSp>
-      <p:sp>
-        <p:nvSpPr>
-          <p:cNvPr id="7" name="TextBox 6"/>
-          <p:cNvSpPr txBox="1"/>
-          <p:nvPr/>
-        </p:nvSpPr>
-        <p:spPr>
-          <a:xfrm>
-            <a:off x="533400" y="6515100"/>
-            <a:ext cx="6667500" cy="133350"/>
-          </a:xfrm>
-          <a:prstGeom prst="rect">
-            <a:avLst/>
-          </a:prstGeom>
-          <a:noFill/>
-        </p:spPr>
-        <p:txBody>
-          <a:bodyPr wrap="square">
-            <a:spAutoFit/>
-          </a:bodyPr>
-          <a:lstStyle/>
-          <a:p>
-            <a:pPr algn="l"/>
-            <a:r>
-              <a:rPr sz="900" b="0">
-                <a:solidFill>
-                  <a:srgbClr val="6A6A6A"/>
-                </a:solidFill>
-                <a:latin typeface="AppleGothic"/>
-                <a:ea typeface="AppleGothic"/>
-              </a:rPr>
-              <a:t>SPS Lab  ·  Assumption-Aware Extrapolation</a:t>
-            </a:r>
-          </a:p>
-        </p:txBody>
-      </p:sp>
-      <p:sp>
-        <p:nvSpPr>
-          <p:cNvPr id="8" name="TextBox 7"/>
-          <p:cNvSpPr txBox="1"/>
-          <p:nvPr/>
-        </p:nvSpPr>
-        <p:spPr>
-          <a:xfrm>
-            <a:off x="10858500" y="6496050"/>
-            <a:ext cx="571500" cy="152400"/>
-          </a:xfrm>
-          <a:prstGeom prst="rect">
-            <a:avLst/>
-          </a:prstGeom>
-          <a:noFill/>
-        </p:spPr>
-        <p:txBody>
-          <a:bodyPr wrap="square">
-            <a:spAutoFit/>
-          </a:bodyPr>
-          <a:lstStyle/>
-          <a:p>
-            <a:pPr algn="r"/>
-            <a:r>
-              <a:rPr sz="1000" b="1">
-                <a:solidFill>
-                  <a:srgbClr val="6A6A6A"/>
-                </a:solidFill>
-                <a:latin typeface="AppleGothic"/>
-                <a:ea typeface="AppleGothic"/>
-              </a:rPr>
-              <a:t>15</a:t>
-            </a:r>
-          </a:p>
-        </p:txBody>
-      </p:sp>
-    </p:spTree>
-  </p:cSld>
-  <p:clrMapOvr>
-    <a:masterClrMapping/>
-  </p:clrMapOvr>
-</p:sld>
-</file>
-
-<file path=ppt/slides/slide16.xml><?xml version="1.0" encoding="utf-8"?>
-<p:sld xmlns:a="http://schemas.openxmlformats.org/drawingml/2006/main" xmlns:p="http://schemas.openxmlformats.org/presentationml/2006/main" xmlns:r="http://schemas.openxmlformats.org/officeDocument/2006/relationships">
-  <p:cSld>
-    <p:spTree>
-      <p:nvGrpSpPr>
-        <p:cNvPr id="1" name=""/>
-        <p:cNvGrpSpPr/>
-        <p:nvPr/>
-      </p:nvGrpSpPr>
-      <p:grpSpPr/>
-      <p:sp>
-        <p:nvSpPr>
-          <p:cNvPr id="2" name="Rectangle 1"/>
-          <p:cNvSpPr/>
-          <p:nvPr/>
-        </p:nvSpPr>
-        <p:spPr>
-          <a:xfrm>
-            <a:off x="0" y="0"/>
-            <a:ext cx="12192000" cy="6858000"/>
-          </a:xfrm>
-          <a:prstGeom prst="rect">
-            <a:avLst/>
-          </a:prstGeom>
-          <a:solidFill>
-            <a:srgbClr val="FFFFFF"/>
-          </a:solidFill>
-          <a:ln>
-            <a:noFill/>
-          </a:ln>
-        </p:spPr>
-        <p:style>
-          <a:lnRef idx="1">
-            <a:schemeClr val="accent1"/>
-          </a:lnRef>
-          <a:fillRef idx="3">
-            <a:schemeClr val="accent1"/>
-          </a:fillRef>
-          <a:effectRef idx="2">
-            <a:schemeClr val="accent1"/>
-          </a:effectRef>
-          <a:fontRef idx="minor">
-            <a:schemeClr val="lt1"/>
-          </a:fontRef>
-        </p:style>
-        <p:txBody>
-          <a:bodyPr rtlCol="0" anchor="ctr"/>
-          <a:lstStyle/>
-          <a:p>
-            <a:pPr algn="ctr"/>
-          </a:p>
-        </p:txBody>
-      </p:sp>
-      <p:sp>
-        <p:nvSpPr>
-          <p:cNvPr id="3" name="Rectangle 2"/>
-          <p:cNvSpPr/>
-          <p:nvPr/>
-        </p:nvSpPr>
-        <p:spPr>
-          <a:xfrm>
-            <a:off x="0" y="0"/>
-            <a:ext cx="12192000" cy="28575"/>
-          </a:xfrm>
-          <a:prstGeom prst="rect">
-            <a:avLst/>
-          </a:prstGeom>
-          <a:solidFill>
-            <a:srgbClr val="0F5C5C"/>
-          </a:solidFill>
-          <a:ln>
-            <a:noFill/>
-          </a:ln>
-        </p:spPr>
-        <p:style>
-          <a:lnRef idx="1">
-            <a:schemeClr val="accent1"/>
-          </a:lnRef>
-          <a:fillRef idx="3">
-            <a:schemeClr val="accent1"/>
-          </a:fillRef>
-          <a:effectRef idx="2">
-            <a:schemeClr val="accent1"/>
-          </a:effectRef>
-          <a:fontRef idx="minor">
-            <a:schemeClr val="lt1"/>
-          </a:fontRef>
-        </p:style>
-        <p:txBody>
-          <a:bodyPr rtlCol="0" anchor="ctr"/>
-          <a:lstStyle/>
-          <a:p>
-            <a:pPr algn="ctr"/>
-          </a:p>
-        </p:txBody>
-      </p:sp>
-      <p:sp>
-        <p:nvSpPr>
-          <p:cNvPr id="4" name="TextBox 3"/>
-          <p:cNvSpPr txBox="1"/>
-          <p:nvPr/>
-        </p:nvSpPr>
-        <p:spPr>
-          <a:xfrm>
-            <a:off x="533400" y="266700"/>
-            <a:ext cx="10477500" cy="342900"/>
-          </a:xfrm>
-          <a:prstGeom prst="rect">
-            <a:avLst/>
-          </a:prstGeom>
-          <a:noFill/>
-        </p:spPr>
-        <p:txBody>
-          <a:bodyPr wrap="square">
-            <a:spAutoFit/>
-          </a:bodyPr>
-          <a:lstStyle/>
-          <a:p>
-            <a:pPr algn="l"/>
-            <a:r>
-              <a:rPr sz="2200" b="1">
-                <a:solidFill>
-                  <a:srgbClr val="1C1C1C"/>
-                </a:solidFill>
-                <a:latin typeface="AppleGothic"/>
-                <a:ea typeface="AppleGothic"/>
-              </a:rPr>
-              <a:t>안정성 · 유닛</a:t>
-            </a:r>
-          </a:p>
-        </p:txBody>
-      </p:sp>
-      <p:sp>
-        <p:nvSpPr>
-          <p:cNvPr id="5" name="TextBox 4"/>
-          <p:cNvSpPr txBox="1"/>
-          <p:nvPr/>
-        </p:nvSpPr>
-        <p:spPr>
-          <a:xfrm>
-            <a:off x="533400" y="609600"/>
-            <a:ext cx="10477500" cy="209550"/>
-          </a:xfrm>
-          <a:prstGeom prst="rect">
-            <a:avLst/>
-          </a:prstGeom>
-          <a:noFill/>
-        </p:spPr>
-        <p:txBody>
-          <a:bodyPr wrap="square">
-            <a:spAutoFit/>
-          </a:bodyPr>
-          <a:lstStyle/>
-          <a:p>
-            <a:pPr algn="l"/>
-            <a:r>
-              <a:rPr sz="1200" b="0">
-                <a:solidFill>
-                  <a:srgbClr val="6A6A6A"/>
-                </a:solidFill>
-                <a:latin typeface="AppleGothic"/>
-                <a:ea typeface="AppleGothic"/>
-              </a:rPr>
-              <a:t>bootstrap CI  ·  MICH 8/8 양수</a:t>
-            </a:r>
-          </a:p>
-        </p:txBody>
-      </p:sp>
-      <p:pic>
-        <p:nvPicPr>
-          <p:cNvPr id="6" name="Picture 5" descr="bootstrap_ci.png"/>
-          <p:cNvPicPr>
-            <a:picLocks noChangeAspect="1"/>
-          </p:cNvPicPr>
-          <p:nvPr/>
-        </p:nvPicPr>
-        <p:blipFill>
-          <a:blip r:embed="rId2"/>
-          <a:stretch>
-            <a:fillRect/>
-          </a:stretch>
-        </p:blipFill>
-        <p:spPr>
-          <a:xfrm>
-            <a:off x="285750" y="1000125"/>
-            <a:ext cx="5715000" cy="4572000"/>
-          </a:xfrm>
-          <a:prstGeom prst="rect">
-            <a:avLst/>
-          </a:prstGeom>
-        </p:spPr>
-      </p:pic>
-      <p:pic>
-        <p:nvPicPr>
-          <p:cNvPr id="7" name="Picture 6" descr="mich_units.png"/>
-          <p:cNvPicPr>
-            <a:picLocks noChangeAspect="1"/>
-          </p:cNvPicPr>
-          <p:nvPr/>
-        </p:nvPicPr>
-        <p:blipFill>
-          <a:blip r:embed="rId3"/>
-          <a:stretch>
-            <a:fillRect/>
-          </a:stretch>
-        </p:blipFill>
-        <p:spPr>
-          <a:xfrm>
-            <a:off x="6191250" y="1000125"/>
-            <a:ext cx="5429250" cy="4572000"/>
-          </a:xfrm>
-          <a:prstGeom prst="rect">
-            <a:avLst/>
-          </a:prstGeom>
-        </p:spPr>
-      </p:pic>
-      <p:cxnSp>
-        <p:nvCxnSpPr>
-          <p:cNvPr id="8" name="Connector 7"/>
-          <p:cNvCxnSpPr/>
-          <p:nvPr/>
-        </p:nvCxnSpPr>
-        <p:spPr>
-          <a:xfrm>
-            <a:off x="533400" y="6457950"/>
-            <a:ext cx="11125200" cy="0"/>
-          </a:xfrm>
-          <a:prstGeom prst="line">
-            <a:avLst/>
-          </a:prstGeom>
-          <a:ln w="9525">
-            <a:solidFill>
-              <a:srgbClr val="E6E6E6"/>
-            </a:solidFill>
-          </a:ln>
-        </p:spPr>
-        <p:style>
-          <a:lnRef idx="2">
-            <a:schemeClr val="accent1"/>
-          </a:lnRef>
-          <a:fillRef idx="0">
-            <a:schemeClr val="accent1"/>
-          </a:fillRef>
-          <a:effectRef idx="1">
-            <a:schemeClr val="accent1"/>
-          </a:effectRef>
-          <a:fontRef idx="minor">
-            <a:schemeClr val="tx1"/>
-          </a:fontRef>
-        </p:style>
-      </p:cxnSp>
-      <p:sp>
-        <p:nvSpPr>
-          <p:cNvPr id="9" name="TextBox 8"/>
-          <p:cNvSpPr txBox="1"/>
-          <p:nvPr/>
-        </p:nvSpPr>
-        <p:spPr>
-          <a:xfrm>
-            <a:off x="533400" y="6515100"/>
-            <a:ext cx="6667500" cy="133350"/>
-          </a:xfrm>
-          <a:prstGeom prst="rect">
-            <a:avLst/>
-          </a:prstGeom>
-          <a:noFill/>
-        </p:spPr>
-        <p:txBody>
-          <a:bodyPr wrap="square">
-            <a:spAutoFit/>
-          </a:bodyPr>
-          <a:lstStyle/>
-          <a:p>
-            <a:pPr algn="l"/>
-            <a:r>
-              <a:rPr sz="900" b="0">
-                <a:solidFill>
-                  <a:srgbClr val="6A6A6A"/>
-                </a:solidFill>
-                <a:latin typeface="AppleGothic"/>
-                <a:ea typeface="AppleGothic"/>
-              </a:rPr>
-              <a:t>SPS Lab  ·  Assumption-Aware Extrapolation</a:t>
-            </a:r>
-          </a:p>
-        </p:txBody>
-      </p:sp>
-      <p:sp>
-        <p:nvSpPr>
-          <p:cNvPr id="10" name="TextBox 9"/>
-          <p:cNvSpPr txBox="1"/>
-          <p:nvPr/>
-        </p:nvSpPr>
-        <p:spPr>
-          <a:xfrm>
-            <a:off x="10858500" y="6496050"/>
-            <a:ext cx="571500" cy="152400"/>
-          </a:xfrm>
-          <a:prstGeom prst="rect">
-            <a:avLst/>
-          </a:prstGeom>
-          <a:noFill/>
-        </p:spPr>
-        <p:txBody>
-          <a:bodyPr wrap="square">
-            <a:spAutoFit/>
-          </a:bodyPr>
-          <a:lstStyle/>
-          <a:p>
-            <a:pPr algn="r"/>
-            <a:r>
-              <a:rPr sz="1000" b="1">
-                <a:solidFill>
-                  <a:srgbClr val="6A6A6A"/>
-                </a:solidFill>
-                <a:latin typeface="AppleGothic"/>
-                <a:ea typeface="AppleGothic"/>
-              </a:rPr>
-              <a:t>16</a:t>
-            </a:r>
-          </a:p>
-        </p:txBody>
-      </p:sp>
-    </p:spTree>
-  </p:cSld>
-  <p:clrMapOvr>
-    <a:masterClrMapping/>
-  </p:clrMapOvr>
-</p:sld>
-</file>
-
-<file path=ppt/slides/slide17.xml><?xml version="1.0" encoding="utf-8"?>
-<p:sld xmlns:a="http://schemas.openxmlformats.org/drawingml/2006/main" xmlns:p="http://schemas.openxmlformats.org/presentationml/2006/main" xmlns:r="http://schemas.openxmlformats.org/officeDocument/2006/relationships">
-  <p:cSld>
-    <p:spTree>
-      <p:nvGrpSpPr>
-        <p:cNvPr id="1" name=""/>
-        <p:cNvGrpSpPr/>
-        <p:nvPr/>
-      </p:nvGrpSpPr>
-      <p:grpSpPr/>
-      <p:sp>
-        <p:nvSpPr>
-          <p:cNvPr id="2" name="Rectangle 1"/>
-          <p:cNvSpPr/>
-          <p:nvPr/>
-        </p:nvSpPr>
-        <p:spPr>
-          <a:xfrm>
-            <a:off x="0" y="0"/>
-            <a:ext cx="12192000" cy="6858000"/>
-          </a:xfrm>
-          <a:prstGeom prst="rect">
-            <a:avLst/>
-          </a:prstGeom>
-          <a:solidFill>
-            <a:srgbClr val="FFFFFF"/>
-          </a:solidFill>
-          <a:ln>
-            <a:noFill/>
-          </a:ln>
-        </p:spPr>
-        <p:style>
-          <a:lnRef idx="1">
-            <a:schemeClr val="accent1"/>
-          </a:lnRef>
-          <a:fillRef idx="3">
-            <a:schemeClr val="accent1"/>
-          </a:fillRef>
-          <a:effectRef idx="2">
-            <a:schemeClr val="accent1"/>
-          </a:effectRef>
-          <a:fontRef idx="minor">
-            <a:schemeClr val="lt1"/>
-          </a:fontRef>
-        </p:style>
-        <p:txBody>
-          <a:bodyPr rtlCol="0" anchor="ctr"/>
-          <a:lstStyle/>
-          <a:p>
-            <a:pPr algn="ctr"/>
-          </a:p>
-        </p:txBody>
-      </p:sp>
-      <p:sp>
-        <p:nvSpPr>
-          <p:cNvPr id="3" name="Rectangle 2"/>
-          <p:cNvSpPr/>
-          <p:nvPr/>
-        </p:nvSpPr>
-        <p:spPr>
-          <a:xfrm>
-            <a:off x="0" y="0"/>
-            <a:ext cx="12192000" cy="28575"/>
-          </a:xfrm>
-          <a:prstGeom prst="rect">
-            <a:avLst/>
-          </a:prstGeom>
-          <a:solidFill>
-            <a:srgbClr val="0F5C5C"/>
-          </a:solidFill>
-          <a:ln>
-            <a:noFill/>
-          </a:ln>
-        </p:spPr>
-        <p:style>
-          <a:lnRef idx="1">
-            <a:schemeClr val="accent1"/>
-          </a:lnRef>
-          <a:fillRef idx="3">
-            <a:schemeClr val="accent1"/>
-          </a:fillRef>
-          <a:effectRef idx="2">
-            <a:schemeClr val="accent1"/>
-          </a:effectRef>
-          <a:fontRef idx="minor">
-            <a:schemeClr val="lt1"/>
-          </a:fontRef>
-        </p:style>
-        <p:txBody>
-          <a:bodyPr rtlCol="0" anchor="ctr"/>
-          <a:lstStyle/>
-          <a:p>
-            <a:pPr algn="ctr"/>
-          </a:p>
-        </p:txBody>
-      </p:sp>
-      <p:sp>
-        <p:nvSpPr>
-          <p:cNvPr id="4" name="TextBox 3"/>
-          <p:cNvSpPr txBox="1"/>
-          <p:nvPr/>
-        </p:nvSpPr>
-        <p:spPr>
-          <a:xfrm>
-            <a:off x="533400" y="266700"/>
-            <a:ext cx="10477500" cy="342900"/>
-          </a:xfrm>
-          <a:prstGeom prst="rect">
-            <a:avLst/>
-          </a:prstGeom>
-          <a:noFill/>
-        </p:spPr>
-        <p:txBody>
-          <a:bodyPr wrap="square">
-            <a:spAutoFit/>
-          </a:bodyPr>
-          <a:lstStyle/>
-          <a:p>
-            <a:pPr algn="l"/>
-            <a:r>
-              <a:rPr sz="2200" b="1">
-                <a:solidFill>
-                  <a:srgbClr val="1C1C1C"/>
-                </a:solidFill>
-                <a:latin typeface="AppleGothic"/>
-                <a:ea typeface="AppleGothic"/>
-              </a:rPr>
-              <a:t>한계와 경계</a:t>
-            </a:r>
-          </a:p>
-        </p:txBody>
-      </p:sp>
-      <p:sp>
-        <p:nvSpPr>
-          <p:cNvPr id="5" name="TextBox 4"/>
-          <p:cNvSpPr txBox="1"/>
-          <p:nvPr/>
-        </p:nvSpPr>
-        <p:spPr>
-          <a:xfrm>
-            <a:off x="533400" y="609600"/>
-            <a:ext cx="10477500" cy="209550"/>
-          </a:xfrm>
-          <a:prstGeom prst="rect">
-            <a:avLst/>
-          </a:prstGeom>
-          <a:noFill/>
-        </p:spPr>
-        <p:txBody>
-          <a:bodyPr wrap="square">
-            <a:spAutoFit/>
-          </a:bodyPr>
-          <a:lstStyle/>
-          <a:p>
-            <a:pPr algn="l"/>
-            <a:r>
-              <a:rPr sz="1200" b="0">
-                <a:solidFill>
-                  <a:srgbClr val="6A6A6A"/>
-                </a:solidFill>
-                <a:latin typeface="AppleGothic"/>
-                <a:ea typeface="AppleGothic"/>
-              </a:rPr>
-              <a:t>확증이 아닌 것 · 아직 주장하지 않는 것</a:t>
-            </a:r>
-          </a:p>
-        </p:txBody>
-      </p:sp>
-      <p:pic>
-        <p:nvPicPr>
-          <p:cNvPr id="6" name="Picture 5" descr="status_compact.png"/>
-          <p:cNvPicPr>
-            <a:picLocks noChangeAspect="1"/>
-          </p:cNvPicPr>
-          <p:nvPr/>
-        </p:nvPicPr>
-        <p:blipFill>
-          <a:blip r:embed="rId2"/>
-          <a:stretch>
-            <a:fillRect/>
-          </a:stretch>
-        </p:blipFill>
-        <p:spPr>
-          <a:xfrm>
-            <a:off x="381000" y="952500"/>
-            <a:ext cx="6667500" cy="4572000"/>
-          </a:xfrm>
-          <a:prstGeom prst="rect">
-            <a:avLst/>
-          </a:prstGeom>
-        </p:spPr>
-      </p:pic>
-      <p:pic>
-        <p:nvPicPr>
-          <p:cNvPr id="7" name="Picture 6" descr="limits_strip.png"/>
-          <p:cNvPicPr>
-            <a:picLocks noChangeAspect="1"/>
-          </p:cNvPicPr>
-          <p:nvPr/>
-        </p:nvPicPr>
-        <p:blipFill>
-          <a:blip r:embed="rId3"/>
-          <a:stretch>
-            <a:fillRect/>
-          </a:stretch>
-        </p:blipFill>
-        <p:spPr>
-          <a:xfrm>
-            <a:off x="7239000" y="1714500"/>
-            <a:ext cx="4381500" cy="3048000"/>
-          </a:xfrm>
-          <a:prstGeom prst="rect">
-            <a:avLst/>
-          </a:prstGeom>
-        </p:spPr>
-      </p:pic>
-      <p:cxnSp>
-        <p:nvCxnSpPr>
-          <p:cNvPr id="8" name="Connector 7"/>
-          <p:cNvCxnSpPr/>
-          <p:nvPr/>
-        </p:nvCxnSpPr>
-        <p:spPr>
-          <a:xfrm>
-            <a:off x="533400" y="6457950"/>
-            <a:ext cx="11125200" cy="0"/>
-          </a:xfrm>
-          <a:prstGeom prst="line">
-            <a:avLst/>
-          </a:prstGeom>
-          <a:ln w="9525">
-            <a:solidFill>
-              <a:srgbClr val="E6E6E6"/>
-            </a:solidFill>
-          </a:ln>
-        </p:spPr>
-        <p:style>
-          <a:lnRef idx="2">
-            <a:schemeClr val="accent1"/>
-          </a:lnRef>
-          <a:fillRef idx="0">
-            <a:schemeClr val="accent1"/>
-          </a:fillRef>
-          <a:effectRef idx="1">
-            <a:schemeClr val="accent1"/>
-          </a:effectRef>
-          <a:fontRef idx="minor">
-            <a:schemeClr val="tx1"/>
-          </a:fontRef>
-        </p:style>
-      </p:cxnSp>
-      <p:sp>
-        <p:nvSpPr>
-          <p:cNvPr id="9" name="TextBox 8"/>
-          <p:cNvSpPr txBox="1"/>
-          <p:nvPr/>
-        </p:nvSpPr>
-        <p:spPr>
-          <a:xfrm>
-            <a:off x="533400" y="6515100"/>
-            <a:ext cx="6667500" cy="133350"/>
-          </a:xfrm>
-          <a:prstGeom prst="rect">
-            <a:avLst/>
-          </a:prstGeom>
-          <a:noFill/>
-        </p:spPr>
-        <p:txBody>
-          <a:bodyPr wrap="square">
-            <a:spAutoFit/>
-          </a:bodyPr>
-          <a:lstStyle/>
-          <a:p>
-            <a:pPr algn="l"/>
-            <a:r>
-              <a:rPr sz="900" b="0">
-                <a:solidFill>
-                  <a:srgbClr val="6A6A6A"/>
-                </a:solidFill>
-                <a:latin typeface="AppleGothic"/>
-                <a:ea typeface="AppleGothic"/>
-              </a:rPr>
-              <a:t>SPS Lab  ·  Assumption-Aware Extrapolation</a:t>
-            </a:r>
-          </a:p>
-        </p:txBody>
-      </p:sp>
-      <p:sp>
-        <p:nvSpPr>
-          <p:cNvPr id="10" name="TextBox 9"/>
-          <p:cNvSpPr txBox="1"/>
-          <p:nvPr/>
-        </p:nvSpPr>
-        <p:spPr>
-          <a:xfrm>
-            <a:off x="10858500" y="6496050"/>
-            <a:ext cx="571500" cy="152400"/>
-          </a:xfrm>
-          <a:prstGeom prst="rect">
-            <a:avLst/>
-          </a:prstGeom>
-          <a:noFill/>
-        </p:spPr>
-        <p:txBody>
-          <a:bodyPr wrap="square">
-            <a:spAutoFit/>
-          </a:bodyPr>
-          <a:lstStyle/>
-          <a:p>
-            <a:pPr algn="r"/>
-            <a:r>
-              <a:rPr sz="1000" b="1">
-                <a:solidFill>
-                  <a:srgbClr val="6A6A6A"/>
-                </a:solidFill>
-                <a:latin typeface="AppleGothic"/>
-                <a:ea typeface="AppleGothic"/>
-              </a:rPr>
-              <a:t>17</a:t>
-            </a:r>
-          </a:p>
-        </p:txBody>
-      </p:sp>
-    </p:spTree>
-  </p:cSld>
-  <p:clrMapOvr>
-    <a:masterClrMapping/>
-  </p:clrMapOvr>
-</p:sld>
-</file>
-
-<file path=ppt/slides/slide18.xml><?xml version="1.0" encoding="utf-8"?>
-<p:sld xmlns:a="http://schemas.openxmlformats.org/drawingml/2006/main" xmlns:p="http://schemas.openxmlformats.org/presentationml/2006/main" xmlns:r="http://schemas.openxmlformats.org/officeDocument/2006/relationships">
-  <p:cSld>
-    <p:spTree>
-      <p:nvGrpSpPr>
-        <p:cNvPr id="1" name=""/>
-        <p:cNvGrpSpPr/>
-        <p:nvPr/>
-      </p:nvGrpSpPr>
-      <p:grpSpPr/>
-      <p:sp>
-        <p:nvSpPr>
-          <p:cNvPr id="2" name="Rectangle 1"/>
-          <p:cNvSpPr/>
-          <p:nvPr/>
-        </p:nvSpPr>
-        <p:spPr>
-          <a:xfrm>
-            <a:off x="0" y="0"/>
-            <a:ext cx="12192000" cy="6858000"/>
-          </a:xfrm>
-          <a:prstGeom prst="rect">
-            <a:avLst/>
-          </a:prstGeom>
-          <a:solidFill>
-            <a:srgbClr val="FFFFFF"/>
-          </a:solidFill>
-          <a:ln>
-            <a:noFill/>
-          </a:ln>
-        </p:spPr>
-        <p:style>
-          <a:lnRef idx="1">
-            <a:schemeClr val="accent1"/>
-          </a:lnRef>
-          <a:fillRef idx="3">
-            <a:schemeClr val="accent1"/>
-          </a:fillRef>
-          <a:effectRef idx="2">
-            <a:schemeClr val="accent1"/>
-          </a:effectRef>
-          <a:fontRef idx="minor">
-            <a:schemeClr val="lt1"/>
-          </a:fontRef>
-        </p:style>
-        <p:txBody>
-          <a:bodyPr rtlCol="0" anchor="ctr"/>
-          <a:lstStyle/>
-          <a:p>
-            <a:pPr algn="ctr"/>
-          </a:p>
-        </p:txBody>
-      </p:sp>
-      <p:sp>
-        <p:nvSpPr>
-          <p:cNvPr id="3" name="Rectangle 2"/>
-          <p:cNvSpPr/>
-          <p:nvPr/>
-        </p:nvSpPr>
-        <p:spPr>
-          <a:xfrm>
-            <a:off x="0" y="0"/>
-            <a:ext cx="12192000" cy="28575"/>
-          </a:xfrm>
-          <a:prstGeom prst="rect">
-            <a:avLst/>
-          </a:prstGeom>
-          <a:solidFill>
-            <a:srgbClr val="0F5C5C"/>
-          </a:solidFill>
-          <a:ln>
-            <a:noFill/>
-          </a:ln>
-        </p:spPr>
-        <p:style>
-          <a:lnRef idx="1">
-            <a:schemeClr val="accent1"/>
-          </a:lnRef>
-          <a:fillRef idx="3">
-            <a:schemeClr val="accent1"/>
-          </a:fillRef>
-          <a:effectRef idx="2">
-            <a:schemeClr val="accent1"/>
-          </a:effectRef>
-          <a:fontRef idx="minor">
-            <a:schemeClr val="lt1"/>
-          </a:fontRef>
-        </p:style>
-        <p:txBody>
-          <a:bodyPr rtlCol="0" anchor="ctr"/>
-          <a:lstStyle/>
-          <a:p>
-            <a:pPr algn="ctr"/>
-          </a:p>
-        </p:txBody>
-      </p:sp>
-      <p:sp>
-        <p:nvSpPr>
-          <p:cNvPr id="4" name="TextBox 3"/>
-          <p:cNvSpPr txBox="1"/>
-          <p:nvPr/>
-        </p:nvSpPr>
-        <p:spPr>
-          <a:xfrm>
-            <a:off x="533400" y="266700"/>
-            <a:ext cx="10477500" cy="342900"/>
-          </a:xfrm>
-          <a:prstGeom prst="rect">
-            <a:avLst/>
-          </a:prstGeom>
-          <a:noFill/>
-        </p:spPr>
-        <p:txBody>
-          <a:bodyPr wrap="square">
-            <a:spAutoFit/>
-          </a:bodyPr>
-          <a:lstStyle/>
-          <a:p>
-            <a:pPr algn="l"/>
-            <a:r>
-              <a:rPr sz="2200" b="1">
-                <a:solidFill>
-                  <a:srgbClr val="1C1C1C"/>
-                </a:solidFill>
-                <a:latin typeface="AppleGothic"/>
-                <a:ea typeface="AppleGothic"/>
-              </a:rPr>
-              <a:t>실패도 남긴다</a:t>
-            </a:r>
-          </a:p>
-        </p:txBody>
-      </p:sp>
-      <p:sp>
-        <p:nvSpPr>
-          <p:cNvPr id="5" name="TextBox 4"/>
-          <p:cNvSpPr txBox="1"/>
-          <p:nvPr/>
-        </p:nvSpPr>
-        <p:spPr>
-          <a:xfrm>
-            <a:off x="533400" y="609600"/>
-            <a:ext cx="10477500" cy="209550"/>
-          </a:xfrm>
-          <a:prstGeom prst="rect">
-            <a:avLst/>
-          </a:prstGeom>
-          <a:noFill/>
-        </p:spPr>
-        <p:txBody>
-          <a:bodyPr wrap="square">
-            <a:spAutoFit/>
-          </a:bodyPr>
-          <a:lstStyle/>
-          <a:p>
-            <a:pPr algn="l"/>
-            <a:r>
-              <a:rPr sz="1200" b="0">
-                <a:solidFill>
-                  <a:srgbClr val="6A6A6A"/>
-                </a:solidFill>
-                <a:latin typeface="AppleGothic"/>
-                <a:ea typeface="AppleGothic"/>
-              </a:rPr>
-              <a:t>거절이 정직한 답이 되는 경우</a:t>
-            </a:r>
-          </a:p>
-        </p:txBody>
-      </p:sp>
-      <p:pic>
-        <p:nvPicPr>
-          <p:cNvPr id="6" name="Picture 5" descr="fail_cases.png"/>
-          <p:cNvPicPr>
-            <a:picLocks noChangeAspect="1"/>
-          </p:cNvPicPr>
-          <p:nvPr/>
-        </p:nvPicPr>
-        <p:blipFill>
-          <a:blip r:embed="rId2"/>
-          <a:stretch>
-            <a:fillRect/>
-          </a:stretch>
-        </p:blipFill>
-        <p:spPr>
-          <a:xfrm>
-            <a:off x="381000" y="1047750"/>
-            <a:ext cx="11430000" cy="4762500"/>
-          </a:xfrm>
-          <a:prstGeom prst="rect">
-            <a:avLst/>
-          </a:prstGeom>
-        </p:spPr>
-      </p:pic>
-      <p:cxnSp>
-        <p:nvCxnSpPr>
-          <p:cNvPr id="7" name="Connector 6"/>
-          <p:cNvCxnSpPr/>
-          <p:nvPr/>
-        </p:nvCxnSpPr>
-        <p:spPr>
-          <a:xfrm>
-            <a:off x="533400" y="6457950"/>
-            <a:ext cx="11125200" cy="0"/>
-          </a:xfrm>
-          <a:prstGeom prst="line">
-            <a:avLst/>
-          </a:prstGeom>
-          <a:ln w="9525">
-            <a:solidFill>
-              <a:srgbClr val="E6E6E6"/>
-            </a:solidFill>
-          </a:ln>
-        </p:spPr>
-        <p:style>
-          <a:lnRef idx="2">
-            <a:schemeClr val="accent1"/>
-          </a:lnRef>
-          <a:fillRef idx="0">
-            <a:schemeClr val="accent1"/>
-          </a:fillRef>
-          <a:effectRef idx="1">
-            <a:schemeClr val="accent1"/>
-          </a:effectRef>
-          <a:fontRef idx="minor">
-            <a:schemeClr val="tx1"/>
-          </a:fontRef>
-        </p:style>
-      </p:cxnSp>
-      <p:sp>
-        <p:nvSpPr>
-          <p:cNvPr id="8" name="TextBox 7"/>
-          <p:cNvSpPr txBox="1"/>
-          <p:nvPr/>
-        </p:nvSpPr>
-        <p:spPr>
-          <a:xfrm>
-            <a:off x="533400" y="6515100"/>
-            <a:ext cx="6667500" cy="133350"/>
-          </a:xfrm>
-          <a:prstGeom prst="rect">
-            <a:avLst/>
-          </a:prstGeom>
-          <a:noFill/>
-        </p:spPr>
-        <p:txBody>
-          <a:bodyPr wrap="square">
-            <a:spAutoFit/>
-          </a:bodyPr>
-          <a:lstStyle/>
-          <a:p>
-            <a:pPr algn="l"/>
-            <a:r>
-              <a:rPr sz="900" b="0">
-                <a:solidFill>
-                  <a:srgbClr val="6A6A6A"/>
-                </a:solidFill>
-                <a:latin typeface="AppleGothic"/>
-                <a:ea typeface="AppleGothic"/>
-              </a:rPr>
-              <a:t>SPS Lab  ·  Assumption-Aware Extrapolation</a:t>
-            </a:r>
-          </a:p>
-        </p:txBody>
-      </p:sp>
-      <p:sp>
-        <p:nvSpPr>
-          <p:cNvPr id="9" name="TextBox 8"/>
-          <p:cNvSpPr txBox="1"/>
-          <p:nvPr/>
-        </p:nvSpPr>
-        <p:spPr>
-          <a:xfrm>
-            <a:off x="10858500" y="6496050"/>
-            <a:ext cx="571500" cy="152400"/>
-          </a:xfrm>
-          <a:prstGeom prst="rect">
-            <a:avLst/>
-          </a:prstGeom>
-          <a:noFill/>
-        </p:spPr>
-        <p:txBody>
-          <a:bodyPr wrap="square">
-            <a:spAutoFit/>
-          </a:bodyPr>
-          <a:lstStyle/>
-          <a:p>
-            <a:pPr algn="r"/>
-            <a:r>
-              <a:rPr sz="1000" b="1">
-                <a:solidFill>
-                  <a:srgbClr val="6A6A6A"/>
-                </a:solidFill>
-                <a:latin typeface="AppleGothic"/>
-                <a:ea typeface="AppleGothic"/>
-              </a:rPr>
-              <a:t>18</a:t>
-            </a:r>
-          </a:p>
-        </p:txBody>
-      </p:sp>
-    </p:spTree>
-  </p:cSld>
-  <p:clrMapOvr>
-    <a:masterClrMapping/>
-  </p:clrMapOvr>
-</p:sld>
-</file>
-
-<file path=ppt/slides/slide19.xml><?xml version="1.0" encoding="utf-8"?>
-<p:sld xmlns:a="http://schemas.openxmlformats.org/drawingml/2006/main" xmlns:p="http://schemas.openxmlformats.org/presentationml/2006/main" xmlns:r="http://schemas.openxmlformats.org/officeDocument/2006/relationships">
-  <p:cSld>
-    <p:spTree>
-      <p:nvGrpSpPr>
-        <p:cNvPr id="1" name=""/>
-        <p:cNvGrpSpPr/>
-        <p:nvPr/>
-      </p:nvGrpSpPr>
-      <p:grpSpPr/>
-      <p:sp>
-        <p:nvSpPr>
-          <p:cNvPr id="2" name="Rectangle 1"/>
-          <p:cNvSpPr/>
-          <p:nvPr/>
-        </p:nvSpPr>
-        <p:spPr>
-          <a:xfrm>
-            <a:off x="0" y="0"/>
-            <a:ext cx="12192000" cy="6858000"/>
-          </a:xfrm>
-          <a:prstGeom prst="rect">
-            <a:avLst/>
-          </a:prstGeom>
-          <a:solidFill>
-            <a:srgbClr val="FFFFFF"/>
-          </a:solidFill>
-          <a:ln>
-            <a:noFill/>
-          </a:ln>
-        </p:spPr>
-        <p:style>
-          <a:lnRef idx="1">
-            <a:schemeClr val="accent1"/>
-          </a:lnRef>
-          <a:fillRef idx="3">
-            <a:schemeClr val="accent1"/>
-          </a:fillRef>
-          <a:effectRef idx="2">
-            <a:schemeClr val="accent1"/>
-          </a:effectRef>
-          <a:fontRef idx="minor">
-            <a:schemeClr val="lt1"/>
-          </a:fontRef>
-        </p:style>
-        <p:txBody>
-          <a:bodyPr rtlCol="0" anchor="ctr"/>
-          <a:lstStyle/>
-          <a:p>
-            <a:pPr algn="ctr"/>
-          </a:p>
-        </p:txBody>
-      </p:sp>
-      <p:sp>
-        <p:nvSpPr>
-          <p:cNvPr id="3" name="Rectangle 2"/>
-          <p:cNvSpPr/>
-          <p:nvPr/>
-        </p:nvSpPr>
-        <p:spPr>
-          <a:xfrm>
-            <a:off x="0" y="0"/>
-            <a:ext cx="12192000" cy="28575"/>
-          </a:xfrm>
-          <a:prstGeom prst="rect">
-            <a:avLst/>
-          </a:prstGeom>
-          <a:solidFill>
-            <a:srgbClr val="0F5C5C"/>
-          </a:solidFill>
-          <a:ln>
-            <a:noFill/>
-          </a:ln>
-        </p:spPr>
-        <p:style>
-          <a:lnRef idx="1">
-            <a:schemeClr val="accent1"/>
-          </a:lnRef>
-          <a:fillRef idx="3">
-            <a:schemeClr val="accent1"/>
-          </a:fillRef>
-          <a:effectRef idx="2">
-            <a:schemeClr val="accent1"/>
-          </a:effectRef>
-          <a:fontRef idx="minor">
-            <a:schemeClr val="lt1"/>
-          </a:fontRef>
-        </p:style>
-        <p:txBody>
-          <a:bodyPr rtlCol="0" anchor="ctr"/>
-          <a:lstStyle/>
-          <a:p>
-            <a:pPr algn="ctr"/>
-          </a:p>
-        </p:txBody>
-      </p:sp>
-      <p:sp>
-        <p:nvSpPr>
-          <p:cNvPr id="4" name="TextBox 3"/>
-          <p:cNvSpPr txBox="1"/>
-          <p:nvPr/>
-        </p:nvSpPr>
-        <p:spPr>
-          <a:xfrm>
-            <a:off x="533400" y="266700"/>
-            <a:ext cx="10477500" cy="342900"/>
-          </a:xfrm>
-          <a:prstGeom prst="rect">
-            <a:avLst/>
-          </a:prstGeom>
-          <a:noFill/>
-        </p:spPr>
-        <p:txBody>
-          <a:bodyPr wrap="square">
-            <a:spAutoFit/>
-          </a:bodyPr>
-          <a:lstStyle/>
-          <a:p>
-            <a:pPr algn="l"/>
-            <a:r>
-              <a:rPr sz="2200" b="1">
-                <a:solidFill>
-                  <a:srgbClr val="1C1C1C"/>
-                </a:solidFill>
-                <a:latin typeface="AppleGothic"/>
-                <a:ea typeface="AppleGothic"/>
-              </a:rPr>
-              <a:t>PAE / SAAR</a:t>
-            </a:r>
-          </a:p>
-        </p:txBody>
-      </p:sp>
-      <p:sp>
-        <p:nvSpPr>
-          <p:cNvPr id="5" name="TextBox 4"/>
-          <p:cNvSpPr txBox="1"/>
-          <p:nvPr/>
-        </p:nvSpPr>
-        <p:spPr>
-          <a:xfrm>
-            <a:off x="533400" y="609600"/>
-            <a:ext cx="10477500" cy="209550"/>
-          </a:xfrm>
-          <a:prstGeom prst="rect">
-            <a:avLst/>
-          </a:prstGeom>
-          <a:noFill/>
-        </p:spPr>
-        <p:txBody>
-          <a:bodyPr wrap="square">
-            <a:spAutoFit/>
-          </a:bodyPr>
-          <a:lstStyle/>
-          <a:p>
-            <a:pPr algn="l"/>
-            <a:r>
-              <a:rPr sz="1200" b="0">
-                <a:solidFill>
-                  <a:srgbClr val="6A6A6A"/>
-                </a:solidFill>
-                <a:latin typeface="AppleGothic"/>
-                <a:ea typeface="AppleGothic"/>
-              </a:rPr>
-              <a:t>같은 외삽, 다른 입력 — 식 있음 / 식 없음</a:t>
-            </a:r>
-          </a:p>
-        </p:txBody>
-      </p:sp>
-      <p:pic>
-        <p:nvPicPr>
-          <p:cNvPr id="6" name="Picture 5" descr="pp_vs_pae_split.png"/>
-          <p:cNvPicPr>
-            <a:picLocks noChangeAspect="1"/>
-          </p:cNvPicPr>
-          <p:nvPr/>
-        </p:nvPicPr>
-        <p:blipFill>
-          <a:blip r:embed="rId2"/>
-          <a:stretch>
-            <a:fillRect/>
-          </a:stretch>
-        </p:blipFill>
-        <p:spPr>
-          <a:xfrm>
-            <a:off x="381000" y="952500"/>
-            <a:ext cx="11430000" cy="4762500"/>
-          </a:xfrm>
-          <a:prstGeom prst="rect">
-            <a:avLst/>
-          </a:prstGeom>
-        </p:spPr>
-      </p:pic>
-      <p:cxnSp>
-        <p:nvCxnSpPr>
-          <p:cNvPr id="7" name="Connector 6"/>
-          <p:cNvCxnSpPr/>
-          <p:nvPr/>
-        </p:nvCxnSpPr>
-        <p:spPr>
-          <a:xfrm>
-            <a:off x="533400" y="6457950"/>
-            <a:ext cx="11125200" cy="0"/>
-          </a:xfrm>
-          <a:prstGeom prst="line">
-            <a:avLst/>
-          </a:prstGeom>
-          <a:ln w="9525">
-            <a:solidFill>
-              <a:srgbClr val="E6E6E6"/>
-            </a:solidFill>
-          </a:ln>
-        </p:spPr>
-        <p:style>
-          <a:lnRef idx="2">
-            <a:schemeClr val="accent1"/>
-          </a:lnRef>
-          <a:fillRef idx="0">
-            <a:schemeClr val="accent1"/>
-          </a:fillRef>
-          <a:effectRef idx="1">
-            <a:schemeClr val="accent1"/>
-          </a:effectRef>
-          <a:fontRef idx="minor">
-            <a:schemeClr val="tx1"/>
-          </a:fontRef>
-        </p:style>
-      </p:cxnSp>
-      <p:sp>
-        <p:nvSpPr>
-          <p:cNvPr id="8" name="TextBox 7"/>
-          <p:cNvSpPr txBox="1"/>
-          <p:nvPr/>
-        </p:nvSpPr>
-        <p:spPr>
-          <a:xfrm>
-            <a:off x="533400" y="6515100"/>
-            <a:ext cx="6667500" cy="133350"/>
-          </a:xfrm>
-          <a:prstGeom prst="rect">
-            <a:avLst/>
-          </a:prstGeom>
-          <a:noFill/>
-        </p:spPr>
-        <p:txBody>
-          <a:bodyPr wrap="square">
-            <a:spAutoFit/>
-          </a:bodyPr>
-          <a:lstStyle/>
-          <a:p>
-            <a:pPr algn="l"/>
-            <a:r>
-              <a:rPr sz="900" b="0">
-                <a:solidFill>
-                  <a:srgbClr val="6A6A6A"/>
-                </a:solidFill>
-                <a:latin typeface="AppleGothic"/>
-                <a:ea typeface="AppleGothic"/>
-              </a:rPr>
-              <a:t>SPS Lab  ·  Assumption-Aware Extrapolation</a:t>
-            </a:r>
-          </a:p>
-        </p:txBody>
-      </p:sp>
-      <p:sp>
-        <p:nvSpPr>
-          <p:cNvPr id="9" name="TextBox 8"/>
-          <p:cNvSpPr txBox="1"/>
-          <p:nvPr/>
-        </p:nvSpPr>
-        <p:spPr>
-          <a:xfrm>
-            <a:off x="10858500" y="6496050"/>
-            <a:ext cx="571500" cy="152400"/>
-          </a:xfrm>
-          <a:prstGeom prst="rect">
-            <a:avLst/>
-          </a:prstGeom>
-          <a:noFill/>
-        </p:spPr>
-        <p:txBody>
-          <a:bodyPr wrap="square">
-            <a:spAutoFit/>
-          </a:bodyPr>
-          <a:lstStyle/>
-          <a:p>
-            <a:pPr algn="r"/>
-            <a:r>
-              <a:rPr sz="1000" b="1">
-                <a:solidFill>
-                  <a:srgbClr val="6A6A6A"/>
-                </a:solidFill>
-                <a:latin typeface="AppleGothic"/>
-                <a:ea typeface="AppleGothic"/>
-              </a:rPr>
-              <a:t>19</a:t>
+              <a:t>12/12</a:t>
             </a:r>
           </a:p>
         </p:txBody>
@@ -6580,13 +4512,13 @@
         <p:spPr>
           <a:xfrm>
             <a:off x="0" y="0"/>
-            <a:ext cx="12192000" cy="28575"/>
+            <a:ext cx="12192000" cy="38100"/>
           </a:xfrm>
           <a:prstGeom prst="rect">
             <a:avLst/>
           </a:prstGeom>
           <a:solidFill>
-            <a:srgbClr val="0F5C5C"/>
+            <a:srgbClr val="0A5C5C"/>
           </a:solidFill>
           <a:ln>
             <a:noFill/>
@@ -6622,8 +4554,8 @@
         </p:nvSpPr>
         <p:spPr>
           <a:xfrm>
-            <a:off x="533400" y="266700"/>
-            <a:ext cx="10477500" cy="342900"/>
+            <a:off x="457200" y="209550"/>
+            <a:ext cx="11239500" cy="323850"/>
           </a:xfrm>
           <a:prstGeom prst="rect">
             <a:avLst/>
@@ -6640,7 +4572,7 @@
             <a:r>
               <a:rPr sz="2200" b="1">
                 <a:solidFill>
-                  <a:srgbClr val="1C1C1C"/>
+                  <a:srgbClr val="111111"/>
                 </a:solidFill>
                 <a:latin typeface="AppleGothic"/>
                 <a:ea typeface="AppleGothic"/>
@@ -6658,8 +4590,8 @@
         </p:nvSpPr>
         <p:spPr>
           <a:xfrm>
-            <a:off x="533400" y="609600"/>
-            <a:ext cx="10477500" cy="209550"/>
+            <a:off x="457200" y="533400"/>
+            <a:ext cx="11239500" cy="190500"/>
           </a:xfrm>
           <a:prstGeom prst="rect">
             <a:avLst/>
@@ -6676,7 +4608,7 @@
             <a:r>
               <a:rPr sz="1200" b="0">
                 <a:solidFill>
-                  <a:srgbClr val="6A6A6A"/>
+                  <a:srgbClr val="555555"/>
                 </a:solidFill>
                 <a:latin typeface="AppleGothic"/>
                 <a:ea typeface="AppleGothic"/>
@@ -6702,8 +4634,8 @@
         </p:blipFill>
         <p:spPr>
           <a:xfrm>
-            <a:off x="476250" y="904875"/>
-            <a:ext cx="11239500" cy="5143500"/>
+            <a:off x="381000" y="857250"/>
+            <a:ext cx="11430000" cy="5143500"/>
           </a:xfrm>
           <a:prstGeom prst="rect">
             <a:avLst/>
@@ -6718,15 +4650,15 @@
         </p:nvCxnSpPr>
         <p:spPr>
           <a:xfrm>
-            <a:off x="533400" y="6457950"/>
-            <a:ext cx="11125200" cy="0"/>
+            <a:off x="457200" y="6477000"/>
+            <a:ext cx="11277600" cy="0"/>
           </a:xfrm>
           <a:prstGeom prst="line">
             <a:avLst/>
           </a:prstGeom>
           <a:ln w="9525">
             <a:solidFill>
-              <a:srgbClr val="E6E6E6"/>
+              <a:srgbClr val="D0D0D0"/>
             </a:solidFill>
           </a:ln>
         </p:spPr>
@@ -6753,8 +4685,8 @@
         </p:nvSpPr>
         <p:spPr>
           <a:xfrm>
-            <a:off x="533400" y="6515100"/>
-            <a:ext cx="6667500" cy="133350"/>
+            <a:off x="457200" y="6534150"/>
+            <a:ext cx="7620000" cy="133350"/>
           </a:xfrm>
           <a:prstGeom prst="rect">
             <a:avLst/>
@@ -6771,12 +4703,12 @@
             <a:r>
               <a:rPr sz="900" b="0">
                 <a:solidFill>
-                  <a:srgbClr val="6A6A6A"/>
+                  <a:srgbClr val="555555"/>
                 </a:solidFill>
                 <a:latin typeface="AppleGothic"/>
                 <a:ea typeface="AppleGothic"/>
               </a:rPr>
-              <a:t>SPS Lab  ·  Assumption-Aware Extrapolation</a:t>
+              <a:t>SPS Lab  ·  Assumption-Aware Extrapolation  ·  SAAR</a:t>
             </a:r>
           </a:p>
         </p:txBody>
@@ -6789,8 +4721,8 @@
         </p:nvSpPr>
         <p:spPr>
           <a:xfrm>
-            <a:off x="10858500" y="6496050"/>
-            <a:ext cx="571500" cy="152400"/>
+            <a:off x="10477500" y="6515100"/>
+            <a:ext cx="952500" cy="152400"/>
           </a:xfrm>
           <a:prstGeom prst="rect">
             <a:avLst/>
@@ -6807,2677 +4739,12 @@
             <a:r>
               <a:rPr sz="1000" b="1">
                 <a:solidFill>
-                  <a:srgbClr val="6A6A6A"/>
+                  <a:srgbClr val="555555"/>
                 </a:solidFill>
                 <a:latin typeface="AppleGothic"/>
                 <a:ea typeface="AppleGothic"/>
               </a:rPr>
-              <a:t>02</a:t>
-            </a:r>
-          </a:p>
-        </p:txBody>
-      </p:sp>
-    </p:spTree>
-  </p:cSld>
-  <p:clrMapOvr>
-    <a:masterClrMapping/>
-  </p:clrMapOvr>
-</p:sld>
-</file>
-
-<file path=ppt/slides/slide20.xml><?xml version="1.0" encoding="utf-8"?>
-<p:sld xmlns:a="http://schemas.openxmlformats.org/drawingml/2006/main" xmlns:p="http://schemas.openxmlformats.org/presentationml/2006/main" xmlns:r="http://schemas.openxmlformats.org/officeDocument/2006/relationships">
-  <p:cSld>
-    <p:spTree>
-      <p:nvGrpSpPr>
-        <p:cNvPr id="1" name=""/>
-        <p:cNvGrpSpPr/>
-        <p:nvPr/>
-      </p:nvGrpSpPr>
-      <p:grpSpPr/>
-      <p:sp>
-        <p:nvSpPr>
-          <p:cNvPr id="2" name="Rectangle 1"/>
-          <p:cNvSpPr/>
-          <p:nvPr/>
-        </p:nvSpPr>
-        <p:spPr>
-          <a:xfrm>
-            <a:off x="0" y="0"/>
-            <a:ext cx="12192000" cy="6858000"/>
-          </a:xfrm>
-          <a:prstGeom prst="rect">
-            <a:avLst/>
-          </a:prstGeom>
-          <a:solidFill>
-            <a:srgbClr val="FFFFFF"/>
-          </a:solidFill>
-          <a:ln>
-            <a:noFill/>
-          </a:ln>
-        </p:spPr>
-        <p:style>
-          <a:lnRef idx="1">
-            <a:schemeClr val="accent1"/>
-          </a:lnRef>
-          <a:fillRef idx="3">
-            <a:schemeClr val="accent1"/>
-          </a:fillRef>
-          <a:effectRef idx="2">
-            <a:schemeClr val="accent1"/>
-          </a:effectRef>
-          <a:fontRef idx="minor">
-            <a:schemeClr val="lt1"/>
-          </a:fontRef>
-        </p:style>
-        <p:txBody>
-          <a:bodyPr rtlCol="0" anchor="ctr"/>
-          <a:lstStyle/>
-          <a:p>
-            <a:pPr algn="ctr"/>
-          </a:p>
-        </p:txBody>
-      </p:sp>
-      <p:sp>
-        <p:nvSpPr>
-          <p:cNvPr id="3" name="Rectangle 2"/>
-          <p:cNvSpPr/>
-          <p:nvPr/>
-        </p:nvSpPr>
-        <p:spPr>
-          <a:xfrm>
-            <a:off x="0" y="0"/>
-            <a:ext cx="12192000" cy="28575"/>
-          </a:xfrm>
-          <a:prstGeom prst="rect">
-            <a:avLst/>
-          </a:prstGeom>
-          <a:solidFill>
-            <a:srgbClr val="0F5C5C"/>
-          </a:solidFill>
-          <a:ln>
-            <a:noFill/>
-          </a:ln>
-        </p:spPr>
-        <p:style>
-          <a:lnRef idx="1">
-            <a:schemeClr val="accent1"/>
-          </a:lnRef>
-          <a:fillRef idx="3">
-            <a:schemeClr val="accent1"/>
-          </a:fillRef>
-          <a:effectRef idx="2">
-            <a:schemeClr val="accent1"/>
-          </a:effectRef>
-          <a:fontRef idx="minor">
-            <a:schemeClr val="lt1"/>
-          </a:fontRef>
-        </p:style>
-        <p:txBody>
-          <a:bodyPr rtlCol="0" anchor="ctr"/>
-          <a:lstStyle/>
-          <a:p>
-            <a:pPr algn="ctr"/>
-          </a:p>
-        </p:txBody>
-      </p:sp>
-      <p:sp>
-        <p:nvSpPr>
-          <p:cNvPr id="4" name="TextBox 3"/>
-          <p:cNvSpPr txBox="1"/>
-          <p:nvPr/>
-        </p:nvSpPr>
-        <p:spPr>
-          <a:xfrm>
-            <a:off x="533400" y="266700"/>
-            <a:ext cx="10477500" cy="342900"/>
-          </a:xfrm>
-          <a:prstGeom prst="rect">
-            <a:avLst/>
-          </a:prstGeom>
-          <a:noFill/>
-        </p:spPr>
-        <p:txBody>
-          <a:bodyPr wrap="square">
-            <a:spAutoFit/>
-          </a:bodyPr>
-          <a:lstStyle/>
-          <a:p>
-            <a:pPr algn="l"/>
-            <a:r>
-              <a:rPr sz="2200" b="1">
-                <a:solidFill>
-                  <a:srgbClr val="1C1C1C"/>
-                </a:solidFill>
-                <a:latin typeface="AppleGothic"/>
-                <a:ea typeface="AppleGothic"/>
-              </a:rPr>
-              <a:t>가져갈 말</a:t>
-            </a:r>
-          </a:p>
-        </p:txBody>
-      </p:sp>
-      <p:sp>
-        <p:nvSpPr>
-          <p:cNvPr id="5" name="TextBox 4"/>
-          <p:cNvSpPr txBox="1"/>
-          <p:nvPr/>
-        </p:nvSpPr>
-        <p:spPr>
-          <a:xfrm>
-            <a:off x="666750" y="1238250"/>
-            <a:ext cx="381000" cy="342900"/>
-          </a:xfrm>
-          <a:prstGeom prst="rect">
-            <a:avLst/>
-          </a:prstGeom>
-          <a:noFill/>
-        </p:spPr>
-        <p:txBody>
-          <a:bodyPr wrap="square">
-            <a:spAutoFit/>
-          </a:bodyPr>
-          <a:lstStyle/>
-          <a:p>
-            <a:pPr algn="l"/>
-            <a:r>
-              <a:rPr sz="2200" b="1">
-                <a:solidFill>
-                  <a:srgbClr val="0F5C5C"/>
-                </a:solidFill>
-                <a:latin typeface="AppleGothic"/>
-                <a:ea typeface="AppleGothic"/>
-              </a:rPr>
-              <a:t>1</a:t>
-            </a:r>
-          </a:p>
-        </p:txBody>
-      </p:sp>
-      <p:sp>
-        <p:nvSpPr>
-          <p:cNvPr id="6" name="TextBox 5"/>
-          <p:cNvSpPr txBox="1"/>
-          <p:nvPr/>
-        </p:nvSpPr>
-        <p:spPr>
-          <a:xfrm>
-            <a:off x="1143000" y="1276350"/>
-            <a:ext cx="10001250" cy="381000"/>
-          </a:xfrm>
-          <a:prstGeom prst="rect">
-            <a:avLst/>
-          </a:prstGeom>
-          <a:noFill/>
-        </p:spPr>
-        <p:txBody>
-          <a:bodyPr wrap="square">
-            <a:spAutoFit/>
-          </a:bodyPr>
-          <a:lstStyle/>
-          <a:p>
-            <a:pPr algn="l"/>
-            <a:r>
-              <a:rPr sz="1800" b="0">
-                <a:solidFill>
-                  <a:srgbClr val="1C1C1C"/>
-                </a:solidFill>
-                <a:latin typeface="AppleGothic"/>
-                <a:ea typeface="AppleGothic"/>
-              </a:rPr>
-              <a:t>밖을 지탱하는 것은 데이터가 아니라 가정이다.</a:t>
-            </a:r>
-          </a:p>
-        </p:txBody>
-      </p:sp>
-      <p:sp>
-        <p:nvSpPr>
-          <p:cNvPr id="7" name="TextBox 6"/>
-          <p:cNvSpPr txBox="1"/>
-          <p:nvPr/>
-        </p:nvSpPr>
-        <p:spPr>
-          <a:xfrm>
-            <a:off x="666750" y="2190750"/>
-            <a:ext cx="381000" cy="342900"/>
-          </a:xfrm>
-          <a:prstGeom prst="rect">
-            <a:avLst/>
-          </a:prstGeom>
-          <a:noFill/>
-        </p:spPr>
-        <p:txBody>
-          <a:bodyPr wrap="square">
-            <a:spAutoFit/>
-          </a:bodyPr>
-          <a:lstStyle/>
-          <a:p>
-            <a:pPr algn="l"/>
-            <a:r>
-              <a:rPr sz="2200" b="1">
-                <a:solidFill>
-                  <a:srgbClr val="0F5C5C"/>
-                </a:solidFill>
-                <a:latin typeface="AppleGothic"/>
-                <a:ea typeface="AppleGothic"/>
-              </a:rPr>
-              <a:t>2</a:t>
-            </a:r>
-          </a:p>
-        </p:txBody>
-      </p:sp>
-      <p:sp>
-        <p:nvSpPr>
-          <p:cNvPr id="8" name="TextBox 7"/>
-          <p:cNvSpPr txBox="1"/>
-          <p:nvPr/>
-        </p:nvSpPr>
-        <p:spPr>
-          <a:xfrm>
-            <a:off x="1143000" y="2228850"/>
-            <a:ext cx="10001250" cy="381000"/>
-          </a:xfrm>
-          <a:prstGeom prst="rect">
-            <a:avLst/>
-          </a:prstGeom>
-          <a:noFill/>
-        </p:spPr>
-        <p:txBody>
-          <a:bodyPr wrap="square">
-            <a:spAutoFit/>
-          </a:bodyPr>
-          <a:lstStyle/>
-          <a:p>
-            <a:pPr algn="l"/>
-            <a:r>
-              <a:rPr sz="1800" b="0">
-                <a:solidFill>
-                  <a:srgbClr val="1C1C1C"/>
-                </a:solidFill>
-                <a:latin typeface="AppleGothic"/>
-                <a:ea typeface="AppleGothic"/>
-              </a:rPr>
-              <a:t>식이 없으면 SAAR: 동결 affine + 제한 residual.</a:t>
-            </a:r>
-          </a:p>
-        </p:txBody>
-      </p:sp>
-      <p:sp>
-        <p:nvSpPr>
-          <p:cNvPr id="9" name="TextBox 8"/>
-          <p:cNvSpPr txBox="1"/>
-          <p:nvPr/>
-        </p:nvSpPr>
-        <p:spPr>
-          <a:xfrm>
-            <a:off x="666750" y="3143250"/>
-            <a:ext cx="381000" cy="342900"/>
-          </a:xfrm>
-          <a:prstGeom prst="rect">
-            <a:avLst/>
-          </a:prstGeom>
-          <a:noFill/>
-        </p:spPr>
-        <p:txBody>
-          <a:bodyPr wrap="square">
-            <a:spAutoFit/>
-          </a:bodyPr>
-          <a:lstStyle/>
-          <a:p>
-            <a:pPr algn="l"/>
-            <a:r>
-              <a:rPr sz="2200" b="1">
-                <a:solidFill>
-                  <a:srgbClr val="0F5C5C"/>
-                </a:solidFill>
-                <a:latin typeface="AppleGothic"/>
-                <a:ea typeface="AppleGothic"/>
-              </a:rPr>
-              <a:t>3</a:t>
-            </a:r>
-          </a:p>
-        </p:txBody>
-      </p:sp>
-      <p:sp>
-        <p:nvSpPr>
-          <p:cNvPr id="10" name="TextBox 9"/>
-          <p:cNvSpPr txBox="1"/>
-          <p:nvPr/>
-        </p:nvSpPr>
-        <p:spPr>
-          <a:xfrm>
-            <a:off x="1143000" y="3181350"/>
-            <a:ext cx="10001250" cy="381000"/>
-          </a:xfrm>
-          <a:prstGeom prst="rect">
-            <a:avLst/>
-          </a:prstGeom>
-          <a:noFill/>
-        </p:spPr>
-        <p:txBody>
-          <a:bodyPr wrap="square">
-            <a:spAutoFit/>
-          </a:bodyPr>
-          <a:lstStyle/>
-          <a:p>
-            <a:pPr algn="l"/>
-            <a:r>
-              <a:rPr sz="1800" b="0">
-                <a:solidFill>
-                  <a:srgbClr val="1C1C1C"/>
-                </a:solidFill>
-                <a:latin typeface="AppleGothic"/>
-                <a:ea typeface="AppleGothic"/>
-              </a:rPr>
-              <a:t>주 결과 0.934 / 0.842 / 0.751 — 최저점을 살린 tradeoff.</a:t>
-            </a:r>
-          </a:p>
-        </p:txBody>
-      </p:sp>
-      <p:sp>
-        <p:nvSpPr>
-          <p:cNvPr id="11" name="TextBox 10"/>
-          <p:cNvSpPr txBox="1"/>
-          <p:nvPr/>
-        </p:nvSpPr>
-        <p:spPr>
-          <a:xfrm>
-            <a:off x="666750" y="4095750"/>
-            <a:ext cx="381000" cy="342900"/>
-          </a:xfrm>
-          <a:prstGeom prst="rect">
-            <a:avLst/>
-          </a:prstGeom>
-          <a:noFill/>
-        </p:spPr>
-        <p:txBody>
-          <a:bodyPr wrap="square">
-            <a:spAutoFit/>
-          </a:bodyPr>
-          <a:lstStyle/>
-          <a:p>
-            <a:pPr algn="l"/>
-            <a:r>
-              <a:rPr sz="2200" b="1">
-                <a:solidFill>
-                  <a:srgbClr val="0F5C5C"/>
-                </a:solidFill>
-                <a:latin typeface="AppleGothic"/>
-                <a:ea typeface="AppleGothic"/>
-              </a:rPr>
-              <a:t>4</a:t>
-            </a:r>
-          </a:p>
-        </p:txBody>
-      </p:sp>
-      <p:sp>
-        <p:nvSpPr>
-          <p:cNvPr id="12" name="TextBox 11"/>
-          <p:cNvSpPr txBox="1"/>
-          <p:nvPr/>
-        </p:nvSpPr>
-        <p:spPr>
-          <a:xfrm>
-            <a:off x="1143000" y="4133850"/>
-            <a:ext cx="10001250" cy="381000"/>
-          </a:xfrm>
-          <a:prstGeom prst="rect">
-            <a:avLst/>
-          </a:prstGeom>
-          <a:noFill/>
-        </p:spPr>
-        <p:txBody>
-          <a:bodyPr wrap="square">
-            <a:spAutoFit/>
-          </a:bodyPr>
-          <a:lstStyle/>
-          <a:p>
-            <a:pPr algn="l"/>
-            <a:r>
-              <a:rPr sz="1800" b="0">
-                <a:solidFill>
-                  <a:srgbClr val="1C1C1C"/>
-                </a:solidFill>
-                <a:latin typeface="AppleGothic"/>
-                <a:ea typeface="AppleGothic"/>
-              </a:rPr>
-              <a:t>Zn·베어링·PAE는 한계/후속. 만능 SOTA를 주장하지 않는다.</a:t>
-            </a:r>
-          </a:p>
-        </p:txBody>
-      </p:sp>
-      <p:cxnSp>
-        <p:nvCxnSpPr>
-          <p:cNvPr id="13" name="Connector 12"/>
-          <p:cNvCxnSpPr/>
-          <p:nvPr/>
-        </p:nvCxnSpPr>
-        <p:spPr>
-          <a:xfrm>
-            <a:off x="533400" y="6457950"/>
-            <a:ext cx="11125200" cy="0"/>
-          </a:xfrm>
-          <a:prstGeom prst="line">
-            <a:avLst/>
-          </a:prstGeom>
-          <a:ln w="9525">
-            <a:solidFill>
-              <a:srgbClr val="E6E6E6"/>
-            </a:solidFill>
-          </a:ln>
-        </p:spPr>
-        <p:style>
-          <a:lnRef idx="2">
-            <a:schemeClr val="accent1"/>
-          </a:lnRef>
-          <a:fillRef idx="0">
-            <a:schemeClr val="accent1"/>
-          </a:fillRef>
-          <a:effectRef idx="1">
-            <a:schemeClr val="accent1"/>
-          </a:effectRef>
-          <a:fontRef idx="minor">
-            <a:schemeClr val="tx1"/>
-          </a:fontRef>
-        </p:style>
-      </p:cxnSp>
-      <p:sp>
-        <p:nvSpPr>
-          <p:cNvPr id="14" name="TextBox 13"/>
-          <p:cNvSpPr txBox="1"/>
-          <p:nvPr/>
-        </p:nvSpPr>
-        <p:spPr>
-          <a:xfrm>
-            <a:off x="533400" y="6515100"/>
-            <a:ext cx="6667500" cy="133350"/>
-          </a:xfrm>
-          <a:prstGeom prst="rect">
-            <a:avLst/>
-          </a:prstGeom>
-          <a:noFill/>
-        </p:spPr>
-        <p:txBody>
-          <a:bodyPr wrap="square">
-            <a:spAutoFit/>
-          </a:bodyPr>
-          <a:lstStyle/>
-          <a:p>
-            <a:pPr algn="l"/>
-            <a:r>
-              <a:rPr sz="900" b="0">
-                <a:solidFill>
-                  <a:srgbClr val="6A6A6A"/>
-                </a:solidFill>
-                <a:latin typeface="AppleGothic"/>
-                <a:ea typeface="AppleGothic"/>
-              </a:rPr>
-              <a:t>SPS Lab  ·  Assumption-Aware Extrapolation</a:t>
-            </a:r>
-          </a:p>
-        </p:txBody>
-      </p:sp>
-      <p:sp>
-        <p:nvSpPr>
-          <p:cNvPr id="15" name="TextBox 14"/>
-          <p:cNvSpPr txBox="1"/>
-          <p:nvPr/>
-        </p:nvSpPr>
-        <p:spPr>
-          <a:xfrm>
-            <a:off x="10858500" y="6496050"/>
-            <a:ext cx="571500" cy="152400"/>
-          </a:xfrm>
-          <a:prstGeom prst="rect">
-            <a:avLst/>
-          </a:prstGeom>
-          <a:noFill/>
-        </p:spPr>
-        <p:txBody>
-          <a:bodyPr wrap="square">
-            <a:spAutoFit/>
-          </a:bodyPr>
-          <a:lstStyle/>
-          <a:p>
-            <a:pPr algn="r"/>
-            <a:r>
-              <a:rPr sz="1000" b="1">
-                <a:solidFill>
-                  <a:srgbClr val="6A6A6A"/>
-                </a:solidFill>
-                <a:latin typeface="AppleGothic"/>
-                <a:ea typeface="AppleGothic"/>
-              </a:rPr>
-              <a:t>20</a:t>
-            </a:r>
-          </a:p>
-        </p:txBody>
-      </p:sp>
-    </p:spTree>
-  </p:cSld>
-  <p:clrMapOvr>
-    <a:masterClrMapping/>
-  </p:clrMapOvr>
-</p:sld>
-</file>
-
-<file path=ppt/slides/slide21.xml><?xml version="1.0" encoding="utf-8"?>
-<p:sld xmlns:a="http://schemas.openxmlformats.org/drawingml/2006/main" xmlns:p="http://schemas.openxmlformats.org/presentationml/2006/main" xmlns:r="http://schemas.openxmlformats.org/officeDocument/2006/relationships">
-  <p:cSld>
-    <p:spTree>
-      <p:nvGrpSpPr>
-        <p:cNvPr id="1" name=""/>
-        <p:cNvGrpSpPr/>
-        <p:nvPr/>
-      </p:nvGrpSpPr>
-      <p:grpSpPr/>
-      <p:sp>
-        <p:nvSpPr>
-          <p:cNvPr id="2" name="Rectangle 1"/>
-          <p:cNvSpPr/>
-          <p:nvPr/>
-        </p:nvSpPr>
-        <p:spPr>
-          <a:xfrm>
-            <a:off x="0" y="0"/>
-            <a:ext cx="12192000" cy="6858000"/>
-          </a:xfrm>
-          <a:prstGeom prst="rect">
-            <a:avLst/>
-          </a:prstGeom>
-          <a:solidFill>
-            <a:srgbClr val="FFFFFF"/>
-          </a:solidFill>
-          <a:ln>
-            <a:noFill/>
-          </a:ln>
-        </p:spPr>
-        <p:style>
-          <a:lnRef idx="1">
-            <a:schemeClr val="accent1"/>
-          </a:lnRef>
-          <a:fillRef idx="3">
-            <a:schemeClr val="accent1"/>
-          </a:fillRef>
-          <a:effectRef idx="2">
-            <a:schemeClr val="accent1"/>
-          </a:effectRef>
-          <a:fontRef idx="minor">
-            <a:schemeClr val="lt1"/>
-          </a:fontRef>
-        </p:style>
-        <p:txBody>
-          <a:bodyPr rtlCol="0" anchor="ctr"/>
-          <a:lstStyle/>
-          <a:p>
-            <a:pPr algn="ctr"/>
-          </a:p>
-        </p:txBody>
-      </p:sp>
-      <p:sp>
-        <p:nvSpPr>
-          <p:cNvPr id="3" name="TextBox 2"/>
-          <p:cNvSpPr txBox="1"/>
-          <p:nvPr/>
-        </p:nvSpPr>
-        <p:spPr>
-          <a:xfrm>
-            <a:off x="666750" y="2667000"/>
-            <a:ext cx="10477500" cy="476250"/>
-          </a:xfrm>
-          <a:prstGeom prst="rect">
-            <a:avLst/>
-          </a:prstGeom>
-          <a:noFill/>
-        </p:spPr>
-        <p:txBody>
-          <a:bodyPr wrap="square">
-            <a:spAutoFit/>
-          </a:bodyPr>
-          <a:lstStyle/>
-          <a:p>
-            <a:pPr algn="ctr"/>
-            <a:r>
-              <a:rPr sz="3600" b="1">
-                <a:solidFill>
-                  <a:srgbClr val="1C1C1C"/>
-                </a:solidFill>
-                <a:latin typeface="AppleGothic"/>
-                <a:ea typeface="AppleGothic"/>
-              </a:rPr>
-              <a:t>APPENDIX</a:t>
-            </a:r>
-          </a:p>
-        </p:txBody>
-      </p:sp>
-      <p:sp>
-        <p:nvSpPr>
-          <p:cNvPr id="4" name="TextBox 3"/>
-          <p:cNvSpPr txBox="1"/>
-          <p:nvPr/>
-        </p:nvSpPr>
-        <p:spPr>
-          <a:xfrm>
-            <a:off x="666750" y="3333750"/>
-            <a:ext cx="10477500" cy="285750"/>
-          </a:xfrm>
-          <a:prstGeom prst="rect">
-            <a:avLst/>
-          </a:prstGeom>
-          <a:noFill/>
-        </p:spPr>
-        <p:txBody>
-          <a:bodyPr wrap="square">
-            <a:spAutoFit/>
-          </a:bodyPr>
-          <a:lstStyle/>
-          <a:p>
-            <a:pPr algn="ctr"/>
-            <a:r>
-              <a:rPr sz="1600" b="0">
-                <a:solidFill>
-                  <a:srgbClr val="6A6A6A"/>
-                </a:solidFill>
-                <a:latin typeface="AppleGothic"/>
-                <a:ea typeface="AppleGothic"/>
-              </a:rPr>
-              <a:t>스플릿 · 방법 상세 · 원문 연결</a:t>
-            </a:r>
-          </a:p>
-        </p:txBody>
-      </p:sp>
-      <p:cxnSp>
-        <p:nvCxnSpPr>
-          <p:cNvPr id="5" name="Connector 4"/>
-          <p:cNvCxnSpPr/>
-          <p:nvPr/>
-        </p:nvCxnSpPr>
-        <p:spPr>
-          <a:xfrm>
-            <a:off x="533400" y="6457950"/>
-            <a:ext cx="11125200" cy="0"/>
-          </a:xfrm>
-          <a:prstGeom prst="line">
-            <a:avLst/>
-          </a:prstGeom>
-          <a:ln w="9525">
-            <a:solidFill>
-              <a:srgbClr val="E6E6E6"/>
-            </a:solidFill>
-          </a:ln>
-        </p:spPr>
-        <p:style>
-          <a:lnRef idx="2">
-            <a:schemeClr val="accent1"/>
-          </a:lnRef>
-          <a:fillRef idx="0">
-            <a:schemeClr val="accent1"/>
-          </a:fillRef>
-          <a:effectRef idx="1">
-            <a:schemeClr val="accent1"/>
-          </a:effectRef>
-          <a:fontRef idx="minor">
-            <a:schemeClr val="tx1"/>
-          </a:fontRef>
-        </p:style>
-      </p:cxnSp>
-      <p:sp>
-        <p:nvSpPr>
-          <p:cNvPr id="6" name="TextBox 5"/>
-          <p:cNvSpPr txBox="1"/>
-          <p:nvPr/>
-        </p:nvSpPr>
-        <p:spPr>
-          <a:xfrm>
-            <a:off x="533400" y="6515100"/>
-            <a:ext cx="6667500" cy="133350"/>
-          </a:xfrm>
-          <a:prstGeom prst="rect">
-            <a:avLst/>
-          </a:prstGeom>
-          <a:noFill/>
-        </p:spPr>
-        <p:txBody>
-          <a:bodyPr wrap="square">
-            <a:spAutoFit/>
-          </a:bodyPr>
-          <a:lstStyle/>
-          <a:p>
-            <a:pPr algn="l"/>
-            <a:r>
-              <a:rPr sz="900" b="0">
-                <a:solidFill>
-                  <a:srgbClr val="6A6A6A"/>
-                </a:solidFill>
-                <a:latin typeface="AppleGothic"/>
-                <a:ea typeface="AppleGothic"/>
-              </a:rPr>
-              <a:t>SPS Lab  ·  Assumption-Aware Extrapolation</a:t>
-            </a:r>
-          </a:p>
-        </p:txBody>
-      </p:sp>
-      <p:sp>
-        <p:nvSpPr>
-          <p:cNvPr id="7" name="TextBox 6"/>
-          <p:cNvSpPr txBox="1"/>
-          <p:nvPr/>
-        </p:nvSpPr>
-        <p:spPr>
-          <a:xfrm>
-            <a:off x="10858500" y="6496050"/>
-            <a:ext cx="571500" cy="152400"/>
-          </a:xfrm>
-          <a:prstGeom prst="rect">
-            <a:avLst/>
-          </a:prstGeom>
-          <a:noFill/>
-        </p:spPr>
-        <p:txBody>
-          <a:bodyPr wrap="square">
-            <a:spAutoFit/>
-          </a:bodyPr>
-          <a:lstStyle/>
-          <a:p>
-            <a:pPr algn="r"/>
-            <a:r>
-              <a:rPr sz="1000" b="1">
-                <a:solidFill>
-                  <a:srgbClr val="6A6A6A"/>
-                </a:solidFill>
-                <a:latin typeface="AppleGothic"/>
-                <a:ea typeface="AppleGothic"/>
-              </a:rPr>
-              <a:t>21</a:t>
-            </a:r>
-          </a:p>
-        </p:txBody>
-      </p:sp>
-    </p:spTree>
-  </p:cSld>
-  <p:clrMapOvr>
-    <a:masterClrMapping/>
-  </p:clrMapOvr>
-</p:sld>
-</file>
-
-<file path=ppt/slides/slide22.xml><?xml version="1.0" encoding="utf-8"?>
-<p:sld xmlns:a="http://schemas.openxmlformats.org/drawingml/2006/main" xmlns:p="http://schemas.openxmlformats.org/presentationml/2006/main" xmlns:r="http://schemas.openxmlformats.org/officeDocument/2006/relationships">
-  <p:cSld>
-    <p:spTree>
-      <p:nvGrpSpPr>
-        <p:cNvPr id="1" name=""/>
-        <p:cNvGrpSpPr/>
-        <p:nvPr/>
-      </p:nvGrpSpPr>
-      <p:grpSpPr/>
-      <p:sp>
-        <p:nvSpPr>
-          <p:cNvPr id="2" name="Rectangle 1"/>
-          <p:cNvSpPr/>
-          <p:nvPr/>
-        </p:nvSpPr>
-        <p:spPr>
-          <a:xfrm>
-            <a:off x="0" y="0"/>
-            <a:ext cx="12192000" cy="6858000"/>
-          </a:xfrm>
-          <a:prstGeom prst="rect">
-            <a:avLst/>
-          </a:prstGeom>
-          <a:solidFill>
-            <a:srgbClr val="FFFFFF"/>
-          </a:solidFill>
-          <a:ln>
-            <a:noFill/>
-          </a:ln>
-        </p:spPr>
-        <p:style>
-          <a:lnRef idx="1">
-            <a:schemeClr val="accent1"/>
-          </a:lnRef>
-          <a:fillRef idx="3">
-            <a:schemeClr val="accent1"/>
-          </a:fillRef>
-          <a:effectRef idx="2">
-            <a:schemeClr val="accent1"/>
-          </a:effectRef>
-          <a:fontRef idx="minor">
-            <a:schemeClr val="lt1"/>
-          </a:fontRef>
-        </p:style>
-        <p:txBody>
-          <a:bodyPr rtlCol="0" anchor="ctr"/>
-          <a:lstStyle/>
-          <a:p>
-            <a:pPr algn="ctr"/>
-          </a:p>
-        </p:txBody>
-      </p:sp>
-      <p:sp>
-        <p:nvSpPr>
-          <p:cNvPr id="3" name="Rectangle 2"/>
-          <p:cNvSpPr/>
-          <p:nvPr/>
-        </p:nvSpPr>
-        <p:spPr>
-          <a:xfrm>
-            <a:off x="0" y="0"/>
-            <a:ext cx="12192000" cy="28575"/>
-          </a:xfrm>
-          <a:prstGeom prst="rect">
-            <a:avLst/>
-          </a:prstGeom>
-          <a:solidFill>
-            <a:srgbClr val="0F5C5C"/>
-          </a:solidFill>
-          <a:ln>
-            <a:noFill/>
-          </a:ln>
-        </p:spPr>
-        <p:style>
-          <a:lnRef idx="1">
-            <a:schemeClr val="accent1"/>
-          </a:lnRef>
-          <a:fillRef idx="3">
-            <a:schemeClr val="accent1"/>
-          </a:fillRef>
-          <a:effectRef idx="2">
-            <a:schemeClr val="accent1"/>
-          </a:effectRef>
-          <a:fontRef idx="minor">
-            <a:schemeClr val="lt1"/>
-          </a:fontRef>
-        </p:style>
-        <p:txBody>
-          <a:bodyPr rtlCol="0" anchor="ctr"/>
-          <a:lstStyle/>
-          <a:p>
-            <a:pPr algn="ctr"/>
-          </a:p>
-        </p:txBody>
-      </p:sp>
-      <p:sp>
-        <p:nvSpPr>
-          <p:cNvPr id="4" name="TextBox 3"/>
-          <p:cNvSpPr txBox="1"/>
-          <p:nvPr/>
-        </p:nvSpPr>
-        <p:spPr>
-          <a:xfrm>
-            <a:off x="533400" y="266700"/>
-            <a:ext cx="10477500" cy="342900"/>
-          </a:xfrm>
-          <a:prstGeom prst="rect">
-            <a:avLst/>
-          </a:prstGeom>
-          <a:noFill/>
-        </p:spPr>
-        <p:txBody>
-          <a:bodyPr wrap="square">
-            <a:spAutoFit/>
-          </a:bodyPr>
-          <a:lstStyle/>
-          <a:p>
-            <a:pPr algn="l"/>
-            <a:r>
-              <a:rPr sz="2200" b="1">
-                <a:solidFill>
-                  <a:srgbClr val="1C1C1C"/>
-                </a:solidFill>
-                <a:latin typeface="AppleGothic"/>
-                <a:ea typeface="AppleGothic"/>
-              </a:rPr>
-              <a:t>공통 스플릿</a:t>
-            </a:r>
-          </a:p>
-        </p:txBody>
-      </p:sp>
-      <p:pic>
-        <p:nvPicPr>
-          <p:cNvPr id="5" name="Picture 4" descr="dataset_split.png"/>
-          <p:cNvPicPr>
-            <a:picLocks noChangeAspect="1"/>
-          </p:cNvPicPr>
-          <p:nvPr/>
-        </p:nvPicPr>
-        <p:blipFill>
-          <a:blip r:embed="rId2"/>
-          <a:stretch>
-            <a:fillRect/>
-          </a:stretch>
-        </p:blipFill>
-        <p:spPr>
-          <a:xfrm>
-            <a:off x="381000" y="952500"/>
-            <a:ext cx="11430000" cy="4762500"/>
-          </a:xfrm>
-          <a:prstGeom prst="rect">
-            <a:avLst/>
-          </a:prstGeom>
-        </p:spPr>
-      </p:pic>
-      <p:cxnSp>
-        <p:nvCxnSpPr>
-          <p:cNvPr id="6" name="Connector 5"/>
-          <p:cNvCxnSpPr/>
-          <p:nvPr/>
-        </p:nvCxnSpPr>
-        <p:spPr>
-          <a:xfrm>
-            <a:off x="533400" y="6457950"/>
-            <a:ext cx="11125200" cy="0"/>
-          </a:xfrm>
-          <a:prstGeom prst="line">
-            <a:avLst/>
-          </a:prstGeom>
-          <a:ln w="9525">
-            <a:solidFill>
-              <a:srgbClr val="E6E6E6"/>
-            </a:solidFill>
-          </a:ln>
-        </p:spPr>
-        <p:style>
-          <a:lnRef idx="2">
-            <a:schemeClr val="accent1"/>
-          </a:lnRef>
-          <a:fillRef idx="0">
-            <a:schemeClr val="accent1"/>
-          </a:fillRef>
-          <a:effectRef idx="1">
-            <a:schemeClr val="accent1"/>
-          </a:effectRef>
-          <a:fontRef idx="minor">
-            <a:schemeClr val="tx1"/>
-          </a:fontRef>
-        </p:style>
-      </p:cxnSp>
-      <p:sp>
-        <p:nvSpPr>
-          <p:cNvPr id="7" name="TextBox 6"/>
-          <p:cNvSpPr txBox="1"/>
-          <p:nvPr/>
-        </p:nvSpPr>
-        <p:spPr>
-          <a:xfrm>
-            <a:off x="533400" y="6515100"/>
-            <a:ext cx="6667500" cy="133350"/>
-          </a:xfrm>
-          <a:prstGeom prst="rect">
-            <a:avLst/>
-          </a:prstGeom>
-          <a:noFill/>
-        </p:spPr>
-        <p:txBody>
-          <a:bodyPr wrap="square">
-            <a:spAutoFit/>
-          </a:bodyPr>
-          <a:lstStyle/>
-          <a:p>
-            <a:pPr algn="l"/>
-            <a:r>
-              <a:rPr sz="900" b="0">
-                <a:solidFill>
-                  <a:srgbClr val="6A6A6A"/>
-                </a:solidFill>
-                <a:latin typeface="AppleGothic"/>
-                <a:ea typeface="AppleGothic"/>
-              </a:rPr>
-              <a:t>SPS Lab  ·  Assumption-Aware Extrapolation</a:t>
-            </a:r>
-          </a:p>
-        </p:txBody>
-      </p:sp>
-      <p:sp>
-        <p:nvSpPr>
-          <p:cNvPr id="8" name="TextBox 7"/>
-          <p:cNvSpPr txBox="1"/>
-          <p:nvPr/>
-        </p:nvSpPr>
-        <p:spPr>
-          <a:xfrm>
-            <a:off x="10858500" y="6496050"/>
-            <a:ext cx="571500" cy="152400"/>
-          </a:xfrm>
-          <a:prstGeom prst="rect">
-            <a:avLst/>
-          </a:prstGeom>
-          <a:noFill/>
-        </p:spPr>
-        <p:txBody>
-          <a:bodyPr wrap="square">
-            <a:spAutoFit/>
-          </a:bodyPr>
-          <a:lstStyle/>
-          <a:p>
-            <a:pPr algn="r"/>
-            <a:r>
-              <a:rPr sz="1000" b="1">
-                <a:solidFill>
-                  <a:srgbClr val="6A6A6A"/>
-                </a:solidFill>
-                <a:latin typeface="AppleGothic"/>
-                <a:ea typeface="AppleGothic"/>
-              </a:rPr>
-              <a:t>22</a:t>
-            </a:r>
-          </a:p>
-        </p:txBody>
-      </p:sp>
-    </p:spTree>
-  </p:cSld>
-  <p:clrMapOvr>
-    <a:masterClrMapping/>
-  </p:clrMapOvr>
-</p:sld>
-</file>
-
-<file path=ppt/slides/slide23.xml><?xml version="1.0" encoding="utf-8"?>
-<p:sld xmlns:a="http://schemas.openxmlformats.org/drawingml/2006/main" xmlns:p="http://schemas.openxmlformats.org/presentationml/2006/main" xmlns:r="http://schemas.openxmlformats.org/officeDocument/2006/relationships">
-  <p:cSld>
-    <p:spTree>
-      <p:nvGrpSpPr>
-        <p:cNvPr id="1" name=""/>
-        <p:cNvGrpSpPr/>
-        <p:nvPr/>
-      </p:nvGrpSpPr>
-      <p:grpSpPr/>
-      <p:sp>
-        <p:nvSpPr>
-          <p:cNvPr id="2" name="Rectangle 1"/>
-          <p:cNvSpPr/>
-          <p:nvPr/>
-        </p:nvSpPr>
-        <p:spPr>
-          <a:xfrm>
-            <a:off x="0" y="0"/>
-            <a:ext cx="12192000" cy="6858000"/>
-          </a:xfrm>
-          <a:prstGeom prst="rect">
-            <a:avLst/>
-          </a:prstGeom>
-          <a:solidFill>
-            <a:srgbClr val="FFFFFF"/>
-          </a:solidFill>
-          <a:ln>
-            <a:noFill/>
-          </a:ln>
-        </p:spPr>
-        <p:style>
-          <a:lnRef idx="1">
-            <a:schemeClr val="accent1"/>
-          </a:lnRef>
-          <a:fillRef idx="3">
-            <a:schemeClr val="accent1"/>
-          </a:fillRef>
-          <a:effectRef idx="2">
-            <a:schemeClr val="accent1"/>
-          </a:effectRef>
-          <a:fontRef idx="minor">
-            <a:schemeClr val="lt1"/>
-          </a:fontRef>
-        </p:style>
-        <p:txBody>
-          <a:bodyPr rtlCol="0" anchor="ctr"/>
-          <a:lstStyle/>
-          <a:p>
-            <a:pPr algn="ctr"/>
-          </a:p>
-        </p:txBody>
-      </p:sp>
-      <p:sp>
-        <p:nvSpPr>
-          <p:cNvPr id="3" name="Rectangle 2"/>
-          <p:cNvSpPr/>
-          <p:nvPr/>
-        </p:nvSpPr>
-        <p:spPr>
-          <a:xfrm>
-            <a:off x="0" y="0"/>
-            <a:ext cx="12192000" cy="28575"/>
-          </a:xfrm>
-          <a:prstGeom prst="rect">
-            <a:avLst/>
-          </a:prstGeom>
-          <a:solidFill>
-            <a:srgbClr val="0F5C5C"/>
-          </a:solidFill>
-          <a:ln>
-            <a:noFill/>
-          </a:ln>
-        </p:spPr>
-        <p:style>
-          <a:lnRef idx="1">
-            <a:schemeClr val="accent1"/>
-          </a:lnRef>
-          <a:fillRef idx="3">
-            <a:schemeClr val="accent1"/>
-          </a:fillRef>
-          <a:effectRef idx="2">
-            <a:schemeClr val="accent1"/>
-          </a:effectRef>
-          <a:fontRef idx="minor">
-            <a:schemeClr val="lt1"/>
-          </a:fontRef>
-        </p:style>
-        <p:txBody>
-          <a:bodyPr rtlCol="0" anchor="ctr"/>
-          <a:lstStyle/>
-          <a:p>
-            <a:pPr algn="ctr"/>
-          </a:p>
-        </p:txBody>
-      </p:sp>
-      <p:sp>
-        <p:nvSpPr>
-          <p:cNvPr id="4" name="TextBox 3"/>
-          <p:cNvSpPr txBox="1"/>
-          <p:nvPr/>
-        </p:nvSpPr>
-        <p:spPr>
-          <a:xfrm>
-            <a:off x="533400" y="266700"/>
-            <a:ext cx="10477500" cy="342900"/>
-          </a:xfrm>
-          <a:prstGeom prst="rect">
-            <a:avLst/>
-          </a:prstGeom>
-          <a:noFill/>
-        </p:spPr>
-        <p:txBody>
-          <a:bodyPr wrap="square">
-            <a:spAutoFit/>
-          </a:bodyPr>
-          <a:lstStyle/>
-          <a:p>
-            <a:pPr algn="l"/>
-            <a:r>
-              <a:rPr sz="2200" b="1">
-                <a:solidFill>
-                  <a:srgbClr val="1C1C1C"/>
-                </a:solidFill>
-                <a:latin typeface="AppleGothic"/>
-                <a:ea typeface="AppleGothic"/>
-              </a:rPr>
-              <a:t>방법 상세</a:t>
-            </a:r>
-          </a:p>
-        </p:txBody>
-      </p:sp>
-      <p:sp>
-        <p:nvSpPr>
-          <p:cNvPr id="5" name="TextBox 4"/>
-          <p:cNvSpPr txBox="1"/>
-          <p:nvPr/>
-        </p:nvSpPr>
-        <p:spPr>
-          <a:xfrm>
-            <a:off x="533400" y="609600"/>
-            <a:ext cx="10477500" cy="209550"/>
-          </a:xfrm>
-          <a:prstGeom prst="rect">
-            <a:avLst/>
-          </a:prstGeom>
-          <a:noFill/>
-        </p:spPr>
-        <p:txBody>
-          <a:bodyPr wrap="square">
-            <a:spAutoFit/>
-          </a:bodyPr>
-          <a:lstStyle/>
-          <a:p>
-            <a:pPr algn="l"/>
-            <a:r>
-              <a:rPr sz="1200" b="0">
-                <a:solidFill>
-                  <a:srgbClr val="6A6A6A"/>
-                </a:solidFill>
-                <a:latin typeface="AppleGothic"/>
-                <a:ea typeface="AppleGothic"/>
-              </a:rPr>
-              <a:t>공용 구조 · 데이터별은 계수·NN만</a:t>
-            </a:r>
-          </a:p>
-        </p:txBody>
-      </p:sp>
-      <p:pic>
-        <p:nvPicPr>
-          <p:cNvPr id="6" name="Picture 5" descr="pp_equation_panel.png"/>
-          <p:cNvPicPr>
-            <a:picLocks noChangeAspect="1"/>
-          </p:cNvPicPr>
-          <p:nvPr/>
-        </p:nvPicPr>
-        <p:blipFill>
-          <a:blip r:embed="rId2"/>
-          <a:stretch>
-            <a:fillRect/>
-          </a:stretch>
-        </p:blipFill>
-        <p:spPr>
-          <a:xfrm>
-            <a:off x="381000" y="952500"/>
-            <a:ext cx="11430000" cy="4762500"/>
-          </a:xfrm>
-          <a:prstGeom prst="rect">
-            <a:avLst/>
-          </a:prstGeom>
-        </p:spPr>
-      </p:pic>
-      <p:cxnSp>
-        <p:nvCxnSpPr>
-          <p:cNvPr id="7" name="Connector 6"/>
-          <p:cNvCxnSpPr/>
-          <p:nvPr/>
-        </p:nvCxnSpPr>
-        <p:spPr>
-          <a:xfrm>
-            <a:off x="533400" y="6457950"/>
-            <a:ext cx="11125200" cy="0"/>
-          </a:xfrm>
-          <a:prstGeom prst="line">
-            <a:avLst/>
-          </a:prstGeom>
-          <a:ln w="9525">
-            <a:solidFill>
-              <a:srgbClr val="E6E6E6"/>
-            </a:solidFill>
-          </a:ln>
-        </p:spPr>
-        <p:style>
-          <a:lnRef idx="2">
-            <a:schemeClr val="accent1"/>
-          </a:lnRef>
-          <a:fillRef idx="0">
-            <a:schemeClr val="accent1"/>
-          </a:fillRef>
-          <a:effectRef idx="1">
-            <a:schemeClr val="accent1"/>
-          </a:effectRef>
-          <a:fontRef idx="minor">
-            <a:schemeClr val="tx1"/>
-          </a:fontRef>
-        </p:style>
-      </p:cxnSp>
-      <p:sp>
-        <p:nvSpPr>
-          <p:cNvPr id="8" name="TextBox 7"/>
-          <p:cNvSpPr txBox="1"/>
-          <p:nvPr/>
-        </p:nvSpPr>
-        <p:spPr>
-          <a:xfrm>
-            <a:off x="533400" y="6515100"/>
-            <a:ext cx="6667500" cy="133350"/>
-          </a:xfrm>
-          <a:prstGeom prst="rect">
-            <a:avLst/>
-          </a:prstGeom>
-          <a:noFill/>
-        </p:spPr>
-        <p:txBody>
-          <a:bodyPr wrap="square">
-            <a:spAutoFit/>
-          </a:bodyPr>
-          <a:lstStyle/>
-          <a:p>
-            <a:pPr algn="l"/>
-            <a:r>
-              <a:rPr sz="900" b="0">
-                <a:solidFill>
-                  <a:srgbClr val="6A6A6A"/>
-                </a:solidFill>
-                <a:latin typeface="AppleGothic"/>
-                <a:ea typeface="AppleGothic"/>
-              </a:rPr>
-              <a:t>SPS Lab  ·  Assumption-Aware Extrapolation</a:t>
-            </a:r>
-          </a:p>
-        </p:txBody>
-      </p:sp>
-      <p:sp>
-        <p:nvSpPr>
-          <p:cNvPr id="9" name="TextBox 8"/>
-          <p:cNvSpPr txBox="1"/>
-          <p:nvPr/>
-        </p:nvSpPr>
-        <p:spPr>
-          <a:xfrm>
-            <a:off x="10858500" y="6496050"/>
-            <a:ext cx="571500" cy="152400"/>
-          </a:xfrm>
-          <a:prstGeom prst="rect">
-            <a:avLst/>
-          </a:prstGeom>
-          <a:noFill/>
-        </p:spPr>
-        <p:txBody>
-          <a:bodyPr wrap="square">
-            <a:spAutoFit/>
-          </a:bodyPr>
-          <a:lstStyle/>
-          <a:p>
-            <a:pPr algn="r"/>
-            <a:r>
-              <a:rPr sz="1000" b="1">
-                <a:solidFill>
-                  <a:srgbClr val="6A6A6A"/>
-                </a:solidFill>
-                <a:latin typeface="AppleGothic"/>
-                <a:ea typeface="AppleGothic"/>
-              </a:rPr>
-              <a:t>23</a:t>
-            </a:r>
-          </a:p>
-        </p:txBody>
-      </p:sp>
-    </p:spTree>
-  </p:cSld>
-  <p:clrMapOvr>
-    <a:masterClrMapping/>
-  </p:clrMapOvr>
-</p:sld>
-</file>
-
-<file path=ppt/slides/slide24.xml><?xml version="1.0" encoding="utf-8"?>
-<p:sld xmlns:a="http://schemas.openxmlformats.org/drawingml/2006/main" xmlns:p="http://schemas.openxmlformats.org/presentationml/2006/main" xmlns:r="http://schemas.openxmlformats.org/officeDocument/2006/relationships">
-  <p:cSld>
-    <p:spTree>
-      <p:nvGrpSpPr>
-        <p:cNvPr id="1" name=""/>
-        <p:cNvGrpSpPr/>
-        <p:nvPr/>
-      </p:nvGrpSpPr>
-      <p:grpSpPr/>
-      <p:sp>
-        <p:nvSpPr>
-          <p:cNvPr id="2" name="Rectangle 1"/>
-          <p:cNvSpPr/>
-          <p:nvPr/>
-        </p:nvSpPr>
-        <p:spPr>
-          <a:xfrm>
-            <a:off x="0" y="0"/>
-            <a:ext cx="12192000" cy="6858000"/>
-          </a:xfrm>
-          <a:prstGeom prst="rect">
-            <a:avLst/>
-          </a:prstGeom>
-          <a:solidFill>
-            <a:srgbClr val="FFFFFF"/>
-          </a:solidFill>
-          <a:ln>
-            <a:noFill/>
-          </a:ln>
-        </p:spPr>
-        <p:style>
-          <a:lnRef idx="1">
-            <a:schemeClr val="accent1"/>
-          </a:lnRef>
-          <a:fillRef idx="3">
-            <a:schemeClr val="accent1"/>
-          </a:fillRef>
-          <a:effectRef idx="2">
-            <a:schemeClr val="accent1"/>
-          </a:effectRef>
-          <a:fontRef idx="minor">
-            <a:schemeClr val="lt1"/>
-          </a:fontRef>
-        </p:style>
-        <p:txBody>
-          <a:bodyPr rtlCol="0" anchor="ctr"/>
-          <a:lstStyle/>
-          <a:p>
-            <a:pPr algn="ctr"/>
-          </a:p>
-        </p:txBody>
-      </p:sp>
-      <p:sp>
-        <p:nvSpPr>
-          <p:cNvPr id="3" name="Rectangle 2"/>
-          <p:cNvSpPr/>
-          <p:nvPr/>
-        </p:nvSpPr>
-        <p:spPr>
-          <a:xfrm>
-            <a:off x="0" y="0"/>
-            <a:ext cx="12192000" cy="28575"/>
-          </a:xfrm>
-          <a:prstGeom prst="rect">
-            <a:avLst/>
-          </a:prstGeom>
-          <a:solidFill>
-            <a:srgbClr val="0F5C5C"/>
-          </a:solidFill>
-          <a:ln>
-            <a:noFill/>
-          </a:ln>
-        </p:spPr>
-        <p:style>
-          <a:lnRef idx="1">
-            <a:schemeClr val="accent1"/>
-          </a:lnRef>
-          <a:fillRef idx="3">
-            <a:schemeClr val="accent1"/>
-          </a:fillRef>
-          <a:effectRef idx="2">
-            <a:schemeClr val="accent1"/>
-          </a:effectRef>
-          <a:fontRef idx="minor">
-            <a:schemeClr val="lt1"/>
-          </a:fontRef>
-        </p:style>
-        <p:txBody>
-          <a:bodyPr rtlCol="0" anchor="ctr"/>
-          <a:lstStyle/>
-          <a:p>
-            <a:pPr algn="ctr"/>
-          </a:p>
-        </p:txBody>
-      </p:sp>
-      <p:sp>
-        <p:nvSpPr>
-          <p:cNvPr id="4" name="TextBox 3"/>
-          <p:cNvSpPr txBox="1"/>
-          <p:nvPr/>
-        </p:nvSpPr>
-        <p:spPr>
-          <a:xfrm>
-            <a:off x="533400" y="266700"/>
-            <a:ext cx="10477500" cy="342900"/>
-          </a:xfrm>
-          <a:prstGeom prst="rect">
-            <a:avLst/>
-          </a:prstGeom>
-          <a:noFill/>
-        </p:spPr>
-        <p:txBody>
-          <a:bodyPr wrap="square">
-            <a:spAutoFit/>
-          </a:bodyPr>
-          <a:lstStyle/>
-          <a:p>
-            <a:pPr algn="l"/>
-            <a:r>
-              <a:rPr sz="2200" b="1">
-                <a:solidFill>
-                  <a:srgbClr val="1C1C1C"/>
-                </a:solidFill>
-                <a:latin typeface="AppleGothic"/>
-                <a:ea typeface="AppleGothic"/>
-              </a:rPr>
-              <a:t>Ablation 수치</a:t>
-            </a:r>
-          </a:p>
-        </p:txBody>
-      </p:sp>
-      <p:pic>
-        <p:nvPicPr>
-          <p:cNvPr id="5" name="Picture 4" descr="ablation_numbers.png"/>
-          <p:cNvPicPr>
-            <a:picLocks noChangeAspect="1"/>
-          </p:cNvPicPr>
-          <p:nvPr/>
-        </p:nvPicPr>
-        <p:blipFill>
-          <a:blip r:embed="rId2"/>
-          <a:stretch>
-            <a:fillRect/>
-          </a:stretch>
-        </p:blipFill>
-        <p:spPr>
-          <a:xfrm>
-            <a:off x="381000" y="952500"/>
-            <a:ext cx="11430000" cy="4953000"/>
-          </a:xfrm>
-          <a:prstGeom prst="rect">
-            <a:avLst/>
-          </a:prstGeom>
-        </p:spPr>
-      </p:pic>
-      <p:cxnSp>
-        <p:nvCxnSpPr>
-          <p:cNvPr id="6" name="Connector 5"/>
-          <p:cNvCxnSpPr/>
-          <p:nvPr/>
-        </p:nvCxnSpPr>
-        <p:spPr>
-          <a:xfrm>
-            <a:off x="533400" y="6457950"/>
-            <a:ext cx="11125200" cy="0"/>
-          </a:xfrm>
-          <a:prstGeom prst="line">
-            <a:avLst/>
-          </a:prstGeom>
-          <a:ln w="9525">
-            <a:solidFill>
-              <a:srgbClr val="E6E6E6"/>
-            </a:solidFill>
-          </a:ln>
-        </p:spPr>
-        <p:style>
-          <a:lnRef idx="2">
-            <a:schemeClr val="accent1"/>
-          </a:lnRef>
-          <a:fillRef idx="0">
-            <a:schemeClr val="accent1"/>
-          </a:fillRef>
-          <a:effectRef idx="1">
-            <a:schemeClr val="accent1"/>
-          </a:effectRef>
-          <a:fontRef idx="minor">
-            <a:schemeClr val="tx1"/>
-          </a:fontRef>
-        </p:style>
-      </p:cxnSp>
-      <p:sp>
-        <p:nvSpPr>
-          <p:cNvPr id="7" name="TextBox 6"/>
-          <p:cNvSpPr txBox="1"/>
-          <p:nvPr/>
-        </p:nvSpPr>
-        <p:spPr>
-          <a:xfrm>
-            <a:off x="533400" y="6515100"/>
-            <a:ext cx="6667500" cy="133350"/>
-          </a:xfrm>
-          <a:prstGeom prst="rect">
-            <a:avLst/>
-          </a:prstGeom>
-          <a:noFill/>
-        </p:spPr>
-        <p:txBody>
-          <a:bodyPr wrap="square">
-            <a:spAutoFit/>
-          </a:bodyPr>
-          <a:lstStyle/>
-          <a:p>
-            <a:pPr algn="l"/>
-            <a:r>
-              <a:rPr sz="900" b="0">
-                <a:solidFill>
-                  <a:srgbClr val="6A6A6A"/>
-                </a:solidFill>
-                <a:latin typeface="AppleGothic"/>
-                <a:ea typeface="AppleGothic"/>
-              </a:rPr>
-              <a:t>SPS Lab  ·  Assumption-Aware Extrapolation</a:t>
-            </a:r>
-          </a:p>
-        </p:txBody>
-      </p:sp>
-      <p:sp>
-        <p:nvSpPr>
-          <p:cNvPr id="8" name="TextBox 7"/>
-          <p:cNvSpPr txBox="1"/>
-          <p:nvPr/>
-        </p:nvSpPr>
-        <p:spPr>
-          <a:xfrm>
-            <a:off x="10858500" y="6496050"/>
-            <a:ext cx="571500" cy="152400"/>
-          </a:xfrm>
-          <a:prstGeom prst="rect">
-            <a:avLst/>
-          </a:prstGeom>
-          <a:noFill/>
-        </p:spPr>
-        <p:txBody>
-          <a:bodyPr wrap="square">
-            <a:spAutoFit/>
-          </a:bodyPr>
-          <a:lstStyle/>
-          <a:p>
-            <a:pPr algn="r"/>
-            <a:r>
-              <a:rPr sz="1000" b="1">
-                <a:solidFill>
-                  <a:srgbClr val="6A6A6A"/>
-                </a:solidFill>
-                <a:latin typeface="AppleGothic"/>
-                <a:ea typeface="AppleGothic"/>
-              </a:rPr>
-              <a:t>24</a:t>
-            </a:r>
-          </a:p>
-        </p:txBody>
-      </p:sp>
-    </p:spTree>
-  </p:cSld>
-  <p:clrMapOvr>
-    <a:masterClrMapping/>
-  </p:clrMapOvr>
-</p:sld>
-</file>
-
-<file path=ppt/slides/slide25.xml><?xml version="1.0" encoding="utf-8"?>
-<p:sld xmlns:a="http://schemas.openxmlformats.org/drawingml/2006/main" xmlns:p="http://schemas.openxmlformats.org/presentationml/2006/main" xmlns:r="http://schemas.openxmlformats.org/officeDocument/2006/relationships">
-  <p:cSld>
-    <p:spTree>
-      <p:nvGrpSpPr>
-        <p:cNvPr id="1" name=""/>
-        <p:cNvGrpSpPr/>
-        <p:nvPr/>
-      </p:nvGrpSpPr>
-      <p:grpSpPr/>
-      <p:sp>
-        <p:nvSpPr>
-          <p:cNvPr id="2" name="Rectangle 1"/>
-          <p:cNvSpPr/>
-          <p:nvPr/>
-        </p:nvSpPr>
-        <p:spPr>
-          <a:xfrm>
-            <a:off x="0" y="0"/>
-            <a:ext cx="12192000" cy="6858000"/>
-          </a:xfrm>
-          <a:prstGeom prst="rect">
-            <a:avLst/>
-          </a:prstGeom>
-          <a:solidFill>
-            <a:srgbClr val="FFFFFF"/>
-          </a:solidFill>
-          <a:ln>
-            <a:noFill/>
-          </a:ln>
-        </p:spPr>
-        <p:style>
-          <a:lnRef idx="1">
-            <a:schemeClr val="accent1"/>
-          </a:lnRef>
-          <a:fillRef idx="3">
-            <a:schemeClr val="accent1"/>
-          </a:fillRef>
-          <a:effectRef idx="2">
-            <a:schemeClr val="accent1"/>
-          </a:effectRef>
-          <a:fontRef idx="minor">
-            <a:schemeClr val="lt1"/>
-          </a:fontRef>
-        </p:style>
-        <p:txBody>
-          <a:bodyPr rtlCol="0" anchor="ctr"/>
-          <a:lstStyle/>
-          <a:p>
-            <a:pPr algn="ctr"/>
-          </a:p>
-        </p:txBody>
-      </p:sp>
-      <p:sp>
-        <p:nvSpPr>
-          <p:cNvPr id="3" name="Rectangle 2"/>
-          <p:cNvSpPr/>
-          <p:nvPr/>
-        </p:nvSpPr>
-        <p:spPr>
-          <a:xfrm>
-            <a:off x="0" y="0"/>
-            <a:ext cx="12192000" cy="28575"/>
-          </a:xfrm>
-          <a:prstGeom prst="rect">
-            <a:avLst/>
-          </a:prstGeom>
-          <a:solidFill>
-            <a:srgbClr val="0F5C5C"/>
-          </a:solidFill>
-          <a:ln>
-            <a:noFill/>
-          </a:ln>
-        </p:spPr>
-        <p:style>
-          <a:lnRef idx="1">
-            <a:schemeClr val="accent1"/>
-          </a:lnRef>
-          <a:fillRef idx="3">
-            <a:schemeClr val="accent1"/>
-          </a:fillRef>
-          <a:effectRef idx="2">
-            <a:schemeClr val="accent1"/>
-          </a:effectRef>
-          <a:fontRef idx="minor">
-            <a:schemeClr val="lt1"/>
-          </a:fontRef>
-        </p:style>
-        <p:txBody>
-          <a:bodyPr rtlCol="0" anchor="ctr"/>
-          <a:lstStyle/>
-          <a:p>
-            <a:pPr algn="ctr"/>
-          </a:p>
-        </p:txBody>
-      </p:sp>
-      <p:sp>
-        <p:nvSpPr>
-          <p:cNvPr id="4" name="TextBox 3"/>
-          <p:cNvSpPr txBox="1"/>
-          <p:nvPr/>
-        </p:nvSpPr>
-        <p:spPr>
-          <a:xfrm>
-            <a:off x="533400" y="266700"/>
-            <a:ext cx="10477500" cy="342900"/>
-          </a:xfrm>
-          <a:prstGeom prst="rect">
-            <a:avLst/>
-          </a:prstGeom>
-          <a:noFill/>
-        </p:spPr>
-        <p:txBody>
-          <a:bodyPr wrap="square">
-            <a:spAutoFit/>
-          </a:bodyPr>
-          <a:lstStyle/>
-          <a:p>
-            <a:pPr algn="l"/>
-            <a:r>
-              <a:rPr sz="2200" b="1">
-                <a:solidFill>
-                  <a:srgbClr val="1C1C1C"/>
-                </a:solidFill>
-                <a:latin typeface="AppleGothic"/>
-                <a:ea typeface="AppleGothic"/>
-              </a:rPr>
-              <a:t>알고리즘 막대</a:t>
-            </a:r>
-          </a:p>
-        </p:txBody>
-      </p:sp>
-      <p:pic>
-        <p:nvPicPr>
-          <p:cNvPr id="5" name="Picture 4" descr="competitor_algo_bars.png"/>
-          <p:cNvPicPr>
-            <a:picLocks noChangeAspect="1"/>
-          </p:cNvPicPr>
-          <p:nvPr/>
-        </p:nvPicPr>
-        <p:blipFill>
-          <a:blip r:embed="rId2"/>
-          <a:stretch>
-            <a:fillRect/>
-          </a:stretch>
-        </p:blipFill>
-        <p:spPr>
-          <a:xfrm>
-            <a:off x="381000" y="952500"/>
-            <a:ext cx="11430000" cy="4953000"/>
-          </a:xfrm>
-          <a:prstGeom prst="rect">
-            <a:avLst/>
-          </a:prstGeom>
-        </p:spPr>
-      </p:pic>
-      <p:cxnSp>
-        <p:nvCxnSpPr>
-          <p:cNvPr id="6" name="Connector 5"/>
-          <p:cNvCxnSpPr/>
-          <p:nvPr/>
-        </p:nvCxnSpPr>
-        <p:spPr>
-          <a:xfrm>
-            <a:off x="533400" y="6457950"/>
-            <a:ext cx="11125200" cy="0"/>
-          </a:xfrm>
-          <a:prstGeom prst="line">
-            <a:avLst/>
-          </a:prstGeom>
-          <a:ln w="9525">
-            <a:solidFill>
-              <a:srgbClr val="E6E6E6"/>
-            </a:solidFill>
-          </a:ln>
-        </p:spPr>
-        <p:style>
-          <a:lnRef idx="2">
-            <a:schemeClr val="accent1"/>
-          </a:lnRef>
-          <a:fillRef idx="0">
-            <a:schemeClr val="accent1"/>
-          </a:fillRef>
-          <a:effectRef idx="1">
-            <a:schemeClr val="accent1"/>
-          </a:effectRef>
-          <a:fontRef idx="minor">
-            <a:schemeClr val="tx1"/>
-          </a:fontRef>
-        </p:style>
-      </p:cxnSp>
-      <p:sp>
-        <p:nvSpPr>
-          <p:cNvPr id="7" name="TextBox 6"/>
-          <p:cNvSpPr txBox="1"/>
-          <p:nvPr/>
-        </p:nvSpPr>
-        <p:spPr>
-          <a:xfrm>
-            <a:off x="533400" y="6515100"/>
-            <a:ext cx="6667500" cy="133350"/>
-          </a:xfrm>
-          <a:prstGeom prst="rect">
-            <a:avLst/>
-          </a:prstGeom>
-          <a:noFill/>
-        </p:spPr>
-        <p:txBody>
-          <a:bodyPr wrap="square">
-            <a:spAutoFit/>
-          </a:bodyPr>
-          <a:lstStyle/>
-          <a:p>
-            <a:pPr algn="l"/>
-            <a:r>
-              <a:rPr sz="900" b="0">
-                <a:solidFill>
-                  <a:srgbClr val="6A6A6A"/>
-                </a:solidFill>
-                <a:latin typeface="AppleGothic"/>
-                <a:ea typeface="AppleGothic"/>
-              </a:rPr>
-              <a:t>SPS Lab  ·  Assumption-Aware Extrapolation</a:t>
-            </a:r>
-          </a:p>
-        </p:txBody>
-      </p:sp>
-      <p:sp>
-        <p:nvSpPr>
-          <p:cNvPr id="8" name="TextBox 7"/>
-          <p:cNvSpPr txBox="1"/>
-          <p:nvPr/>
-        </p:nvSpPr>
-        <p:spPr>
-          <a:xfrm>
-            <a:off x="10858500" y="6496050"/>
-            <a:ext cx="571500" cy="152400"/>
-          </a:xfrm>
-          <a:prstGeom prst="rect">
-            <a:avLst/>
-          </a:prstGeom>
-          <a:noFill/>
-        </p:spPr>
-        <p:txBody>
-          <a:bodyPr wrap="square">
-            <a:spAutoFit/>
-          </a:bodyPr>
-          <a:lstStyle/>
-          <a:p>
-            <a:pPr algn="r"/>
-            <a:r>
-              <a:rPr sz="1000" b="1">
-                <a:solidFill>
-                  <a:srgbClr val="6A6A6A"/>
-                </a:solidFill>
-                <a:latin typeface="AppleGothic"/>
-                <a:ea typeface="AppleGothic"/>
-              </a:rPr>
-              <a:t>25</a:t>
-            </a:r>
-          </a:p>
-        </p:txBody>
-      </p:sp>
-    </p:spTree>
-  </p:cSld>
-  <p:clrMapOvr>
-    <a:masterClrMapping/>
-  </p:clrMapOvr>
-</p:sld>
-</file>
-
-<file path=ppt/slides/slide26.xml><?xml version="1.0" encoding="utf-8"?>
-<p:sld xmlns:a="http://schemas.openxmlformats.org/drawingml/2006/main" xmlns:p="http://schemas.openxmlformats.org/presentationml/2006/main" xmlns:r="http://schemas.openxmlformats.org/officeDocument/2006/relationships">
-  <p:cSld>
-    <p:spTree>
-      <p:nvGrpSpPr>
-        <p:cNvPr id="1" name=""/>
-        <p:cNvGrpSpPr/>
-        <p:nvPr/>
-      </p:nvGrpSpPr>
-      <p:grpSpPr/>
-      <p:sp>
-        <p:nvSpPr>
-          <p:cNvPr id="2" name="Rectangle 1"/>
-          <p:cNvSpPr/>
-          <p:nvPr/>
-        </p:nvSpPr>
-        <p:spPr>
-          <a:xfrm>
-            <a:off x="0" y="0"/>
-            <a:ext cx="12192000" cy="6858000"/>
-          </a:xfrm>
-          <a:prstGeom prst="rect">
-            <a:avLst/>
-          </a:prstGeom>
-          <a:solidFill>
-            <a:srgbClr val="FFFFFF"/>
-          </a:solidFill>
-          <a:ln>
-            <a:noFill/>
-          </a:ln>
-        </p:spPr>
-        <p:style>
-          <a:lnRef idx="1">
-            <a:schemeClr val="accent1"/>
-          </a:lnRef>
-          <a:fillRef idx="3">
-            <a:schemeClr val="accent1"/>
-          </a:fillRef>
-          <a:effectRef idx="2">
-            <a:schemeClr val="accent1"/>
-          </a:effectRef>
-          <a:fontRef idx="minor">
-            <a:schemeClr val="lt1"/>
-          </a:fontRef>
-        </p:style>
-        <p:txBody>
-          <a:bodyPr rtlCol="0" anchor="ctr"/>
-          <a:lstStyle/>
-          <a:p>
-            <a:pPr algn="ctr"/>
-          </a:p>
-        </p:txBody>
-      </p:sp>
-      <p:sp>
-        <p:nvSpPr>
-          <p:cNvPr id="3" name="Rectangle 2"/>
-          <p:cNvSpPr/>
-          <p:nvPr/>
-        </p:nvSpPr>
-        <p:spPr>
-          <a:xfrm>
-            <a:off x="0" y="0"/>
-            <a:ext cx="12192000" cy="28575"/>
-          </a:xfrm>
-          <a:prstGeom prst="rect">
-            <a:avLst/>
-          </a:prstGeom>
-          <a:solidFill>
-            <a:srgbClr val="0F5C5C"/>
-          </a:solidFill>
-          <a:ln>
-            <a:noFill/>
-          </a:ln>
-        </p:spPr>
-        <p:style>
-          <a:lnRef idx="1">
-            <a:schemeClr val="accent1"/>
-          </a:lnRef>
-          <a:fillRef idx="3">
-            <a:schemeClr val="accent1"/>
-          </a:fillRef>
-          <a:effectRef idx="2">
-            <a:schemeClr val="accent1"/>
-          </a:effectRef>
-          <a:fontRef idx="minor">
-            <a:schemeClr val="lt1"/>
-          </a:fontRef>
-        </p:style>
-        <p:txBody>
-          <a:bodyPr rtlCol="0" anchor="ctr"/>
-          <a:lstStyle/>
-          <a:p>
-            <a:pPr algn="ctr"/>
-          </a:p>
-        </p:txBody>
-      </p:sp>
-      <p:sp>
-        <p:nvSpPr>
-          <p:cNvPr id="4" name="TextBox 3"/>
-          <p:cNvSpPr txBox="1"/>
-          <p:nvPr/>
-        </p:nvSpPr>
-        <p:spPr>
-          <a:xfrm>
-            <a:off x="533400" y="266700"/>
-            <a:ext cx="10477500" cy="342900"/>
-          </a:xfrm>
-          <a:prstGeom prst="rect">
-            <a:avLst/>
-          </a:prstGeom>
-          <a:noFill/>
-        </p:spPr>
-        <p:txBody>
-          <a:bodyPr wrap="square">
-            <a:spAutoFit/>
-          </a:bodyPr>
-          <a:lstStyle/>
-          <a:p>
-            <a:pPr algn="l"/>
-            <a:r>
-              <a:rPr sz="2200" b="1">
-                <a:solidFill>
-                  <a:srgbClr val="1C1C1C"/>
-                </a:solidFill>
-                <a:latin typeface="AppleGothic"/>
-                <a:ea typeface="AppleGothic"/>
-              </a:rPr>
-              <a:t>PAE 경로 (후속)</a:t>
-            </a:r>
-          </a:p>
-        </p:txBody>
-      </p:sp>
-      <p:sp>
-        <p:nvSpPr>
-          <p:cNvPr id="5" name="TextBox 4"/>
-          <p:cNvSpPr txBox="1"/>
-          <p:nvPr/>
-        </p:nvSpPr>
-        <p:spPr>
-          <a:xfrm>
-            <a:off x="533400" y="609600"/>
-            <a:ext cx="10477500" cy="209550"/>
-          </a:xfrm>
-          <a:prstGeom prst="rect">
-            <a:avLst/>
-          </a:prstGeom>
-          <a:noFill/>
-        </p:spPr>
-        <p:txBody>
-          <a:bodyPr wrap="square">
-            <a:spAutoFit/>
-          </a:bodyPr>
-          <a:lstStyle/>
-          <a:p>
-            <a:pPr algn="l"/>
-            <a:r>
-              <a:rPr sz="1200" b="0">
-                <a:solidFill>
-                  <a:srgbClr val="6A6A6A"/>
-                </a:solidFill>
-                <a:latin typeface="AppleGothic"/>
-                <a:ea typeface="AppleGothic"/>
-              </a:rPr>
-              <a:t>식 뼈대 + 제한 NN</a:t>
-            </a:r>
-          </a:p>
-        </p:txBody>
-      </p:sp>
-      <p:pic>
-        <p:nvPicPr>
-          <p:cNvPr id="6" name="Picture 5" descr="pae_equation_nn.png"/>
-          <p:cNvPicPr>
-            <a:picLocks noChangeAspect="1"/>
-          </p:cNvPicPr>
-          <p:nvPr/>
-        </p:nvPicPr>
-        <p:blipFill>
-          <a:blip r:embed="rId2"/>
-          <a:stretch>
-            <a:fillRect/>
-          </a:stretch>
-        </p:blipFill>
-        <p:spPr>
-          <a:xfrm>
-            <a:off x="381000" y="952500"/>
-            <a:ext cx="11430000" cy="4762500"/>
-          </a:xfrm>
-          <a:prstGeom prst="rect">
-            <a:avLst/>
-          </a:prstGeom>
-        </p:spPr>
-      </p:pic>
-      <p:cxnSp>
-        <p:nvCxnSpPr>
-          <p:cNvPr id="7" name="Connector 6"/>
-          <p:cNvCxnSpPr/>
-          <p:nvPr/>
-        </p:nvCxnSpPr>
-        <p:spPr>
-          <a:xfrm>
-            <a:off x="533400" y="6457950"/>
-            <a:ext cx="11125200" cy="0"/>
-          </a:xfrm>
-          <a:prstGeom prst="line">
-            <a:avLst/>
-          </a:prstGeom>
-          <a:ln w="9525">
-            <a:solidFill>
-              <a:srgbClr val="E6E6E6"/>
-            </a:solidFill>
-          </a:ln>
-        </p:spPr>
-        <p:style>
-          <a:lnRef idx="2">
-            <a:schemeClr val="accent1"/>
-          </a:lnRef>
-          <a:fillRef idx="0">
-            <a:schemeClr val="accent1"/>
-          </a:fillRef>
-          <a:effectRef idx="1">
-            <a:schemeClr val="accent1"/>
-          </a:effectRef>
-          <a:fontRef idx="minor">
-            <a:schemeClr val="tx1"/>
-          </a:fontRef>
-        </p:style>
-      </p:cxnSp>
-      <p:sp>
-        <p:nvSpPr>
-          <p:cNvPr id="8" name="TextBox 7"/>
-          <p:cNvSpPr txBox="1"/>
-          <p:nvPr/>
-        </p:nvSpPr>
-        <p:spPr>
-          <a:xfrm>
-            <a:off x="533400" y="6515100"/>
-            <a:ext cx="6667500" cy="133350"/>
-          </a:xfrm>
-          <a:prstGeom prst="rect">
-            <a:avLst/>
-          </a:prstGeom>
-          <a:noFill/>
-        </p:spPr>
-        <p:txBody>
-          <a:bodyPr wrap="square">
-            <a:spAutoFit/>
-          </a:bodyPr>
-          <a:lstStyle/>
-          <a:p>
-            <a:pPr algn="l"/>
-            <a:r>
-              <a:rPr sz="900" b="0">
-                <a:solidFill>
-                  <a:srgbClr val="6A6A6A"/>
-                </a:solidFill>
-                <a:latin typeface="AppleGothic"/>
-                <a:ea typeface="AppleGothic"/>
-              </a:rPr>
-              <a:t>SPS Lab  ·  Assumption-Aware Extrapolation</a:t>
-            </a:r>
-          </a:p>
-        </p:txBody>
-      </p:sp>
-      <p:sp>
-        <p:nvSpPr>
-          <p:cNvPr id="9" name="TextBox 8"/>
-          <p:cNvSpPr txBox="1"/>
-          <p:nvPr/>
-        </p:nvSpPr>
-        <p:spPr>
-          <a:xfrm>
-            <a:off x="10858500" y="6496050"/>
-            <a:ext cx="571500" cy="152400"/>
-          </a:xfrm>
-          <a:prstGeom prst="rect">
-            <a:avLst/>
-          </a:prstGeom>
-          <a:noFill/>
-        </p:spPr>
-        <p:txBody>
-          <a:bodyPr wrap="square">
-            <a:spAutoFit/>
-          </a:bodyPr>
-          <a:lstStyle/>
-          <a:p>
-            <a:pPr algn="r"/>
-            <a:r>
-              <a:rPr sz="1000" b="1">
-                <a:solidFill>
-                  <a:srgbClr val="6A6A6A"/>
-                </a:solidFill>
-                <a:latin typeface="AppleGothic"/>
-                <a:ea typeface="AppleGothic"/>
-              </a:rPr>
-              <a:t>26</a:t>
-            </a:r>
-          </a:p>
-        </p:txBody>
-      </p:sp>
-    </p:spTree>
-  </p:cSld>
-  <p:clrMapOvr>
-    <a:masterClrMapping/>
-  </p:clrMapOvr>
-</p:sld>
-</file>
-
-<file path=ppt/slides/slide27.xml><?xml version="1.0" encoding="utf-8"?>
-<p:sld xmlns:a="http://schemas.openxmlformats.org/drawingml/2006/main" xmlns:p="http://schemas.openxmlformats.org/presentationml/2006/main" xmlns:r="http://schemas.openxmlformats.org/officeDocument/2006/relationships">
-  <p:cSld>
-    <p:spTree>
-      <p:nvGrpSpPr>
-        <p:cNvPr id="1" name=""/>
-        <p:cNvGrpSpPr/>
-        <p:nvPr/>
-      </p:nvGrpSpPr>
-      <p:grpSpPr/>
-      <p:sp>
-        <p:nvSpPr>
-          <p:cNvPr id="2" name="Rectangle 1"/>
-          <p:cNvSpPr/>
-          <p:nvPr/>
-        </p:nvSpPr>
-        <p:spPr>
-          <a:xfrm>
-            <a:off x="0" y="0"/>
-            <a:ext cx="12192000" cy="6858000"/>
-          </a:xfrm>
-          <a:prstGeom prst="rect">
-            <a:avLst/>
-          </a:prstGeom>
-          <a:solidFill>
-            <a:srgbClr val="FFFFFF"/>
-          </a:solidFill>
-          <a:ln>
-            <a:noFill/>
-          </a:ln>
-        </p:spPr>
-        <p:style>
-          <a:lnRef idx="1">
-            <a:schemeClr val="accent1"/>
-          </a:lnRef>
-          <a:fillRef idx="3">
-            <a:schemeClr val="accent1"/>
-          </a:fillRef>
-          <a:effectRef idx="2">
-            <a:schemeClr val="accent1"/>
-          </a:effectRef>
-          <a:fontRef idx="minor">
-            <a:schemeClr val="lt1"/>
-          </a:fontRef>
-        </p:style>
-        <p:txBody>
-          <a:bodyPr rtlCol="0" anchor="ctr"/>
-          <a:lstStyle/>
-          <a:p>
-            <a:pPr algn="ctr"/>
-          </a:p>
-        </p:txBody>
-      </p:sp>
-      <p:sp>
-        <p:nvSpPr>
-          <p:cNvPr id="3" name="Rectangle 2"/>
-          <p:cNvSpPr/>
-          <p:nvPr/>
-        </p:nvSpPr>
-        <p:spPr>
-          <a:xfrm>
-            <a:off x="0" y="0"/>
-            <a:ext cx="12192000" cy="28575"/>
-          </a:xfrm>
-          <a:prstGeom prst="rect">
-            <a:avLst/>
-          </a:prstGeom>
-          <a:solidFill>
-            <a:srgbClr val="0F5C5C"/>
-          </a:solidFill>
-          <a:ln>
-            <a:noFill/>
-          </a:ln>
-        </p:spPr>
-        <p:style>
-          <a:lnRef idx="1">
-            <a:schemeClr val="accent1"/>
-          </a:lnRef>
-          <a:fillRef idx="3">
-            <a:schemeClr val="accent1"/>
-          </a:fillRef>
-          <a:effectRef idx="2">
-            <a:schemeClr val="accent1"/>
-          </a:effectRef>
-          <a:fontRef idx="minor">
-            <a:schemeClr val="lt1"/>
-          </a:fontRef>
-        </p:style>
-        <p:txBody>
-          <a:bodyPr rtlCol="0" anchor="ctr"/>
-          <a:lstStyle/>
-          <a:p>
-            <a:pPr algn="ctr"/>
-          </a:p>
-        </p:txBody>
-      </p:sp>
-      <p:sp>
-        <p:nvSpPr>
-          <p:cNvPr id="4" name="TextBox 3"/>
-          <p:cNvSpPr txBox="1"/>
-          <p:nvPr/>
-        </p:nvSpPr>
-        <p:spPr>
-          <a:xfrm>
-            <a:off x="533400" y="266700"/>
-            <a:ext cx="10477500" cy="342900"/>
-          </a:xfrm>
-          <a:prstGeom prst="rect">
-            <a:avLst/>
-          </a:prstGeom>
-          <a:noFill/>
-        </p:spPr>
-        <p:txBody>
-          <a:bodyPr wrap="square">
-            <a:spAutoFit/>
-          </a:bodyPr>
-          <a:lstStyle/>
-          <a:p>
-            <a:pPr algn="l"/>
-            <a:r>
-              <a:rPr sz="2200" b="1">
-                <a:solidFill>
-                  <a:srgbClr val="1C1C1C"/>
-                </a:solidFill>
-                <a:latin typeface="AppleGothic"/>
-                <a:ea typeface="AppleGothic"/>
-              </a:rPr>
-              <a:t>원문</a:t>
-            </a:r>
-          </a:p>
-        </p:txBody>
-      </p:sp>
-      <p:sp>
-        <p:nvSpPr>
-          <p:cNvPr id="5" name="TextBox 4"/>
-          <p:cNvSpPr txBox="1"/>
-          <p:nvPr/>
-        </p:nvSpPr>
-        <p:spPr>
-          <a:xfrm>
-            <a:off x="762000" y="1143000"/>
-            <a:ext cx="10477500" cy="342900"/>
-          </a:xfrm>
-          <a:prstGeom prst="rect">
-            <a:avLst/>
-          </a:prstGeom>
-          <a:noFill/>
-        </p:spPr>
-        <p:txBody>
-          <a:bodyPr wrap="square">
-            <a:spAutoFit/>
-          </a:bodyPr>
-          <a:lstStyle/>
-          <a:p>
-            <a:pPr algn="l"/>
-            <a:r>
-              <a:rPr sz="1600" b="0">
-                <a:solidFill>
-                  <a:srgbClr val="1C1C1C"/>
-                </a:solidFill>
-                <a:latin typeface="AppleGothic"/>
-                <a:ea typeface="AppleGothic"/>
-              </a:rPr>
-              <a:t>·  MODEL_AND_SPLIT_KO.md</a:t>
-            </a:r>
-          </a:p>
-        </p:txBody>
-      </p:sp>
-      <p:sp>
-        <p:nvSpPr>
-          <p:cNvPr id="6" name="TextBox 5"/>
-          <p:cNvSpPr txBox="1"/>
-          <p:nvPr/>
-        </p:nvSpPr>
-        <p:spPr>
-          <a:xfrm>
-            <a:off x="762000" y="1809750"/>
-            <a:ext cx="10477500" cy="342900"/>
-          </a:xfrm>
-          <a:prstGeom prst="rect">
-            <a:avLst/>
-          </a:prstGeom>
-          <a:noFill/>
-        </p:spPr>
-        <p:txBody>
-          <a:bodyPr wrap="square">
-            <a:spAutoFit/>
-          </a:bodyPr>
-          <a:lstStyle/>
-          <a:p>
-            <a:pPr algn="l"/>
-            <a:r>
-              <a:rPr sz="1600" b="0">
-                <a:solidFill>
-                  <a:srgbClr val="1C1C1C"/>
-                </a:solidFill>
-                <a:latin typeface="AppleGothic"/>
-                <a:ea typeface="AppleGothic"/>
-              </a:rPr>
-              <a:t>·  UNIFIED_SUPPORT_GATED_PP_RESULTS_KO.md</a:t>
-            </a:r>
-          </a:p>
-        </p:txBody>
-      </p:sp>
-      <p:sp>
-        <p:nvSpPr>
-          <p:cNvPr id="7" name="TextBox 6"/>
-          <p:cNvSpPr txBox="1"/>
-          <p:nvPr/>
-        </p:nvSpPr>
-        <p:spPr>
-          <a:xfrm>
-            <a:off x="762000" y="2476500"/>
-            <a:ext cx="10477500" cy="342900"/>
-          </a:xfrm>
-          <a:prstGeom prst="rect">
-            <a:avLst/>
-          </a:prstGeom>
-          <a:noFill/>
-        </p:spPr>
-        <p:txBody>
-          <a:bodyPr wrap="square">
-            <a:spAutoFit/>
-          </a:bodyPr>
-          <a:lstStyle/>
-          <a:p>
-            <a:pPr algn="l"/>
-            <a:r>
-              <a:rPr sz="1600" b="0">
-                <a:solidFill>
-                  <a:srgbClr val="1C1C1C"/>
-                </a:solidFill>
-                <a:latin typeface="AppleGothic"/>
-                <a:ea typeface="AppleGothic"/>
-              </a:rPr>
-              <a:t>·  FINAL_PP_COMPONENT_ABLATION_RESULTS_KO.md</a:t>
-            </a:r>
-          </a:p>
-        </p:txBody>
-      </p:sp>
-      <p:sp>
-        <p:nvSpPr>
-          <p:cNvPr id="8" name="TextBox 7"/>
-          <p:cNvSpPr txBox="1"/>
-          <p:nvPr/>
-        </p:nvSpPr>
-        <p:spPr>
-          <a:xfrm>
-            <a:off x="762000" y="3143250"/>
-            <a:ext cx="10477500" cy="342900"/>
-          </a:xfrm>
-          <a:prstGeom prst="rect">
-            <a:avLst/>
-          </a:prstGeom>
-          <a:noFill/>
-        </p:spPr>
-        <p:txBody>
-          <a:bodyPr wrap="square">
-            <a:spAutoFit/>
-          </a:bodyPr>
-          <a:lstStyle/>
-          <a:p>
-            <a:pPr algn="l"/>
-            <a:r>
-              <a:rPr sz="1600" b="0">
-                <a:solidFill>
-                  <a:srgbClr val="1C1C1C"/>
-                </a:solidFill>
-                <a:latin typeface="AppleGothic"/>
-                <a:ea typeface="AppleGothic"/>
-              </a:rPr>
-              <a:t>·  ALL_DATASET_EXTRAPOLATION_COMPETITORS_KO.md</a:t>
-            </a:r>
-          </a:p>
-        </p:txBody>
-      </p:sp>
-      <p:sp>
-        <p:nvSpPr>
-          <p:cNvPr id="9" name="TextBox 8"/>
-          <p:cNvSpPr txBox="1"/>
-          <p:nvPr/>
-        </p:nvSpPr>
-        <p:spPr>
-          <a:xfrm>
-            <a:off x="762000" y="3810000"/>
-            <a:ext cx="10477500" cy="342900"/>
-          </a:xfrm>
-          <a:prstGeom prst="rect">
-            <a:avLst/>
-          </a:prstGeom>
-          <a:noFill/>
-        </p:spPr>
-        <p:txBody>
-          <a:bodyPr wrap="square">
-            <a:spAutoFit/>
-          </a:bodyPr>
-          <a:lstStyle/>
-          <a:p>
-            <a:pPr algn="l"/>
-            <a:r>
-              <a:rPr sz="1600" b="0">
-                <a:solidFill>
-                  <a:srgbClr val="1C1C1C"/>
-                </a:solidFill>
-                <a:latin typeface="AppleGothic"/>
-                <a:ea typeface="AppleGothic"/>
-              </a:rPr>
-              <a:t>·  STATISTICAL_NOVELTY_EVIDENCE_KO.md</a:t>
-            </a:r>
-          </a:p>
-        </p:txBody>
-      </p:sp>
-      <p:sp>
-        <p:nvSpPr>
-          <p:cNvPr id="10" name="TextBox 9"/>
-          <p:cNvSpPr txBox="1"/>
-          <p:nvPr/>
-        </p:nvSpPr>
-        <p:spPr>
-          <a:xfrm>
-            <a:off x="762000" y="4476750"/>
-            <a:ext cx="10477500" cy="342900"/>
-          </a:xfrm>
-          <a:prstGeom prst="rect">
-            <a:avLst/>
-          </a:prstGeom>
-          <a:noFill/>
-        </p:spPr>
-        <p:txBody>
-          <a:bodyPr wrap="square">
-            <a:spAutoFit/>
-          </a:bodyPr>
-          <a:lstStyle/>
-          <a:p>
-            <a:pPr algn="l"/>
-            <a:r>
-              <a:rPr sz="1600" b="0">
-                <a:solidFill>
-                  <a:srgbClr val="1C1C1C"/>
-                </a:solidFill>
-                <a:latin typeface="AppleGothic"/>
-                <a:ea typeface="AppleGothic"/>
-              </a:rPr>
-              <a:t>·  APPLICABILITY_NOVELTY_LIMITS_KO.md</a:t>
-            </a:r>
-          </a:p>
-        </p:txBody>
-      </p:sp>
-      <p:cxnSp>
-        <p:nvCxnSpPr>
-          <p:cNvPr id="11" name="Connector 10"/>
-          <p:cNvCxnSpPr/>
-          <p:nvPr/>
-        </p:nvCxnSpPr>
-        <p:spPr>
-          <a:xfrm>
-            <a:off x="533400" y="6457950"/>
-            <a:ext cx="11125200" cy="0"/>
-          </a:xfrm>
-          <a:prstGeom prst="line">
-            <a:avLst/>
-          </a:prstGeom>
-          <a:ln w="9525">
-            <a:solidFill>
-              <a:srgbClr val="E6E6E6"/>
-            </a:solidFill>
-          </a:ln>
-        </p:spPr>
-        <p:style>
-          <a:lnRef idx="2">
-            <a:schemeClr val="accent1"/>
-          </a:lnRef>
-          <a:fillRef idx="0">
-            <a:schemeClr val="accent1"/>
-          </a:fillRef>
-          <a:effectRef idx="1">
-            <a:schemeClr val="accent1"/>
-          </a:effectRef>
-          <a:fontRef idx="minor">
-            <a:schemeClr val="tx1"/>
-          </a:fontRef>
-        </p:style>
-      </p:cxnSp>
-      <p:sp>
-        <p:nvSpPr>
-          <p:cNvPr id="12" name="TextBox 11"/>
-          <p:cNvSpPr txBox="1"/>
-          <p:nvPr/>
-        </p:nvSpPr>
-        <p:spPr>
-          <a:xfrm>
-            <a:off x="533400" y="6515100"/>
-            <a:ext cx="6667500" cy="133350"/>
-          </a:xfrm>
-          <a:prstGeom prst="rect">
-            <a:avLst/>
-          </a:prstGeom>
-          <a:noFill/>
-        </p:spPr>
-        <p:txBody>
-          <a:bodyPr wrap="square">
-            <a:spAutoFit/>
-          </a:bodyPr>
-          <a:lstStyle/>
-          <a:p>
-            <a:pPr algn="l"/>
-            <a:r>
-              <a:rPr sz="900" b="0">
-                <a:solidFill>
-                  <a:srgbClr val="6A6A6A"/>
-                </a:solidFill>
-                <a:latin typeface="AppleGothic"/>
-                <a:ea typeface="AppleGothic"/>
-              </a:rPr>
-              <a:t>SPS Lab  ·  Assumption-Aware Extrapolation</a:t>
-            </a:r>
-          </a:p>
-        </p:txBody>
-      </p:sp>
-      <p:sp>
-        <p:nvSpPr>
-          <p:cNvPr id="13" name="TextBox 12"/>
-          <p:cNvSpPr txBox="1"/>
-          <p:nvPr/>
-        </p:nvSpPr>
-        <p:spPr>
-          <a:xfrm>
-            <a:off x="10858500" y="6496050"/>
-            <a:ext cx="571500" cy="152400"/>
-          </a:xfrm>
-          <a:prstGeom prst="rect">
-            <a:avLst/>
-          </a:prstGeom>
-          <a:noFill/>
-        </p:spPr>
-        <p:txBody>
-          <a:bodyPr wrap="square">
-            <a:spAutoFit/>
-          </a:bodyPr>
-          <a:lstStyle/>
-          <a:p>
-            <a:pPr algn="r"/>
-            <a:r>
-              <a:rPr sz="1000" b="1">
-                <a:solidFill>
-                  <a:srgbClr val="6A6A6A"/>
-                </a:solidFill>
-                <a:latin typeface="AppleGothic"/>
-                <a:ea typeface="AppleGothic"/>
-              </a:rPr>
-              <a:t>27</a:t>
+              <a:t>2/12</a:t>
             </a:r>
           </a:p>
         </p:txBody>
@@ -9552,13 +4819,13 @@
         <p:spPr>
           <a:xfrm>
             <a:off x="0" y="0"/>
-            <a:ext cx="12192000" cy="28575"/>
+            <a:ext cx="12192000" cy="38100"/>
           </a:xfrm>
           <a:prstGeom prst="rect">
             <a:avLst/>
           </a:prstGeom>
           <a:solidFill>
-            <a:srgbClr val="0F5C5C"/>
+            <a:srgbClr val="0A5C5C"/>
           </a:solidFill>
           <a:ln>
             <a:noFill/>
@@ -9594,8 +4861,8 @@
         </p:nvSpPr>
         <p:spPr>
           <a:xfrm>
-            <a:off x="533400" y="266700"/>
-            <a:ext cx="10477500" cy="342900"/>
+            <a:off x="457200" y="209550"/>
+            <a:ext cx="11239500" cy="323850"/>
           </a:xfrm>
           <a:prstGeom prst="rect">
             <a:avLst/>
@@ -9612,12 +4879,12 @@
             <a:r>
               <a:rPr sz="2200" b="1">
                 <a:solidFill>
-                  <a:srgbClr val="1C1C1C"/>
+                  <a:srgbClr val="111111"/>
                 </a:solidFill>
                 <a:latin typeface="AppleGothic"/>
                 <a:ea typeface="AppleGothic"/>
               </a:rPr>
-              <a:t>지금 결론</a:t>
+              <a:t>문제</a:t>
             </a:r>
           </a:p>
         </p:txBody>
@@ -9630,8 +4897,8 @@
         </p:nvSpPr>
         <p:spPr>
           <a:xfrm>
-            <a:off x="533400" y="609600"/>
-            <a:ext cx="10477500" cy="209550"/>
+            <a:off x="457200" y="533400"/>
+            <a:ext cx="11239500" cy="190500"/>
           </a:xfrm>
           <a:prstGeom prst="rect">
             <a:avLst/>
@@ -9648,19 +4915,19 @@
             <a:r>
               <a:rPr sz="1200" b="0">
                 <a:solidFill>
-                  <a:srgbClr val="6A6A6A"/>
+                  <a:srgbClr val="555555"/>
                 </a:solidFill>
                 <a:latin typeface="AppleGothic"/>
                 <a:ea typeface="AppleGothic"/>
               </a:rPr>
-              <a:t>SAAR  ·  Sunwoda 0.934  ·  RWTH 0.842  ·  MICH 0.751</a:t>
+              <a:t>support 밖에서는 데이터가 아니라 가정이 방향을 정한다</a:t>
             </a:r>
           </a:p>
         </p:txBody>
       </p:sp>
       <p:pic>
         <p:nvPicPr>
-          <p:cNvPr id="6" name="Picture 5" descr="summary_executive.png"/>
+          <p:cNvPr id="6" name="Picture 5" descr="nn_vs_saar_curves.png"/>
           <p:cNvPicPr>
             <a:picLocks noChangeAspect="1"/>
           </p:cNvPicPr>
@@ -9674,8 +4941,8 @@
         </p:blipFill>
         <p:spPr>
           <a:xfrm>
-            <a:off x="381000" y="952500"/>
-            <a:ext cx="11430000" cy="4953000"/>
+            <a:off x="476250" y="857250"/>
+            <a:ext cx="11239500" cy="5143500"/>
           </a:xfrm>
           <a:prstGeom prst="rect">
             <a:avLst/>
@@ -9690,15 +4957,15 @@
         </p:nvCxnSpPr>
         <p:spPr>
           <a:xfrm>
-            <a:off x="533400" y="6457950"/>
-            <a:ext cx="11125200" cy="0"/>
+            <a:off x="457200" y="6477000"/>
+            <a:ext cx="11277600" cy="0"/>
           </a:xfrm>
           <a:prstGeom prst="line">
             <a:avLst/>
           </a:prstGeom>
           <a:ln w="9525">
             <a:solidFill>
-              <a:srgbClr val="E6E6E6"/>
+              <a:srgbClr val="D0D0D0"/>
             </a:solidFill>
           </a:ln>
         </p:spPr>
@@ -9725,8 +4992,8 @@
         </p:nvSpPr>
         <p:spPr>
           <a:xfrm>
-            <a:off x="533400" y="6515100"/>
-            <a:ext cx="6667500" cy="133350"/>
+            <a:off x="457200" y="6534150"/>
+            <a:ext cx="7620000" cy="133350"/>
           </a:xfrm>
           <a:prstGeom prst="rect">
             <a:avLst/>
@@ -9743,12 +5010,12 @@
             <a:r>
               <a:rPr sz="900" b="0">
                 <a:solidFill>
-                  <a:srgbClr val="6A6A6A"/>
+                  <a:srgbClr val="555555"/>
                 </a:solidFill>
                 <a:latin typeface="AppleGothic"/>
                 <a:ea typeface="AppleGothic"/>
               </a:rPr>
-              <a:t>SPS Lab  ·  Assumption-Aware Extrapolation</a:t>
+              <a:t>SPS Lab  ·  Assumption-Aware Extrapolation  ·  SAAR</a:t>
             </a:r>
           </a:p>
         </p:txBody>
@@ -9761,8 +5028,8 @@
         </p:nvSpPr>
         <p:spPr>
           <a:xfrm>
-            <a:off x="10858500" y="6496050"/>
-            <a:ext cx="571500" cy="152400"/>
+            <a:off x="10477500" y="6515100"/>
+            <a:ext cx="952500" cy="152400"/>
           </a:xfrm>
           <a:prstGeom prst="rect">
             <a:avLst/>
@@ -9779,12 +5046,12 @@
             <a:r>
               <a:rPr sz="1000" b="1">
                 <a:solidFill>
-                  <a:srgbClr val="6A6A6A"/>
+                  <a:srgbClr val="555555"/>
                 </a:solidFill>
                 <a:latin typeface="AppleGothic"/>
                 <a:ea typeface="AppleGothic"/>
               </a:rPr>
-              <a:t>03</a:t>
+              <a:t>3/12</a:t>
             </a:r>
           </a:p>
         </p:txBody>
@@ -9859,13 +5126,13 @@
         <p:spPr>
           <a:xfrm>
             <a:off x="0" y="0"/>
-            <a:ext cx="12192000" cy="28575"/>
+            <a:ext cx="12192000" cy="38100"/>
           </a:xfrm>
           <a:prstGeom prst="rect">
             <a:avLst/>
           </a:prstGeom>
           <a:solidFill>
-            <a:srgbClr val="0F5C5C"/>
+            <a:srgbClr val="0A5C5C"/>
           </a:solidFill>
           <a:ln>
             <a:noFill/>
@@ -9901,8 +5168,8 @@
         </p:nvSpPr>
         <p:spPr>
           <a:xfrm>
-            <a:off x="533400" y="266700"/>
-            <a:ext cx="10477500" cy="342900"/>
+            <a:off x="457200" y="209550"/>
+            <a:ext cx="11239500" cy="323850"/>
           </a:xfrm>
           <a:prstGeom prst="rect">
             <a:avLst/>
@@ -9919,12 +5186,12 @@
             <a:r>
               <a:rPr sz="2200" b="1">
                 <a:solidFill>
-                  <a:srgbClr val="1C1C1C"/>
+                  <a:srgbClr val="111111"/>
                 </a:solidFill>
                 <a:latin typeface="AppleGothic"/>
                 <a:ea typeface="AppleGothic"/>
               </a:rPr>
-              <a:t>왜 외삽이 어려운가</a:t>
+              <a:t>방법 — SAAR</a:t>
             </a:r>
           </a:p>
         </p:txBody>
@@ -9937,8 +5204,8 @@
         </p:nvSpPr>
         <p:spPr>
           <a:xfrm>
-            <a:off x="533400" y="609600"/>
-            <a:ext cx="10477500" cy="209550"/>
+            <a:off x="457200" y="533400"/>
+            <a:ext cx="11239500" cy="190500"/>
           </a:xfrm>
           <a:prstGeom prst="rect">
             <a:avLst/>
@@ -9955,19 +5222,19 @@
             <a:r>
               <a:rPr sz="1200" b="0">
                 <a:solidFill>
-                  <a:srgbClr val="6A6A6A"/>
+                  <a:srgbClr val="555555"/>
                 </a:solidFill>
                 <a:latin typeface="AppleGothic"/>
                 <a:ea typeface="AppleGothic"/>
               </a:rPr>
-              <a:t>support 안에서는 여러 함수가 맞고, 밖에서는 가정이 방향을 정한다</a:t>
+              <a:t>동결 affine + dual-scale residual  ·  equation-free</a:t>
             </a:r>
           </a:p>
         </p:txBody>
       </p:sp>
       <p:pic>
         <p:nvPicPr>
-          <p:cNvPr id="6" name="Picture 5" descr="motivation_futures.png"/>
+          <p:cNvPr id="6" name="Picture 5" descr="pp_equation_panel.png"/>
           <p:cNvPicPr>
             <a:picLocks noChangeAspect="1"/>
           </p:cNvPicPr>
@@ -9981,8 +5248,8 @@
         </p:blipFill>
         <p:spPr>
           <a:xfrm>
-            <a:off x="381000" y="952500"/>
-            <a:ext cx="11430000" cy="4762500"/>
+            <a:off x="381000" y="857250"/>
+            <a:ext cx="11430000" cy="4953000"/>
           </a:xfrm>
           <a:prstGeom prst="rect">
             <a:avLst/>
@@ -9997,15 +5264,15 @@
         </p:nvCxnSpPr>
         <p:spPr>
           <a:xfrm>
-            <a:off x="533400" y="6457950"/>
-            <a:ext cx="11125200" cy="0"/>
+            <a:off x="457200" y="6477000"/>
+            <a:ext cx="11277600" cy="0"/>
           </a:xfrm>
           <a:prstGeom prst="line">
             <a:avLst/>
           </a:prstGeom>
           <a:ln w="9525">
             <a:solidFill>
-              <a:srgbClr val="E6E6E6"/>
+              <a:srgbClr val="D0D0D0"/>
             </a:solidFill>
           </a:ln>
         </p:spPr>
@@ -10032,8 +5299,8 @@
         </p:nvSpPr>
         <p:spPr>
           <a:xfrm>
-            <a:off x="533400" y="6515100"/>
-            <a:ext cx="6667500" cy="133350"/>
+            <a:off x="457200" y="6534150"/>
+            <a:ext cx="7620000" cy="133350"/>
           </a:xfrm>
           <a:prstGeom prst="rect">
             <a:avLst/>
@@ -10050,12 +5317,12 @@
             <a:r>
               <a:rPr sz="900" b="0">
                 <a:solidFill>
-                  <a:srgbClr val="6A6A6A"/>
+                  <a:srgbClr val="555555"/>
                 </a:solidFill>
                 <a:latin typeface="AppleGothic"/>
                 <a:ea typeface="AppleGothic"/>
               </a:rPr>
-              <a:t>SPS Lab  ·  Assumption-Aware Extrapolation</a:t>
+              <a:t>SPS Lab  ·  Assumption-Aware Extrapolation  ·  SAAR</a:t>
             </a:r>
           </a:p>
         </p:txBody>
@@ -10068,8 +5335,8 @@
         </p:nvSpPr>
         <p:spPr>
           <a:xfrm>
-            <a:off x="10858500" y="6496050"/>
-            <a:ext cx="571500" cy="152400"/>
+            <a:off x="10477500" y="6515100"/>
+            <a:ext cx="952500" cy="152400"/>
           </a:xfrm>
           <a:prstGeom prst="rect">
             <a:avLst/>
@@ -10086,12 +5353,12 @@
             <a:r>
               <a:rPr sz="1000" b="1">
                 <a:solidFill>
-                  <a:srgbClr val="6A6A6A"/>
+                  <a:srgbClr val="555555"/>
                 </a:solidFill>
                 <a:latin typeface="AppleGothic"/>
                 <a:ea typeface="AppleGothic"/>
               </a:rPr>
-              <a:t>04</a:t>
+              <a:t>4/12</a:t>
             </a:r>
           </a:p>
         </p:txBody>
@@ -10166,13 +5433,13 @@
         <p:spPr>
           <a:xfrm>
             <a:off x="0" y="0"/>
-            <a:ext cx="12192000" cy="28575"/>
+            <a:ext cx="12192000" cy="38100"/>
           </a:xfrm>
           <a:prstGeom prst="rect">
             <a:avLst/>
           </a:prstGeom>
           <a:solidFill>
-            <a:srgbClr val="0F5C5C"/>
+            <a:srgbClr val="0A5C5C"/>
           </a:solidFill>
           <a:ln>
             <a:noFill/>
@@ -10208,8 +5475,8 @@
         </p:nvSpPr>
         <p:spPr>
           <a:xfrm>
-            <a:off x="533400" y="266700"/>
-            <a:ext cx="10477500" cy="342900"/>
+            <a:off x="457200" y="209550"/>
+            <a:ext cx="11239500" cy="323850"/>
           </a:xfrm>
           <a:prstGeom prst="rect">
             <a:avLst/>
@@ -10226,12 +5493,12 @@
             <a:r>
               <a:rPr sz="2200" b="1">
                 <a:solidFill>
-                  <a:srgbClr val="1C1C1C"/>
+                  <a:srgbClr val="111111"/>
                 </a:solidFill>
                 <a:latin typeface="AppleGothic"/>
                 <a:ea typeface="AppleGothic"/>
               </a:rPr>
-              <a:t>핵심: NN은 밖으로 튀고, SAAR는 추세를 지킨다</a:t>
+              <a:t>지금 결론</a:t>
             </a:r>
           </a:p>
         </p:txBody>
@@ -10244,8 +5511,8 @@
         </p:nvSpPr>
         <p:spPr>
           <a:xfrm>
-            <a:off x="533400" y="609600"/>
-            <a:ext cx="10477500" cy="209550"/>
+            <a:off x="457200" y="533400"/>
+            <a:ext cx="11239500" cy="190500"/>
           </a:xfrm>
           <a:prstGeom prst="rect">
             <a:avLst/>
@@ -10262,19 +5529,19 @@
             <a:r>
               <a:rPr sz="1200" b="0">
                 <a:solidFill>
-                  <a:srgbClr val="6A6A6A"/>
+                  <a:srgbClr val="555555"/>
                 </a:solidFill>
                 <a:latin typeface="AppleGothic"/>
                 <a:ea typeface="AppleGothic"/>
               </a:rPr>
-              <a:t>동결 affine + 제한 residual</a:t>
+              <a:t>개발 3배터리 주표</a:t>
             </a:r>
           </a:p>
         </p:txBody>
       </p:sp>
       <p:pic>
         <p:nvPicPr>
-          <p:cNvPr id="6" name="Picture 5" descr="nn_vs_saar_curves.png"/>
+          <p:cNvPr id="6" name="Picture 5" descr="summary_executive.png"/>
           <p:cNvPicPr>
             <a:picLocks noChangeAspect="1"/>
           </p:cNvPicPr>
@@ -10288,8 +5555,8 @@
         </p:blipFill>
         <p:spPr>
           <a:xfrm>
-            <a:off x="762000" y="952500"/>
-            <a:ext cx="10668000" cy="4953000"/>
+            <a:off x="381000" y="952500"/>
+            <a:ext cx="11430000" cy="4762500"/>
           </a:xfrm>
           <a:prstGeom prst="rect">
             <a:avLst/>
@@ -10304,15 +5571,15 @@
         </p:nvCxnSpPr>
         <p:spPr>
           <a:xfrm>
-            <a:off x="533400" y="6457950"/>
-            <a:ext cx="11125200" cy="0"/>
+            <a:off x="457200" y="6477000"/>
+            <a:ext cx="11277600" cy="0"/>
           </a:xfrm>
           <a:prstGeom prst="line">
             <a:avLst/>
           </a:prstGeom>
           <a:ln w="9525">
             <a:solidFill>
-              <a:srgbClr val="E6E6E6"/>
+              <a:srgbClr val="D0D0D0"/>
             </a:solidFill>
           </a:ln>
         </p:spPr>
@@ -10339,8 +5606,8 @@
         </p:nvSpPr>
         <p:spPr>
           <a:xfrm>
-            <a:off x="533400" y="6515100"/>
-            <a:ext cx="6667500" cy="133350"/>
+            <a:off x="457200" y="6534150"/>
+            <a:ext cx="7620000" cy="133350"/>
           </a:xfrm>
           <a:prstGeom prst="rect">
             <a:avLst/>
@@ -10357,12 +5624,12 @@
             <a:r>
               <a:rPr sz="900" b="0">
                 <a:solidFill>
-                  <a:srgbClr val="6A6A6A"/>
+                  <a:srgbClr val="555555"/>
                 </a:solidFill>
                 <a:latin typeface="AppleGothic"/>
                 <a:ea typeface="AppleGothic"/>
               </a:rPr>
-              <a:t>SPS Lab  ·  Assumption-Aware Extrapolation</a:t>
+              <a:t>SPS Lab  ·  Assumption-Aware Extrapolation  ·  SAAR</a:t>
             </a:r>
           </a:p>
         </p:txBody>
@@ -10375,8 +5642,8 @@
         </p:nvSpPr>
         <p:spPr>
           <a:xfrm>
-            <a:off x="10858500" y="6496050"/>
-            <a:ext cx="571500" cy="152400"/>
+            <a:off x="10477500" y="6515100"/>
+            <a:ext cx="952500" cy="152400"/>
           </a:xfrm>
           <a:prstGeom prst="rect">
             <a:avLst/>
@@ -10393,12 +5660,12 @@
             <a:r>
               <a:rPr sz="1000" b="1">
                 <a:solidFill>
-                  <a:srgbClr val="6A6A6A"/>
+                  <a:srgbClr val="555555"/>
                 </a:solidFill>
                 <a:latin typeface="AppleGothic"/>
                 <a:ea typeface="AppleGothic"/>
               </a:rPr>
-              <a:t>05</a:t>
+              <a:t>5/12</a:t>
             </a:r>
           </a:p>
         </p:txBody>
@@ -10473,13 +5740,13 @@
         <p:spPr>
           <a:xfrm>
             <a:off x="0" y="0"/>
-            <a:ext cx="12192000" cy="28575"/>
+            <a:ext cx="12192000" cy="38100"/>
           </a:xfrm>
           <a:prstGeom prst="rect">
             <a:avLst/>
           </a:prstGeom>
           <a:solidFill>
-            <a:srgbClr val="0F5C5C"/>
+            <a:srgbClr val="0A5C5C"/>
           </a:solidFill>
           <a:ln>
             <a:noFill/>
@@ -10515,8 +5782,8 @@
         </p:nvSpPr>
         <p:spPr>
           <a:xfrm>
-            <a:off x="533400" y="266700"/>
-            <a:ext cx="10477500" cy="342900"/>
+            <a:off x="457200" y="209550"/>
+            <a:ext cx="11239500" cy="323850"/>
           </a:xfrm>
           <a:prstGeom prst="rect">
             <a:avLst/>
@@ -10533,12 +5800,12 @@
             <a:r>
               <a:rPr sz="2200" b="1">
                 <a:solidFill>
-                  <a:srgbClr val="1C1C1C"/>
+                  <a:srgbClr val="111111"/>
                 </a:solidFill>
                 <a:latin typeface="AppleGothic"/>
                 <a:ea typeface="AppleGothic"/>
               </a:rPr>
-              <a:t>연구 범위</a:t>
+              <a:t>주 결과</a:t>
             </a:r>
           </a:p>
         </p:txBody>
@@ -10551,8 +5818,8 @@
         </p:nvSpPr>
         <p:spPr>
           <a:xfrm>
-            <a:off x="533400" y="609600"/>
-            <a:ext cx="10477500" cy="209550"/>
+            <a:off x="457200" y="533400"/>
+            <a:ext cx="11239500" cy="190500"/>
           </a:xfrm>
           <a:prstGeom prst="rect">
             <a:avLst/>
@@ -10569,19 +5836,19 @@
             <a:r>
               <a:rPr sz="1200" b="0">
                 <a:solidFill>
-                  <a:srgbClr val="6A6A6A"/>
+                  <a:srgbClr val="555555"/>
                 </a:solidFill>
                 <a:latin typeface="AppleGothic"/>
                 <a:ea typeface="AppleGothic"/>
               </a:rPr>
-              <a:t>unit 분리 · hull-out RUL  ·  식 없는 구조 prior</a:t>
+              <a:t>같은 구조 · Sunwoda / RWTH / MICH</a:t>
             </a:r>
           </a:p>
         </p:txBody>
       </p:sp>
       <p:pic>
         <p:nvPicPr>
-          <p:cNvPr id="6" name="Picture 5" descr="scope_inout.png"/>
+          <p:cNvPr id="6" name="Picture 5" descr="results_panel.png"/>
           <p:cNvPicPr>
             <a:picLocks noChangeAspect="1"/>
           </p:cNvPicPr>
@@ -10595,8 +5862,8 @@
         </p:blipFill>
         <p:spPr>
           <a:xfrm>
-            <a:off x="571500" y="952500"/>
-            <a:ext cx="11049000" cy="4953000"/>
+            <a:off x="285750" y="809625"/>
+            <a:ext cx="11620500" cy="5238750"/>
           </a:xfrm>
           <a:prstGeom prst="rect">
             <a:avLst/>
@@ -10611,15 +5878,15 @@
         </p:nvCxnSpPr>
         <p:spPr>
           <a:xfrm>
-            <a:off x="533400" y="6457950"/>
-            <a:ext cx="11125200" cy="0"/>
+            <a:off x="457200" y="6477000"/>
+            <a:ext cx="11277600" cy="0"/>
           </a:xfrm>
           <a:prstGeom prst="line">
             <a:avLst/>
           </a:prstGeom>
           <a:ln w="9525">
             <a:solidFill>
-              <a:srgbClr val="E6E6E6"/>
+              <a:srgbClr val="D0D0D0"/>
             </a:solidFill>
           </a:ln>
         </p:spPr>
@@ -10646,8 +5913,8 @@
         </p:nvSpPr>
         <p:spPr>
           <a:xfrm>
-            <a:off x="533400" y="6515100"/>
-            <a:ext cx="6667500" cy="133350"/>
+            <a:off x="457200" y="6534150"/>
+            <a:ext cx="7620000" cy="133350"/>
           </a:xfrm>
           <a:prstGeom prst="rect">
             <a:avLst/>
@@ -10664,12 +5931,12 @@
             <a:r>
               <a:rPr sz="900" b="0">
                 <a:solidFill>
-                  <a:srgbClr val="6A6A6A"/>
+                  <a:srgbClr val="555555"/>
                 </a:solidFill>
                 <a:latin typeface="AppleGothic"/>
                 <a:ea typeface="AppleGothic"/>
               </a:rPr>
-              <a:t>SPS Lab  ·  Assumption-Aware Extrapolation</a:t>
+              <a:t>SPS Lab  ·  Assumption-Aware Extrapolation  ·  SAAR</a:t>
             </a:r>
           </a:p>
         </p:txBody>
@@ -10682,8 +5949,8 @@
         </p:nvSpPr>
         <p:spPr>
           <a:xfrm>
-            <a:off x="10858500" y="6496050"/>
-            <a:ext cx="571500" cy="152400"/>
+            <a:off x="10477500" y="6515100"/>
+            <a:ext cx="952500" cy="152400"/>
           </a:xfrm>
           <a:prstGeom prst="rect">
             <a:avLst/>
@@ -10700,12 +5967,12 @@
             <a:r>
               <a:rPr sz="1000" b="1">
                 <a:solidFill>
-                  <a:srgbClr val="6A6A6A"/>
+                  <a:srgbClr val="555555"/>
                 </a:solidFill>
                 <a:latin typeface="AppleGothic"/>
                 <a:ea typeface="AppleGothic"/>
               </a:rPr>
-              <a:t>06</a:t>
+              <a:t>6/12</a:t>
             </a:r>
           </a:p>
         </p:txBody>
@@ -10780,13 +6047,13 @@
         <p:spPr>
           <a:xfrm>
             <a:off x="0" y="0"/>
-            <a:ext cx="12192000" cy="28575"/>
+            <a:ext cx="12192000" cy="38100"/>
           </a:xfrm>
           <a:prstGeom prst="rect">
             <a:avLst/>
           </a:prstGeom>
           <a:solidFill>
-            <a:srgbClr val="0F5C5C"/>
+            <a:srgbClr val="0A5C5C"/>
           </a:solidFill>
           <a:ln>
             <a:noFill/>
@@ -10822,8 +6089,8 @@
         </p:nvSpPr>
         <p:spPr>
           <a:xfrm>
-            <a:off x="533400" y="266700"/>
-            <a:ext cx="10477500" cy="342900"/>
+            <a:off x="457200" y="209550"/>
+            <a:ext cx="11239500" cy="323850"/>
           </a:xfrm>
           <a:prstGeom prst="rect">
             <a:avLst/>
@@ -10840,12 +6107,12 @@
             <a:r>
               <a:rPr sz="2200" b="1">
                 <a:solidFill>
-                  <a:srgbClr val="1C1C1C"/>
+                  <a:srgbClr val="111111"/>
                 </a:solidFill>
                 <a:latin typeface="AppleGothic"/>
                 <a:ea typeface="AppleGothic"/>
               </a:rPr>
-              <a:t>지금 / 다음 / 통합</a:t>
+              <a:t>Ablation</a:t>
             </a:r>
           </a:p>
         </p:txBody>
@@ -10858,8 +6125,8 @@
         </p:nvSpPr>
         <p:spPr>
           <a:xfrm>
-            <a:off x="533400" y="609600"/>
-            <a:ext cx="10477500" cy="209550"/>
+            <a:off x="457200" y="533400"/>
+            <a:ext cx="11239500" cy="190500"/>
           </a:xfrm>
           <a:prstGeom prst="rect">
             <a:avLst/>
@@ -10876,19 +6143,19 @@
             <a:r>
               <a:rPr sz="1200" b="0">
                 <a:solidFill>
-                  <a:srgbClr val="6A6A6A"/>
+                  <a:srgbClr val="555555"/>
                 </a:solidFill>
                 <a:latin typeface="AppleGothic"/>
                 <a:ea typeface="AppleGothic"/>
               </a:rPr>
-              <a:t>지금은 SAAR(PP). PAE와 Assurance는 이어질 경로.</a:t>
+              <a:t>고정 경계 → SAAR 이동  ·  평균–최저 tradeoff</a:t>
             </a:r>
           </a:p>
         </p:txBody>
       </p:sp>
       <p:pic>
         <p:nvPicPr>
-          <p:cNvPr id="6" name="Picture 5" descr="roadmap_line.png"/>
+          <p:cNvPr id="6" name="Picture 5" descr="ablation_panel.png"/>
           <p:cNvPicPr>
             <a:picLocks noChangeAspect="1"/>
           </p:cNvPicPr>
@@ -10902,8 +6169,8 @@
         </p:blipFill>
         <p:spPr>
           <a:xfrm>
-            <a:off x="381000" y="1524000"/>
-            <a:ext cx="11430000" cy="3810000"/>
+            <a:off x="285750" y="809625"/>
+            <a:ext cx="11620500" cy="5238750"/>
           </a:xfrm>
           <a:prstGeom prst="rect">
             <a:avLst/>
@@ -10918,15 +6185,15 @@
         </p:nvCxnSpPr>
         <p:spPr>
           <a:xfrm>
-            <a:off x="533400" y="6457950"/>
-            <a:ext cx="11125200" cy="0"/>
+            <a:off x="457200" y="6477000"/>
+            <a:ext cx="11277600" cy="0"/>
           </a:xfrm>
           <a:prstGeom prst="line">
             <a:avLst/>
           </a:prstGeom>
           <a:ln w="9525">
             <a:solidFill>
-              <a:srgbClr val="E6E6E6"/>
+              <a:srgbClr val="D0D0D0"/>
             </a:solidFill>
           </a:ln>
         </p:spPr>
@@ -10953,8 +6220,8 @@
         </p:nvSpPr>
         <p:spPr>
           <a:xfrm>
-            <a:off x="533400" y="6515100"/>
-            <a:ext cx="6667500" cy="133350"/>
+            <a:off x="457200" y="6534150"/>
+            <a:ext cx="7620000" cy="133350"/>
           </a:xfrm>
           <a:prstGeom prst="rect">
             <a:avLst/>
@@ -10971,12 +6238,12 @@
             <a:r>
               <a:rPr sz="900" b="0">
                 <a:solidFill>
-                  <a:srgbClr val="6A6A6A"/>
+                  <a:srgbClr val="555555"/>
                 </a:solidFill>
                 <a:latin typeface="AppleGothic"/>
                 <a:ea typeface="AppleGothic"/>
               </a:rPr>
-              <a:t>SPS Lab  ·  Assumption-Aware Extrapolation</a:t>
+              <a:t>SPS Lab  ·  Assumption-Aware Extrapolation  ·  SAAR</a:t>
             </a:r>
           </a:p>
         </p:txBody>
@@ -10989,8 +6256,8 @@
         </p:nvSpPr>
         <p:spPr>
           <a:xfrm>
-            <a:off x="10858500" y="6496050"/>
-            <a:ext cx="571500" cy="152400"/>
+            <a:off x="10477500" y="6515100"/>
+            <a:ext cx="952500" cy="152400"/>
           </a:xfrm>
           <a:prstGeom prst="rect">
             <a:avLst/>
@@ -11007,12 +6274,12 @@
             <a:r>
               <a:rPr sz="1000" b="1">
                 <a:solidFill>
-                  <a:srgbClr val="6A6A6A"/>
+                  <a:srgbClr val="555555"/>
                 </a:solidFill>
                 <a:latin typeface="AppleGothic"/>
                 <a:ea typeface="AppleGothic"/>
               </a:rPr>
-              <a:t>07</a:t>
+              <a:t>7/12</a:t>
             </a:r>
           </a:p>
         </p:txBody>
@@ -11087,13 +6354,13 @@
         <p:spPr>
           <a:xfrm>
             <a:off x="0" y="0"/>
-            <a:ext cx="12192000" cy="28575"/>
+            <a:ext cx="12192000" cy="38100"/>
           </a:xfrm>
           <a:prstGeom prst="rect">
             <a:avLst/>
           </a:prstGeom>
           <a:solidFill>
-            <a:srgbClr val="0F5C5C"/>
+            <a:srgbClr val="0A5C5C"/>
           </a:solidFill>
           <a:ln>
             <a:noFill/>
@@ -11129,8 +6396,8 @@
         </p:nvSpPr>
         <p:spPr>
           <a:xfrm>
-            <a:off x="533400" y="266700"/>
-            <a:ext cx="10477500" cy="342900"/>
+            <a:off x="457200" y="209550"/>
+            <a:ext cx="11239500" cy="323850"/>
           </a:xfrm>
           <a:prstGeom prst="rect">
             <a:avLst/>
@@ -11147,12 +6414,12 @@
             <a:r>
               <a:rPr sz="2200" b="1">
                 <a:solidFill>
-                  <a:srgbClr val="1C1C1C"/>
+                  <a:srgbClr val="111111"/>
                 </a:solidFill>
                 <a:latin typeface="AppleGothic"/>
                 <a:ea typeface="AppleGothic"/>
               </a:rPr>
-              <a:t>SAAR 식</a:t>
+              <a:t>비교</a:t>
             </a:r>
           </a:p>
         </p:txBody>
@@ -11165,8 +6432,8 @@
         </p:nvSpPr>
         <p:spPr>
           <a:xfrm>
-            <a:off x="533400" y="609600"/>
-            <a:ext cx="10477500" cy="209550"/>
+            <a:off x="457200" y="533400"/>
+            <a:ext cx="11239500" cy="190500"/>
           </a:xfrm>
           <a:prstGeom prst="rect">
             <a:avLst/>
@@ -11183,19 +6450,19 @@
             <a:r>
               <a:rPr sz="1200" b="0">
                 <a:solidFill>
-                  <a:srgbClr val="6A6A6A"/>
+                  <a:srgbClr val="555555"/>
                 </a:solidFill>
                 <a:latin typeface="AppleGothic"/>
                 <a:ea typeface="AppleGothic"/>
               </a:rPr>
-              <a:t>ŷ = m · softplus(ℓ + cθ)  ·  dual-scale residual</a:t>
+              <a:t>양의 8곳 × 알고리즘 $R^2$</a:t>
             </a:r>
           </a:p>
         </p:txBody>
       </p:sp>
       <p:pic>
         <p:nvPicPr>
-          <p:cNvPr id="6" name="Picture 5" descr="pp_equation_panel.png"/>
+          <p:cNvPr id="6" name="Picture 5" descr="competitor_bars.png"/>
           <p:cNvPicPr>
             <a:picLocks noChangeAspect="1"/>
           </p:cNvPicPr>
@@ -11209,8 +6476,8 @@
         </p:blipFill>
         <p:spPr>
           <a:xfrm>
-            <a:off x="381000" y="952500"/>
-            <a:ext cx="11430000" cy="4762500"/>
+            <a:off x="285750" y="762000"/>
+            <a:ext cx="11620500" cy="5334000"/>
           </a:xfrm>
           <a:prstGeom prst="rect">
             <a:avLst/>
@@ -11225,15 +6492,15 @@
         </p:nvCxnSpPr>
         <p:spPr>
           <a:xfrm>
-            <a:off x="533400" y="6457950"/>
-            <a:ext cx="11125200" cy="0"/>
+            <a:off x="457200" y="6477000"/>
+            <a:ext cx="11277600" cy="0"/>
           </a:xfrm>
           <a:prstGeom prst="line">
             <a:avLst/>
           </a:prstGeom>
           <a:ln w="9525">
             <a:solidFill>
-              <a:srgbClr val="E6E6E6"/>
+              <a:srgbClr val="D0D0D0"/>
             </a:solidFill>
           </a:ln>
         </p:spPr>
@@ -11260,8 +6527,8 @@
         </p:nvSpPr>
         <p:spPr>
           <a:xfrm>
-            <a:off x="533400" y="6515100"/>
-            <a:ext cx="6667500" cy="133350"/>
+            <a:off x="457200" y="6534150"/>
+            <a:ext cx="7620000" cy="133350"/>
           </a:xfrm>
           <a:prstGeom prst="rect">
             <a:avLst/>
@@ -11278,12 +6545,12 @@
             <a:r>
               <a:rPr sz="900" b="0">
                 <a:solidFill>
-                  <a:srgbClr val="6A6A6A"/>
+                  <a:srgbClr val="555555"/>
                 </a:solidFill>
                 <a:latin typeface="AppleGothic"/>
                 <a:ea typeface="AppleGothic"/>
               </a:rPr>
-              <a:t>SPS Lab  ·  Assumption-Aware Extrapolation</a:t>
+              <a:t>SPS Lab  ·  Assumption-Aware Extrapolation  ·  SAAR</a:t>
             </a:r>
           </a:p>
         </p:txBody>
@@ -11296,8 +6563,8 @@
         </p:nvSpPr>
         <p:spPr>
           <a:xfrm>
-            <a:off x="10858500" y="6496050"/>
-            <a:ext cx="571500" cy="152400"/>
+            <a:off x="10477500" y="6515100"/>
+            <a:ext cx="952500" cy="152400"/>
           </a:xfrm>
           <a:prstGeom prst="rect">
             <a:avLst/>
@@ -11314,12 +6581,12 @@
             <a:r>
               <a:rPr sz="1000" b="1">
                 <a:solidFill>
-                  <a:srgbClr val="6A6A6A"/>
+                  <a:srgbClr val="555555"/>
                 </a:solidFill>
                 <a:latin typeface="AppleGothic"/>
                 <a:ea typeface="AppleGothic"/>
               </a:rPr>
-              <a:t>08</a:t>
+              <a:t>8/12</a:t>
             </a:r>
           </a:p>
         </p:txBody>
@@ -11394,13 +6661,13 @@
         <p:spPr>
           <a:xfrm>
             <a:off x="0" y="0"/>
-            <a:ext cx="12192000" cy="28575"/>
+            <a:ext cx="12192000" cy="38100"/>
           </a:xfrm>
           <a:prstGeom prst="rect">
             <a:avLst/>
           </a:prstGeom>
           <a:solidFill>
-            <a:srgbClr val="0F5C5C"/>
+            <a:srgbClr val="0A5C5C"/>
           </a:solidFill>
           <a:ln>
             <a:noFill/>
@@ -11436,8 +6703,8 @@
         </p:nvSpPr>
         <p:spPr>
           <a:xfrm>
-            <a:off x="533400" y="266700"/>
-            <a:ext cx="10477500" cy="342900"/>
+            <a:off x="457200" y="209550"/>
+            <a:ext cx="11239500" cy="323850"/>
           </a:xfrm>
           <a:prstGeom prst="rect">
             <a:avLst/>
@@ -11454,12 +6721,12 @@
             <a:r>
               <a:rPr sz="2200" b="1">
                 <a:solidFill>
-                  <a:srgbClr val="1C1C1C"/>
+                  <a:srgbClr val="111111"/>
                 </a:solidFill>
                 <a:latin typeface="AppleGothic"/>
                 <a:ea typeface="AppleGothic"/>
               </a:rPr>
-              <a:t>구조</a:t>
+              <a:t>SAAR vs TabPFN</a:t>
             </a:r>
           </a:p>
         </p:txBody>
@@ -11472,8 +6739,8 @@
         </p:nvSpPr>
         <p:spPr>
           <a:xfrm>
-            <a:off x="533400" y="609600"/>
-            <a:ext cx="10477500" cy="209550"/>
+            <a:off x="457200" y="533400"/>
+            <a:ext cx="11239500" cy="190500"/>
           </a:xfrm>
           <a:prstGeom prst="rect">
             <a:avLst/>
@@ -11490,19 +6757,19 @@
             <a:r>
               <a:rPr sz="1200" b="0">
                 <a:solidFill>
-                  <a:srgbClr val="6A6A6A"/>
+                  <a:srgbClr val="555555"/>
                 </a:solidFill>
                 <a:latin typeface="AppleGothic"/>
                 <a:ea typeface="AppleGothic"/>
               </a:rPr>
-              <a:t>Frozen Affine  ·  Dual-Scale Residual  ·  Support Gate</a:t>
+              <a:t>표 수치 기반 막대 비교</a:t>
             </a:r>
           </a:p>
         </p:txBody>
       </p:sp>
       <p:pic>
         <p:nvPicPr>
-          <p:cNvPr id="6" name="Picture 5" descr="pp_architecture.png"/>
+          <p:cNvPr id="6" name="Picture 5" descr="pp_vs_tabpfn.png"/>
           <p:cNvPicPr>
             <a:picLocks noChangeAspect="1"/>
           </p:cNvPicPr>
@@ -11516,32 +6783,8 @@
         </p:blipFill>
         <p:spPr>
           <a:xfrm>
-            <a:off x="381000" y="904875"/>
-            <a:ext cx="5905500" cy="4762500"/>
-          </a:xfrm>
-          <a:prstGeom prst="rect">
-            <a:avLst/>
-          </a:prstGeom>
-        </p:spPr>
-      </p:pic>
-      <p:pic>
-        <p:nvPicPr>
-          <p:cNvPr id="7" name="Picture 6" descr="support_adaptive.png"/>
-          <p:cNvPicPr>
-            <a:picLocks noChangeAspect="1"/>
-          </p:cNvPicPr>
-          <p:nvPr/>
-        </p:nvPicPr>
-        <p:blipFill>
-          <a:blip r:embed="rId3"/>
-          <a:stretch>
-            <a:fillRect/>
-          </a:stretch>
-        </p:blipFill>
-        <p:spPr>
-          <a:xfrm>
-            <a:off x="6477000" y="1143000"/>
-            <a:ext cx="5143500" cy="4286250"/>
+            <a:off x="381000" y="857250"/>
+            <a:ext cx="11430000" cy="5143500"/>
           </a:xfrm>
           <a:prstGeom prst="rect">
             <a:avLst/>
@@ -11550,21 +6793,21 @@
       </p:pic>
       <p:cxnSp>
         <p:nvCxnSpPr>
-          <p:cNvPr id="8" name="Connector 7"/>
+          <p:cNvPr id="7" name="Connector 6"/>
           <p:cNvCxnSpPr/>
           <p:nvPr/>
         </p:nvCxnSpPr>
         <p:spPr>
           <a:xfrm>
-            <a:off x="533400" y="6457950"/>
-            <a:ext cx="11125200" cy="0"/>
+            <a:off x="457200" y="6477000"/>
+            <a:ext cx="11277600" cy="0"/>
           </a:xfrm>
           <a:prstGeom prst="line">
             <a:avLst/>
           </a:prstGeom>
           <a:ln w="9525">
             <a:solidFill>
-              <a:srgbClr val="E6E6E6"/>
+              <a:srgbClr val="D0D0D0"/>
             </a:solidFill>
           </a:ln>
         </p:spPr>
@@ -11585,14 +6828,14 @@
       </p:cxnSp>
       <p:sp>
         <p:nvSpPr>
-          <p:cNvPr id="9" name="TextBox 8"/>
+          <p:cNvPr id="8" name="TextBox 7"/>
           <p:cNvSpPr txBox="1"/>
           <p:nvPr/>
         </p:nvSpPr>
         <p:spPr>
           <a:xfrm>
-            <a:off x="533400" y="6515100"/>
-            <a:ext cx="6667500" cy="133350"/>
+            <a:off x="457200" y="6534150"/>
+            <a:ext cx="7620000" cy="133350"/>
           </a:xfrm>
           <a:prstGeom prst="rect">
             <a:avLst/>
@@ -11609,26 +6852,26 @@
             <a:r>
               <a:rPr sz="900" b="0">
                 <a:solidFill>
-                  <a:srgbClr val="6A6A6A"/>
+                  <a:srgbClr val="555555"/>
                 </a:solidFill>
                 <a:latin typeface="AppleGothic"/>
                 <a:ea typeface="AppleGothic"/>
               </a:rPr>
-              <a:t>SPS Lab  ·  Assumption-Aware Extrapolation</a:t>
-            </a:r>
-          </a:p>
-        </p:txBody>
-      </p:sp>
-      <p:sp>
-        <p:nvSpPr>
-          <p:cNvPr id="10" name="TextBox 9"/>
+              <a:t>SPS Lab  ·  Assumption-Aware Extrapolation  ·  SAAR</a:t>
+            </a:r>
+          </a:p>
+        </p:txBody>
+      </p:sp>
+      <p:sp>
+        <p:nvSpPr>
+          <p:cNvPr id="9" name="TextBox 8"/>
           <p:cNvSpPr txBox="1"/>
           <p:nvPr/>
         </p:nvSpPr>
         <p:spPr>
           <a:xfrm>
-            <a:off x="10858500" y="6496050"/>
-            <a:ext cx="571500" cy="152400"/>
+            <a:off x="10477500" y="6515100"/>
+            <a:ext cx="952500" cy="152400"/>
           </a:xfrm>
           <a:prstGeom prst="rect">
             <a:avLst/>
@@ -11645,12 +6888,12 @@
             <a:r>
               <a:rPr sz="1000" b="1">
                 <a:solidFill>
-                  <a:srgbClr val="6A6A6A"/>
+                  <a:srgbClr val="555555"/>
                 </a:solidFill>
                 <a:latin typeface="AppleGothic"/>
                 <a:ea typeface="AppleGothic"/>
               </a:rPr>
-              <a:t>09</a:t>
+              <a:t>9/12</a:t>
             </a:r>
           </a:p>
         </p:txBody>

--- a/output/PP_Research_Detailed_v2.pptx
+++ b/output/PP_Research_Detailed_v2.pptx
@@ -16,7 +16,6 @@
     <p:sldId id="264" r:id="rId15"/>
     <p:sldId id="265" r:id="rId16"/>
     <p:sldId id="266" r:id="rId17"/>
-    <p:sldId id="267" r:id="rId18"/>
   </p:sldIdLst>
   <p:sldSz cx="12192000" cy="6858000" type="screen4x3"/>
   <p:notesSz cx="6858000" cy="9144000"/>
@@ -3524,7 +3523,7 @@
                 <a:latin typeface="AppleGothic"/>
                 <a:ea typeface="AppleGothic"/>
               </a:rPr>
-              <a:t>안정성</a:t>
+              <a:t>실패 · 경계</a:t>
             </a:r>
           </a:p>
         </p:txBody>
@@ -3560,14 +3559,14 @@
                 <a:latin typeface="AppleGothic"/>
                 <a:ea typeface="AppleGothic"/>
               </a:rPr>
-              <a:t>bootstrap CI  ·  MICH unit $R^2$</a:t>
+              <a:t>표로 남긴 한계  ·  주장 / 비주장</a:t>
             </a:r>
           </a:p>
         </p:txBody>
       </p:sp>
       <p:pic>
         <p:nvPicPr>
-          <p:cNvPr id="6" name="Picture 5" descr="robustness_panel.png"/>
+          <p:cNvPr id="6" name="Picture 5" descr="fail_cases.png"/>
           <p:cNvPicPr>
             <a:picLocks noChangeAspect="1"/>
           </p:cNvPicPr>
@@ -3581,8 +3580,32 @@
         </p:blipFill>
         <p:spPr>
           <a:xfrm>
-            <a:off x="285750" y="857250"/>
-            <a:ext cx="11620500" cy="5048250"/>
+            <a:off x="285750" y="809625"/>
+            <a:ext cx="5905500" cy="4953000"/>
+          </a:xfrm>
+          <a:prstGeom prst="rect">
+            <a:avLst/>
+          </a:prstGeom>
+        </p:spPr>
+      </p:pic>
+      <p:pic>
+        <p:nvPicPr>
+          <p:cNvPr id="7" name="Picture 6" descr="status_compact.png"/>
+          <p:cNvPicPr>
+            <a:picLocks noChangeAspect="1"/>
+          </p:cNvPicPr>
+          <p:nvPr/>
+        </p:nvPicPr>
+        <p:blipFill>
+          <a:blip r:embed="rId3"/>
+          <a:stretch>
+            <a:fillRect/>
+          </a:stretch>
+        </p:blipFill>
+        <p:spPr>
+          <a:xfrm>
+            <a:off x="6286500" y="809625"/>
+            <a:ext cx="5334000" cy="4953000"/>
           </a:xfrm>
           <a:prstGeom prst="rect">
             <a:avLst/>
@@ -3591,7 +3614,7 @@
       </p:pic>
       <p:cxnSp>
         <p:nvCxnSpPr>
-          <p:cNvPr id="7" name="Connector 6"/>
+          <p:cNvPr id="8" name="Connector 7"/>
           <p:cNvCxnSpPr/>
           <p:nvPr/>
         </p:nvCxnSpPr>
@@ -3626,7 +3649,7 @@
       </p:cxnSp>
       <p:sp>
         <p:nvSpPr>
-          <p:cNvPr id="8" name="TextBox 7"/>
+          <p:cNvPr id="9" name="TextBox 8"/>
           <p:cNvSpPr txBox="1"/>
           <p:nvPr/>
         </p:nvSpPr>
@@ -3662,7 +3685,7 @@
       </p:sp>
       <p:sp>
         <p:nvSpPr>
-          <p:cNvPr id="9" name="TextBox 8"/>
+          <p:cNvPr id="10" name="TextBox 9"/>
           <p:cNvSpPr txBox="1"/>
           <p:nvPr/>
         </p:nvSpPr>
@@ -3691,7 +3714,7 @@
                 <a:latin typeface="AppleGothic"/>
                 <a:ea typeface="AppleGothic"/>
               </a:rPr>
-              <a:t>10/12</a:t>
+              <a:t>10/11</a:t>
             </a:r>
           </a:p>
         </p:txBody>
@@ -3831,7 +3854,7 @@
                 <a:latin typeface="AppleGothic"/>
                 <a:ea typeface="AppleGothic"/>
               </a:rPr>
-              <a:t>실패 · 경계</a:t>
+              <a:t>경로와 한 줄</a:t>
             </a:r>
           </a:p>
         </p:txBody>
@@ -3867,14 +3890,14 @@
                 <a:latin typeface="AppleGothic"/>
                 <a:ea typeface="AppleGothic"/>
               </a:rPr>
-              <a:t>표로 남긴 한계  ·  주장 / 비주장</a:t>
+              <a:t>PAE / SAAR  ·  오늘 가져갈 말</a:t>
             </a:r>
           </a:p>
         </p:txBody>
       </p:sp>
       <p:pic>
         <p:nvPicPr>
-          <p:cNvPr id="6" name="Picture 5" descr="fail_cases.png"/>
+          <p:cNvPr id="6" name="Picture 5" descr="pp_vs_pae_split.png"/>
           <p:cNvPicPr>
             <a:picLocks noChangeAspect="1"/>
           </p:cNvPicPr>
@@ -3888,41 +3911,125 @@
         </p:blipFill>
         <p:spPr>
           <a:xfrm>
-            <a:off x="285750" y="809625"/>
-            <a:ext cx="5905500" cy="4953000"/>
+            <a:off x="381000" y="809625"/>
+            <a:ext cx="11430000" cy="3619500"/>
           </a:xfrm>
           <a:prstGeom prst="rect">
             <a:avLst/>
           </a:prstGeom>
         </p:spPr>
       </p:pic>
-      <p:pic>
-        <p:nvPicPr>
-          <p:cNvPr id="7" name="Picture 6" descr="status_compact.png"/>
-          <p:cNvPicPr>
-            <a:picLocks noChangeAspect="1"/>
-          </p:cNvPicPr>
-          <p:nvPr/>
-        </p:nvPicPr>
-        <p:blipFill>
-          <a:blip r:embed="rId3"/>
-          <a:stretch>
-            <a:fillRect/>
-          </a:stretch>
-        </p:blipFill>
-        <p:spPr>
-          <a:xfrm>
-            <a:off x="6286500" y="809625"/>
-            <a:ext cx="5334000" cy="4953000"/>
-          </a:xfrm>
-          <a:prstGeom prst="rect">
-            <a:avLst/>
-          </a:prstGeom>
-        </p:spPr>
-      </p:pic>
+      <p:sp>
+        <p:nvSpPr>
+          <p:cNvPr id="7" name="TextBox 6"/>
+          <p:cNvSpPr txBox="1"/>
+          <p:nvPr/>
+        </p:nvSpPr>
+        <p:spPr>
+          <a:xfrm>
+            <a:off x="533400" y="4667250"/>
+            <a:ext cx="11049000" cy="266700"/>
+          </a:xfrm>
+          <a:prstGeom prst="rect">
+            <a:avLst/>
+          </a:prstGeom>
+          <a:noFill/>
+        </p:spPr>
+        <p:txBody>
+          <a:bodyPr wrap="square">
+            <a:spAutoFit/>
+          </a:bodyPr>
+          <a:lstStyle/>
+          <a:p>
+            <a:pPr algn="l"/>
+            <a:r>
+              <a:rPr sz="1400" b="0">
+                <a:solidFill>
+                  <a:srgbClr val="111111"/>
+                </a:solidFill>
+                <a:latin typeface="AppleGothic"/>
+                <a:ea typeface="AppleGothic"/>
+              </a:rPr>
+              <a:t>1  밖을 지탱하는 것은 가정이지만, 식만 넣으면 답이 아니다.</a:t>
+            </a:r>
+          </a:p>
+        </p:txBody>
+      </p:sp>
+      <p:sp>
+        <p:nvSpPr>
+          <p:cNvPr id="8" name="TextBox 7"/>
+          <p:cNvSpPr txBox="1"/>
+          <p:nvPr/>
+        </p:nvSpPr>
+        <p:spPr>
+          <a:xfrm>
+            <a:off x="533400" y="5048250"/>
+            <a:ext cx="11049000" cy="266700"/>
+          </a:xfrm>
+          <a:prstGeom prst="rect">
+            <a:avLst/>
+          </a:prstGeom>
+          <a:noFill/>
+        </p:spPr>
+        <p:txBody>
+          <a:bodyPr wrap="square">
+            <a:spAutoFit/>
+          </a:bodyPr>
+          <a:lstStyle/>
+          <a:p>
+            <a:pPr algn="l"/>
+            <a:r>
+              <a:rPr sz="1400" b="0">
+                <a:solidFill>
+                  <a:srgbClr val="111111"/>
+                </a:solidFill>
+                <a:latin typeface="AppleGothic"/>
+                <a:ea typeface="AppleGothic"/>
+              </a:rPr>
+              <a:t>2  식이 없으면 SAAR — 동결 affine + 제한 residual.  주표 0.934 / 0.842 / 0.751.</a:t>
+            </a:r>
+          </a:p>
+        </p:txBody>
+      </p:sp>
+      <p:sp>
+        <p:nvSpPr>
+          <p:cNvPr id="9" name="TextBox 8"/>
+          <p:cNvSpPr txBox="1"/>
+          <p:nvPr/>
+        </p:nvSpPr>
+        <p:spPr>
+          <a:xfrm>
+            <a:off x="533400" y="5429250"/>
+            <a:ext cx="11049000" cy="266700"/>
+          </a:xfrm>
+          <a:prstGeom prst="rect">
+            <a:avLst/>
+          </a:prstGeom>
+          <a:noFill/>
+        </p:spPr>
+        <p:txBody>
+          <a:bodyPr wrap="square">
+            <a:spAutoFit/>
+          </a:bodyPr>
+          <a:lstStyle/>
+          <a:p>
+            <a:pPr algn="l"/>
+            <a:r>
+              <a:rPr sz="1400" b="0">
+                <a:solidFill>
+                  <a:srgbClr val="111111"/>
+                </a:solidFill>
+                <a:latin typeface="AppleGothic"/>
+                <a:ea typeface="AppleGothic"/>
+              </a:rPr>
+              <a:t>3  실패·Zn·PAE는 한계/후속. 만능 SOTA를 주장하지 않는다.</a:t>
+            </a:r>
+          </a:p>
+        </p:txBody>
+      </p:sp>
       <p:cxnSp>
         <p:nvCxnSpPr>
-          <p:cNvPr id="8" name="Connector 7"/>
+          <p:cNvPr id="10" name="Connector 9"/>
           <p:cNvCxnSpPr/>
           <p:nvPr/>
         </p:nvCxnSpPr>
@@ -3957,7 +4064,7 @@
       </p:cxnSp>
       <p:sp>
         <p:nvSpPr>
-          <p:cNvPr id="9" name="TextBox 8"/>
+          <p:cNvPr id="11" name="TextBox 10"/>
           <p:cNvSpPr txBox="1"/>
           <p:nvPr/>
         </p:nvSpPr>
@@ -3993,7 +4100,7 @@
       </p:sp>
       <p:sp>
         <p:nvSpPr>
-          <p:cNvPr id="10" name="TextBox 9"/>
+          <p:cNvPr id="12" name="TextBox 11"/>
           <p:cNvSpPr txBox="1"/>
           <p:nvPr/>
         </p:nvSpPr>
@@ -4022,422 +4129,7 @@
                 <a:latin typeface="AppleGothic"/>
                 <a:ea typeface="AppleGothic"/>
               </a:rPr>
-              <a:t>11/12</a:t>
-            </a:r>
-          </a:p>
-        </p:txBody>
-      </p:sp>
-    </p:spTree>
-  </p:cSld>
-  <p:clrMapOvr>
-    <a:masterClrMapping/>
-  </p:clrMapOvr>
-</p:sld>
-</file>
-
-<file path=ppt/slides/slide12.xml><?xml version="1.0" encoding="utf-8"?>
-<p:sld xmlns:a="http://schemas.openxmlformats.org/drawingml/2006/main" xmlns:p="http://schemas.openxmlformats.org/presentationml/2006/main" xmlns:r="http://schemas.openxmlformats.org/officeDocument/2006/relationships">
-  <p:cSld>
-    <p:spTree>
-      <p:nvGrpSpPr>
-        <p:cNvPr id="1" name=""/>
-        <p:cNvGrpSpPr/>
-        <p:nvPr/>
-      </p:nvGrpSpPr>
-      <p:grpSpPr/>
-      <p:sp>
-        <p:nvSpPr>
-          <p:cNvPr id="2" name="Rectangle 1"/>
-          <p:cNvSpPr/>
-          <p:nvPr/>
-        </p:nvSpPr>
-        <p:spPr>
-          <a:xfrm>
-            <a:off x="0" y="0"/>
-            <a:ext cx="12192000" cy="6858000"/>
-          </a:xfrm>
-          <a:prstGeom prst="rect">
-            <a:avLst/>
-          </a:prstGeom>
-          <a:solidFill>
-            <a:srgbClr val="FFFFFF"/>
-          </a:solidFill>
-          <a:ln>
-            <a:noFill/>
-          </a:ln>
-        </p:spPr>
-        <p:style>
-          <a:lnRef idx="1">
-            <a:schemeClr val="accent1"/>
-          </a:lnRef>
-          <a:fillRef idx="3">
-            <a:schemeClr val="accent1"/>
-          </a:fillRef>
-          <a:effectRef idx="2">
-            <a:schemeClr val="accent1"/>
-          </a:effectRef>
-          <a:fontRef idx="minor">
-            <a:schemeClr val="lt1"/>
-          </a:fontRef>
-        </p:style>
-        <p:txBody>
-          <a:bodyPr rtlCol="0" anchor="ctr"/>
-          <a:lstStyle/>
-          <a:p>
-            <a:pPr algn="ctr"/>
-          </a:p>
-        </p:txBody>
-      </p:sp>
-      <p:sp>
-        <p:nvSpPr>
-          <p:cNvPr id="3" name="Rectangle 2"/>
-          <p:cNvSpPr/>
-          <p:nvPr/>
-        </p:nvSpPr>
-        <p:spPr>
-          <a:xfrm>
-            <a:off x="0" y="0"/>
-            <a:ext cx="12192000" cy="38100"/>
-          </a:xfrm>
-          <a:prstGeom prst="rect">
-            <a:avLst/>
-          </a:prstGeom>
-          <a:solidFill>
-            <a:srgbClr val="0A5C5C"/>
-          </a:solidFill>
-          <a:ln>
-            <a:noFill/>
-          </a:ln>
-        </p:spPr>
-        <p:style>
-          <a:lnRef idx="1">
-            <a:schemeClr val="accent1"/>
-          </a:lnRef>
-          <a:fillRef idx="3">
-            <a:schemeClr val="accent1"/>
-          </a:fillRef>
-          <a:effectRef idx="2">
-            <a:schemeClr val="accent1"/>
-          </a:effectRef>
-          <a:fontRef idx="minor">
-            <a:schemeClr val="lt1"/>
-          </a:fontRef>
-        </p:style>
-        <p:txBody>
-          <a:bodyPr rtlCol="0" anchor="ctr"/>
-          <a:lstStyle/>
-          <a:p>
-            <a:pPr algn="ctr"/>
-          </a:p>
-        </p:txBody>
-      </p:sp>
-      <p:sp>
-        <p:nvSpPr>
-          <p:cNvPr id="4" name="TextBox 3"/>
-          <p:cNvSpPr txBox="1"/>
-          <p:nvPr/>
-        </p:nvSpPr>
-        <p:spPr>
-          <a:xfrm>
-            <a:off x="457200" y="209550"/>
-            <a:ext cx="11239500" cy="323850"/>
-          </a:xfrm>
-          <a:prstGeom prst="rect">
-            <a:avLst/>
-          </a:prstGeom>
-          <a:noFill/>
-        </p:spPr>
-        <p:txBody>
-          <a:bodyPr wrap="square">
-            <a:spAutoFit/>
-          </a:bodyPr>
-          <a:lstStyle/>
-          <a:p>
-            <a:pPr algn="l"/>
-            <a:r>
-              <a:rPr sz="2200" b="1">
-                <a:solidFill>
-                  <a:srgbClr val="111111"/>
-                </a:solidFill>
-                <a:latin typeface="AppleGothic"/>
-                <a:ea typeface="AppleGothic"/>
-              </a:rPr>
-              <a:t>경로와 한 줄</a:t>
-            </a:r>
-          </a:p>
-        </p:txBody>
-      </p:sp>
-      <p:sp>
-        <p:nvSpPr>
-          <p:cNvPr id="5" name="TextBox 4"/>
-          <p:cNvSpPr txBox="1"/>
-          <p:nvPr/>
-        </p:nvSpPr>
-        <p:spPr>
-          <a:xfrm>
-            <a:off x="457200" y="533400"/>
-            <a:ext cx="11239500" cy="190500"/>
-          </a:xfrm>
-          <a:prstGeom prst="rect">
-            <a:avLst/>
-          </a:prstGeom>
-          <a:noFill/>
-        </p:spPr>
-        <p:txBody>
-          <a:bodyPr wrap="square">
-            <a:spAutoFit/>
-          </a:bodyPr>
-          <a:lstStyle/>
-          <a:p>
-            <a:pPr algn="l"/>
-            <a:r>
-              <a:rPr sz="1200" b="0">
-                <a:solidFill>
-                  <a:srgbClr val="555555"/>
-                </a:solidFill>
-                <a:latin typeface="AppleGothic"/>
-                <a:ea typeface="AppleGothic"/>
-              </a:rPr>
-              <a:t>PAE / SAAR  ·  오늘 가져갈 말</a:t>
-            </a:r>
-          </a:p>
-        </p:txBody>
-      </p:sp>
-      <p:pic>
-        <p:nvPicPr>
-          <p:cNvPr id="6" name="Picture 5" descr="pp_vs_pae_split.png"/>
-          <p:cNvPicPr>
-            <a:picLocks noChangeAspect="1"/>
-          </p:cNvPicPr>
-          <p:nvPr/>
-        </p:nvPicPr>
-        <p:blipFill>
-          <a:blip r:embed="rId2"/>
-          <a:stretch>
-            <a:fillRect/>
-          </a:stretch>
-        </p:blipFill>
-        <p:spPr>
-          <a:xfrm>
-            <a:off x="381000" y="809625"/>
-            <a:ext cx="11430000" cy="3619500"/>
-          </a:xfrm>
-          <a:prstGeom prst="rect">
-            <a:avLst/>
-          </a:prstGeom>
-        </p:spPr>
-      </p:pic>
-      <p:sp>
-        <p:nvSpPr>
-          <p:cNvPr id="7" name="TextBox 6"/>
-          <p:cNvSpPr txBox="1"/>
-          <p:nvPr/>
-        </p:nvSpPr>
-        <p:spPr>
-          <a:xfrm>
-            <a:off x="533400" y="4667250"/>
-            <a:ext cx="11049000" cy="266700"/>
-          </a:xfrm>
-          <a:prstGeom prst="rect">
-            <a:avLst/>
-          </a:prstGeom>
-          <a:noFill/>
-        </p:spPr>
-        <p:txBody>
-          <a:bodyPr wrap="square">
-            <a:spAutoFit/>
-          </a:bodyPr>
-          <a:lstStyle/>
-          <a:p>
-            <a:pPr algn="l"/>
-            <a:r>
-              <a:rPr sz="1400" b="0">
-                <a:solidFill>
-                  <a:srgbClr val="111111"/>
-                </a:solidFill>
-                <a:latin typeface="AppleGothic"/>
-                <a:ea typeface="AppleGothic"/>
-              </a:rPr>
-              <a:t>1  밖을 지탱하는 것은 가정이지만, 식만 넣으면 답이 아니다.</a:t>
-            </a:r>
-          </a:p>
-        </p:txBody>
-      </p:sp>
-      <p:sp>
-        <p:nvSpPr>
-          <p:cNvPr id="8" name="TextBox 7"/>
-          <p:cNvSpPr txBox="1"/>
-          <p:nvPr/>
-        </p:nvSpPr>
-        <p:spPr>
-          <a:xfrm>
-            <a:off x="533400" y="5048250"/>
-            <a:ext cx="11049000" cy="266700"/>
-          </a:xfrm>
-          <a:prstGeom prst="rect">
-            <a:avLst/>
-          </a:prstGeom>
-          <a:noFill/>
-        </p:spPr>
-        <p:txBody>
-          <a:bodyPr wrap="square">
-            <a:spAutoFit/>
-          </a:bodyPr>
-          <a:lstStyle/>
-          <a:p>
-            <a:pPr algn="l"/>
-            <a:r>
-              <a:rPr sz="1400" b="0">
-                <a:solidFill>
-                  <a:srgbClr val="111111"/>
-                </a:solidFill>
-                <a:latin typeface="AppleGothic"/>
-                <a:ea typeface="AppleGothic"/>
-              </a:rPr>
-              <a:t>2  식이 없으면 SAAR — 동결 affine + 제한 residual.  주표 0.934 / 0.842 / 0.751.</a:t>
-            </a:r>
-          </a:p>
-        </p:txBody>
-      </p:sp>
-      <p:sp>
-        <p:nvSpPr>
-          <p:cNvPr id="9" name="TextBox 8"/>
-          <p:cNvSpPr txBox="1"/>
-          <p:nvPr/>
-        </p:nvSpPr>
-        <p:spPr>
-          <a:xfrm>
-            <a:off x="533400" y="5429250"/>
-            <a:ext cx="11049000" cy="266700"/>
-          </a:xfrm>
-          <a:prstGeom prst="rect">
-            <a:avLst/>
-          </a:prstGeom>
-          <a:noFill/>
-        </p:spPr>
-        <p:txBody>
-          <a:bodyPr wrap="square">
-            <a:spAutoFit/>
-          </a:bodyPr>
-          <a:lstStyle/>
-          <a:p>
-            <a:pPr algn="l"/>
-            <a:r>
-              <a:rPr sz="1400" b="0">
-                <a:solidFill>
-                  <a:srgbClr val="111111"/>
-                </a:solidFill>
-                <a:latin typeface="AppleGothic"/>
-                <a:ea typeface="AppleGothic"/>
-              </a:rPr>
-              <a:t>3  실패·Zn·PAE는 한계/후속. 만능 SOTA를 주장하지 않는다.</a:t>
-            </a:r>
-          </a:p>
-        </p:txBody>
-      </p:sp>
-      <p:cxnSp>
-        <p:nvCxnSpPr>
-          <p:cNvPr id="10" name="Connector 9"/>
-          <p:cNvCxnSpPr/>
-          <p:nvPr/>
-        </p:nvCxnSpPr>
-        <p:spPr>
-          <a:xfrm>
-            <a:off x="457200" y="6477000"/>
-            <a:ext cx="11277600" cy="0"/>
-          </a:xfrm>
-          <a:prstGeom prst="line">
-            <a:avLst/>
-          </a:prstGeom>
-          <a:ln w="9525">
-            <a:solidFill>
-              <a:srgbClr val="D0D0D0"/>
-            </a:solidFill>
-          </a:ln>
-        </p:spPr>
-        <p:style>
-          <a:lnRef idx="2">
-            <a:schemeClr val="accent1"/>
-          </a:lnRef>
-          <a:fillRef idx="0">
-            <a:schemeClr val="accent1"/>
-          </a:fillRef>
-          <a:effectRef idx="1">
-            <a:schemeClr val="accent1"/>
-          </a:effectRef>
-          <a:fontRef idx="minor">
-            <a:schemeClr val="tx1"/>
-          </a:fontRef>
-        </p:style>
-      </p:cxnSp>
-      <p:sp>
-        <p:nvSpPr>
-          <p:cNvPr id="11" name="TextBox 10"/>
-          <p:cNvSpPr txBox="1"/>
-          <p:nvPr/>
-        </p:nvSpPr>
-        <p:spPr>
-          <a:xfrm>
-            <a:off x="457200" y="6534150"/>
-            <a:ext cx="7620000" cy="133350"/>
-          </a:xfrm>
-          <a:prstGeom prst="rect">
-            <a:avLst/>
-          </a:prstGeom>
-          <a:noFill/>
-        </p:spPr>
-        <p:txBody>
-          <a:bodyPr wrap="square">
-            <a:spAutoFit/>
-          </a:bodyPr>
-          <a:lstStyle/>
-          <a:p>
-            <a:pPr algn="l"/>
-            <a:r>
-              <a:rPr sz="900" b="0">
-                <a:solidFill>
-                  <a:srgbClr val="555555"/>
-                </a:solidFill>
-                <a:latin typeface="AppleGothic"/>
-                <a:ea typeface="AppleGothic"/>
-              </a:rPr>
-              <a:t>SPS Lab  ·  Assumption-Aware Extrapolation  ·  SAAR</a:t>
-            </a:r>
-          </a:p>
-        </p:txBody>
-      </p:sp>
-      <p:sp>
-        <p:nvSpPr>
-          <p:cNvPr id="12" name="TextBox 11"/>
-          <p:cNvSpPr txBox="1"/>
-          <p:nvPr/>
-        </p:nvSpPr>
-        <p:spPr>
-          <a:xfrm>
-            <a:off x="10477500" y="6515100"/>
-            <a:ext cx="952500" cy="152400"/>
-          </a:xfrm>
-          <a:prstGeom prst="rect">
-            <a:avLst/>
-          </a:prstGeom>
-          <a:noFill/>
-        </p:spPr>
-        <p:txBody>
-          <a:bodyPr wrap="square">
-            <a:spAutoFit/>
-          </a:bodyPr>
-          <a:lstStyle/>
-          <a:p>
-            <a:pPr algn="r"/>
-            <a:r>
-              <a:rPr sz="1000" b="1">
-                <a:solidFill>
-                  <a:srgbClr val="555555"/>
-                </a:solidFill>
-                <a:latin typeface="AppleGothic"/>
-                <a:ea typeface="AppleGothic"/>
-              </a:rPr>
-              <a:t>12/12</a:t>
+              <a:t>11/11</a:t>
             </a:r>
           </a:p>
         </p:txBody>
@@ -4744,7 +4436,7 @@
                 <a:latin typeface="AppleGothic"/>
                 <a:ea typeface="AppleGothic"/>
               </a:rPr>
-              <a:t>2/12</a:t>
+              <a:t>2/11</a:t>
             </a:r>
           </a:p>
         </p:txBody>
@@ -5051,7 +4743,7 @@
                 <a:latin typeface="AppleGothic"/>
                 <a:ea typeface="AppleGothic"/>
               </a:rPr>
-              <a:t>3/12</a:t>
+              <a:t>3/11</a:t>
             </a:r>
           </a:p>
         </p:txBody>
@@ -5358,7 +5050,7 @@
                 <a:latin typeface="AppleGothic"/>
                 <a:ea typeface="AppleGothic"/>
               </a:rPr>
-              <a:t>4/12</a:t>
+              <a:t>4/11</a:t>
             </a:r>
           </a:p>
         </p:txBody>
@@ -5665,7 +5357,7 @@
                 <a:latin typeface="AppleGothic"/>
                 <a:ea typeface="AppleGothic"/>
               </a:rPr>
-              <a:t>5/12</a:t>
+              <a:t>5/11</a:t>
             </a:r>
           </a:p>
         </p:txBody>
@@ -5972,7 +5664,7 @@
                 <a:latin typeface="AppleGothic"/>
                 <a:ea typeface="AppleGothic"/>
               </a:rPr>
-              <a:t>6/12</a:t>
+              <a:t>6/11</a:t>
             </a:r>
           </a:p>
         </p:txBody>
@@ -6279,7 +5971,7 @@
                 <a:latin typeface="AppleGothic"/>
                 <a:ea typeface="AppleGothic"/>
               </a:rPr>
-              <a:t>7/12</a:t>
+              <a:t>7/11</a:t>
             </a:r>
           </a:p>
         </p:txBody>
@@ -6455,7 +6147,7 @@
                 <a:latin typeface="AppleGothic"/>
                 <a:ea typeface="AppleGothic"/>
               </a:rPr>
-              <a:t>양의 8곳 × 알고리즘 $R^2$</a:t>
+              <a:t>양의 8곳 × 전 알고리즘 (SAAR … TabPFN 한 그래프)</a:t>
             </a:r>
           </a:p>
         </p:txBody>
@@ -6476,8 +6168,8 @@
         </p:blipFill>
         <p:spPr>
           <a:xfrm>
-            <a:off x="285750" y="762000"/>
-            <a:ext cx="11620500" cy="5334000"/>
+            <a:off x="381000" y="742950"/>
+            <a:ext cx="11430000" cy="5334000"/>
           </a:xfrm>
           <a:prstGeom prst="rect">
             <a:avLst/>
@@ -6586,7 +6278,7 @@
                 <a:latin typeface="AppleGothic"/>
                 <a:ea typeface="AppleGothic"/>
               </a:rPr>
-              <a:t>8/12</a:t>
+              <a:t>8/11</a:t>
             </a:r>
           </a:p>
         </p:txBody>
@@ -6726,7 +6418,7 @@
                 <a:latin typeface="AppleGothic"/>
                 <a:ea typeface="AppleGothic"/>
               </a:rPr>
-              <a:t>SAAR vs TabPFN</a:t>
+              <a:t>안정성</a:t>
             </a:r>
           </a:p>
         </p:txBody>
@@ -6762,14 +6454,14 @@
                 <a:latin typeface="AppleGothic"/>
                 <a:ea typeface="AppleGothic"/>
               </a:rPr>
-              <a:t>표 수치 기반 막대 비교</a:t>
+              <a:t>bootstrap CI  ·  MICH unit $R^2$</a:t>
             </a:r>
           </a:p>
         </p:txBody>
       </p:sp>
       <p:pic>
         <p:nvPicPr>
-          <p:cNvPr id="6" name="Picture 5" descr="pp_vs_tabpfn.png"/>
+          <p:cNvPr id="6" name="Picture 5" descr="robustness_panel.png"/>
           <p:cNvPicPr>
             <a:picLocks noChangeAspect="1"/>
           </p:cNvPicPr>
@@ -6783,8 +6475,8 @@
         </p:blipFill>
         <p:spPr>
           <a:xfrm>
-            <a:off x="381000" y="857250"/>
-            <a:ext cx="11430000" cy="5143500"/>
+            <a:off x="285750" y="857250"/>
+            <a:ext cx="11620500" cy="5048250"/>
           </a:xfrm>
           <a:prstGeom prst="rect">
             <a:avLst/>
@@ -6893,7 +6585,7 @@
                 <a:latin typeface="AppleGothic"/>
                 <a:ea typeface="AppleGothic"/>
               </a:rPr>
-              <a:t>9/12</a:t>
+              <a:t>9/11</a:t>
             </a:r>
           </a:p>
         </p:txBody>

--- a/output/PP_Research_Detailed_v2.pptx
+++ b/output/PP_Research_Detailed_v2.pptx
@@ -3564,57 +3564,1187 @@
           </a:p>
         </p:txBody>
       </p:sp>
-      <p:pic>
-        <p:nvPicPr>
-          <p:cNvPr id="6" name="Picture 5" descr="fail_cases.png"/>
-          <p:cNvPicPr>
-            <a:picLocks noChangeAspect="1"/>
-          </p:cNvPicPr>
-          <p:nvPr/>
-        </p:nvPicPr>
-        <p:blipFill>
-          <a:blip r:embed="rId2"/>
-          <a:stretch>
-            <a:fillRect/>
-          </a:stretch>
-        </p:blipFill>
-        <p:spPr>
-          <a:xfrm>
-            <a:off x="285750" y="809625"/>
-            <a:ext cx="5905500" cy="4953000"/>
+      <p:sp>
+        <p:nvSpPr>
+          <p:cNvPr id="6" name="TextBox 5"/>
+          <p:cNvSpPr txBox="1"/>
+          <p:nvPr/>
+        </p:nvSpPr>
+        <p:spPr>
+          <a:xfrm>
+            <a:off x="457200" y="857250"/>
+            <a:ext cx="5715000" cy="228600"/>
           </a:xfrm>
           <a:prstGeom prst="rect">
             <a:avLst/>
           </a:prstGeom>
-        </p:spPr>
-      </p:pic>
-      <p:pic>
-        <p:nvPicPr>
-          <p:cNvPr id="7" name="Picture 6" descr="status_compact.png"/>
-          <p:cNvPicPr>
-            <a:picLocks noChangeAspect="1"/>
-          </p:cNvPicPr>
-          <p:nvPr/>
-        </p:nvPicPr>
-        <p:blipFill>
-          <a:blip r:embed="rId3"/>
-          <a:stretch>
-            <a:fillRect/>
-          </a:stretch>
-        </p:blipFill>
-        <p:spPr>
-          <a:xfrm>
-            <a:off x="6286500" y="809625"/>
-            <a:ext cx="5334000" cy="4953000"/>
+          <a:noFill/>
+        </p:spPr>
+        <p:txBody>
+          <a:bodyPr wrap="square">
+            <a:spAutoFit/>
+          </a:bodyPr>
+          <a:lstStyle/>
+          <a:p>
+            <a:pPr algn="l"/>
+            <a:r>
+              <a:rPr sz="1400" b="1">
+                <a:solidFill>
+                  <a:srgbClr val="111111"/>
+                </a:solidFill>
+                <a:latin typeface="AppleGothic"/>
+                <a:ea typeface="AppleGothic"/>
+              </a:rPr>
+              <a:t>실패 설정</a:t>
+            </a:r>
+          </a:p>
+        </p:txBody>
+      </p:sp>
+      <p:graphicFrame>
+        <p:nvGraphicFramePr>
+          <p:cNvPr id="7" name="Table 6"/>
+          <p:cNvGraphicFramePr>
+            <a:graphicFrameLocks noGrp="1"/>
+          </p:cNvGraphicFramePr>
+          <p:nvPr/>
+        </p:nvGraphicFramePr>
+        <p:xfrm>
+          <a:off x="457200" y="1143000"/>
+          <a:ext cx="11277600" cy="2286000"/>
+        </p:xfrm>
+        <a:graphic>
+          <a:graphicData uri="http://schemas.openxmlformats.org/drawingml/2006/table">
+            <a:tbl>
+              <a:tblPr firstRow="1" bandRow="1">
+                <a:tableStyleId>{5C22544A-7EE6-4342-B048-85BDC9FD1C3A}</a:tableStyleId>
+              </a:tblPr>
+              <a:tblGrid>
+                <a:gridCol w="2819400"/>
+                <a:gridCol w="2819400"/>
+                <a:gridCol w="2819400"/>
+                <a:gridCol w="2819400"/>
+              </a:tblGrid>
+              <a:tr h="457200">
+                <a:tc>
+                  <a:txBody>
+                    <a:bodyPr/>
+                    <a:lstStyle/>
+                    <a:p>
+                      <a:pPr algn="ctr"/>
+                      <a:r>
+                        <a:rPr sz="1200" b="1">
+                          <a:solidFill>
+                            <a:srgbClr val="FFFFFF"/>
+                          </a:solidFill>
+                          <a:latin typeface="AppleGothic"/>
+                          <a:ea typeface="AppleGothic"/>
+                        </a:rPr>
+                        <a:t>설정</a:t>
+                      </a:r>
+                    </a:p>
+                  </a:txBody>
+                  <a:tcPr anchor="ctr">
+                    <a:solidFill>
+                      <a:srgbClr val="111111"/>
+                    </a:solidFill>
+                  </a:tcPr>
+                </a:tc>
+                <a:tc>
+                  <a:txBody>
+                    <a:bodyPr/>
+                    <a:lstStyle/>
+                    <a:p>
+                      <a:pPr algn="ctr"/>
+                      <a:r>
+                        <a:rPr sz="1200" b="1">
+                          <a:solidFill>
+                            <a:srgbClr val="FFFFFF"/>
+                          </a:solidFill>
+                          <a:latin typeface="AppleGothic"/>
+                          <a:ea typeface="AppleGothic"/>
+                        </a:rPr>
+                        <a:t>기본 PP R²</a:t>
+                      </a:r>
+                    </a:p>
+                  </a:txBody>
+                  <a:tcPr anchor="ctr">
+                    <a:solidFill>
+                      <a:srgbClr val="111111"/>
+                    </a:solidFill>
+                  </a:tcPr>
+                </a:tc>
+                <a:tc>
+                  <a:txBody>
+                    <a:bodyPr/>
+                    <a:lstStyle/>
+                    <a:p>
+                      <a:pPr algn="ctr"/>
+                      <a:r>
+                        <a:rPr sz="1200" b="1">
+                          <a:solidFill>
+                            <a:srgbClr val="FFFFFF"/>
+                          </a:solidFill>
+                          <a:latin typeface="AppleGothic"/>
+                          <a:ea typeface="AppleGothic"/>
+                        </a:rPr>
+                        <a:t>해석</a:t>
+                      </a:r>
+                    </a:p>
+                  </a:txBody>
+                  <a:tcPr anchor="ctr">
+                    <a:solidFill>
+                      <a:srgbClr val="111111"/>
+                    </a:solidFill>
+                  </a:tcPr>
+                </a:tc>
+                <a:tc>
+                  <a:txBody>
+                    <a:bodyPr/>
+                    <a:lstStyle/>
+                    <a:p>
+                      <a:pPr algn="ctr"/>
+                      <a:r>
+                        <a:rPr sz="1200" b="1">
+                          <a:solidFill>
+                            <a:srgbClr val="FFFFFF"/>
+                          </a:solidFill>
+                          <a:latin typeface="AppleGothic"/>
+                          <a:ea typeface="AppleGothic"/>
+                        </a:rPr>
+                        <a:t>조치</a:t>
+                      </a:r>
+                    </a:p>
+                  </a:txBody>
+                  <a:tcPr anchor="ctr">
+                    <a:solidFill>
+                      <a:srgbClr val="111111"/>
+                    </a:solidFill>
+                  </a:tcPr>
+                </a:tc>
+              </a:tr>
+              <a:tr h="457200">
+                <a:tc>
+                  <a:txBody>
+                    <a:bodyPr/>
+                    <a:lstStyle/>
+                    <a:p>
+                      <a:pPr algn="l"/>
+                      <a:r>
+                        <a:rPr sz="1200" b="1">
+                          <a:solidFill>
+                            <a:srgbClr val="111111"/>
+                          </a:solidFill>
+                          <a:latin typeface="AppleGothic"/>
+                          <a:ea typeface="AppleGothic"/>
+                        </a:rPr>
+                        <a:t>MICH (기본)</a:t>
+                      </a:r>
+                    </a:p>
+                  </a:txBody>
+                  <a:tcPr anchor="ctr">
+                    <a:solidFill>
+                      <a:srgbClr val="FFFFFF"/>
+                    </a:solidFill>
+                  </a:tcPr>
+                </a:tc>
+                <a:tc>
+                  <a:txBody>
+                    <a:bodyPr/>
+                    <a:lstStyle/>
+                    <a:p>
+                      <a:pPr algn="ctr"/>
+                      <a:r>
+                        <a:rPr sz="1200" b="1">
+                          <a:solidFill>
+                            <a:srgbClr val="9B1C1C"/>
+                          </a:solidFill>
+                          <a:latin typeface="AppleGothic"/>
+                          <a:ea typeface="AppleGothic"/>
+                        </a:rPr>
+                        <a:t>-1.522</a:t>
+                      </a:r>
+                    </a:p>
+                  </a:txBody>
+                  <a:tcPr anchor="ctr">
+                    <a:solidFill>
+                      <a:srgbClr val="FFFFFF"/>
+                    </a:solidFill>
+                  </a:tcPr>
+                </a:tc>
+                <a:tc>
+                  <a:txBody>
+                    <a:bodyPr/>
+                    <a:lstStyle/>
+                    <a:p>
+                      <a:pPr algn="l"/>
+                      <a:r>
+                        <a:rPr sz="1200" b="0">
+                          <a:solidFill>
+                            <a:srgbClr val="111111"/>
+                          </a:solidFill>
+                          <a:latin typeface="AppleGothic"/>
+                          <a:ea typeface="AppleGothic"/>
+                        </a:rPr>
+                        <a:t>관계 이동 · 보정 꺼짐</a:t>
+                      </a:r>
+                    </a:p>
+                  </a:txBody>
+                  <a:tcPr anchor="ctr">
+                    <a:solidFill>
+                      <a:srgbClr val="FFFFFF"/>
+                    </a:solidFill>
+                  </a:tcPr>
+                </a:tc>
+                <a:tc>
+                  <a:txBody>
+                    <a:bodyPr/>
+                    <a:lstStyle/>
+                    <a:p>
+                      <a:pPr algn="l"/>
+                      <a:r>
+                        <a:rPr sz="1200" b="0">
+                          <a:solidFill>
+                            <a:srgbClr val="111111"/>
+                          </a:solidFill>
+                          <a:latin typeface="AppleGothic"/>
+                          <a:ea typeface="AppleGothic"/>
+                        </a:rPr>
+                        <a:t>경계 + dual-scale → 0.751</a:t>
+                      </a:r>
+                    </a:p>
+                  </a:txBody>
+                  <a:tcPr anchor="ctr">
+                    <a:solidFill>
+                      <a:srgbClr val="FFFFFF"/>
+                    </a:solidFill>
+                  </a:tcPr>
+                </a:tc>
+              </a:tr>
+              <a:tr h="457200">
+                <a:tc>
+                  <a:txBody>
+                    <a:bodyPr/>
+                    <a:lstStyle/>
+                    <a:p>
+                      <a:pPr algn="l"/>
+                      <a:r>
+                        <a:rPr sz="1200" b="1">
+                          <a:solidFill>
+                            <a:srgbClr val="111111"/>
+                          </a:solidFill>
+                          <a:latin typeface="AppleGothic"/>
+                          <a:ea typeface="AppleGothic"/>
+                        </a:rPr>
+                        <a:t>XJTU</a:t>
+                      </a:r>
+                    </a:p>
+                  </a:txBody>
+                  <a:tcPr anchor="ctr">
+                    <a:solidFill>
+                      <a:srgbClr val="F2F2F0"/>
+                    </a:solidFill>
+                  </a:tcPr>
+                </a:tc>
+                <a:tc>
+                  <a:txBody>
+                    <a:bodyPr/>
+                    <a:lstStyle/>
+                    <a:p>
+                      <a:pPr algn="ctr"/>
+                      <a:r>
+                        <a:rPr sz="1200" b="1">
+                          <a:solidFill>
+                            <a:srgbClr val="9B1C1C"/>
+                          </a:solidFill>
+                          <a:latin typeface="AppleGothic"/>
+                          <a:ea typeface="AppleGothic"/>
+                        </a:rPr>
+                        <a:t>-1.229</a:t>
+                      </a:r>
+                    </a:p>
+                  </a:txBody>
+                  <a:tcPr anchor="ctr">
+                    <a:solidFill>
+                      <a:srgbClr val="F2F2F0"/>
+                    </a:solidFill>
+                  </a:tcPr>
+                </a:tc>
+                <a:tc>
+                  <a:txBody>
+                    <a:bodyPr/>
+                    <a:lstStyle/>
+                    <a:p>
+                      <a:pPr algn="l"/>
+                      <a:r>
+                        <a:rPr sz="1200" b="0">
+                          <a:solidFill>
+                            <a:srgbClr val="111111"/>
+                          </a:solidFill>
+                          <a:latin typeface="AppleGothic"/>
+                          <a:ea typeface="AppleGothic"/>
+                        </a:rPr>
+                        <a:t>val/test 이동 반대</a:t>
+                      </a:r>
+                    </a:p>
+                  </a:txBody>
+                  <a:tcPr anchor="ctr">
+                    <a:solidFill>
+                      <a:srgbClr val="F2F2F0"/>
+                    </a:solidFill>
+                  </a:tcPr>
+                </a:tc>
+                <a:tc>
+                  <a:txBody>
+                    <a:bodyPr/>
+                    <a:lstStyle/>
+                    <a:p>
+                      <a:pPr algn="l"/>
+                      <a:r>
+                        <a:rPr sz="1200" b="0">
+                          <a:solidFill>
+                            <a:srgbClr val="111111"/>
+                          </a:solidFill>
+                          <a:latin typeface="AppleGothic"/>
+                          <a:ea typeface="AppleGothic"/>
+                        </a:rPr>
+                        <a:t>거절 / 옮기지 않음</a:t>
+                      </a:r>
+                    </a:p>
+                  </a:txBody>
+                  <a:tcPr anchor="ctr">
+                    <a:solidFill>
+                      <a:srgbClr val="F2F2F0"/>
+                    </a:solidFill>
+                  </a:tcPr>
+                </a:tc>
+              </a:tr>
+              <a:tr h="457200">
+                <a:tc>
+                  <a:txBody>
+                    <a:bodyPr/>
+                    <a:lstStyle/>
+                    <a:p>
+                      <a:pPr algn="l"/>
+                      <a:r>
+                        <a:rPr sz="1200" b="1">
+                          <a:solidFill>
+                            <a:srgbClr val="111111"/>
+                          </a:solidFill>
+                          <a:latin typeface="AppleGothic"/>
+                          <a:ea typeface="AppleGothic"/>
+                        </a:rPr>
+                        <a:t>FEMTO</a:t>
+                      </a:r>
+                    </a:p>
+                  </a:txBody>
+                  <a:tcPr anchor="ctr">
+                    <a:solidFill>
+                      <a:srgbClr val="FFFFFF"/>
+                    </a:solidFill>
+                  </a:tcPr>
+                </a:tc>
+                <a:tc>
+                  <a:txBody>
+                    <a:bodyPr/>
+                    <a:lstStyle/>
+                    <a:p>
+                      <a:pPr algn="ctr"/>
+                      <a:r>
+                        <a:rPr sz="1200" b="1">
+                          <a:solidFill>
+                            <a:srgbClr val="9B1C1C"/>
+                          </a:solidFill>
+                          <a:latin typeface="AppleGothic"/>
+                          <a:ea typeface="AppleGothic"/>
+                        </a:rPr>
+                        <a:t>-1.378</a:t>
+                      </a:r>
+                    </a:p>
+                  </a:txBody>
+                  <a:tcPr anchor="ctr">
+                    <a:solidFill>
+                      <a:srgbClr val="FFFFFF"/>
+                    </a:solidFill>
+                  </a:tcPr>
+                </a:tc>
+                <a:tc>
+                  <a:txBody>
+                    <a:bodyPr/>
+                    <a:lstStyle/>
+                    <a:p>
+                      <a:pPr algn="l"/>
+                      <a:r>
+                        <a:rPr sz="1200" b="0">
+                          <a:solidFill>
+                            <a:srgbClr val="111111"/>
+                          </a:solidFill>
+                          <a:latin typeface="AppleGothic"/>
+                          <a:ea typeface="AppleGothic"/>
+                        </a:rPr>
+                        <a:t>끝점 희소 · 채널 이슈</a:t>
+                      </a:r>
+                    </a:p>
+                  </a:txBody>
+                  <a:tcPr anchor="ctr">
+                    <a:solidFill>
+                      <a:srgbClr val="FFFFFF"/>
+                    </a:solidFill>
+                  </a:tcPr>
+                </a:tc>
+                <a:tc>
+                  <a:txBody>
+                    <a:bodyPr/>
+                    <a:lstStyle/>
+                    <a:p>
+                      <a:pPr algn="l"/>
+                      <a:r>
+                        <a:rPr sz="1200" b="0">
+                          <a:solidFill>
+                            <a:srgbClr val="111111"/>
+                          </a:solidFill>
+                          <a:latin typeface="AppleGothic"/>
+                          <a:ea typeface="AppleGothic"/>
+                        </a:rPr>
+                        <a:t>설계 미성숙 · 보류</a:t>
+                      </a:r>
+                    </a:p>
+                  </a:txBody>
+                  <a:tcPr anchor="ctr">
+                    <a:solidFill>
+                      <a:srgbClr val="FFFFFF"/>
+                    </a:solidFill>
+                  </a:tcPr>
+                </a:tc>
+              </a:tr>
+              <a:tr h="457200">
+                <a:tc>
+                  <a:txBody>
+                    <a:bodyPr/>
+                    <a:lstStyle/>
+                    <a:p>
+                      <a:pPr algn="l"/>
+                      <a:r>
+                        <a:rPr sz="1200" b="1">
+                          <a:solidFill>
+                            <a:srgbClr val="111111"/>
+                          </a:solidFill>
+                          <a:latin typeface="AppleGothic"/>
+                          <a:ea typeface="AppleGothic"/>
+                        </a:rPr>
+                        <a:t>NASA milling</a:t>
+                      </a:r>
+                    </a:p>
+                  </a:txBody>
+                  <a:tcPr anchor="ctr">
+                    <a:solidFill>
+                      <a:srgbClr val="F2F2F0"/>
+                    </a:solidFill>
+                  </a:tcPr>
+                </a:tc>
+                <a:tc>
+                  <a:txBody>
+                    <a:bodyPr/>
+                    <a:lstStyle/>
+                    <a:p>
+                      <a:pPr algn="ctr"/>
+                      <a:r>
+                        <a:rPr sz="1200" b="1">
+                          <a:solidFill>
+                            <a:srgbClr val="9B1C1C"/>
+                          </a:solidFill>
+                          <a:latin typeface="AppleGothic"/>
+                          <a:ea typeface="AppleGothic"/>
+                        </a:rPr>
+                        <a:t>-4.826</a:t>
+                      </a:r>
+                    </a:p>
+                  </a:txBody>
+                  <a:tcPr anchor="ctr">
+                    <a:solidFill>
+                      <a:srgbClr val="F2F2F0"/>
+                    </a:solidFill>
+                  </a:tcPr>
+                </a:tc>
+                <a:tc>
+                  <a:txBody>
+                    <a:bodyPr/>
+                    <a:lstStyle/>
+                    <a:p>
+                      <a:pPr algn="l"/>
+                      <a:r>
+                        <a:rPr sz="1200" b="0">
+                          <a:solidFill>
+                            <a:srgbClr val="111111"/>
+                          </a:solidFill>
+                          <a:latin typeface="AppleGothic"/>
+                          <a:ea typeface="AppleGothic"/>
+                        </a:rPr>
+                        <a:t>메커니즘 전이 · unit 극소</a:t>
+                      </a:r>
+                    </a:p>
+                  </a:txBody>
+                  <a:tcPr anchor="ctr">
+                    <a:solidFill>
+                      <a:srgbClr val="F2F2F0"/>
+                    </a:solidFill>
+                  </a:tcPr>
+                </a:tc>
+                <a:tc>
+                  <a:txBody>
+                    <a:bodyPr/>
+                    <a:lstStyle/>
+                    <a:p>
+                      <a:pPr algn="l"/>
+                      <a:r>
+                        <a:rPr sz="1200" b="0">
+                          <a:solidFill>
+                            <a:srgbClr val="111111"/>
+                          </a:solidFill>
+                          <a:latin typeface="AppleGothic"/>
+                          <a:ea typeface="AppleGothic"/>
+                        </a:rPr>
+                        <a:t>사전 Fail / ABSTAIN</a:t>
+                      </a:r>
+                    </a:p>
+                  </a:txBody>
+                  <a:tcPr anchor="ctr">
+                    <a:solidFill>
+                      <a:srgbClr val="F2F2F0"/>
+                    </a:solidFill>
+                  </a:tcPr>
+                </a:tc>
+              </a:tr>
+            </a:tbl>
+          </a:graphicData>
+        </a:graphic>
+      </p:graphicFrame>
+      <p:sp>
+        <p:nvSpPr>
+          <p:cNvPr id="8" name="TextBox 7"/>
+          <p:cNvSpPr txBox="1"/>
+          <p:nvPr/>
+        </p:nvSpPr>
+        <p:spPr>
+          <a:xfrm>
+            <a:off x="457200" y="3714750"/>
+            <a:ext cx="5334000" cy="228600"/>
           </a:xfrm>
           <a:prstGeom prst="rect">
             <a:avLst/>
           </a:prstGeom>
-        </p:spPr>
-      </p:pic>
+          <a:noFill/>
+        </p:spPr>
+        <p:txBody>
+          <a:bodyPr wrap="square">
+            <a:spAutoFit/>
+          </a:bodyPr>
+          <a:lstStyle/>
+          <a:p>
+            <a:pPr algn="l"/>
+            <a:r>
+              <a:rPr sz="1300" b="1">
+                <a:solidFill>
+                  <a:srgbClr val="0A5C5C"/>
+                </a:solidFill>
+                <a:latin typeface="AppleGothic"/>
+                <a:ea typeface="AppleGothic"/>
+              </a:rPr>
+              <a:t>주장하는 것</a:t>
+            </a:r>
+          </a:p>
+        </p:txBody>
+      </p:sp>
+      <p:graphicFrame>
+        <p:nvGraphicFramePr>
+          <p:cNvPr id="9" name="Table 8"/>
+          <p:cNvGraphicFramePr>
+            <a:graphicFrameLocks noGrp="1"/>
+          </p:cNvGraphicFramePr>
+          <p:nvPr/>
+        </p:nvGraphicFramePr>
+        <p:xfrm>
+          <a:off x="457200" y="4000500"/>
+          <a:ext cx="5334000" cy="1905000"/>
+        </p:xfrm>
+        <a:graphic>
+          <a:graphicData uri="http://schemas.openxmlformats.org/drawingml/2006/table">
+            <a:tbl>
+              <a:tblPr firstRow="1" bandRow="1">
+                <a:tableStyleId>{5C22544A-7EE6-4342-B048-85BDC9FD1C3A}</a:tableStyleId>
+              </a:tblPr>
+              <a:tblGrid>
+                <a:gridCol w="2667000"/>
+                <a:gridCol w="2667000"/>
+              </a:tblGrid>
+              <a:tr h="381000">
+                <a:tc>
+                  <a:txBody>
+                    <a:bodyPr/>
+                    <a:lstStyle/>
+                    <a:p>
+                      <a:pPr algn="ctr"/>
+                      <a:r>
+                        <a:rPr sz="1100" b="1">
+                          <a:solidFill>
+                            <a:srgbClr val="FFFFFF"/>
+                          </a:solidFill>
+                          <a:latin typeface="AppleGothic"/>
+                          <a:ea typeface="AppleGothic"/>
+                        </a:rPr>
+                        <a:t>항목</a:t>
+                      </a:r>
+                    </a:p>
+                  </a:txBody>
+                  <a:tcPr anchor="ctr">
+                    <a:solidFill>
+                      <a:srgbClr val="111111"/>
+                    </a:solidFill>
+                  </a:tcPr>
+                </a:tc>
+                <a:tc>
+                  <a:txBody>
+                    <a:bodyPr/>
+                    <a:lstStyle/>
+                    <a:p>
+                      <a:pPr algn="ctr"/>
+                      <a:r>
+                        <a:rPr sz="1100" b="1">
+                          <a:solidFill>
+                            <a:srgbClr val="FFFFFF"/>
+                          </a:solidFill>
+                          <a:latin typeface="AppleGothic"/>
+                          <a:ea typeface="AppleGothic"/>
+                        </a:rPr>
+                        <a:t>내용</a:t>
+                      </a:r>
+                    </a:p>
+                  </a:txBody>
+                  <a:tcPr anchor="ctr">
+                    <a:solidFill>
+                      <a:srgbClr val="111111"/>
+                    </a:solidFill>
+                  </a:tcPr>
+                </a:tc>
+              </a:tr>
+              <a:tr h="381000">
+                <a:tc>
+                  <a:txBody>
+                    <a:bodyPr/>
+                    <a:lstStyle/>
+                    <a:p>
+                      <a:pPr algn="ctr"/>
+                      <a:r>
+                        <a:rPr sz="1100" b="1">
+                          <a:solidFill>
+                            <a:srgbClr val="111111"/>
+                          </a:solidFill>
+                          <a:latin typeface="AppleGothic"/>
+                          <a:ea typeface="AppleGothic"/>
+                        </a:rPr>
+                        <a:t>주표</a:t>
+                      </a:r>
+                    </a:p>
+                  </a:txBody>
+                  <a:tcPr anchor="ctr">
+                    <a:solidFill>
+                      <a:srgbClr val="FFFFFF"/>
+                    </a:solidFill>
+                  </a:tcPr>
+                </a:tc>
+                <a:tc>
+                  <a:txBody>
+                    <a:bodyPr/>
+                    <a:lstStyle/>
+                    <a:p>
+                      <a:pPr algn="ctr"/>
+                      <a:r>
+                        <a:rPr sz="1100" b="0">
+                          <a:solidFill>
+                            <a:srgbClr val="111111"/>
+                          </a:solidFill>
+                          <a:latin typeface="AppleGothic"/>
+                          <a:ea typeface="AppleGothic"/>
+                        </a:rPr>
+                        <a:t>0.934 / 0.842 / 0.751</a:t>
+                      </a:r>
+                    </a:p>
+                  </a:txBody>
+                  <a:tcPr anchor="ctr">
+                    <a:solidFill>
+                      <a:srgbClr val="FFFFFF"/>
+                    </a:solidFill>
+                  </a:tcPr>
+                </a:tc>
+              </a:tr>
+              <a:tr h="381000">
+                <a:tc>
+                  <a:txBody>
+                    <a:bodyPr/>
+                    <a:lstStyle/>
+                    <a:p>
+                      <a:pPr algn="ctr"/>
+                      <a:r>
+                        <a:rPr sz="1100" b="1">
+                          <a:solidFill>
+                            <a:srgbClr val="111111"/>
+                          </a:solidFill>
+                          <a:latin typeface="AppleGothic"/>
+                          <a:ea typeface="AppleGothic"/>
+                        </a:rPr>
+                        <a:t>범위</a:t>
+                      </a:r>
+                    </a:p>
+                  </a:txBody>
+                  <a:tcPr anchor="ctr">
+                    <a:solidFill>
+                      <a:srgbClr val="F2F2F0"/>
+                    </a:solidFill>
+                  </a:tcPr>
+                </a:tc>
+                <a:tc>
+                  <a:txBody>
+                    <a:bodyPr/>
+                    <a:lstStyle/>
+                    <a:p>
+                      <a:pPr algn="ctr"/>
+                      <a:r>
+                        <a:rPr sz="1100" b="0">
+                          <a:solidFill>
+                            <a:srgbClr val="111111"/>
+                          </a:solidFill>
+                          <a:latin typeface="AppleGothic"/>
+                          <a:ea typeface="AppleGothic"/>
+                        </a:rPr>
+                        <a:t>연속 열화 · unit-disjoint · hull-out</a:t>
+                      </a:r>
+                    </a:p>
+                  </a:txBody>
+                  <a:tcPr anchor="ctr">
+                    <a:solidFill>
+                      <a:srgbClr val="F2F2F0"/>
+                    </a:solidFill>
+                  </a:tcPr>
+                </a:tc>
+              </a:tr>
+              <a:tr h="381000">
+                <a:tc>
+                  <a:txBody>
+                    <a:bodyPr/>
+                    <a:lstStyle/>
+                    <a:p>
+                      <a:pPr algn="ctr"/>
+                      <a:r>
+                        <a:rPr sz="1100" b="1">
+                          <a:solidFill>
+                            <a:srgbClr val="111111"/>
+                          </a:solidFill>
+                          <a:latin typeface="AppleGothic"/>
+                          <a:ea typeface="AppleGothic"/>
+                        </a:rPr>
+                        <a:t>방법</a:t>
+                      </a:r>
+                    </a:p>
+                  </a:txBody>
+                  <a:tcPr anchor="ctr">
+                    <a:solidFill>
+                      <a:srgbClr val="FFFFFF"/>
+                    </a:solidFill>
+                  </a:tcPr>
+                </a:tc>
+                <a:tc>
+                  <a:txBody>
+                    <a:bodyPr/>
+                    <a:lstStyle/>
+                    <a:p>
+                      <a:pPr algn="ctr"/>
+                      <a:r>
+                        <a:rPr sz="1100" b="0">
+                          <a:solidFill>
+                            <a:srgbClr val="111111"/>
+                          </a:solidFill>
+                          <a:latin typeface="AppleGothic"/>
+                          <a:ea typeface="AppleGothic"/>
+                        </a:rPr>
+                        <a:t>동결 affine + dual-scale residual</a:t>
+                      </a:r>
+                    </a:p>
+                  </a:txBody>
+                  <a:tcPr anchor="ctr">
+                    <a:solidFill>
+                      <a:srgbClr val="FFFFFF"/>
+                    </a:solidFill>
+                  </a:tcPr>
+                </a:tc>
+              </a:tr>
+              <a:tr h="381000">
+                <a:tc>
+                  <a:txBody>
+                    <a:bodyPr/>
+                    <a:lstStyle/>
+                    <a:p>
+                      <a:pPr algn="ctr"/>
+                      <a:r>
+                        <a:rPr sz="1100" b="1">
+                          <a:solidFill>
+                            <a:srgbClr val="111111"/>
+                          </a:solidFill>
+                          <a:latin typeface="AppleGothic"/>
+                          <a:ea typeface="AppleGothic"/>
+                        </a:rPr>
+                        <a:t>타깃</a:t>
+                      </a:r>
+                    </a:p>
+                  </a:txBody>
+                  <a:tcPr anchor="ctr">
+                    <a:solidFill>
+                      <a:srgbClr val="F2F2F0"/>
+                    </a:solidFill>
+                  </a:tcPr>
+                </a:tc>
+                <a:tc>
+                  <a:txBody>
+                    <a:bodyPr/>
+                    <a:lstStyle/>
+                    <a:p>
+                      <a:pPr algn="ctr"/>
+                      <a:r>
+                        <a:rPr sz="1100" b="0">
+                          <a:solidFill>
+                            <a:srgbClr val="111111"/>
+                          </a:solidFill>
+                          <a:latin typeface="AppleGothic"/>
+                          <a:ea typeface="AppleGothic"/>
+                        </a:rPr>
+                        <a:t>분야 Q1–Q2</a:t>
+                      </a:r>
+                    </a:p>
+                  </a:txBody>
+                  <a:tcPr anchor="ctr">
+                    <a:solidFill>
+                      <a:srgbClr val="F2F2F0"/>
+                    </a:solidFill>
+                  </a:tcPr>
+                </a:tc>
+              </a:tr>
+            </a:tbl>
+          </a:graphicData>
+        </a:graphic>
+      </p:graphicFrame>
+      <p:sp>
+        <p:nvSpPr>
+          <p:cNvPr id="10" name="TextBox 9"/>
+          <p:cNvSpPr txBox="1"/>
+          <p:nvPr/>
+        </p:nvSpPr>
+        <p:spPr>
+          <a:xfrm>
+            <a:off x="6096000" y="3714750"/>
+            <a:ext cx="5334000" cy="228600"/>
+          </a:xfrm>
+          <a:prstGeom prst="rect">
+            <a:avLst/>
+          </a:prstGeom>
+          <a:noFill/>
+        </p:spPr>
+        <p:txBody>
+          <a:bodyPr wrap="square">
+            <a:spAutoFit/>
+          </a:bodyPr>
+          <a:lstStyle/>
+          <a:p>
+            <a:pPr algn="l"/>
+            <a:r>
+              <a:rPr sz="1300" b="1">
+                <a:solidFill>
+                  <a:srgbClr val="9B1C1C"/>
+                </a:solidFill>
+                <a:latin typeface="AppleGothic"/>
+                <a:ea typeface="AppleGothic"/>
+              </a:rPr>
+              <a:t>아직 주장하지 않는 것</a:t>
+            </a:r>
+          </a:p>
+        </p:txBody>
+      </p:sp>
+      <p:graphicFrame>
+        <p:nvGraphicFramePr>
+          <p:cNvPr id="11" name="Table 10"/>
+          <p:cNvGraphicFramePr>
+            <a:graphicFrameLocks noGrp="1"/>
+          </p:cNvGraphicFramePr>
+          <p:nvPr/>
+        </p:nvGraphicFramePr>
+        <p:xfrm>
+          <a:off x="6096000" y="4000500"/>
+          <a:ext cx="5638800" cy="1905000"/>
+        </p:xfrm>
+        <a:graphic>
+          <a:graphicData uri="http://schemas.openxmlformats.org/drawingml/2006/table">
+            <a:tbl>
+              <a:tblPr firstRow="1" bandRow="1">
+                <a:tableStyleId>{5C22544A-7EE6-4342-B048-85BDC9FD1C3A}</a:tableStyleId>
+              </a:tblPr>
+              <a:tblGrid>
+                <a:gridCol w="2819400"/>
+                <a:gridCol w="2819400"/>
+              </a:tblGrid>
+              <a:tr h="381000">
+                <a:tc>
+                  <a:txBody>
+                    <a:bodyPr/>
+                    <a:lstStyle/>
+                    <a:p>
+                      <a:pPr algn="ctr"/>
+                      <a:r>
+                        <a:rPr sz="1100" b="1">
+                          <a:solidFill>
+                            <a:srgbClr val="FFFFFF"/>
+                          </a:solidFill>
+                          <a:latin typeface="AppleGothic"/>
+                          <a:ea typeface="AppleGothic"/>
+                        </a:rPr>
+                        <a:t>항목</a:t>
+                      </a:r>
+                    </a:p>
+                  </a:txBody>
+                  <a:tcPr anchor="ctr">
+                    <a:solidFill>
+                      <a:srgbClr val="111111"/>
+                    </a:solidFill>
+                  </a:tcPr>
+                </a:tc>
+                <a:tc>
+                  <a:txBody>
+                    <a:bodyPr/>
+                    <a:lstStyle/>
+                    <a:p>
+                      <a:pPr algn="ctr"/>
+                      <a:r>
+                        <a:rPr sz="1100" b="1">
+                          <a:solidFill>
+                            <a:srgbClr val="FFFFFF"/>
+                          </a:solidFill>
+                          <a:latin typeface="AppleGothic"/>
+                          <a:ea typeface="AppleGothic"/>
+                        </a:rPr>
+                        <a:t>내용</a:t>
+                      </a:r>
+                    </a:p>
+                  </a:txBody>
+                  <a:tcPr anchor="ctr">
+                    <a:solidFill>
+                      <a:srgbClr val="111111"/>
+                    </a:solidFill>
+                  </a:tcPr>
+                </a:tc>
+              </a:tr>
+              <a:tr h="381000">
+                <a:tc>
+                  <a:txBody>
+                    <a:bodyPr/>
+                    <a:lstStyle/>
+                    <a:p>
+                      <a:pPr algn="ctr"/>
+                      <a:r>
+                        <a:rPr sz="1100" b="1">
+                          <a:solidFill>
+                            <a:srgbClr val="111111"/>
+                          </a:solidFill>
+                          <a:latin typeface="AppleGothic"/>
+                          <a:ea typeface="AppleGothic"/>
+                        </a:rPr>
+                        <a:t>Zn / Na</a:t>
+                      </a:r>
+                    </a:p>
+                  </a:txBody>
+                  <a:tcPr anchor="ctr">
+                    <a:solidFill>
+                      <a:srgbClr val="FFFFFF"/>
+                    </a:solidFill>
+                  </a:tcPr>
+                </a:tc>
+                <a:tc>
+                  <a:txBody>
+                    <a:bodyPr/>
+                    <a:lstStyle/>
+                    <a:p>
+                      <a:pPr algn="ctr"/>
+                      <a:r>
+                        <a:rPr sz="1100" b="0">
+                          <a:solidFill>
+                            <a:srgbClr val="111111"/>
+                          </a:solidFill>
+                          <a:latin typeface="AppleGothic"/>
+                          <a:ea typeface="AppleGothic"/>
+                        </a:rPr>
+                        <a:t>사후 개발 — untouched 확증 아님</a:t>
+                      </a:r>
+                    </a:p>
+                  </a:txBody>
+                  <a:tcPr anchor="ctr">
+                    <a:solidFill>
+                      <a:srgbClr val="FFFFFF"/>
+                    </a:solidFill>
+                  </a:tcPr>
+                </a:tc>
+              </a:tr>
+              <a:tr h="381000">
+                <a:tc>
+                  <a:txBody>
+                    <a:bodyPr/>
+                    <a:lstStyle/>
+                    <a:p>
+                      <a:pPr algn="ctr"/>
+                      <a:r>
+                        <a:rPr sz="1100" b="1">
+                          <a:solidFill>
+                            <a:srgbClr val="111111"/>
+                          </a:solidFill>
+                          <a:latin typeface="AppleGothic"/>
+                          <a:ea typeface="AppleGothic"/>
+                        </a:rPr>
+                        <a:t>교차도메인</a:t>
+                      </a:r>
+                    </a:p>
+                  </a:txBody>
+                  <a:tcPr anchor="ctr">
+                    <a:solidFill>
+                      <a:srgbClr val="F2F2F0"/>
+                    </a:solidFill>
+                  </a:tcPr>
+                </a:tc>
+                <a:tc>
+                  <a:txBody>
+                    <a:bodyPr/>
+                    <a:lstStyle/>
+                    <a:p>
+                      <a:pPr algn="ctr"/>
+                      <a:r>
+                        <a:rPr sz="1100" b="0">
+                          <a:solidFill>
+                            <a:srgbClr val="111111"/>
+                          </a:solidFill>
+                          <a:latin typeface="AppleGothic"/>
+                          <a:ea typeface="AppleGothic"/>
+                        </a:rPr>
+                        <a:t>XJTU · FEMTO 우월성 전</a:t>
+                      </a:r>
+                    </a:p>
+                  </a:txBody>
+                  <a:tcPr anchor="ctr">
+                    <a:solidFill>
+                      <a:srgbClr val="F2F2F0"/>
+                    </a:solidFill>
+                  </a:tcPr>
+                </a:tc>
+              </a:tr>
+              <a:tr h="381000">
+                <a:tc>
+                  <a:txBody>
+                    <a:bodyPr/>
+                    <a:lstStyle/>
+                    <a:p>
+                      <a:pPr algn="ctr"/>
+                      <a:r>
+                        <a:rPr sz="1100" b="1">
+                          <a:solidFill>
+                            <a:srgbClr val="111111"/>
+                          </a:solidFill>
+                          <a:latin typeface="AppleGothic"/>
+                          <a:ea typeface="AppleGothic"/>
+                        </a:rPr>
+                        <a:t>PAE</a:t>
+                      </a:r>
+                    </a:p>
+                  </a:txBody>
+                  <a:tcPr anchor="ctr">
+                    <a:solidFill>
+                      <a:srgbClr val="FFFFFF"/>
+                    </a:solidFill>
+                  </a:tcPr>
+                </a:tc>
+                <a:tc>
+                  <a:txBody>
+                    <a:bodyPr/>
+                    <a:lstStyle/>
+                    <a:p>
+                      <a:pPr algn="ctr"/>
+                      <a:r>
+                        <a:rPr sz="1100" b="0">
+                          <a:solidFill>
+                            <a:srgbClr val="111111"/>
+                          </a:solidFill>
+                          <a:latin typeface="AppleGothic"/>
+                          <a:ea typeface="AppleGothic"/>
+                        </a:rPr>
+                        <a:t>식 라우팅 실험 없음 · 표 분리</a:t>
+                      </a:r>
+                    </a:p>
+                  </a:txBody>
+                  <a:tcPr anchor="ctr">
+                    <a:solidFill>
+                      <a:srgbClr val="FFFFFF"/>
+                    </a:solidFill>
+                  </a:tcPr>
+                </a:tc>
+              </a:tr>
+              <a:tr h="381000">
+                <a:tc>
+                  <a:txBody>
+                    <a:bodyPr/>
+                    <a:lstStyle/>
+                    <a:p>
+                      <a:pPr algn="ctr"/>
+                      <a:r>
+                        <a:rPr sz="1100" b="1">
+                          <a:solidFill>
+                            <a:srgbClr val="111111"/>
+                          </a:solidFill>
+                          <a:latin typeface="AppleGothic"/>
+                          <a:ea typeface="AppleGothic"/>
+                        </a:rPr>
+                        <a:t>만능 SOTA</a:t>
+                      </a:r>
+                    </a:p>
+                  </a:txBody>
+                  <a:tcPr anchor="ctr">
+                    <a:solidFill>
+                      <a:srgbClr val="F2F2F0"/>
+                    </a:solidFill>
+                  </a:tcPr>
+                </a:tc>
+                <a:tc>
+                  <a:txBody>
+                    <a:bodyPr/>
+                    <a:lstStyle/>
+                    <a:p>
+                      <a:pPr algn="ctr"/>
+                      <a:r>
+                        <a:rPr sz="1100" b="0">
+                          <a:solidFill>
+                            <a:srgbClr val="111111"/>
+                          </a:solidFill>
+                          <a:latin typeface="AppleGothic"/>
+                          <a:ea typeface="AppleGothic"/>
+                        </a:rPr>
+                        <a:t>모든 OOD 1등 아님</a:t>
+                      </a:r>
+                    </a:p>
+                  </a:txBody>
+                  <a:tcPr anchor="ctr">
+                    <a:solidFill>
+                      <a:srgbClr val="F2F2F0"/>
+                    </a:solidFill>
+                  </a:tcPr>
+                </a:tc>
+              </a:tr>
+            </a:tbl>
+          </a:graphicData>
+        </a:graphic>
+      </p:graphicFrame>
       <p:cxnSp>
         <p:nvCxnSpPr>
-          <p:cNvPr id="8" name="Connector 7"/>
+          <p:cNvPr id="12" name="Connector 11"/>
           <p:cNvCxnSpPr/>
           <p:nvPr/>
         </p:nvCxnSpPr>
@@ -3649,7 +4779,7 @@
       </p:cxnSp>
       <p:sp>
         <p:nvSpPr>
-          <p:cNvPr id="9" name="TextBox 8"/>
+          <p:cNvPr id="13" name="TextBox 12"/>
           <p:cNvSpPr txBox="1"/>
           <p:nvPr/>
         </p:nvSpPr>
@@ -3685,7 +4815,7 @@
       </p:sp>
       <p:sp>
         <p:nvSpPr>
-          <p:cNvPr id="10" name="TextBox 9"/>
+          <p:cNvPr id="14" name="TextBox 13"/>
           <p:cNvSpPr txBox="1"/>
           <p:nvPr/>
         </p:nvSpPr>
@@ -5247,17 +6377,329 @@
         </p:blipFill>
         <p:spPr>
           <a:xfrm>
-            <a:off x="381000" y="952500"/>
-            <a:ext cx="11430000" cy="4762500"/>
+            <a:off x="381000" y="904875"/>
+            <a:ext cx="6667500" cy="4000500"/>
           </a:xfrm>
           <a:prstGeom prst="rect">
             <a:avLst/>
           </a:prstGeom>
         </p:spPr>
       </p:pic>
+      <p:graphicFrame>
+        <p:nvGraphicFramePr>
+          <p:cNvPr id="7" name="Table 6"/>
+          <p:cNvGraphicFramePr>
+            <a:graphicFrameLocks noGrp="1"/>
+          </p:cNvGraphicFramePr>
+          <p:nvPr/>
+        </p:nvGraphicFramePr>
+        <p:xfrm>
+          <a:off x="7239000" y="1524000"/>
+          <a:ext cx="4381500" cy="2667000"/>
+        </p:xfrm>
+        <a:graphic>
+          <a:graphicData uri="http://schemas.openxmlformats.org/drawingml/2006/table">
+            <a:tbl>
+              <a:tblPr firstRow="1" bandRow="1">
+                <a:tableStyleId>{5C22544A-7EE6-4342-B048-85BDC9FD1C3A}</a:tableStyleId>
+              </a:tblPr>
+              <a:tblGrid>
+                <a:gridCol w="2190750"/>
+                <a:gridCol w="2190750"/>
+              </a:tblGrid>
+              <a:tr h="533400">
+                <a:tc>
+                  <a:txBody>
+                    <a:bodyPr/>
+                    <a:lstStyle/>
+                    <a:p>
+                      <a:pPr algn="ctr"/>
+                      <a:r>
+                        <a:rPr sz="1400" b="1">
+                          <a:solidFill>
+                            <a:srgbClr val="FFFFFF"/>
+                          </a:solidFill>
+                          <a:latin typeface="AppleGothic"/>
+                          <a:ea typeface="AppleGothic"/>
+                        </a:rPr>
+                        <a:t>데이터</a:t>
+                      </a:r>
+                    </a:p>
+                  </a:txBody>
+                  <a:tcPr anchor="ctr">
+                    <a:solidFill>
+                      <a:srgbClr val="111111"/>
+                    </a:solidFill>
+                  </a:tcPr>
+                </a:tc>
+                <a:tc>
+                  <a:txBody>
+                    <a:bodyPr/>
+                    <a:lstStyle/>
+                    <a:p>
+                      <a:pPr algn="ctr"/>
+                      <a:r>
+                        <a:rPr sz="1400" b="1">
+                          <a:solidFill>
+                            <a:srgbClr val="FFFFFF"/>
+                          </a:solidFill>
+                          <a:latin typeface="AppleGothic"/>
+                          <a:ea typeface="AppleGothic"/>
+                        </a:rPr>
+                        <a:t>R²</a:t>
+                      </a:r>
+                    </a:p>
+                  </a:txBody>
+                  <a:tcPr anchor="ctr">
+                    <a:solidFill>
+                      <a:srgbClr val="111111"/>
+                    </a:solidFill>
+                  </a:tcPr>
+                </a:tc>
+              </a:tr>
+              <a:tr h="533400">
+                <a:tc>
+                  <a:txBody>
+                    <a:bodyPr/>
+                    <a:lstStyle/>
+                    <a:p>
+                      <a:pPr algn="ctr"/>
+                      <a:r>
+                        <a:rPr sz="1400" b="1">
+                          <a:solidFill>
+                            <a:srgbClr val="111111"/>
+                          </a:solidFill>
+                          <a:latin typeface="AppleGothic"/>
+                          <a:ea typeface="AppleGothic"/>
+                        </a:rPr>
+                        <a:t>Sunwoda</a:t>
+                      </a:r>
+                    </a:p>
+                  </a:txBody>
+                  <a:tcPr anchor="ctr">
+                    <a:solidFill>
+                      <a:srgbClr val="FFFFFF"/>
+                    </a:solidFill>
+                  </a:tcPr>
+                </a:tc>
+                <a:tc>
+                  <a:txBody>
+                    <a:bodyPr/>
+                    <a:lstStyle/>
+                    <a:p>
+                      <a:pPr algn="ctr"/>
+                      <a:r>
+                        <a:rPr sz="1400" b="0">
+                          <a:solidFill>
+                            <a:srgbClr val="111111"/>
+                          </a:solidFill>
+                          <a:latin typeface="AppleGothic"/>
+                          <a:ea typeface="AppleGothic"/>
+                        </a:rPr>
+                        <a:t>0.934</a:t>
+                      </a:r>
+                    </a:p>
+                  </a:txBody>
+                  <a:tcPr anchor="ctr">
+                    <a:solidFill>
+                      <a:srgbClr val="FFFFFF"/>
+                    </a:solidFill>
+                  </a:tcPr>
+                </a:tc>
+              </a:tr>
+              <a:tr h="533400">
+                <a:tc>
+                  <a:txBody>
+                    <a:bodyPr/>
+                    <a:lstStyle/>
+                    <a:p>
+                      <a:pPr algn="ctr"/>
+                      <a:r>
+                        <a:rPr sz="1400" b="1">
+                          <a:solidFill>
+                            <a:srgbClr val="111111"/>
+                          </a:solidFill>
+                          <a:latin typeface="AppleGothic"/>
+                          <a:ea typeface="AppleGothic"/>
+                        </a:rPr>
+                        <a:t>RWTH</a:t>
+                      </a:r>
+                    </a:p>
+                  </a:txBody>
+                  <a:tcPr anchor="ctr">
+                    <a:solidFill>
+                      <a:srgbClr val="F2F2F0"/>
+                    </a:solidFill>
+                  </a:tcPr>
+                </a:tc>
+                <a:tc>
+                  <a:txBody>
+                    <a:bodyPr/>
+                    <a:lstStyle/>
+                    <a:p>
+                      <a:pPr algn="ctr"/>
+                      <a:r>
+                        <a:rPr sz="1400" b="0">
+                          <a:solidFill>
+                            <a:srgbClr val="111111"/>
+                          </a:solidFill>
+                          <a:latin typeface="AppleGothic"/>
+                          <a:ea typeface="AppleGothic"/>
+                        </a:rPr>
+                        <a:t>0.842</a:t>
+                      </a:r>
+                    </a:p>
+                  </a:txBody>
+                  <a:tcPr anchor="ctr">
+                    <a:solidFill>
+                      <a:srgbClr val="F2F2F0"/>
+                    </a:solidFill>
+                  </a:tcPr>
+                </a:tc>
+              </a:tr>
+              <a:tr h="533400">
+                <a:tc>
+                  <a:txBody>
+                    <a:bodyPr/>
+                    <a:lstStyle/>
+                    <a:p>
+                      <a:pPr algn="ctr"/>
+                      <a:r>
+                        <a:rPr sz="1400" b="1">
+                          <a:solidFill>
+                            <a:srgbClr val="111111"/>
+                          </a:solidFill>
+                          <a:latin typeface="AppleGothic"/>
+                          <a:ea typeface="AppleGothic"/>
+                        </a:rPr>
+                        <a:t>MICH</a:t>
+                      </a:r>
+                    </a:p>
+                  </a:txBody>
+                  <a:tcPr anchor="ctr">
+                    <a:solidFill>
+                      <a:srgbClr val="FFFFFF"/>
+                    </a:solidFill>
+                  </a:tcPr>
+                </a:tc>
+                <a:tc>
+                  <a:txBody>
+                    <a:bodyPr/>
+                    <a:lstStyle/>
+                    <a:p>
+                      <a:pPr algn="ctr"/>
+                      <a:r>
+                        <a:rPr sz="1400" b="0">
+                          <a:solidFill>
+                            <a:srgbClr val="111111"/>
+                          </a:solidFill>
+                          <a:latin typeface="AppleGothic"/>
+                          <a:ea typeface="AppleGothic"/>
+                        </a:rPr>
+                        <a:t>0.751</a:t>
+                      </a:r>
+                    </a:p>
+                  </a:txBody>
+                  <a:tcPr anchor="ctr">
+                    <a:solidFill>
+                      <a:srgbClr val="FFFFFF"/>
+                    </a:solidFill>
+                  </a:tcPr>
+                </a:tc>
+              </a:tr>
+              <a:tr h="533400">
+                <a:tc>
+                  <a:txBody>
+                    <a:bodyPr/>
+                    <a:lstStyle/>
+                    <a:p>
+                      <a:pPr algn="ctr"/>
+                      <a:r>
+                        <a:rPr sz="1400" b="1">
+                          <a:solidFill>
+                            <a:srgbClr val="0A5C5C"/>
+                          </a:solidFill>
+                          <a:latin typeface="AppleGothic"/>
+                          <a:ea typeface="AppleGothic"/>
+                        </a:rPr>
+                        <a:t>평균</a:t>
+                      </a:r>
+                    </a:p>
+                  </a:txBody>
+                  <a:tcPr anchor="ctr">
+                    <a:solidFill>
+                      <a:srgbClr val="DCEBEB"/>
+                    </a:solidFill>
+                  </a:tcPr>
+                </a:tc>
+                <a:tc>
+                  <a:txBody>
+                    <a:bodyPr/>
+                    <a:lstStyle/>
+                    <a:p>
+                      <a:pPr algn="ctr"/>
+                      <a:r>
+                        <a:rPr sz="1400" b="1">
+                          <a:solidFill>
+                            <a:srgbClr val="0A5C5C"/>
+                          </a:solidFill>
+                          <a:latin typeface="AppleGothic"/>
+                          <a:ea typeface="AppleGothic"/>
+                        </a:rPr>
+                        <a:t>0.842</a:t>
+                      </a:r>
+                    </a:p>
+                  </a:txBody>
+                  <a:tcPr anchor="ctr">
+                    <a:solidFill>
+                      <a:srgbClr val="DCEBEB"/>
+                    </a:solidFill>
+                  </a:tcPr>
+                </a:tc>
+              </a:tr>
+            </a:tbl>
+          </a:graphicData>
+        </a:graphic>
+      </p:graphicFrame>
+      <p:sp>
+        <p:nvSpPr>
+          <p:cNvPr id="8" name="TextBox 7"/>
+          <p:cNvSpPr txBox="1"/>
+          <p:nvPr/>
+        </p:nvSpPr>
+        <p:spPr>
+          <a:xfrm>
+            <a:off x="7239000" y="4381500"/>
+            <a:ext cx="4381500" cy="571500"/>
+          </a:xfrm>
+          <a:prstGeom prst="rect">
+            <a:avLst/>
+          </a:prstGeom>
+          <a:noFill/>
+        </p:spPr>
+        <p:txBody>
+          <a:bodyPr wrap="square">
+            <a:spAutoFit/>
+          </a:bodyPr>
+          <a:lstStyle/>
+          <a:p>
+            <a:pPr algn="l"/>
+            <a:r>
+              <a:rPr sz="1200" b="0">
+                <a:solidFill>
+                  <a:srgbClr val="555555"/>
+                </a:solidFill>
+                <a:latin typeface="AppleGothic"/>
+                <a:ea typeface="AppleGothic"/>
+              </a:rPr>
+              <a:t>만능 SOTA 아님  ·  PAE 결과는 이번 표에 없음</a:t>
+            </a:r>
+          </a:p>
+        </p:txBody>
+      </p:sp>
       <p:cxnSp>
         <p:nvCxnSpPr>
-          <p:cNvPr id="7" name="Connector 6"/>
+          <p:cNvPr id="9" name="Connector 8"/>
           <p:cNvCxnSpPr/>
           <p:nvPr/>
         </p:nvCxnSpPr>
@@ -5292,7 +6734,7 @@
       </p:cxnSp>
       <p:sp>
         <p:nvSpPr>
-          <p:cNvPr id="8" name="TextBox 7"/>
+          <p:cNvPr id="10" name="TextBox 9"/>
           <p:cNvSpPr txBox="1"/>
           <p:nvPr/>
         </p:nvSpPr>
@@ -5328,7 +6770,7 @@
       </p:sp>
       <p:sp>
         <p:nvSpPr>
-          <p:cNvPr id="9" name="TextBox 8"/>
+          <p:cNvPr id="11" name="TextBox 10"/>
           <p:cNvSpPr txBox="1"/>
           <p:nvPr/>
         </p:nvSpPr>
@@ -5554,17 +6996,813 @@
         </p:blipFill>
         <p:spPr>
           <a:xfrm>
-            <a:off x="285750" y="809625"/>
-            <a:ext cx="11620500" cy="5238750"/>
+            <a:off x="285750" y="857250"/>
+            <a:ext cx="6858000" cy="4572000"/>
           </a:xfrm>
           <a:prstGeom prst="rect">
             <a:avLst/>
           </a:prstGeom>
         </p:spPr>
       </p:pic>
+      <p:graphicFrame>
+        <p:nvGraphicFramePr>
+          <p:cNvPr id="7" name="Table 6"/>
+          <p:cNvGraphicFramePr>
+            <a:graphicFrameLocks noGrp="1"/>
+          </p:cNvGraphicFramePr>
+          <p:nvPr/>
+        </p:nvGraphicFramePr>
+        <p:xfrm>
+          <a:off x="7239000" y="1143000"/>
+          <a:ext cx="4476750" cy="3048000"/>
+        </p:xfrm>
+        <a:graphic>
+          <a:graphicData uri="http://schemas.openxmlformats.org/drawingml/2006/table">
+            <a:tbl>
+              <a:tblPr firstRow="1" bandRow="1">
+                <a:tableStyleId>{5C22544A-7EE6-4342-B048-85BDC9FD1C3A}</a:tableStyleId>
+              </a:tblPr>
+              <a:tblGrid>
+                <a:gridCol w="746125"/>
+                <a:gridCol w="746125"/>
+                <a:gridCol w="746125"/>
+                <a:gridCol w="746125"/>
+                <a:gridCol w="746125"/>
+                <a:gridCol w="746125"/>
+              </a:tblGrid>
+              <a:tr h="609600">
+                <a:tc>
+                  <a:txBody>
+                    <a:bodyPr/>
+                    <a:lstStyle/>
+                    <a:p>
+                      <a:pPr algn="ctr"/>
+                      <a:r>
+                        <a:rPr sz="1100" b="1">
+                          <a:solidFill>
+                            <a:srgbClr val="FFFFFF"/>
+                          </a:solidFill>
+                          <a:latin typeface="AppleGothic"/>
+                          <a:ea typeface="AppleGothic"/>
+                        </a:rPr>
+                        <a:t>모형</a:t>
+                      </a:r>
+                    </a:p>
+                  </a:txBody>
+                  <a:tcPr anchor="ctr">
+                    <a:solidFill>
+                      <a:srgbClr val="111111"/>
+                    </a:solidFill>
+                  </a:tcPr>
+                </a:tc>
+                <a:tc>
+                  <a:txBody>
+                    <a:bodyPr/>
+                    <a:lstStyle/>
+                    <a:p>
+                      <a:pPr algn="ctr"/>
+                      <a:r>
+                        <a:rPr sz="1100" b="1">
+                          <a:solidFill>
+                            <a:srgbClr val="FFFFFF"/>
+                          </a:solidFill>
+                          <a:latin typeface="AppleGothic"/>
+                          <a:ea typeface="AppleGothic"/>
+                        </a:rPr>
+                        <a:t>Sun</a:t>
+                      </a:r>
+                    </a:p>
+                  </a:txBody>
+                  <a:tcPr anchor="ctr">
+                    <a:solidFill>
+                      <a:srgbClr val="111111"/>
+                    </a:solidFill>
+                  </a:tcPr>
+                </a:tc>
+                <a:tc>
+                  <a:txBody>
+                    <a:bodyPr/>
+                    <a:lstStyle/>
+                    <a:p>
+                      <a:pPr algn="ctr"/>
+                      <a:r>
+                        <a:rPr sz="1100" b="1">
+                          <a:solidFill>
+                            <a:srgbClr val="FFFFFF"/>
+                          </a:solidFill>
+                          <a:latin typeface="AppleGothic"/>
+                          <a:ea typeface="AppleGothic"/>
+                        </a:rPr>
+                        <a:t>RWTH</a:t>
+                      </a:r>
+                    </a:p>
+                  </a:txBody>
+                  <a:tcPr anchor="ctr">
+                    <a:solidFill>
+                      <a:srgbClr val="111111"/>
+                    </a:solidFill>
+                  </a:tcPr>
+                </a:tc>
+                <a:tc>
+                  <a:txBody>
+                    <a:bodyPr/>
+                    <a:lstStyle/>
+                    <a:p>
+                      <a:pPr algn="ctr"/>
+                      <a:r>
+                        <a:rPr sz="1100" b="1">
+                          <a:solidFill>
+                            <a:srgbClr val="FFFFFF"/>
+                          </a:solidFill>
+                          <a:latin typeface="AppleGothic"/>
+                          <a:ea typeface="AppleGothic"/>
+                        </a:rPr>
+                        <a:t>MICH</a:t>
+                      </a:r>
+                    </a:p>
+                  </a:txBody>
+                  <a:tcPr anchor="ctr">
+                    <a:solidFill>
+                      <a:srgbClr val="111111"/>
+                    </a:solidFill>
+                  </a:tcPr>
+                </a:tc>
+                <a:tc>
+                  <a:txBody>
+                    <a:bodyPr/>
+                    <a:lstStyle/>
+                    <a:p>
+                      <a:pPr algn="ctr"/>
+                      <a:r>
+                        <a:rPr sz="1100" b="1">
+                          <a:solidFill>
+                            <a:srgbClr val="FFFFFF"/>
+                          </a:solidFill>
+                          <a:latin typeface="AppleGothic"/>
+                          <a:ea typeface="AppleGothic"/>
+                        </a:rPr>
+                        <a:t>평균</a:t>
+                      </a:r>
+                    </a:p>
+                  </a:txBody>
+                  <a:tcPr anchor="ctr">
+                    <a:solidFill>
+                      <a:srgbClr val="111111"/>
+                    </a:solidFill>
+                  </a:tcPr>
+                </a:tc>
+                <a:tc>
+                  <a:txBody>
+                    <a:bodyPr/>
+                    <a:lstStyle/>
+                    <a:p>
+                      <a:pPr algn="ctr"/>
+                      <a:r>
+                        <a:rPr sz="1100" b="1">
+                          <a:solidFill>
+                            <a:srgbClr val="FFFFFF"/>
+                          </a:solidFill>
+                          <a:latin typeface="AppleGothic"/>
+                          <a:ea typeface="AppleGothic"/>
+                        </a:rPr>
+                        <a:t>최저</a:t>
+                      </a:r>
+                    </a:p>
+                  </a:txBody>
+                  <a:tcPr anchor="ctr">
+                    <a:solidFill>
+                      <a:srgbClr val="111111"/>
+                    </a:solidFill>
+                  </a:tcPr>
+                </a:tc>
+              </a:tr>
+              <a:tr h="609600">
+                <a:tc>
+                  <a:txBody>
+                    <a:bodyPr/>
+                    <a:lstStyle/>
+                    <a:p>
+                      <a:pPr algn="l"/>
+                      <a:r>
+                        <a:rPr sz="1100" b="1">
+                          <a:solidFill>
+                            <a:srgbClr val="111111"/>
+                          </a:solidFill>
+                          <a:latin typeface="AppleGothic"/>
+                          <a:ea typeface="AppleGothic"/>
+                        </a:rPr>
+                        <a:t>고정 경계</a:t>
+                      </a:r>
+                    </a:p>
+                  </a:txBody>
+                  <a:tcPr anchor="ctr">
+                    <a:solidFill>
+                      <a:srgbClr val="FFFFFF"/>
+                    </a:solidFill>
+                  </a:tcPr>
+                </a:tc>
+                <a:tc>
+                  <a:txBody>
+                    <a:bodyPr/>
+                    <a:lstStyle/>
+                    <a:p>
+                      <a:pPr algn="ctr"/>
+                      <a:r>
+                        <a:rPr sz="1100" b="0">
+                          <a:solidFill>
+                            <a:srgbClr val="111111"/>
+                          </a:solidFill>
+                          <a:latin typeface="AppleGothic"/>
+                          <a:ea typeface="AppleGothic"/>
+                        </a:rPr>
+                        <a:t>0.939</a:t>
+                      </a:r>
+                    </a:p>
+                  </a:txBody>
+                  <a:tcPr anchor="ctr">
+                    <a:solidFill>
+                      <a:srgbClr val="FFFFFF"/>
+                    </a:solidFill>
+                  </a:tcPr>
+                </a:tc>
+                <a:tc>
+                  <a:txBody>
+                    <a:bodyPr/>
+                    <a:lstStyle/>
+                    <a:p>
+                      <a:pPr algn="l"/>
+                      <a:r>
+                        <a:rPr sz="1100" b="0">
+                          <a:solidFill>
+                            <a:srgbClr val="111111"/>
+                          </a:solidFill>
+                          <a:latin typeface="AppleGothic"/>
+                          <a:ea typeface="AppleGothic"/>
+                        </a:rPr>
+                        <a:t>0.878</a:t>
+                      </a:r>
+                    </a:p>
+                  </a:txBody>
+                  <a:tcPr anchor="ctr">
+                    <a:solidFill>
+                      <a:srgbClr val="FFFFFF"/>
+                    </a:solidFill>
+                  </a:tcPr>
+                </a:tc>
+                <a:tc>
+                  <a:txBody>
+                    <a:bodyPr/>
+                    <a:lstStyle/>
+                    <a:p>
+                      <a:pPr algn="l"/>
+                      <a:r>
+                        <a:rPr sz="1100" b="0">
+                          <a:solidFill>
+                            <a:srgbClr val="111111"/>
+                          </a:solidFill>
+                          <a:latin typeface="AppleGothic"/>
+                          <a:ea typeface="AppleGothic"/>
+                        </a:rPr>
+                        <a:t>0.468</a:t>
+                      </a:r>
+                    </a:p>
+                  </a:txBody>
+                  <a:tcPr anchor="ctr">
+                    <a:solidFill>
+                      <a:srgbClr val="FFFFFF"/>
+                    </a:solidFill>
+                  </a:tcPr>
+                </a:tc>
+                <a:tc>
+                  <a:txBody>
+                    <a:bodyPr/>
+                    <a:lstStyle/>
+                    <a:p>
+                      <a:pPr algn="ctr"/>
+                      <a:r>
+                        <a:rPr sz="1100" b="0">
+                          <a:solidFill>
+                            <a:srgbClr val="111111"/>
+                          </a:solidFill>
+                          <a:latin typeface="AppleGothic"/>
+                          <a:ea typeface="AppleGothic"/>
+                        </a:rPr>
+                        <a:t>0.762</a:t>
+                      </a:r>
+                    </a:p>
+                  </a:txBody>
+                  <a:tcPr anchor="ctr">
+                    <a:solidFill>
+                      <a:srgbClr val="FFFFFF"/>
+                    </a:solidFill>
+                  </a:tcPr>
+                </a:tc>
+                <a:tc>
+                  <a:txBody>
+                    <a:bodyPr/>
+                    <a:lstStyle/>
+                    <a:p>
+                      <a:pPr algn="ctr"/>
+                      <a:r>
+                        <a:rPr sz="1100" b="0">
+                          <a:solidFill>
+                            <a:srgbClr val="111111"/>
+                          </a:solidFill>
+                          <a:latin typeface="AppleGothic"/>
+                          <a:ea typeface="AppleGothic"/>
+                        </a:rPr>
+                        <a:t>0.468</a:t>
+                      </a:r>
+                    </a:p>
+                  </a:txBody>
+                  <a:tcPr anchor="ctr">
+                    <a:solidFill>
+                      <a:srgbClr val="FFFFFF"/>
+                    </a:solidFill>
+                  </a:tcPr>
+                </a:tc>
+              </a:tr>
+              <a:tr h="609600">
+                <a:tc>
+                  <a:txBody>
+                    <a:bodyPr/>
+                    <a:lstStyle/>
+                    <a:p>
+                      <a:pPr algn="l"/>
+                      <a:r>
+                        <a:rPr sz="1100" b="1">
+                          <a:solidFill>
+                            <a:srgbClr val="111111"/>
+                          </a:solidFill>
+                          <a:latin typeface="AppleGothic"/>
+                          <a:ea typeface="AppleGothic"/>
+                        </a:rPr>
+                        <a:t>무제한</a:t>
+                      </a:r>
+                    </a:p>
+                  </a:txBody>
+                  <a:tcPr anchor="ctr">
+                    <a:solidFill>
+                      <a:srgbClr val="F2F2F0"/>
+                    </a:solidFill>
+                  </a:tcPr>
+                </a:tc>
+                <a:tc>
+                  <a:txBody>
+                    <a:bodyPr/>
+                    <a:lstStyle/>
+                    <a:p>
+                      <a:pPr algn="ctr"/>
+                      <a:r>
+                        <a:rPr sz="1100" b="0">
+                          <a:solidFill>
+                            <a:srgbClr val="111111"/>
+                          </a:solidFill>
+                          <a:latin typeface="AppleGothic"/>
+                          <a:ea typeface="AppleGothic"/>
+                        </a:rPr>
+                        <a:t>0.718</a:t>
+                      </a:r>
+                    </a:p>
+                  </a:txBody>
+                  <a:tcPr anchor="ctr">
+                    <a:solidFill>
+                      <a:srgbClr val="F2F2F0"/>
+                    </a:solidFill>
+                  </a:tcPr>
+                </a:tc>
+                <a:tc>
+                  <a:txBody>
+                    <a:bodyPr/>
+                    <a:lstStyle/>
+                    <a:p>
+                      <a:pPr algn="l"/>
+                      <a:r>
+                        <a:rPr sz="1100" b="0">
+                          <a:solidFill>
+                            <a:srgbClr val="111111"/>
+                          </a:solidFill>
+                          <a:latin typeface="AppleGothic"/>
+                          <a:ea typeface="AppleGothic"/>
+                        </a:rPr>
+                        <a:t>0.788</a:t>
+                      </a:r>
+                    </a:p>
+                  </a:txBody>
+                  <a:tcPr anchor="ctr">
+                    <a:solidFill>
+                      <a:srgbClr val="F2F2F0"/>
+                    </a:solidFill>
+                  </a:tcPr>
+                </a:tc>
+                <a:tc>
+                  <a:txBody>
+                    <a:bodyPr/>
+                    <a:lstStyle/>
+                    <a:p>
+                      <a:pPr algn="l"/>
+                      <a:r>
+                        <a:rPr sz="1100" b="0">
+                          <a:solidFill>
+                            <a:srgbClr val="111111"/>
+                          </a:solidFill>
+                          <a:latin typeface="AppleGothic"/>
+                          <a:ea typeface="AppleGothic"/>
+                        </a:rPr>
+                        <a:t>0.759</a:t>
+                      </a:r>
+                    </a:p>
+                  </a:txBody>
+                  <a:tcPr anchor="ctr">
+                    <a:solidFill>
+                      <a:srgbClr val="F2F2F0"/>
+                    </a:solidFill>
+                  </a:tcPr>
+                </a:tc>
+                <a:tc>
+                  <a:txBody>
+                    <a:bodyPr/>
+                    <a:lstStyle/>
+                    <a:p>
+                      <a:pPr algn="ctr"/>
+                      <a:r>
+                        <a:rPr sz="1100" b="0">
+                          <a:solidFill>
+                            <a:srgbClr val="111111"/>
+                          </a:solidFill>
+                          <a:latin typeface="AppleGothic"/>
+                          <a:ea typeface="AppleGothic"/>
+                        </a:rPr>
+                        <a:t>0.755</a:t>
+                      </a:r>
+                    </a:p>
+                  </a:txBody>
+                  <a:tcPr anchor="ctr">
+                    <a:solidFill>
+                      <a:srgbClr val="F2F2F0"/>
+                    </a:solidFill>
+                  </a:tcPr>
+                </a:tc>
+                <a:tc>
+                  <a:txBody>
+                    <a:bodyPr/>
+                    <a:lstStyle/>
+                    <a:p>
+                      <a:pPr algn="ctr"/>
+                      <a:r>
+                        <a:rPr sz="1100" b="0">
+                          <a:solidFill>
+                            <a:srgbClr val="111111"/>
+                          </a:solidFill>
+                          <a:latin typeface="AppleGothic"/>
+                          <a:ea typeface="AppleGothic"/>
+                        </a:rPr>
+                        <a:t>0.718</a:t>
+                      </a:r>
+                    </a:p>
+                  </a:txBody>
+                  <a:tcPr anchor="ctr">
+                    <a:solidFill>
+                      <a:srgbClr val="F2F2F0"/>
+                    </a:solidFill>
+                  </a:tcPr>
+                </a:tc>
+              </a:tr>
+              <a:tr h="609600">
+                <a:tc>
+                  <a:txBody>
+                    <a:bodyPr/>
+                    <a:lstStyle/>
+                    <a:p>
+                      <a:pPr algn="l"/>
+                      <a:r>
+                        <a:rPr sz="1100" b="1">
+                          <a:solidFill>
+                            <a:srgbClr val="111111"/>
+                          </a:solidFill>
+                          <a:latin typeface="AppleGothic"/>
+                          <a:ea typeface="AppleGothic"/>
+                        </a:rPr>
+                        <a:t>거리보정</a:t>
+                      </a:r>
+                    </a:p>
+                  </a:txBody>
+                  <a:tcPr anchor="ctr">
+                    <a:solidFill>
+                      <a:srgbClr val="FFFFFF"/>
+                    </a:solidFill>
+                  </a:tcPr>
+                </a:tc>
+                <a:tc>
+                  <a:txBody>
+                    <a:bodyPr/>
+                    <a:lstStyle/>
+                    <a:p>
+                      <a:pPr algn="ctr"/>
+                      <a:r>
+                        <a:rPr sz="1100" b="0">
+                          <a:solidFill>
+                            <a:srgbClr val="111111"/>
+                          </a:solidFill>
+                          <a:latin typeface="AppleGothic"/>
+                          <a:ea typeface="AppleGothic"/>
+                        </a:rPr>
+                        <a:t>0.894</a:t>
+                      </a:r>
+                    </a:p>
+                  </a:txBody>
+                  <a:tcPr anchor="ctr">
+                    <a:solidFill>
+                      <a:srgbClr val="FFFFFF"/>
+                    </a:solidFill>
+                  </a:tcPr>
+                </a:tc>
+                <a:tc>
+                  <a:txBody>
+                    <a:bodyPr/>
+                    <a:lstStyle/>
+                    <a:p>
+                      <a:pPr algn="l"/>
+                      <a:r>
+                        <a:rPr sz="1100" b="0">
+                          <a:solidFill>
+                            <a:srgbClr val="111111"/>
+                          </a:solidFill>
+                          <a:latin typeface="AppleGothic"/>
+                          <a:ea typeface="AppleGothic"/>
+                        </a:rPr>
+                        <a:t>0.800</a:t>
+                      </a:r>
+                    </a:p>
+                  </a:txBody>
+                  <a:tcPr anchor="ctr">
+                    <a:solidFill>
+                      <a:srgbClr val="FFFFFF"/>
+                    </a:solidFill>
+                  </a:tcPr>
+                </a:tc>
+                <a:tc>
+                  <a:txBody>
+                    <a:bodyPr/>
+                    <a:lstStyle/>
+                    <a:p>
+                      <a:pPr algn="l"/>
+                      <a:r>
+                        <a:rPr sz="1100" b="0">
+                          <a:solidFill>
+                            <a:srgbClr val="111111"/>
+                          </a:solidFill>
+                          <a:latin typeface="AppleGothic"/>
+                          <a:ea typeface="AppleGothic"/>
+                        </a:rPr>
+                        <a:t>0.736</a:t>
+                      </a:r>
+                    </a:p>
+                  </a:txBody>
+                  <a:tcPr anchor="ctr">
+                    <a:solidFill>
+                      <a:srgbClr val="FFFFFF"/>
+                    </a:solidFill>
+                  </a:tcPr>
+                </a:tc>
+                <a:tc>
+                  <a:txBody>
+                    <a:bodyPr/>
+                    <a:lstStyle/>
+                    <a:p>
+                      <a:pPr algn="ctr"/>
+                      <a:r>
+                        <a:rPr sz="1100" b="0">
+                          <a:solidFill>
+                            <a:srgbClr val="111111"/>
+                          </a:solidFill>
+                          <a:latin typeface="AppleGothic"/>
+                          <a:ea typeface="AppleGothic"/>
+                        </a:rPr>
+                        <a:t>0.810</a:t>
+                      </a:r>
+                    </a:p>
+                  </a:txBody>
+                  <a:tcPr anchor="ctr">
+                    <a:solidFill>
+                      <a:srgbClr val="FFFFFF"/>
+                    </a:solidFill>
+                  </a:tcPr>
+                </a:tc>
+                <a:tc>
+                  <a:txBody>
+                    <a:bodyPr/>
+                    <a:lstStyle/>
+                    <a:p>
+                      <a:pPr algn="ctr"/>
+                      <a:r>
+                        <a:rPr sz="1100" b="0">
+                          <a:solidFill>
+                            <a:srgbClr val="111111"/>
+                          </a:solidFill>
+                          <a:latin typeface="AppleGothic"/>
+                          <a:ea typeface="AppleGothic"/>
+                        </a:rPr>
+                        <a:t>0.736</a:t>
+                      </a:r>
+                    </a:p>
+                  </a:txBody>
+                  <a:tcPr anchor="ctr">
+                    <a:solidFill>
+                      <a:srgbClr val="FFFFFF"/>
+                    </a:solidFill>
+                  </a:tcPr>
+                </a:tc>
+              </a:tr>
+              <a:tr h="609600">
+                <a:tc>
+                  <a:txBody>
+                    <a:bodyPr/>
+                    <a:lstStyle/>
+                    <a:p>
+                      <a:pPr algn="l"/>
+                      <a:r>
+                        <a:rPr sz="1100" b="1">
+                          <a:solidFill>
+                            <a:srgbClr val="0A5C5C"/>
+                          </a:solidFill>
+                          <a:latin typeface="AppleGothic"/>
+                          <a:ea typeface="AppleGothic"/>
+                        </a:rPr>
+                        <a:t>SAAR</a:t>
+                      </a:r>
+                    </a:p>
+                  </a:txBody>
+                  <a:tcPr anchor="ctr">
+                    <a:solidFill>
+                      <a:srgbClr val="DCEBEB"/>
+                    </a:solidFill>
+                  </a:tcPr>
+                </a:tc>
+                <a:tc>
+                  <a:txBody>
+                    <a:bodyPr/>
+                    <a:lstStyle/>
+                    <a:p>
+                      <a:pPr algn="ctr"/>
+                      <a:r>
+                        <a:rPr sz="1100" b="1">
+                          <a:solidFill>
+                            <a:srgbClr val="0A5C5C"/>
+                          </a:solidFill>
+                          <a:latin typeface="AppleGothic"/>
+                          <a:ea typeface="AppleGothic"/>
+                        </a:rPr>
+                        <a:t>0.934</a:t>
+                      </a:r>
+                    </a:p>
+                  </a:txBody>
+                  <a:tcPr anchor="ctr">
+                    <a:solidFill>
+                      <a:srgbClr val="DCEBEB"/>
+                    </a:solidFill>
+                  </a:tcPr>
+                </a:tc>
+                <a:tc>
+                  <a:txBody>
+                    <a:bodyPr/>
+                    <a:lstStyle/>
+                    <a:p>
+                      <a:pPr algn="l"/>
+                      <a:r>
+                        <a:rPr sz="1100" b="1">
+                          <a:solidFill>
+                            <a:srgbClr val="0A5C5C"/>
+                          </a:solidFill>
+                          <a:latin typeface="AppleGothic"/>
+                          <a:ea typeface="AppleGothic"/>
+                        </a:rPr>
+                        <a:t>0.842</a:t>
+                      </a:r>
+                    </a:p>
+                  </a:txBody>
+                  <a:tcPr anchor="ctr">
+                    <a:solidFill>
+                      <a:srgbClr val="DCEBEB"/>
+                    </a:solidFill>
+                  </a:tcPr>
+                </a:tc>
+                <a:tc>
+                  <a:txBody>
+                    <a:bodyPr/>
+                    <a:lstStyle/>
+                    <a:p>
+                      <a:pPr algn="l"/>
+                      <a:r>
+                        <a:rPr sz="1100" b="1">
+                          <a:solidFill>
+                            <a:srgbClr val="0A5C5C"/>
+                          </a:solidFill>
+                          <a:latin typeface="AppleGothic"/>
+                          <a:ea typeface="AppleGothic"/>
+                        </a:rPr>
+                        <a:t>0.751</a:t>
+                      </a:r>
+                    </a:p>
+                  </a:txBody>
+                  <a:tcPr anchor="ctr">
+                    <a:solidFill>
+                      <a:srgbClr val="DCEBEB"/>
+                    </a:solidFill>
+                  </a:tcPr>
+                </a:tc>
+                <a:tc>
+                  <a:txBody>
+                    <a:bodyPr/>
+                    <a:lstStyle/>
+                    <a:p>
+                      <a:pPr algn="ctr"/>
+                      <a:r>
+                        <a:rPr sz="1100" b="1">
+                          <a:solidFill>
+                            <a:srgbClr val="0A5C5C"/>
+                          </a:solidFill>
+                          <a:latin typeface="AppleGothic"/>
+                          <a:ea typeface="AppleGothic"/>
+                        </a:rPr>
+                        <a:t>0.842</a:t>
+                      </a:r>
+                    </a:p>
+                  </a:txBody>
+                  <a:tcPr anchor="ctr">
+                    <a:solidFill>
+                      <a:srgbClr val="DCEBEB"/>
+                    </a:solidFill>
+                  </a:tcPr>
+                </a:tc>
+                <a:tc>
+                  <a:txBody>
+                    <a:bodyPr/>
+                    <a:lstStyle/>
+                    <a:p>
+                      <a:pPr algn="ctr"/>
+                      <a:r>
+                        <a:rPr sz="1100" b="1">
+                          <a:solidFill>
+                            <a:srgbClr val="0A5C5C"/>
+                          </a:solidFill>
+                          <a:latin typeface="AppleGothic"/>
+                          <a:ea typeface="AppleGothic"/>
+                        </a:rPr>
+                        <a:t>0.751</a:t>
+                      </a:r>
+                    </a:p>
+                  </a:txBody>
+                  <a:tcPr anchor="ctr">
+                    <a:solidFill>
+                      <a:srgbClr val="DCEBEB"/>
+                    </a:solidFill>
+                  </a:tcPr>
+                </a:tc>
+              </a:tr>
+            </a:tbl>
+          </a:graphicData>
+        </a:graphic>
+      </p:graphicFrame>
+      <p:sp>
+        <p:nvSpPr>
+          <p:cNvPr id="8" name="TextBox 7"/>
+          <p:cNvSpPr txBox="1"/>
+          <p:nvPr/>
+        </p:nvSpPr>
+        <p:spPr>
+          <a:xfrm>
+            <a:off x="7239000" y="4381500"/>
+            <a:ext cx="4476750" cy="476250"/>
+          </a:xfrm>
+          <a:prstGeom prst="rect">
+            <a:avLst/>
+          </a:prstGeom>
+          <a:noFill/>
+        </p:spPr>
+        <p:txBody>
+          <a:bodyPr wrap="square">
+            <a:spAutoFit/>
+          </a:bodyPr>
+          <a:lstStyle/>
+          <a:p>
+            <a:pPr algn="l"/>
+            <a:r>
+              <a:rPr sz="1100" b="0">
+                <a:solidFill>
+                  <a:srgbClr val="555555"/>
+                </a:solidFill>
+                <a:latin typeface="AppleGothic"/>
+                <a:ea typeface="AppleGothic"/>
+              </a:rPr>
+              <a:t>최저(MICH)를 살린 tradeoff  ·  확증 cohort 별도</a:t>
+            </a:r>
+          </a:p>
+        </p:txBody>
+      </p:sp>
       <p:cxnSp>
         <p:nvCxnSpPr>
-          <p:cNvPr id="7" name="Connector 6"/>
+          <p:cNvPr id="9" name="Connector 8"/>
           <p:cNvCxnSpPr/>
           <p:nvPr/>
         </p:nvCxnSpPr>
@@ -5599,7 +7837,7 @@
       </p:cxnSp>
       <p:sp>
         <p:nvSpPr>
-          <p:cNvPr id="8" name="TextBox 7"/>
+          <p:cNvPr id="10" name="TextBox 9"/>
           <p:cNvSpPr txBox="1"/>
           <p:nvPr/>
         </p:nvSpPr>
@@ -5635,7 +7873,7 @@
       </p:sp>
       <p:sp>
         <p:nvSpPr>
-          <p:cNvPr id="9" name="TextBox 8"/>
+          <p:cNvPr id="11" name="TextBox 10"/>
           <p:cNvSpPr txBox="1"/>
           <p:nvPr/>
         </p:nvSpPr>
@@ -6454,7 +8692,7 @@
                 <a:latin typeface="AppleGothic"/>
                 <a:ea typeface="AppleGothic"/>
               </a:rPr>
-              <a:t>bootstrap CI  ·  MICH unit $R^2$</a:t>
+              <a:t>bootstrap CI  ·  MICH unit R²</a:t>
             </a:r>
           </a:p>
         </p:txBody>

--- a/output/PP_Research_Detailed_v2.pptx
+++ b/output/PP_Research_Detailed_v2.pptx
@@ -8385,7 +8385,7 @@
                 <a:latin typeface="AppleGothic"/>
                 <a:ea typeface="AppleGothic"/>
               </a:rPr>
-              <a:t>양의 8곳 × 전 알고리즘 (SAAR … TabPFN 한 그래프)</a:t>
+              <a:t>(a) heatmap  ·  (b) SAAR vs TabPFN vs others  ·  아래는 동일 수치 표</a:t>
             </a:r>
           </a:p>
         </p:txBody>
@@ -8406,17 +8406,2012 @@
         </p:blipFill>
         <p:spPr>
           <a:xfrm>
-            <a:off x="381000" y="742950"/>
-            <a:ext cx="11430000" cy="5334000"/>
+            <a:off x="381000" y="781050"/>
+            <a:ext cx="11239500" cy="3429000"/>
           </a:xfrm>
           <a:prstGeom prst="rect">
             <a:avLst/>
           </a:prstGeom>
         </p:spPr>
       </p:pic>
+      <p:graphicFrame>
+        <p:nvGraphicFramePr>
+          <p:cNvPr id="7" name="Table 6"/>
+          <p:cNvGraphicFramePr>
+            <a:graphicFrameLocks noGrp="1"/>
+          </p:cNvGraphicFramePr>
+          <p:nvPr/>
+        </p:nvGraphicFramePr>
+        <p:xfrm>
+          <a:off x="381000" y="4333875"/>
+          <a:ext cx="11430000" cy="1905000"/>
+        </p:xfrm>
+        <a:graphic>
+          <a:graphicData uri="http://schemas.openxmlformats.org/drawingml/2006/table">
+            <a:tbl>
+              <a:tblPr firstRow="1" bandRow="1">
+                <a:tableStyleId>{5C22544A-7EE6-4342-B048-85BDC9FD1C3A}</a:tableStyleId>
+              </a:tblPr>
+              <a:tblGrid>
+                <a:gridCol w="1270000"/>
+                <a:gridCol w="1270000"/>
+                <a:gridCol w="1270000"/>
+                <a:gridCol w="1270000"/>
+                <a:gridCol w="1270000"/>
+                <a:gridCol w="1270000"/>
+                <a:gridCol w="1270000"/>
+                <a:gridCol w="1270000"/>
+                <a:gridCol w="1270000"/>
+              </a:tblGrid>
+              <a:tr h="211666">
+                <a:tc>
+                  <a:txBody>
+                    <a:bodyPr/>
+                    <a:lstStyle/>
+                    <a:p>
+                      <a:pPr algn="ctr"/>
+                      <a:r>
+                        <a:rPr sz="900" b="1">
+                          <a:solidFill>
+                            <a:srgbClr val="FFFFFF"/>
+                          </a:solidFill>
+                          <a:latin typeface="AppleGothic"/>
+                          <a:ea typeface="AppleGothic"/>
+                        </a:rPr>
+                        <a:t>Dataset</a:t>
+                      </a:r>
+                    </a:p>
+                  </a:txBody>
+                  <a:tcPr anchor="ctr">
+                    <a:solidFill>
+                      <a:srgbClr val="111111"/>
+                    </a:solidFill>
+                  </a:tcPr>
+                </a:tc>
+                <a:tc>
+                  <a:txBody>
+                    <a:bodyPr/>
+                    <a:lstStyle/>
+                    <a:p>
+                      <a:pPr algn="ctr"/>
+                      <a:r>
+                        <a:rPr sz="900" b="1">
+                          <a:solidFill>
+                            <a:srgbClr val="FFFFFF"/>
+                          </a:solidFill>
+                          <a:latin typeface="AppleGothic"/>
+                          <a:ea typeface="AppleGothic"/>
+                        </a:rPr>
+                        <a:t>SAAR</a:t>
+                      </a:r>
+                    </a:p>
+                  </a:txBody>
+                  <a:tcPr anchor="ctr">
+                    <a:solidFill>
+                      <a:srgbClr val="111111"/>
+                    </a:solidFill>
+                  </a:tcPr>
+                </a:tc>
+                <a:tc>
+                  <a:txBody>
+                    <a:bodyPr/>
+                    <a:lstStyle/>
+                    <a:p>
+                      <a:pPr algn="ctr"/>
+                      <a:r>
+                        <a:rPr sz="900" b="1">
+                          <a:solidFill>
+                            <a:srgbClr val="FFFFFF"/>
+                          </a:solidFill>
+                          <a:latin typeface="AppleGothic"/>
+                          <a:ea typeface="AppleGothic"/>
+                        </a:rPr>
+                        <a:t>V-REx</a:t>
+                      </a:r>
+                    </a:p>
+                  </a:txBody>
+                  <a:tcPr anchor="ctr">
+                    <a:solidFill>
+                      <a:srgbClr val="111111"/>
+                    </a:solidFill>
+                  </a:tcPr>
+                </a:tc>
+                <a:tc>
+                  <a:txBody>
+                    <a:bodyPr/>
+                    <a:lstStyle/>
+                    <a:p>
+                      <a:pPr algn="ctr"/>
+                      <a:r>
+                        <a:rPr sz="900" b="1">
+                          <a:solidFill>
+                            <a:srgbClr val="FFFFFF"/>
+                          </a:solidFill>
+                          <a:latin typeface="AppleGothic"/>
+                          <a:ea typeface="AppleGothic"/>
+                        </a:rPr>
+                        <a:t>G-DRO</a:t>
+                      </a:r>
+                    </a:p>
+                  </a:txBody>
+                  <a:tcPr anchor="ctr">
+                    <a:solidFill>
+                      <a:srgbClr val="111111"/>
+                    </a:solidFill>
+                  </a:tcPr>
+                </a:tc>
+                <a:tc>
+                  <a:txBody>
+                    <a:bodyPr/>
+                    <a:lstStyle/>
+                    <a:p>
+                      <a:pPr algn="ctr"/>
+                      <a:r>
+                        <a:rPr sz="900" b="1">
+                          <a:solidFill>
+                            <a:srgbClr val="FFFFFF"/>
+                          </a:solidFill>
+                          <a:latin typeface="AppleGothic"/>
+                          <a:ea typeface="AppleGothic"/>
+                        </a:rPr>
+                        <a:t>Mono</a:t>
+                      </a:r>
+                    </a:p>
+                  </a:txBody>
+                  <a:tcPr anchor="ctr">
+                    <a:solidFill>
+                      <a:srgbClr val="111111"/>
+                    </a:solidFill>
+                  </a:tcPr>
+                </a:tc>
+                <a:tc>
+                  <a:txBody>
+                    <a:bodyPr/>
+                    <a:lstStyle/>
+                    <a:p>
+                      <a:pPr algn="ctr"/>
+                      <a:r>
+                        <a:rPr sz="900" b="1">
+                          <a:solidFill>
+                            <a:srgbClr val="FFFFFF"/>
+                          </a:solidFill>
+                          <a:latin typeface="AppleGothic"/>
+                          <a:ea typeface="AppleGothic"/>
+                        </a:rPr>
+                        <a:t>LinRBF</a:t>
+                      </a:r>
+                    </a:p>
+                  </a:txBody>
+                  <a:tcPr anchor="ctr">
+                    <a:solidFill>
+                      <a:srgbClr val="111111"/>
+                    </a:solidFill>
+                  </a:tcPr>
+                </a:tc>
+                <a:tc>
+                  <a:txBody>
+                    <a:bodyPr/>
+                    <a:lstStyle/>
+                    <a:p>
+                      <a:pPr algn="ctr"/>
+                      <a:r>
+                        <a:rPr sz="900" b="1">
+                          <a:solidFill>
+                            <a:srgbClr val="FFFFFF"/>
+                          </a:solidFill>
+                          <a:latin typeface="AppleGothic"/>
+                          <a:ea typeface="AppleGothic"/>
+                        </a:rPr>
+                        <a:t>Engr.</a:t>
+                      </a:r>
+                    </a:p>
+                  </a:txBody>
+                  <a:tcPr anchor="ctr">
+                    <a:solidFill>
+                      <a:srgbClr val="111111"/>
+                    </a:solidFill>
+                  </a:tcPr>
+                </a:tc>
+                <a:tc>
+                  <a:txBody>
+                    <a:bodyPr/>
+                    <a:lstStyle/>
+                    <a:p>
+                      <a:pPr algn="ctr"/>
+                      <a:r>
+                        <a:rPr sz="900" b="1">
+                          <a:solidFill>
+                            <a:srgbClr val="FFFFFF"/>
+                          </a:solidFill>
+                          <a:latin typeface="AppleGothic"/>
+                          <a:ea typeface="AppleGothic"/>
+                        </a:rPr>
+                        <a:t>GP</a:t>
+                      </a:r>
+                    </a:p>
+                  </a:txBody>
+                  <a:tcPr anchor="ctr">
+                    <a:solidFill>
+                      <a:srgbClr val="111111"/>
+                    </a:solidFill>
+                  </a:tcPr>
+                </a:tc>
+                <a:tc>
+                  <a:txBody>
+                    <a:bodyPr/>
+                    <a:lstStyle/>
+                    <a:p>
+                      <a:pPr algn="ctr"/>
+                      <a:r>
+                        <a:rPr sz="900" b="1">
+                          <a:solidFill>
+                            <a:srgbClr val="FFFFFF"/>
+                          </a:solidFill>
+                          <a:latin typeface="AppleGothic"/>
+                          <a:ea typeface="AppleGothic"/>
+                        </a:rPr>
+                        <a:t>TabPFN</a:t>
+                      </a:r>
+                    </a:p>
+                  </a:txBody>
+                  <a:tcPr anchor="ctr">
+                    <a:solidFill>
+                      <a:srgbClr val="111111"/>
+                    </a:solidFill>
+                  </a:tcPr>
+                </a:tc>
+              </a:tr>
+              <a:tr h="211666">
+                <a:tc>
+                  <a:txBody>
+                    <a:bodyPr/>
+                    <a:lstStyle/>
+                    <a:p>
+                      <a:pPr algn="l"/>
+                      <a:r>
+                        <a:rPr sz="900" b="1">
+                          <a:solidFill>
+                            <a:srgbClr val="111111"/>
+                          </a:solidFill>
+                          <a:latin typeface="AppleGothic"/>
+                          <a:ea typeface="AppleGothic"/>
+                        </a:rPr>
+                        <a:t>HUST</a:t>
+                      </a:r>
+                    </a:p>
+                  </a:txBody>
+                  <a:tcPr anchor="ctr">
+                    <a:solidFill>
+                      <a:srgbClr val="FFFFFF"/>
+                    </a:solidFill>
+                  </a:tcPr>
+                </a:tc>
+                <a:tc>
+                  <a:txBody>
+                    <a:bodyPr/>
+                    <a:lstStyle/>
+                    <a:p>
+                      <a:pPr algn="ctr"/>
+                      <a:r>
+                        <a:rPr sz="900" b="0">
+                          <a:solidFill>
+                            <a:srgbClr val="111111"/>
+                          </a:solidFill>
+                          <a:latin typeface="AppleGothic"/>
+                          <a:ea typeface="AppleGothic"/>
+                        </a:rPr>
+                        <a:t>0.958</a:t>
+                      </a:r>
+                    </a:p>
+                  </a:txBody>
+                  <a:tcPr anchor="ctr">
+                    <a:solidFill>
+                      <a:srgbClr val="FFFFFF"/>
+                    </a:solidFill>
+                  </a:tcPr>
+                </a:tc>
+                <a:tc>
+                  <a:txBody>
+                    <a:bodyPr/>
+                    <a:lstStyle/>
+                    <a:p>
+                      <a:pPr algn="l"/>
+                      <a:r>
+                        <a:rPr sz="900" b="0">
+                          <a:solidFill>
+                            <a:srgbClr val="111111"/>
+                          </a:solidFill>
+                          <a:latin typeface="AppleGothic"/>
+                          <a:ea typeface="AppleGothic"/>
+                        </a:rPr>
+                        <a:t>0.809</a:t>
+                      </a:r>
+                    </a:p>
+                  </a:txBody>
+                  <a:tcPr anchor="ctr">
+                    <a:solidFill>
+                      <a:srgbClr val="FFFFFF"/>
+                    </a:solidFill>
+                  </a:tcPr>
+                </a:tc>
+                <a:tc>
+                  <a:txBody>
+                    <a:bodyPr/>
+                    <a:lstStyle/>
+                    <a:p>
+                      <a:pPr algn="l"/>
+                      <a:r>
+                        <a:rPr sz="900" b="0">
+                          <a:solidFill>
+                            <a:srgbClr val="111111"/>
+                          </a:solidFill>
+                          <a:latin typeface="AppleGothic"/>
+                          <a:ea typeface="AppleGothic"/>
+                        </a:rPr>
+                        <a:t>0.934</a:t>
+                      </a:r>
+                    </a:p>
+                  </a:txBody>
+                  <a:tcPr anchor="ctr">
+                    <a:solidFill>
+                      <a:srgbClr val="FFFFFF"/>
+                    </a:solidFill>
+                  </a:tcPr>
+                </a:tc>
+                <a:tc>
+                  <a:txBody>
+                    <a:bodyPr/>
+                    <a:lstStyle/>
+                    <a:p>
+                      <a:pPr algn="ctr"/>
+                      <a:r>
+                        <a:rPr sz="900" b="0">
+                          <a:solidFill>
+                            <a:srgbClr val="111111"/>
+                          </a:solidFill>
+                          <a:latin typeface="AppleGothic"/>
+                          <a:ea typeface="AppleGothic"/>
+                        </a:rPr>
+                        <a:t>0.822</a:t>
+                      </a:r>
+                    </a:p>
+                  </a:txBody>
+                  <a:tcPr anchor="ctr">
+                    <a:solidFill>
+                      <a:srgbClr val="FFFFFF"/>
+                    </a:solidFill>
+                  </a:tcPr>
+                </a:tc>
+                <a:tc>
+                  <a:txBody>
+                    <a:bodyPr/>
+                    <a:lstStyle/>
+                    <a:p>
+                      <a:pPr algn="ctr"/>
+                      <a:r>
+                        <a:rPr sz="900" b="0">
+                          <a:solidFill>
+                            <a:srgbClr val="111111"/>
+                          </a:solidFill>
+                          <a:latin typeface="AppleGothic"/>
+                          <a:ea typeface="AppleGothic"/>
+                        </a:rPr>
+                        <a:t>0.710</a:t>
+                      </a:r>
+                    </a:p>
+                  </a:txBody>
+                  <a:tcPr anchor="ctr">
+                    <a:solidFill>
+                      <a:srgbClr val="FFFFFF"/>
+                    </a:solidFill>
+                  </a:tcPr>
+                </a:tc>
+                <a:tc>
+                  <a:txBody>
+                    <a:bodyPr/>
+                    <a:lstStyle/>
+                    <a:p>
+                      <a:pPr algn="ctr"/>
+                      <a:r>
+                        <a:rPr sz="900" b="0">
+                          <a:solidFill>
+                            <a:srgbClr val="111111"/>
+                          </a:solidFill>
+                          <a:latin typeface="AppleGothic"/>
+                          <a:ea typeface="AppleGothic"/>
+                        </a:rPr>
+                        <a:t>0.878</a:t>
+                      </a:r>
+                    </a:p>
+                  </a:txBody>
+                  <a:tcPr anchor="ctr">
+                    <a:solidFill>
+                      <a:srgbClr val="FFFFFF"/>
+                    </a:solidFill>
+                  </a:tcPr>
+                </a:tc>
+                <a:tc>
+                  <a:txBody>
+                    <a:bodyPr/>
+                    <a:lstStyle/>
+                    <a:p>
+                      <a:pPr algn="ctr"/>
+                      <a:r>
+                        <a:rPr sz="900" b="0">
+                          <a:solidFill>
+                            <a:srgbClr val="111111"/>
+                          </a:solidFill>
+                          <a:latin typeface="AppleGothic"/>
+                          <a:ea typeface="AppleGothic"/>
+                        </a:rPr>
+                        <a:t>-0.32</a:t>
+                      </a:r>
+                    </a:p>
+                  </a:txBody>
+                  <a:tcPr anchor="ctr">
+                    <a:solidFill>
+                      <a:srgbClr val="FFFFFF"/>
+                    </a:solidFill>
+                  </a:tcPr>
+                </a:tc>
+                <a:tc>
+                  <a:txBody>
+                    <a:bodyPr/>
+                    <a:lstStyle/>
+                    <a:p>
+                      <a:pPr algn="ctr"/>
+                      <a:r>
+                        <a:rPr sz="900" b="0">
+                          <a:solidFill>
+                            <a:srgbClr val="111111"/>
+                          </a:solidFill>
+                          <a:latin typeface="AppleGothic"/>
+                          <a:ea typeface="AppleGothic"/>
+                        </a:rPr>
+                        <a:t>0.218</a:t>
+                      </a:r>
+                    </a:p>
+                  </a:txBody>
+                  <a:tcPr anchor="ctr">
+                    <a:solidFill>
+                      <a:srgbClr val="FFFFFF"/>
+                    </a:solidFill>
+                  </a:tcPr>
+                </a:tc>
+              </a:tr>
+              <a:tr h="211666">
+                <a:tc>
+                  <a:txBody>
+                    <a:bodyPr/>
+                    <a:lstStyle/>
+                    <a:p>
+                      <a:pPr algn="l"/>
+                      <a:r>
+                        <a:rPr sz="900" b="1">
+                          <a:solidFill>
+                            <a:srgbClr val="111111"/>
+                          </a:solidFill>
+                          <a:latin typeface="AppleGothic"/>
+                          <a:ea typeface="AppleGothic"/>
+                        </a:rPr>
+                        <a:t>Virkler</a:t>
+                      </a:r>
+                    </a:p>
+                  </a:txBody>
+                  <a:tcPr anchor="ctr">
+                    <a:solidFill>
+                      <a:srgbClr val="F2F2F0"/>
+                    </a:solidFill>
+                  </a:tcPr>
+                </a:tc>
+                <a:tc>
+                  <a:txBody>
+                    <a:bodyPr/>
+                    <a:lstStyle/>
+                    <a:p>
+                      <a:pPr algn="ctr"/>
+                      <a:r>
+                        <a:rPr sz="900" b="0">
+                          <a:solidFill>
+                            <a:srgbClr val="111111"/>
+                          </a:solidFill>
+                          <a:latin typeface="AppleGothic"/>
+                          <a:ea typeface="AppleGothic"/>
+                        </a:rPr>
+                        <a:t>0.888</a:t>
+                      </a:r>
+                    </a:p>
+                  </a:txBody>
+                  <a:tcPr anchor="ctr">
+                    <a:solidFill>
+                      <a:srgbClr val="F2F2F0"/>
+                    </a:solidFill>
+                  </a:tcPr>
+                </a:tc>
+                <a:tc>
+                  <a:txBody>
+                    <a:bodyPr/>
+                    <a:lstStyle/>
+                    <a:p>
+                      <a:pPr algn="l"/>
+                      <a:r>
+                        <a:rPr sz="900" b="0">
+                          <a:solidFill>
+                            <a:srgbClr val="111111"/>
+                          </a:solidFill>
+                          <a:latin typeface="AppleGothic"/>
+                          <a:ea typeface="AppleGothic"/>
+                        </a:rPr>
+                        <a:t>0.583</a:t>
+                      </a:r>
+                    </a:p>
+                  </a:txBody>
+                  <a:tcPr anchor="ctr">
+                    <a:solidFill>
+                      <a:srgbClr val="F2F2F0"/>
+                    </a:solidFill>
+                  </a:tcPr>
+                </a:tc>
+                <a:tc>
+                  <a:txBody>
+                    <a:bodyPr/>
+                    <a:lstStyle/>
+                    <a:p>
+                      <a:pPr algn="l"/>
+                      <a:r>
+                        <a:rPr sz="900" b="0">
+                          <a:solidFill>
+                            <a:srgbClr val="111111"/>
+                          </a:solidFill>
+                          <a:latin typeface="AppleGothic"/>
+                          <a:ea typeface="AppleGothic"/>
+                        </a:rPr>
+                        <a:t>0.554</a:t>
+                      </a:r>
+                    </a:p>
+                  </a:txBody>
+                  <a:tcPr anchor="ctr">
+                    <a:solidFill>
+                      <a:srgbClr val="F2F2F0"/>
+                    </a:solidFill>
+                  </a:tcPr>
+                </a:tc>
+                <a:tc>
+                  <a:txBody>
+                    <a:bodyPr/>
+                    <a:lstStyle/>
+                    <a:p>
+                      <a:pPr algn="ctr"/>
+                      <a:r>
+                        <a:rPr sz="900" b="0">
+                          <a:solidFill>
+                            <a:srgbClr val="111111"/>
+                          </a:solidFill>
+                          <a:latin typeface="AppleGothic"/>
+                          <a:ea typeface="AppleGothic"/>
+                        </a:rPr>
+                        <a:t>0.565</a:t>
+                      </a:r>
+                    </a:p>
+                  </a:txBody>
+                  <a:tcPr anchor="ctr">
+                    <a:solidFill>
+                      <a:srgbClr val="F2F2F0"/>
+                    </a:solidFill>
+                  </a:tcPr>
+                </a:tc>
+                <a:tc>
+                  <a:txBody>
+                    <a:bodyPr/>
+                    <a:lstStyle/>
+                    <a:p>
+                      <a:pPr algn="ctr"/>
+                      <a:r>
+                        <a:rPr sz="900" b="0">
+                          <a:solidFill>
+                            <a:srgbClr val="111111"/>
+                          </a:solidFill>
+                          <a:latin typeface="AppleGothic"/>
+                          <a:ea typeface="AppleGothic"/>
+                        </a:rPr>
+                        <a:t>0.805</a:t>
+                      </a:r>
+                    </a:p>
+                  </a:txBody>
+                  <a:tcPr anchor="ctr">
+                    <a:solidFill>
+                      <a:srgbClr val="F2F2F0"/>
+                    </a:solidFill>
+                  </a:tcPr>
+                </a:tc>
+                <a:tc>
+                  <a:txBody>
+                    <a:bodyPr/>
+                    <a:lstStyle/>
+                    <a:p>
+                      <a:pPr algn="ctr"/>
+                      <a:r>
+                        <a:rPr sz="900" b="0">
+                          <a:solidFill>
+                            <a:srgbClr val="111111"/>
+                          </a:solidFill>
+                          <a:latin typeface="AppleGothic"/>
+                          <a:ea typeface="AppleGothic"/>
+                        </a:rPr>
+                        <a:t>0.552</a:t>
+                      </a:r>
+                    </a:p>
+                  </a:txBody>
+                  <a:tcPr anchor="ctr">
+                    <a:solidFill>
+                      <a:srgbClr val="F2F2F0"/>
+                    </a:solidFill>
+                  </a:tcPr>
+                </a:tc>
+                <a:tc>
+                  <a:txBody>
+                    <a:bodyPr/>
+                    <a:lstStyle/>
+                    <a:p>
+                      <a:pPr algn="ctr"/>
+                      <a:r>
+                        <a:rPr sz="900" b="0">
+                          <a:solidFill>
+                            <a:srgbClr val="111111"/>
+                          </a:solidFill>
+                          <a:latin typeface="AppleGothic"/>
+                          <a:ea typeface="AppleGothic"/>
+                        </a:rPr>
+                        <a:t>0.54</a:t>
+                      </a:r>
+                    </a:p>
+                  </a:txBody>
+                  <a:tcPr anchor="ctr">
+                    <a:solidFill>
+                      <a:srgbClr val="F2F2F0"/>
+                    </a:solidFill>
+                  </a:tcPr>
+                </a:tc>
+                <a:tc>
+                  <a:txBody>
+                    <a:bodyPr/>
+                    <a:lstStyle/>
+                    <a:p>
+                      <a:pPr algn="ctr"/>
+                      <a:r>
+                        <a:rPr sz="900" b="0">
+                          <a:solidFill>
+                            <a:srgbClr val="111111"/>
+                          </a:solidFill>
+                          <a:latin typeface="AppleGothic"/>
+                          <a:ea typeface="AppleGothic"/>
+                        </a:rPr>
+                        <a:t>0.621</a:t>
+                      </a:r>
+                    </a:p>
+                  </a:txBody>
+                  <a:tcPr anchor="ctr">
+                    <a:solidFill>
+                      <a:srgbClr val="F2F2F0"/>
+                    </a:solidFill>
+                  </a:tcPr>
+                </a:tc>
+              </a:tr>
+              <a:tr h="211666">
+                <a:tc>
+                  <a:txBody>
+                    <a:bodyPr/>
+                    <a:lstStyle/>
+                    <a:p>
+                      <a:pPr algn="l"/>
+                      <a:r>
+                        <a:rPr sz="900" b="1">
+                          <a:solidFill>
+                            <a:srgbClr val="111111"/>
+                          </a:solidFill>
+                          <a:latin typeface="AppleGothic"/>
+                          <a:ea typeface="AppleGothic"/>
+                        </a:rPr>
+                        <a:t>NASA</a:t>
+                      </a:r>
+                    </a:p>
+                  </a:txBody>
+                  <a:tcPr anchor="ctr">
+                    <a:solidFill>
+                      <a:srgbClr val="FFFFFF"/>
+                    </a:solidFill>
+                  </a:tcPr>
+                </a:tc>
+                <a:tc>
+                  <a:txBody>
+                    <a:bodyPr/>
+                    <a:lstStyle/>
+                    <a:p>
+                      <a:pPr algn="ctr"/>
+                      <a:r>
+                        <a:rPr sz="900" b="0">
+                          <a:solidFill>
+                            <a:srgbClr val="111111"/>
+                          </a:solidFill>
+                          <a:latin typeface="AppleGothic"/>
+                          <a:ea typeface="AppleGothic"/>
+                        </a:rPr>
+                        <a:t>0.584</a:t>
+                      </a:r>
+                    </a:p>
+                  </a:txBody>
+                  <a:tcPr anchor="ctr">
+                    <a:solidFill>
+                      <a:srgbClr val="FFFFFF"/>
+                    </a:solidFill>
+                  </a:tcPr>
+                </a:tc>
+                <a:tc>
+                  <a:txBody>
+                    <a:bodyPr/>
+                    <a:lstStyle/>
+                    <a:p>
+                      <a:pPr algn="l"/>
+                      <a:r>
+                        <a:rPr sz="900" b="0">
+                          <a:solidFill>
+                            <a:srgbClr val="111111"/>
+                          </a:solidFill>
+                          <a:latin typeface="AppleGothic"/>
+                          <a:ea typeface="AppleGothic"/>
+                        </a:rPr>
+                        <a:t>0.285</a:t>
+                      </a:r>
+                    </a:p>
+                  </a:txBody>
+                  <a:tcPr anchor="ctr">
+                    <a:solidFill>
+                      <a:srgbClr val="FFFFFF"/>
+                    </a:solidFill>
+                  </a:tcPr>
+                </a:tc>
+                <a:tc>
+                  <a:txBody>
+                    <a:bodyPr/>
+                    <a:lstStyle/>
+                    <a:p>
+                      <a:pPr algn="l"/>
+                      <a:r>
+                        <a:rPr sz="900" b="0">
+                          <a:solidFill>
+                            <a:srgbClr val="111111"/>
+                          </a:solidFill>
+                          <a:latin typeface="AppleGothic"/>
+                          <a:ea typeface="AppleGothic"/>
+                        </a:rPr>
+                        <a:t>0.286</a:t>
+                      </a:r>
+                    </a:p>
+                  </a:txBody>
+                  <a:tcPr anchor="ctr">
+                    <a:solidFill>
+                      <a:srgbClr val="FFFFFF"/>
+                    </a:solidFill>
+                  </a:tcPr>
+                </a:tc>
+                <a:tc>
+                  <a:txBody>
+                    <a:bodyPr/>
+                    <a:lstStyle/>
+                    <a:p>
+                      <a:pPr algn="ctr"/>
+                      <a:r>
+                        <a:rPr sz="900" b="0">
+                          <a:solidFill>
+                            <a:srgbClr val="111111"/>
+                          </a:solidFill>
+                          <a:latin typeface="AppleGothic"/>
+                          <a:ea typeface="AppleGothic"/>
+                        </a:rPr>
+                        <a:t>0.283</a:t>
+                      </a:r>
+                    </a:p>
+                  </a:txBody>
+                  <a:tcPr anchor="ctr">
+                    <a:solidFill>
+                      <a:srgbClr val="FFFFFF"/>
+                    </a:solidFill>
+                  </a:tcPr>
+                </a:tc>
+                <a:tc>
+                  <a:txBody>
+                    <a:bodyPr/>
+                    <a:lstStyle/>
+                    <a:p>
+                      <a:pPr algn="ctr"/>
+                      <a:r>
+                        <a:rPr sz="900" b="0">
+                          <a:solidFill>
+                            <a:srgbClr val="111111"/>
+                          </a:solidFill>
+                          <a:latin typeface="AppleGothic"/>
+                          <a:ea typeface="AppleGothic"/>
+                        </a:rPr>
+                        <a:t>0.550</a:t>
+                      </a:r>
+                    </a:p>
+                  </a:txBody>
+                  <a:tcPr anchor="ctr">
+                    <a:solidFill>
+                      <a:srgbClr val="FFFFFF"/>
+                    </a:solidFill>
+                  </a:tcPr>
+                </a:tc>
+                <a:tc>
+                  <a:txBody>
+                    <a:bodyPr/>
+                    <a:lstStyle/>
+                    <a:p>
+                      <a:pPr algn="ctr"/>
+                      <a:r>
+                        <a:rPr sz="900" b="0">
+                          <a:solidFill>
+                            <a:srgbClr val="111111"/>
+                          </a:solidFill>
+                          <a:latin typeface="AppleGothic"/>
+                          <a:ea typeface="AppleGothic"/>
+                        </a:rPr>
+                        <a:t>0.549</a:t>
+                      </a:r>
+                    </a:p>
+                  </a:txBody>
+                  <a:tcPr anchor="ctr">
+                    <a:solidFill>
+                      <a:srgbClr val="FFFFFF"/>
+                    </a:solidFill>
+                  </a:tcPr>
+                </a:tc>
+                <a:tc>
+                  <a:txBody>
+                    <a:bodyPr/>
+                    <a:lstStyle/>
+                    <a:p>
+                      <a:pPr algn="ctr"/>
+                      <a:r>
+                        <a:rPr sz="900" b="0">
+                          <a:solidFill>
+                            <a:srgbClr val="111111"/>
+                          </a:solidFill>
+                          <a:latin typeface="AppleGothic"/>
+                          <a:ea typeface="AppleGothic"/>
+                        </a:rPr>
+                        <a:t>0.44</a:t>
+                      </a:r>
+                    </a:p>
+                  </a:txBody>
+                  <a:tcPr anchor="ctr">
+                    <a:solidFill>
+                      <a:srgbClr val="FFFFFF"/>
+                    </a:solidFill>
+                  </a:tcPr>
+                </a:tc>
+                <a:tc>
+                  <a:txBody>
+                    <a:bodyPr/>
+                    <a:lstStyle/>
+                    <a:p>
+                      <a:pPr algn="ctr"/>
+                      <a:r>
+                        <a:rPr sz="900" b="0">
+                          <a:solidFill>
+                            <a:srgbClr val="111111"/>
+                          </a:solidFill>
+                          <a:latin typeface="AppleGothic"/>
+                          <a:ea typeface="AppleGothic"/>
+                        </a:rPr>
+                        <a:t>-0.69</a:t>
+                      </a:r>
+                    </a:p>
+                  </a:txBody>
+                  <a:tcPr anchor="ctr">
+                    <a:solidFill>
+                      <a:srgbClr val="FFFFFF"/>
+                    </a:solidFill>
+                  </a:tcPr>
+                </a:tc>
+              </a:tr>
+              <a:tr h="211666">
+                <a:tc>
+                  <a:txBody>
+                    <a:bodyPr/>
+                    <a:lstStyle/>
+                    <a:p>
+                      <a:pPr algn="l"/>
+                      <a:r>
+                        <a:rPr sz="900" b="1">
+                          <a:solidFill>
+                            <a:srgbClr val="111111"/>
+                          </a:solidFill>
+                          <a:latin typeface="AppleGothic"/>
+                          <a:ea typeface="AppleGothic"/>
+                        </a:rPr>
+                        <a:t>Sunwoda</a:t>
+                      </a:r>
+                    </a:p>
+                  </a:txBody>
+                  <a:tcPr anchor="ctr">
+                    <a:solidFill>
+                      <a:srgbClr val="F2F2F0"/>
+                    </a:solidFill>
+                  </a:tcPr>
+                </a:tc>
+                <a:tc>
+                  <a:txBody>
+                    <a:bodyPr/>
+                    <a:lstStyle/>
+                    <a:p>
+                      <a:pPr algn="ctr"/>
+                      <a:r>
+                        <a:rPr sz="900" b="0">
+                          <a:solidFill>
+                            <a:srgbClr val="111111"/>
+                          </a:solidFill>
+                          <a:latin typeface="AppleGothic"/>
+                          <a:ea typeface="AppleGothic"/>
+                        </a:rPr>
+                        <a:t>0.865</a:t>
+                      </a:r>
+                    </a:p>
+                  </a:txBody>
+                  <a:tcPr anchor="ctr">
+                    <a:solidFill>
+                      <a:srgbClr val="F2F2F0"/>
+                    </a:solidFill>
+                  </a:tcPr>
+                </a:tc>
+                <a:tc>
+                  <a:txBody>
+                    <a:bodyPr/>
+                    <a:lstStyle/>
+                    <a:p>
+                      <a:pPr algn="l"/>
+                      <a:r>
+                        <a:rPr sz="900" b="0">
+                          <a:solidFill>
+                            <a:srgbClr val="111111"/>
+                          </a:solidFill>
+                          <a:latin typeface="AppleGothic"/>
+                          <a:ea typeface="AppleGothic"/>
+                        </a:rPr>
+                        <a:t>-0.24</a:t>
+                      </a:r>
+                    </a:p>
+                  </a:txBody>
+                  <a:tcPr anchor="ctr">
+                    <a:solidFill>
+                      <a:srgbClr val="F2F2F0"/>
+                    </a:solidFill>
+                  </a:tcPr>
+                </a:tc>
+                <a:tc>
+                  <a:txBody>
+                    <a:bodyPr/>
+                    <a:lstStyle/>
+                    <a:p>
+                      <a:pPr algn="l"/>
+                      <a:r>
+                        <a:rPr sz="900" b="0">
+                          <a:solidFill>
+                            <a:srgbClr val="111111"/>
+                          </a:solidFill>
+                          <a:latin typeface="AppleGothic"/>
+                          <a:ea typeface="AppleGothic"/>
+                        </a:rPr>
+                        <a:t>-0.30</a:t>
+                      </a:r>
+                    </a:p>
+                  </a:txBody>
+                  <a:tcPr anchor="ctr">
+                    <a:solidFill>
+                      <a:srgbClr val="F2F2F0"/>
+                    </a:solidFill>
+                  </a:tcPr>
+                </a:tc>
+                <a:tc>
+                  <a:txBody>
+                    <a:bodyPr/>
+                    <a:lstStyle/>
+                    <a:p>
+                      <a:pPr algn="ctr"/>
+                      <a:r>
+                        <a:rPr sz="900" b="0">
+                          <a:solidFill>
+                            <a:srgbClr val="111111"/>
+                          </a:solidFill>
+                          <a:latin typeface="AppleGothic"/>
+                          <a:ea typeface="AppleGothic"/>
+                        </a:rPr>
+                        <a:t>-0.05</a:t>
+                      </a:r>
+                    </a:p>
+                  </a:txBody>
+                  <a:tcPr anchor="ctr">
+                    <a:solidFill>
+                      <a:srgbClr val="F2F2F0"/>
+                    </a:solidFill>
+                  </a:tcPr>
+                </a:tc>
+                <a:tc>
+                  <a:txBody>
+                    <a:bodyPr/>
+                    <a:lstStyle/>
+                    <a:p>
+                      <a:pPr algn="ctr"/>
+                      <a:r>
+                        <a:rPr sz="900" b="0">
+                          <a:solidFill>
+                            <a:srgbClr val="111111"/>
+                          </a:solidFill>
+                          <a:latin typeface="AppleGothic"/>
+                          <a:ea typeface="AppleGothic"/>
+                        </a:rPr>
+                        <a:t>0.838</a:t>
+                      </a:r>
+                    </a:p>
+                  </a:txBody>
+                  <a:tcPr anchor="ctr">
+                    <a:solidFill>
+                      <a:srgbClr val="F2F2F0"/>
+                    </a:solidFill>
+                  </a:tcPr>
+                </a:tc>
+                <a:tc>
+                  <a:txBody>
+                    <a:bodyPr/>
+                    <a:lstStyle/>
+                    <a:p>
+                      <a:pPr algn="ctr"/>
+                      <a:r>
+                        <a:rPr sz="900" b="0">
+                          <a:solidFill>
+                            <a:srgbClr val="111111"/>
+                          </a:solidFill>
+                          <a:latin typeface="AppleGothic"/>
+                          <a:ea typeface="AppleGothic"/>
+                        </a:rPr>
+                        <a:t>0.619</a:t>
+                      </a:r>
+                    </a:p>
+                  </a:txBody>
+                  <a:tcPr anchor="ctr">
+                    <a:solidFill>
+                      <a:srgbClr val="F2F2F0"/>
+                    </a:solidFill>
+                  </a:tcPr>
+                </a:tc>
+                <a:tc>
+                  <a:txBody>
+                    <a:bodyPr/>
+                    <a:lstStyle/>
+                    <a:p>
+                      <a:pPr algn="ctr"/>
+                      <a:r>
+                        <a:rPr sz="900" b="0">
+                          <a:solidFill>
+                            <a:srgbClr val="111111"/>
+                          </a:solidFill>
+                          <a:latin typeface="AppleGothic"/>
+                          <a:ea typeface="AppleGothic"/>
+                        </a:rPr>
+                        <a:t>-1.60</a:t>
+                      </a:r>
+                    </a:p>
+                  </a:txBody>
+                  <a:tcPr anchor="ctr">
+                    <a:solidFill>
+                      <a:srgbClr val="F2F2F0"/>
+                    </a:solidFill>
+                  </a:tcPr>
+                </a:tc>
+                <a:tc>
+                  <a:txBody>
+                    <a:bodyPr/>
+                    <a:lstStyle/>
+                    <a:p>
+                      <a:pPr algn="ctr"/>
+                      <a:r>
+                        <a:rPr sz="900" b="0">
+                          <a:solidFill>
+                            <a:srgbClr val="111111"/>
+                          </a:solidFill>
+                          <a:latin typeface="AppleGothic"/>
+                          <a:ea typeface="AppleGothic"/>
+                        </a:rPr>
+                        <a:t>-0.89</a:t>
+                      </a:r>
+                    </a:p>
+                  </a:txBody>
+                  <a:tcPr anchor="ctr">
+                    <a:solidFill>
+                      <a:srgbClr val="F2F2F0"/>
+                    </a:solidFill>
+                  </a:tcPr>
+                </a:tc>
+              </a:tr>
+              <a:tr h="211666">
+                <a:tc>
+                  <a:txBody>
+                    <a:bodyPr/>
+                    <a:lstStyle/>
+                    <a:p>
+                      <a:pPr algn="l"/>
+                      <a:r>
+                        <a:rPr sz="900" b="1">
+                          <a:solidFill>
+                            <a:srgbClr val="111111"/>
+                          </a:solidFill>
+                          <a:latin typeface="AppleGothic"/>
+                          <a:ea typeface="AppleGothic"/>
+                        </a:rPr>
+                        <a:t>RWTH</a:t>
+                      </a:r>
+                    </a:p>
+                  </a:txBody>
+                  <a:tcPr anchor="ctr">
+                    <a:solidFill>
+                      <a:srgbClr val="FFFFFF"/>
+                    </a:solidFill>
+                  </a:tcPr>
+                </a:tc>
+                <a:tc>
+                  <a:txBody>
+                    <a:bodyPr/>
+                    <a:lstStyle/>
+                    <a:p>
+                      <a:pPr algn="ctr"/>
+                      <a:r>
+                        <a:rPr sz="900" b="0">
+                          <a:solidFill>
+                            <a:srgbClr val="111111"/>
+                          </a:solidFill>
+                          <a:latin typeface="AppleGothic"/>
+                          <a:ea typeface="AppleGothic"/>
+                        </a:rPr>
+                        <a:t>0.743</a:t>
+                      </a:r>
+                    </a:p>
+                  </a:txBody>
+                  <a:tcPr anchor="ctr">
+                    <a:solidFill>
+                      <a:srgbClr val="FFFFFF"/>
+                    </a:solidFill>
+                  </a:tcPr>
+                </a:tc>
+                <a:tc>
+                  <a:txBody>
+                    <a:bodyPr/>
+                    <a:lstStyle/>
+                    <a:p>
+                      <a:pPr algn="l"/>
+                      <a:r>
+                        <a:rPr sz="900" b="0">
+                          <a:solidFill>
+                            <a:srgbClr val="111111"/>
+                          </a:solidFill>
+                          <a:latin typeface="AppleGothic"/>
+                          <a:ea typeface="AppleGothic"/>
+                        </a:rPr>
+                        <a:t>0.645</a:t>
+                      </a:r>
+                    </a:p>
+                  </a:txBody>
+                  <a:tcPr anchor="ctr">
+                    <a:solidFill>
+                      <a:srgbClr val="FFFFFF"/>
+                    </a:solidFill>
+                  </a:tcPr>
+                </a:tc>
+                <a:tc>
+                  <a:txBody>
+                    <a:bodyPr/>
+                    <a:lstStyle/>
+                    <a:p>
+                      <a:pPr algn="l"/>
+                      <a:r>
+                        <a:rPr sz="900" b="0">
+                          <a:solidFill>
+                            <a:srgbClr val="111111"/>
+                          </a:solidFill>
+                          <a:latin typeface="AppleGothic"/>
+                          <a:ea typeface="AppleGothic"/>
+                        </a:rPr>
+                        <a:t>0.602</a:t>
+                      </a:r>
+                    </a:p>
+                  </a:txBody>
+                  <a:tcPr anchor="ctr">
+                    <a:solidFill>
+                      <a:srgbClr val="FFFFFF"/>
+                    </a:solidFill>
+                  </a:tcPr>
+                </a:tc>
+                <a:tc>
+                  <a:txBody>
+                    <a:bodyPr/>
+                    <a:lstStyle/>
+                    <a:p>
+                      <a:pPr algn="ctr"/>
+                      <a:r>
+                        <a:rPr sz="900" b="0">
+                          <a:solidFill>
+                            <a:srgbClr val="111111"/>
+                          </a:solidFill>
+                          <a:latin typeface="AppleGothic"/>
+                          <a:ea typeface="AppleGothic"/>
+                        </a:rPr>
+                        <a:t>-0.01</a:t>
+                      </a:r>
+                    </a:p>
+                  </a:txBody>
+                  <a:tcPr anchor="ctr">
+                    <a:solidFill>
+                      <a:srgbClr val="FFFFFF"/>
+                    </a:solidFill>
+                  </a:tcPr>
+                </a:tc>
+                <a:tc>
+                  <a:txBody>
+                    <a:bodyPr/>
+                    <a:lstStyle/>
+                    <a:p>
+                      <a:pPr algn="ctr"/>
+                      <a:r>
+                        <a:rPr sz="900" b="0">
+                          <a:solidFill>
+                            <a:srgbClr val="111111"/>
+                          </a:solidFill>
+                          <a:latin typeface="AppleGothic"/>
+                          <a:ea typeface="AppleGothic"/>
+                        </a:rPr>
+                        <a:t>0.385</a:t>
+                      </a:r>
+                    </a:p>
+                  </a:txBody>
+                  <a:tcPr anchor="ctr">
+                    <a:solidFill>
+                      <a:srgbClr val="FFFFFF"/>
+                    </a:solidFill>
+                  </a:tcPr>
+                </a:tc>
+                <a:tc>
+                  <a:txBody>
+                    <a:bodyPr/>
+                    <a:lstStyle/>
+                    <a:p>
+                      <a:pPr algn="ctr"/>
+                      <a:r>
+                        <a:rPr sz="900" b="0">
+                          <a:solidFill>
+                            <a:srgbClr val="111111"/>
+                          </a:solidFill>
+                          <a:latin typeface="AppleGothic"/>
+                          <a:ea typeface="AppleGothic"/>
+                        </a:rPr>
+                        <a:t>0.526</a:t>
+                      </a:r>
+                    </a:p>
+                  </a:txBody>
+                  <a:tcPr anchor="ctr">
+                    <a:solidFill>
+                      <a:srgbClr val="FFFFFF"/>
+                    </a:solidFill>
+                  </a:tcPr>
+                </a:tc>
+                <a:tc>
+                  <a:txBody>
+                    <a:bodyPr/>
+                    <a:lstStyle/>
+                    <a:p>
+                      <a:pPr algn="ctr"/>
+                      <a:r>
+                        <a:rPr sz="900" b="0">
+                          <a:solidFill>
+                            <a:srgbClr val="111111"/>
+                          </a:solidFill>
+                          <a:latin typeface="AppleGothic"/>
+                          <a:ea typeface="AppleGothic"/>
+                        </a:rPr>
+                        <a:t>-0.47</a:t>
+                      </a:r>
+                    </a:p>
+                  </a:txBody>
+                  <a:tcPr anchor="ctr">
+                    <a:solidFill>
+                      <a:srgbClr val="FFFFFF"/>
+                    </a:solidFill>
+                  </a:tcPr>
+                </a:tc>
+                <a:tc>
+                  <a:txBody>
+                    <a:bodyPr/>
+                    <a:lstStyle/>
+                    <a:p>
+                      <a:pPr algn="ctr"/>
+                      <a:r>
+                        <a:rPr sz="900" b="0">
+                          <a:solidFill>
+                            <a:srgbClr val="111111"/>
+                          </a:solidFill>
+                          <a:latin typeface="AppleGothic"/>
+                          <a:ea typeface="AppleGothic"/>
+                        </a:rPr>
+                        <a:t>-2.18</a:t>
+                      </a:r>
+                    </a:p>
+                  </a:txBody>
+                  <a:tcPr anchor="ctr">
+                    <a:solidFill>
+                      <a:srgbClr val="FFFFFF"/>
+                    </a:solidFill>
+                  </a:tcPr>
+                </a:tc>
+              </a:tr>
+              <a:tr h="211666">
+                <a:tc>
+                  <a:txBody>
+                    <a:bodyPr/>
+                    <a:lstStyle/>
+                    <a:p>
+                      <a:pPr algn="l"/>
+                      <a:r>
+                        <a:rPr sz="900" b="1">
+                          <a:solidFill>
+                            <a:srgbClr val="111111"/>
+                          </a:solidFill>
+                          <a:latin typeface="AppleGothic"/>
+                          <a:ea typeface="AppleGothic"/>
+                        </a:rPr>
+                        <a:t>MATR19</a:t>
+                      </a:r>
+                    </a:p>
+                  </a:txBody>
+                  <a:tcPr anchor="ctr">
+                    <a:solidFill>
+                      <a:srgbClr val="F2F2F0"/>
+                    </a:solidFill>
+                  </a:tcPr>
+                </a:tc>
+                <a:tc>
+                  <a:txBody>
+                    <a:bodyPr/>
+                    <a:lstStyle/>
+                    <a:p>
+                      <a:pPr algn="ctr"/>
+                      <a:r>
+                        <a:rPr sz="900" b="0">
+                          <a:solidFill>
+                            <a:srgbClr val="111111"/>
+                          </a:solidFill>
+                          <a:latin typeface="AppleGothic"/>
+                          <a:ea typeface="AppleGothic"/>
+                        </a:rPr>
+                        <a:t>0.466</a:t>
+                      </a:r>
+                    </a:p>
+                  </a:txBody>
+                  <a:tcPr anchor="ctr">
+                    <a:solidFill>
+                      <a:srgbClr val="F2F2F0"/>
+                    </a:solidFill>
+                  </a:tcPr>
+                </a:tc>
+                <a:tc>
+                  <a:txBody>
+                    <a:bodyPr/>
+                    <a:lstStyle/>
+                    <a:p>
+                      <a:pPr algn="l"/>
+                      <a:r>
+                        <a:rPr sz="900" b="0">
+                          <a:solidFill>
+                            <a:srgbClr val="111111"/>
+                          </a:solidFill>
+                          <a:latin typeface="AppleGothic"/>
+                          <a:ea typeface="AppleGothic"/>
+                        </a:rPr>
+                        <a:t>0.044</a:t>
+                      </a:r>
+                    </a:p>
+                  </a:txBody>
+                  <a:tcPr anchor="ctr">
+                    <a:solidFill>
+                      <a:srgbClr val="F2F2F0"/>
+                    </a:solidFill>
+                  </a:tcPr>
+                </a:tc>
+                <a:tc>
+                  <a:txBody>
+                    <a:bodyPr/>
+                    <a:lstStyle/>
+                    <a:p>
+                      <a:pPr algn="l"/>
+                      <a:r>
+                        <a:rPr sz="900" b="0">
+                          <a:solidFill>
+                            <a:srgbClr val="111111"/>
+                          </a:solidFill>
+                          <a:latin typeface="AppleGothic"/>
+                          <a:ea typeface="AppleGothic"/>
+                        </a:rPr>
+                        <a:t>0.272</a:t>
+                      </a:r>
+                    </a:p>
+                  </a:txBody>
+                  <a:tcPr anchor="ctr">
+                    <a:solidFill>
+                      <a:srgbClr val="F2F2F0"/>
+                    </a:solidFill>
+                  </a:tcPr>
+                </a:tc>
+                <a:tc>
+                  <a:txBody>
+                    <a:bodyPr/>
+                    <a:lstStyle/>
+                    <a:p>
+                      <a:pPr algn="ctr"/>
+                      <a:r>
+                        <a:rPr sz="900" b="0">
+                          <a:solidFill>
+                            <a:srgbClr val="111111"/>
+                          </a:solidFill>
+                          <a:latin typeface="AppleGothic"/>
+                          <a:ea typeface="AppleGothic"/>
+                        </a:rPr>
+                        <a:t>0.018</a:t>
+                      </a:r>
+                    </a:p>
+                  </a:txBody>
+                  <a:tcPr anchor="ctr">
+                    <a:solidFill>
+                      <a:srgbClr val="F2F2F0"/>
+                    </a:solidFill>
+                  </a:tcPr>
+                </a:tc>
+                <a:tc>
+                  <a:txBody>
+                    <a:bodyPr/>
+                    <a:lstStyle/>
+                    <a:p>
+                      <a:pPr algn="ctr"/>
+                      <a:r>
+                        <a:rPr sz="900" b="0">
+                          <a:solidFill>
+                            <a:srgbClr val="111111"/>
+                          </a:solidFill>
+                          <a:latin typeface="AppleGothic"/>
+                          <a:ea typeface="AppleGothic"/>
+                        </a:rPr>
+                        <a:t>-2.64</a:t>
+                      </a:r>
+                    </a:p>
+                  </a:txBody>
+                  <a:tcPr anchor="ctr">
+                    <a:solidFill>
+                      <a:srgbClr val="F2F2F0"/>
+                    </a:solidFill>
+                  </a:tcPr>
+                </a:tc>
+                <a:tc>
+                  <a:txBody>
+                    <a:bodyPr/>
+                    <a:lstStyle/>
+                    <a:p>
+                      <a:pPr algn="ctr"/>
+                      <a:r>
+                        <a:rPr sz="900" b="0">
+                          <a:solidFill>
+                            <a:srgbClr val="111111"/>
+                          </a:solidFill>
+                          <a:latin typeface="AppleGothic"/>
+                          <a:ea typeface="AppleGothic"/>
+                        </a:rPr>
+                        <a:t>-0.73</a:t>
+                      </a:r>
+                    </a:p>
+                  </a:txBody>
+                  <a:tcPr anchor="ctr">
+                    <a:solidFill>
+                      <a:srgbClr val="F2F2F0"/>
+                    </a:solidFill>
+                  </a:tcPr>
+                </a:tc>
+                <a:tc>
+                  <a:txBody>
+                    <a:bodyPr/>
+                    <a:lstStyle/>
+                    <a:p>
+                      <a:pPr algn="ctr"/>
+                      <a:r>
+                        <a:rPr sz="900" b="0">
+                          <a:solidFill>
+                            <a:srgbClr val="111111"/>
+                          </a:solidFill>
+                          <a:latin typeface="AppleGothic"/>
+                          <a:ea typeface="AppleGothic"/>
+                        </a:rPr>
+                        <a:t>-2.46</a:t>
+                      </a:r>
+                    </a:p>
+                  </a:txBody>
+                  <a:tcPr anchor="ctr">
+                    <a:solidFill>
+                      <a:srgbClr val="F2F2F0"/>
+                    </a:solidFill>
+                  </a:tcPr>
+                </a:tc>
+                <a:tc>
+                  <a:txBody>
+                    <a:bodyPr/>
+                    <a:lstStyle/>
+                    <a:p>
+                      <a:pPr algn="ctr"/>
+                      <a:r>
+                        <a:rPr sz="900" b="0">
+                          <a:solidFill>
+                            <a:srgbClr val="111111"/>
+                          </a:solidFill>
+                          <a:latin typeface="AppleGothic"/>
+                          <a:ea typeface="AppleGothic"/>
+                        </a:rPr>
+                        <a:t>0.202</a:t>
+                      </a:r>
+                    </a:p>
+                  </a:txBody>
+                  <a:tcPr anchor="ctr">
+                    <a:solidFill>
+                      <a:srgbClr val="F2F2F0"/>
+                    </a:solidFill>
+                  </a:tcPr>
+                </a:tc>
+              </a:tr>
+              <a:tr h="211666">
+                <a:tc>
+                  <a:txBody>
+                    <a:bodyPr/>
+                    <a:lstStyle/>
+                    <a:p>
+                      <a:pPr algn="l"/>
+                      <a:r>
+                        <a:rPr sz="900" b="1">
+                          <a:solidFill>
+                            <a:srgbClr val="111111"/>
+                          </a:solidFill>
+                          <a:latin typeface="AppleGothic"/>
+                          <a:ea typeface="AppleGothic"/>
+                        </a:rPr>
+                        <a:t>MATRb2</a:t>
+                      </a:r>
+                    </a:p>
+                  </a:txBody>
+                  <a:tcPr anchor="ctr">
+                    <a:solidFill>
+                      <a:srgbClr val="FFFFFF"/>
+                    </a:solidFill>
+                  </a:tcPr>
+                </a:tc>
+                <a:tc>
+                  <a:txBody>
+                    <a:bodyPr/>
+                    <a:lstStyle/>
+                    <a:p>
+                      <a:pPr algn="ctr"/>
+                      <a:r>
+                        <a:rPr sz="900" b="0">
+                          <a:solidFill>
+                            <a:srgbClr val="111111"/>
+                          </a:solidFill>
+                          <a:latin typeface="AppleGothic"/>
+                          <a:ea typeface="AppleGothic"/>
+                        </a:rPr>
+                        <a:t>0.862</a:t>
+                      </a:r>
+                    </a:p>
+                  </a:txBody>
+                  <a:tcPr anchor="ctr">
+                    <a:solidFill>
+                      <a:srgbClr val="FFFFFF"/>
+                    </a:solidFill>
+                  </a:tcPr>
+                </a:tc>
+                <a:tc>
+                  <a:txBody>
+                    <a:bodyPr/>
+                    <a:lstStyle/>
+                    <a:p>
+                      <a:pPr algn="l"/>
+                      <a:r>
+                        <a:rPr sz="900" b="0">
+                          <a:solidFill>
+                            <a:srgbClr val="111111"/>
+                          </a:solidFill>
+                          <a:latin typeface="AppleGothic"/>
+                          <a:ea typeface="AppleGothic"/>
+                        </a:rPr>
+                        <a:t>0.850</a:t>
+                      </a:r>
+                    </a:p>
+                  </a:txBody>
+                  <a:tcPr anchor="ctr">
+                    <a:solidFill>
+                      <a:srgbClr val="FFFFFF"/>
+                    </a:solidFill>
+                  </a:tcPr>
+                </a:tc>
+                <a:tc>
+                  <a:txBody>
+                    <a:bodyPr/>
+                    <a:lstStyle/>
+                    <a:p>
+                      <a:pPr algn="l"/>
+                      <a:r>
+                        <a:rPr sz="900" b="0">
+                          <a:solidFill>
+                            <a:srgbClr val="111111"/>
+                          </a:solidFill>
+                          <a:latin typeface="AppleGothic"/>
+                          <a:ea typeface="AppleGothic"/>
+                        </a:rPr>
+                        <a:t>0.777</a:t>
+                      </a:r>
+                    </a:p>
+                  </a:txBody>
+                  <a:tcPr anchor="ctr">
+                    <a:solidFill>
+                      <a:srgbClr val="FFFFFF"/>
+                    </a:solidFill>
+                  </a:tcPr>
+                </a:tc>
+                <a:tc>
+                  <a:txBody>
+                    <a:bodyPr/>
+                    <a:lstStyle/>
+                    <a:p>
+                      <a:pPr algn="ctr"/>
+                      <a:r>
+                        <a:rPr sz="900" b="0">
+                          <a:solidFill>
+                            <a:srgbClr val="111111"/>
+                          </a:solidFill>
+                          <a:latin typeface="AppleGothic"/>
+                          <a:ea typeface="AppleGothic"/>
+                        </a:rPr>
+                        <a:t>0.674</a:t>
+                      </a:r>
+                    </a:p>
+                  </a:txBody>
+                  <a:tcPr anchor="ctr">
+                    <a:solidFill>
+                      <a:srgbClr val="FFFFFF"/>
+                    </a:solidFill>
+                  </a:tcPr>
+                </a:tc>
+                <a:tc>
+                  <a:txBody>
+                    <a:bodyPr/>
+                    <a:lstStyle/>
+                    <a:p>
+                      <a:pPr algn="ctr"/>
+                      <a:r>
+                        <a:rPr sz="900" b="0">
+                          <a:solidFill>
+                            <a:srgbClr val="111111"/>
+                          </a:solidFill>
+                          <a:latin typeface="AppleGothic"/>
+                          <a:ea typeface="AppleGothic"/>
+                        </a:rPr>
+                        <a:t>-0.78</a:t>
+                      </a:r>
+                    </a:p>
+                  </a:txBody>
+                  <a:tcPr anchor="ctr">
+                    <a:solidFill>
+                      <a:srgbClr val="FFFFFF"/>
+                    </a:solidFill>
+                  </a:tcPr>
+                </a:tc>
+                <a:tc>
+                  <a:txBody>
+                    <a:bodyPr/>
+                    <a:lstStyle/>
+                    <a:p>
+                      <a:pPr algn="ctr"/>
+                      <a:r>
+                        <a:rPr sz="900" b="0">
+                          <a:solidFill>
+                            <a:srgbClr val="111111"/>
+                          </a:solidFill>
+                          <a:latin typeface="AppleGothic"/>
+                          <a:ea typeface="AppleGothic"/>
+                        </a:rPr>
+                        <a:t>0.739</a:t>
+                      </a:r>
+                    </a:p>
+                  </a:txBody>
+                  <a:tcPr anchor="ctr">
+                    <a:solidFill>
+                      <a:srgbClr val="FFFFFF"/>
+                    </a:solidFill>
+                  </a:tcPr>
+                </a:tc>
+                <a:tc>
+                  <a:txBody>
+                    <a:bodyPr/>
+                    <a:lstStyle/>
+                    <a:p>
+                      <a:pPr algn="ctr"/>
+                      <a:r>
+                        <a:rPr sz="900" b="0">
+                          <a:solidFill>
+                            <a:srgbClr val="111111"/>
+                          </a:solidFill>
+                          <a:latin typeface="AppleGothic"/>
+                          <a:ea typeface="AppleGothic"/>
+                        </a:rPr>
+                        <a:t>0.21</a:t>
+                      </a:r>
+                    </a:p>
+                  </a:txBody>
+                  <a:tcPr anchor="ctr">
+                    <a:solidFill>
+                      <a:srgbClr val="FFFFFF"/>
+                    </a:solidFill>
+                  </a:tcPr>
+                </a:tc>
+                <a:tc>
+                  <a:txBody>
+                    <a:bodyPr/>
+                    <a:lstStyle/>
+                    <a:p>
+                      <a:pPr algn="ctr"/>
+                      <a:r>
+                        <a:rPr sz="900" b="0">
+                          <a:solidFill>
+                            <a:srgbClr val="111111"/>
+                          </a:solidFill>
+                          <a:latin typeface="AppleGothic"/>
+                          <a:ea typeface="AppleGothic"/>
+                        </a:rPr>
+                        <a:t>0.618</a:t>
+                      </a:r>
+                    </a:p>
+                  </a:txBody>
+                  <a:tcPr anchor="ctr">
+                    <a:solidFill>
+                      <a:srgbClr val="FFFFFF"/>
+                    </a:solidFill>
+                  </a:tcPr>
+                </a:tc>
+              </a:tr>
+              <a:tr h="211672">
+                <a:tc>
+                  <a:txBody>
+                    <a:bodyPr/>
+                    <a:lstStyle/>
+                    <a:p>
+                      <a:pPr algn="l"/>
+                      <a:r>
+                        <a:rPr sz="900" b="1">
+                          <a:solidFill>
+                            <a:srgbClr val="111111"/>
+                          </a:solidFill>
+                          <a:latin typeface="AppleGothic"/>
+                          <a:ea typeface="AppleGothic"/>
+                        </a:rPr>
+                        <a:t>NCMAPSS</a:t>
+                      </a:r>
+                    </a:p>
+                  </a:txBody>
+                  <a:tcPr anchor="ctr">
+                    <a:solidFill>
+                      <a:srgbClr val="F2F2F0"/>
+                    </a:solidFill>
+                  </a:tcPr>
+                </a:tc>
+                <a:tc>
+                  <a:txBody>
+                    <a:bodyPr/>
+                    <a:lstStyle/>
+                    <a:p>
+                      <a:pPr algn="ctr"/>
+                      <a:r>
+                        <a:rPr sz="900" b="0">
+                          <a:solidFill>
+                            <a:srgbClr val="111111"/>
+                          </a:solidFill>
+                          <a:latin typeface="AppleGothic"/>
+                          <a:ea typeface="AppleGothic"/>
+                        </a:rPr>
+                        <a:t>0.937</a:t>
+                      </a:r>
+                    </a:p>
+                  </a:txBody>
+                  <a:tcPr anchor="ctr">
+                    <a:solidFill>
+                      <a:srgbClr val="F2F2F0"/>
+                    </a:solidFill>
+                  </a:tcPr>
+                </a:tc>
+                <a:tc>
+                  <a:txBody>
+                    <a:bodyPr/>
+                    <a:lstStyle/>
+                    <a:p>
+                      <a:pPr algn="l"/>
+                      <a:r>
+                        <a:rPr sz="900" b="0">
+                          <a:solidFill>
+                            <a:srgbClr val="111111"/>
+                          </a:solidFill>
+                          <a:latin typeface="AppleGothic"/>
+                          <a:ea typeface="AppleGothic"/>
+                        </a:rPr>
+                        <a:t>0.883</a:t>
+                      </a:r>
+                    </a:p>
+                  </a:txBody>
+                  <a:tcPr anchor="ctr">
+                    <a:solidFill>
+                      <a:srgbClr val="F2F2F0"/>
+                    </a:solidFill>
+                  </a:tcPr>
+                </a:tc>
+                <a:tc>
+                  <a:txBody>
+                    <a:bodyPr/>
+                    <a:lstStyle/>
+                    <a:p>
+                      <a:pPr algn="l"/>
+                      <a:r>
+                        <a:rPr sz="900" b="0">
+                          <a:solidFill>
+                            <a:srgbClr val="111111"/>
+                          </a:solidFill>
+                          <a:latin typeface="AppleGothic"/>
+                          <a:ea typeface="AppleGothic"/>
+                        </a:rPr>
+                        <a:t>0.880</a:t>
+                      </a:r>
+                    </a:p>
+                  </a:txBody>
+                  <a:tcPr anchor="ctr">
+                    <a:solidFill>
+                      <a:srgbClr val="F2F2F0"/>
+                    </a:solidFill>
+                  </a:tcPr>
+                </a:tc>
+                <a:tc>
+                  <a:txBody>
+                    <a:bodyPr/>
+                    <a:lstStyle/>
+                    <a:p>
+                      <a:pPr algn="ctr"/>
+                      <a:r>
+                        <a:rPr sz="900" b="0">
+                          <a:solidFill>
+                            <a:srgbClr val="111111"/>
+                          </a:solidFill>
+                          <a:latin typeface="AppleGothic"/>
+                          <a:ea typeface="AppleGothic"/>
+                        </a:rPr>
+                        <a:t>0.892</a:t>
+                      </a:r>
+                    </a:p>
+                  </a:txBody>
+                  <a:tcPr anchor="ctr">
+                    <a:solidFill>
+                      <a:srgbClr val="F2F2F0"/>
+                    </a:solidFill>
+                  </a:tcPr>
+                </a:tc>
+                <a:tc>
+                  <a:txBody>
+                    <a:bodyPr/>
+                    <a:lstStyle/>
+                    <a:p>
+                      <a:pPr algn="ctr"/>
+                      <a:r>
+                        <a:rPr sz="900" b="0">
+                          <a:solidFill>
+                            <a:srgbClr val="111111"/>
+                          </a:solidFill>
+                          <a:latin typeface="AppleGothic"/>
+                          <a:ea typeface="AppleGothic"/>
+                        </a:rPr>
+                        <a:t>0.819</a:t>
+                      </a:r>
+                    </a:p>
+                  </a:txBody>
+                  <a:tcPr anchor="ctr">
+                    <a:solidFill>
+                      <a:srgbClr val="F2F2F0"/>
+                    </a:solidFill>
+                  </a:tcPr>
+                </a:tc>
+                <a:tc>
+                  <a:txBody>
+                    <a:bodyPr/>
+                    <a:lstStyle/>
+                    <a:p>
+                      <a:pPr algn="ctr"/>
+                      <a:r>
+                        <a:rPr sz="900" b="0">
+                          <a:solidFill>
+                            <a:srgbClr val="111111"/>
+                          </a:solidFill>
+                          <a:latin typeface="AppleGothic"/>
+                          <a:ea typeface="AppleGothic"/>
+                        </a:rPr>
+                        <a:t>0.932</a:t>
+                      </a:r>
+                    </a:p>
+                  </a:txBody>
+                  <a:tcPr anchor="ctr">
+                    <a:solidFill>
+                      <a:srgbClr val="F2F2F0"/>
+                    </a:solidFill>
+                  </a:tcPr>
+                </a:tc>
+                <a:tc>
+                  <a:txBody>
+                    <a:bodyPr/>
+                    <a:lstStyle/>
+                    <a:p>
+                      <a:pPr algn="ctr"/>
+                      <a:r>
+                        <a:rPr sz="900" b="0">
+                          <a:solidFill>
+                            <a:srgbClr val="111111"/>
+                          </a:solidFill>
+                          <a:latin typeface="AppleGothic"/>
+                          <a:ea typeface="AppleGothic"/>
+                        </a:rPr>
+                        <a:t>0.80</a:t>
+                      </a:r>
+                    </a:p>
+                  </a:txBody>
+                  <a:tcPr anchor="ctr">
+                    <a:solidFill>
+                      <a:srgbClr val="F2F2F0"/>
+                    </a:solidFill>
+                  </a:tcPr>
+                </a:tc>
+                <a:tc>
+                  <a:txBody>
+                    <a:bodyPr/>
+                    <a:lstStyle/>
+                    <a:p>
+                      <a:pPr algn="ctr"/>
+                      <a:r>
+                        <a:rPr sz="900" b="0">
+                          <a:solidFill>
+                            <a:srgbClr val="111111"/>
+                          </a:solidFill>
+                          <a:latin typeface="AppleGothic"/>
+                          <a:ea typeface="AppleGothic"/>
+                        </a:rPr>
+                        <a:t>0.934</a:t>
+                      </a:r>
+                    </a:p>
+                  </a:txBody>
+                  <a:tcPr anchor="ctr">
+                    <a:solidFill>
+                      <a:srgbClr val="F2F2F0"/>
+                    </a:solidFill>
+                  </a:tcPr>
+                </a:tc>
+              </a:tr>
+            </a:tbl>
+          </a:graphicData>
+        </a:graphic>
+      </p:graphicFrame>
       <p:cxnSp>
         <p:nvCxnSpPr>
-          <p:cNvPr id="7" name="Connector 6"/>
+          <p:cNvPr id="8" name="Connector 7"/>
           <p:cNvCxnSpPr/>
           <p:nvPr/>
         </p:nvCxnSpPr>
@@ -8451,7 +10446,7 @@
       </p:cxnSp>
       <p:sp>
         <p:nvSpPr>
-          <p:cNvPr id="8" name="TextBox 7"/>
+          <p:cNvPr id="9" name="TextBox 8"/>
           <p:cNvSpPr txBox="1"/>
           <p:nvPr/>
         </p:nvSpPr>
@@ -8487,7 +10482,7 @@
       </p:sp>
       <p:sp>
         <p:nvSpPr>
-          <p:cNvPr id="9" name="TextBox 8"/>
+          <p:cNvPr id="10" name="TextBox 9"/>
           <p:cNvSpPr txBox="1"/>
           <p:nvPr/>
         </p:nvSpPr>

--- a/output/PP_Research_Detailed_v2.pptx
+++ b/output/PP_Research_Detailed_v2.pptx
@@ -3232,11 +3232,11 @@
           <a:p>
             <a:pPr algn="ctr"/>
             <a:r>
-              <a:rPr sz="3600" b="1">
+              <a:rPr sz="3400" b="1">
                 <a:solidFill>
-                  <a:srgbClr val="111111"/>
+                  <a:srgbClr val="222222"/>
                 </a:solidFill>
-                <a:latin typeface="AppleGothic"/>
+                <a:latin typeface="Arial"/>
                 <a:ea typeface="AppleGothic"/>
               </a:rPr>
               <a:t>가정 인식형 외삽</a:t>
@@ -3270,9 +3270,9 @@
             <a:r>
               <a:rPr sz="1600" b="0">
                 <a:solidFill>
-                  <a:srgbClr val="555555"/>
+                  <a:srgbClr val="666666"/>
                 </a:solidFill>
-                <a:latin typeface="AppleGothic"/>
+                <a:latin typeface="Arial"/>
                 <a:ea typeface="AppleGothic"/>
               </a:rPr>
               <a:t>Assumption-Aware Extrapolation</a:t>
@@ -3306,9 +3306,9 @@
             <a:r>
               <a:rPr sz="1600" b="1">
                 <a:solidFill>
-                  <a:srgbClr val="0A5C5C"/>
+                  <a:srgbClr val="0072B2"/>
                 </a:solidFill>
-                <a:latin typeface="AppleGothic"/>
+                <a:latin typeface="Arial"/>
                 <a:ea typeface="AppleGothic"/>
               </a:rPr>
               <a:t>식 없는 경로  ·  SAAR</a:t>
@@ -3342,9 +3342,9 @@
             <a:r>
               <a:rPr sz="1400" b="0">
                 <a:solidFill>
-                  <a:srgbClr val="111111"/>
+                  <a:srgbClr val="222222"/>
                 </a:solidFill>
-                <a:latin typeface="AppleGothic"/>
+                <a:latin typeface="Arial"/>
                 <a:ea typeface="AppleGothic"/>
               </a:rPr>
               <a:t>Smart Production Systems Lab.  ·  박사과정 박형배</a:t>
@@ -3378,9 +3378,9 @@
             <a:r>
               <a:rPr sz="1300" b="0">
                 <a:solidFill>
-                  <a:srgbClr val="555555"/>
+                  <a:srgbClr val="666666"/>
                 </a:solidFill>
-                <a:latin typeface="AppleGothic"/>
+                <a:latin typeface="Arial"/>
                 <a:ea typeface="AppleGothic"/>
               </a:rPr>
               <a:t>2026.09.09</a:t>
@@ -3458,13 +3458,13 @@
         <p:spPr>
           <a:xfrm>
             <a:off x="0" y="0"/>
-            <a:ext cx="12192000" cy="38100"/>
+            <a:ext cx="12192000" cy="28575"/>
           </a:xfrm>
           <a:prstGeom prst="rect">
             <a:avLst/>
           </a:prstGeom>
           <a:solidFill>
-            <a:srgbClr val="0A5C5C"/>
+            <a:srgbClr val="0072B2"/>
           </a:solidFill>
           <a:ln>
             <a:noFill/>
@@ -3501,7 +3501,7 @@
         <p:spPr>
           <a:xfrm>
             <a:off x="457200" y="209550"/>
-            <a:ext cx="11239500" cy="323850"/>
+            <a:ext cx="11239500" cy="304800"/>
           </a:xfrm>
           <a:prstGeom prst="rect">
             <a:avLst/>
@@ -3518,9 +3518,9 @@
             <a:r>
               <a:rPr sz="2200" b="1">
                 <a:solidFill>
-                  <a:srgbClr val="111111"/>
+                  <a:srgbClr val="222222"/>
                 </a:solidFill>
-                <a:latin typeface="AppleGothic"/>
+                <a:latin typeface="Arial"/>
                 <a:ea typeface="AppleGothic"/>
               </a:rPr>
               <a:t>실패 · 경계</a:t>
@@ -3536,7 +3536,7 @@
         </p:nvSpPr>
         <p:spPr>
           <a:xfrm>
-            <a:off x="457200" y="533400"/>
+            <a:off x="457200" y="514350"/>
             <a:ext cx="11239500" cy="190500"/>
           </a:xfrm>
           <a:prstGeom prst="rect">
@@ -3554,63 +3554,27 @@
             <a:r>
               <a:rPr sz="1200" b="0">
                 <a:solidFill>
-                  <a:srgbClr val="555555"/>
+                  <a:srgbClr val="666666"/>
                 </a:solidFill>
-                <a:latin typeface="AppleGothic"/>
+                <a:latin typeface="Arial"/>
                 <a:ea typeface="AppleGothic"/>
               </a:rPr>
-              <a:t>표로 남긴 한계  ·  주장 / 비주장</a:t>
-            </a:r>
-          </a:p>
-        </p:txBody>
-      </p:sp>
-      <p:sp>
-        <p:nvSpPr>
-          <p:cNvPr id="6" name="TextBox 5"/>
-          <p:cNvSpPr txBox="1"/>
-          <p:nvPr/>
-        </p:nvSpPr>
-        <p:spPr>
-          <a:xfrm>
-            <a:off x="457200" y="857250"/>
-            <a:ext cx="5715000" cy="228600"/>
-          </a:xfrm>
-          <a:prstGeom prst="rect">
-            <a:avLst/>
-          </a:prstGeom>
-          <a:noFill/>
-        </p:spPr>
-        <p:txBody>
-          <a:bodyPr wrap="square">
-            <a:spAutoFit/>
-          </a:bodyPr>
-          <a:lstStyle/>
-          <a:p>
-            <a:pPr algn="l"/>
-            <a:r>
-              <a:rPr sz="1400" b="1">
-                <a:solidFill>
-                  <a:srgbClr val="111111"/>
-                </a:solidFill>
-                <a:latin typeface="AppleGothic"/>
-                <a:ea typeface="AppleGothic"/>
-              </a:rPr>
-              <a:t>실패 설정</a:t>
+              <a:t>표로 남긴 한계</a:t>
             </a:r>
           </a:p>
         </p:txBody>
       </p:sp>
       <p:graphicFrame>
         <p:nvGraphicFramePr>
-          <p:cNvPr id="7" name="Table 6"/>
+          <p:cNvPr id="6" name="Table 5"/>
           <p:cNvGraphicFramePr>
             <a:graphicFrameLocks noGrp="1"/>
           </p:cNvGraphicFramePr>
           <p:nvPr/>
         </p:nvGraphicFramePr>
         <p:xfrm>
-          <a:off x="457200" y="1143000"/>
-          <a:ext cx="11277600" cy="2286000"/>
+          <a:off x="457200" y="1047750"/>
+          <a:ext cx="11277600" cy="2190750"/>
         </p:xfrm>
         <a:graphic>
           <a:graphicData uri="http://schemas.openxmlformats.org/drawingml/2006/table">
@@ -3624,7 +3588,7 @@
                 <a:gridCol w="2819400"/>
                 <a:gridCol w="2819400"/>
               </a:tblGrid>
-              <a:tr h="457200">
+              <a:tr h="438150">
                 <a:tc>
                   <a:txBody>
                     <a:bodyPr/>
@@ -3636,16 +3600,16 @@
                           <a:solidFill>
                             <a:srgbClr val="FFFFFF"/>
                           </a:solidFill>
-                          <a:latin typeface="AppleGothic"/>
-                          <a:ea typeface="AppleGothic"/>
-                        </a:rPr>
-                        <a:t>설정</a:t>
-                      </a:r>
-                    </a:p>
-                  </a:txBody>
-                  <a:tcPr anchor="ctr">
-                    <a:solidFill>
-                      <a:srgbClr val="111111"/>
+                          <a:latin typeface="Arial"/>
+                          <a:ea typeface="AppleGothic"/>
+                        </a:rPr>
+                        <a:t>Setting</a:t>
+                      </a:r>
+                    </a:p>
+                  </a:txBody>
+                  <a:tcPr anchor="ctr">
+                    <a:solidFill>
+                      <a:srgbClr val="222222"/>
                     </a:solidFill>
                   </a:tcPr>
                 </a:tc>
@@ -3660,16 +3624,16 @@
                           <a:solidFill>
                             <a:srgbClr val="FFFFFF"/>
                           </a:solidFill>
-                          <a:latin typeface="AppleGothic"/>
-                          <a:ea typeface="AppleGothic"/>
-                        </a:rPr>
-                        <a:t>기본 PP R²</a:t>
-                      </a:r>
-                    </a:p>
-                  </a:txBody>
-                  <a:tcPr anchor="ctr">
-                    <a:solidFill>
-                      <a:srgbClr val="111111"/>
+                          <a:latin typeface="Arial"/>
+                          <a:ea typeface="AppleGothic"/>
+                        </a:rPr>
+                        <a:t>Base PP R²</a:t>
+                      </a:r>
+                    </a:p>
+                  </a:txBody>
+                  <a:tcPr anchor="ctr">
+                    <a:solidFill>
+                      <a:srgbClr val="222222"/>
                     </a:solidFill>
                   </a:tcPr>
                 </a:tc>
@@ -3684,16 +3648,16 @@
                           <a:solidFill>
                             <a:srgbClr val="FFFFFF"/>
                           </a:solidFill>
-                          <a:latin typeface="AppleGothic"/>
-                          <a:ea typeface="AppleGothic"/>
-                        </a:rPr>
-                        <a:t>해석</a:t>
-                      </a:r>
-                    </a:p>
-                  </a:txBody>
-                  <a:tcPr anchor="ctr">
-                    <a:solidFill>
-                      <a:srgbClr val="111111"/>
+                          <a:latin typeface="Arial"/>
+                          <a:ea typeface="AppleGothic"/>
+                        </a:rPr>
+                        <a:t>Interpretation</a:t>
+                      </a:r>
+                    </a:p>
+                  </a:txBody>
+                  <a:tcPr anchor="ctr">
+                    <a:solidFill>
+                      <a:srgbClr val="222222"/>
                     </a:solidFill>
                   </a:tcPr>
                 </a:tc>
@@ -3708,21 +3672,21 @@
                           <a:solidFill>
                             <a:srgbClr val="FFFFFF"/>
                           </a:solidFill>
-                          <a:latin typeface="AppleGothic"/>
-                          <a:ea typeface="AppleGothic"/>
-                        </a:rPr>
-                        <a:t>조치</a:t>
-                      </a:r>
-                    </a:p>
-                  </a:txBody>
-                  <a:tcPr anchor="ctr">
-                    <a:solidFill>
-                      <a:srgbClr val="111111"/>
+                          <a:latin typeface="Arial"/>
+                          <a:ea typeface="AppleGothic"/>
+                        </a:rPr>
+                        <a:t>Action</a:t>
+                      </a:r>
+                    </a:p>
+                  </a:txBody>
+                  <a:tcPr anchor="ctr">
+                    <a:solidFill>
+                      <a:srgbClr val="222222"/>
                     </a:solidFill>
                   </a:tcPr>
                 </a:tc>
               </a:tr>
-              <a:tr h="457200">
+              <a:tr h="438150">
                 <a:tc>
                   <a:txBody>
                     <a:bodyPr/>
@@ -3732,12 +3696,12 @@
                       <a:r>
                         <a:rPr sz="1200" b="1">
                           <a:solidFill>
-                            <a:srgbClr val="111111"/>
-                          </a:solidFill>
-                          <a:latin typeface="AppleGothic"/>
-                          <a:ea typeface="AppleGothic"/>
-                        </a:rPr>
-                        <a:t>MICH (기본)</a:t>
+                            <a:srgbClr val="222222"/>
+                          </a:solidFill>
+                          <a:latin typeface="Arial"/>
+                          <a:ea typeface="AppleGothic"/>
+                        </a:rPr>
+                        <a:t>MICH (base)</a:t>
                       </a:r>
                     </a:p>
                   </a:txBody>
@@ -3758,7 +3722,7 @@
                           <a:solidFill>
                             <a:srgbClr val="9B1C1C"/>
                           </a:solidFill>
-                          <a:latin typeface="AppleGothic"/>
+                          <a:latin typeface="Arial"/>
                           <a:ea typeface="AppleGothic"/>
                         </a:rPr>
                         <a:t>-1.522</a:t>
@@ -3776,16 +3740,164 @@
                     <a:bodyPr/>
                     <a:lstStyle/>
                     <a:p>
+                      <a:pPr algn="ctr"/>
+                      <a:r>
+                        <a:rPr sz="1200" b="0">
+                          <a:solidFill>
+                            <a:srgbClr val="222222"/>
+                          </a:solidFill>
+                          <a:latin typeface="Arial"/>
+                          <a:ea typeface="AppleGothic"/>
+                        </a:rPr>
+                        <a:t>관계 이동 · 보정 꺼짐</a:t>
+                      </a:r>
+                    </a:p>
+                  </a:txBody>
+                  <a:tcPr anchor="ctr">
+                    <a:solidFill>
+                      <a:srgbClr val="FFFFFF"/>
+                    </a:solidFill>
+                  </a:tcPr>
+                </a:tc>
+                <a:tc>
+                  <a:txBody>
+                    <a:bodyPr/>
+                    <a:lstStyle/>
+                    <a:p>
+                      <a:pPr algn="ctr"/>
+                      <a:r>
+                        <a:rPr sz="1200" b="0">
+                          <a:solidFill>
+                            <a:srgbClr val="222222"/>
+                          </a:solidFill>
+                          <a:latin typeface="Arial"/>
+                          <a:ea typeface="AppleGothic"/>
+                        </a:rPr>
+                        <a:t>경계+dual-scale → 0.751</a:t>
+                      </a:r>
+                    </a:p>
+                  </a:txBody>
+                  <a:tcPr anchor="ctr">
+                    <a:solidFill>
+                      <a:srgbClr val="FFFFFF"/>
+                    </a:solidFill>
+                  </a:tcPr>
+                </a:tc>
+              </a:tr>
+              <a:tr h="438150">
+                <a:tc>
+                  <a:txBody>
+                    <a:bodyPr/>
+                    <a:lstStyle/>
+                    <a:p>
                       <a:pPr algn="l"/>
                       <a:r>
+                        <a:rPr sz="1200" b="1">
+                          <a:solidFill>
+                            <a:srgbClr val="222222"/>
+                          </a:solidFill>
+                          <a:latin typeface="Arial"/>
+                          <a:ea typeface="AppleGothic"/>
+                        </a:rPr>
+                        <a:t>XJTU</a:t>
+                      </a:r>
+                    </a:p>
+                  </a:txBody>
+                  <a:tcPr anchor="ctr">
+                    <a:solidFill>
+                      <a:srgbClr val="F5F5F5"/>
+                    </a:solidFill>
+                  </a:tcPr>
+                </a:tc>
+                <a:tc>
+                  <a:txBody>
+                    <a:bodyPr/>
+                    <a:lstStyle/>
+                    <a:p>
+                      <a:pPr algn="ctr"/>
+                      <a:r>
+                        <a:rPr sz="1200" b="1">
+                          <a:solidFill>
+                            <a:srgbClr val="9B1C1C"/>
+                          </a:solidFill>
+                          <a:latin typeface="Arial"/>
+                          <a:ea typeface="AppleGothic"/>
+                        </a:rPr>
+                        <a:t>-1.229</a:t>
+                      </a:r>
+                    </a:p>
+                  </a:txBody>
+                  <a:tcPr anchor="ctr">
+                    <a:solidFill>
+                      <a:srgbClr val="F5F5F5"/>
+                    </a:solidFill>
+                  </a:tcPr>
+                </a:tc>
+                <a:tc>
+                  <a:txBody>
+                    <a:bodyPr/>
+                    <a:lstStyle/>
+                    <a:p>
+                      <a:pPr algn="ctr"/>
+                      <a:r>
                         <a:rPr sz="1200" b="0">
                           <a:solidFill>
-                            <a:srgbClr val="111111"/>
-                          </a:solidFill>
-                          <a:latin typeface="AppleGothic"/>
-                          <a:ea typeface="AppleGothic"/>
-                        </a:rPr>
-                        <a:t>관계 이동 · 보정 꺼짐</a:t>
+                            <a:srgbClr val="222222"/>
+                          </a:solidFill>
+                          <a:latin typeface="Arial"/>
+                          <a:ea typeface="AppleGothic"/>
+                        </a:rPr>
+                        <a:t>val/test 이동 반대</a:t>
+                      </a:r>
+                    </a:p>
+                  </a:txBody>
+                  <a:tcPr anchor="ctr">
+                    <a:solidFill>
+                      <a:srgbClr val="F5F5F5"/>
+                    </a:solidFill>
+                  </a:tcPr>
+                </a:tc>
+                <a:tc>
+                  <a:txBody>
+                    <a:bodyPr/>
+                    <a:lstStyle/>
+                    <a:p>
+                      <a:pPr algn="ctr"/>
+                      <a:r>
+                        <a:rPr sz="1200" b="0">
+                          <a:solidFill>
+                            <a:srgbClr val="222222"/>
+                          </a:solidFill>
+                          <a:latin typeface="Arial"/>
+                          <a:ea typeface="AppleGothic"/>
+                        </a:rPr>
+                        <a:t>거절 / 옮기지 않음</a:t>
+                      </a:r>
+                    </a:p>
+                  </a:txBody>
+                  <a:tcPr anchor="ctr">
+                    <a:solidFill>
+                      <a:srgbClr val="F5F5F5"/>
+                    </a:solidFill>
+                  </a:tcPr>
+                </a:tc>
+              </a:tr>
+              <a:tr h="438150">
+                <a:tc>
+                  <a:txBody>
+                    <a:bodyPr/>
+                    <a:lstStyle/>
+                    <a:p>
+                      <a:pPr algn="l"/>
+                      <a:r>
+                        <a:rPr sz="1200" b="1">
+                          <a:solidFill>
+                            <a:srgbClr val="222222"/>
+                          </a:solidFill>
+                          <a:latin typeface="Arial"/>
+                          <a:ea typeface="AppleGothic"/>
+                        </a:rPr>
+                        <a:t>FEMTO</a:t>
                       </a:r>
                     </a:p>
                   </a:txBody>
@@ -3800,307 +3912,159 @@
                     <a:bodyPr/>
                     <a:lstStyle/>
                     <a:p>
+                      <a:pPr algn="ctr"/>
+                      <a:r>
+                        <a:rPr sz="1200" b="1">
+                          <a:solidFill>
+                            <a:srgbClr val="9B1C1C"/>
+                          </a:solidFill>
+                          <a:latin typeface="Arial"/>
+                          <a:ea typeface="AppleGothic"/>
+                        </a:rPr>
+                        <a:t>-1.378</a:t>
+                      </a:r>
+                    </a:p>
+                  </a:txBody>
+                  <a:tcPr anchor="ctr">
+                    <a:solidFill>
+                      <a:srgbClr val="FFFFFF"/>
+                    </a:solidFill>
+                  </a:tcPr>
+                </a:tc>
+                <a:tc>
+                  <a:txBody>
+                    <a:bodyPr/>
+                    <a:lstStyle/>
+                    <a:p>
+                      <a:pPr algn="ctr"/>
+                      <a:r>
+                        <a:rPr sz="1200" b="0">
+                          <a:solidFill>
+                            <a:srgbClr val="222222"/>
+                          </a:solidFill>
+                          <a:latin typeface="Arial"/>
+                          <a:ea typeface="AppleGothic"/>
+                        </a:rPr>
+                        <a:t>끝점 희소 · 채널 이슈</a:t>
+                      </a:r>
+                    </a:p>
+                  </a:txBody>
+                  <a:tcPr anchor="ctr">
+                    <a:solidFill>
+                      <a:srgbClr val="FFFFFF"/>
+                    </a:solidFill>
+                  </a:tcPr>
+                </a:tc>
+                <a:tc>
+                  <a:txBody>
+                    <a:bodyPr/>
+                    <a:lstStyle/>
+                    <a:p>
+                      <a:pPr algn="ctr"/>
+                      <a:r>
+                        <a:rPr sz="1200" b="0">
+                          <a:solidFill>
+                            <a:srgbClr val="222222"/>
+                          </a:solidFill>
+                          <a:latin typeface="Arial"/>
+                          <a:ea typeface="AppleGothic"/>
+                        </a:rPr>
+                        <a:t>설계 미성숙 · 보류</a:t>
+                      </a:r>
+                    </a:p>
+                  </a:txBody>
+                  <a:tcPr anchor="ctr">
+                    <a:solidFill>
+                      <a:srgbClr val="FFFFFF"/>
+                    </a:solidFill>
+                  </a:tcPr>
+                </a:tc>
+              </a:tr>
+              <a:tr h="438150">
+                <a:tc>
+                  <a:txBody>
+                    <a:bodyPr/>
+                    <a:lstStyle/>
+                    <a:p>
                       <a:pPr algn="l"/>
                       <a:r>
+                        <a:rPr sz="1200" b="1">
+                          <a:solidFill>
+                            <a:srgbClr val="222222"/>
+                          </a:solidFill>
+                          <a:latin typeface="Arial"/>
+                          <a:ea typeface="AppleGothic"/>
+                        </a:rPr>
+                        <a:t>NASA milling</a:t>
+                      </a:r>
+                    </a:p>
+                  </a:txBody>
+                  <a:tcPr anchor="ctr">
+                    <a:solidFill>
+                      <a:srgbClr val="F5F5F5"/>
+                    </a:solidFill>
+                  </a:tcPr>
+                </a:tc>
+                <a:tc>
+                  <a:txBody>
+                    <a:bodyPr/>
+                    <a:lstStyle/>
+                    <a:p>
+                      <a:pPr algn="ctr"/>
+                      <a:r>
+                        <a:rPr sz="1200" b="1">
+                          <a:solidFill>
+                            <a:srgbClr val="9B1C1C"/>
+                          </a:solidFill>
+                          <a:latin typeface="Arial"/>
+                          <a:ea typeface="AppleGothic"/>
+                        </a:rPr>
+                        <a:t>-4.826</a:t>
+                      </a:r>
+                    </a:p>
+                  </a:txBody>
+                  <a:tcPr anchor="ctr">
+                    <a:solidFill>
+                      <a:srgbClr val="F5F5F5"/>
+                    </a:solidFill>
+                  </a:tcPr>
+                </a:tc>
+                <a:tc>
+                  <a:txBody>
+                    <a:bodyPr/>
+                    <a:lstStyle/>
+                    <a:p>
+                      <a:pPr algn="ctr"/>
+                      <a:r>
                         <a:rPr sz="1200" b="0">
                           <a:solidFill>
-                            <a:srgbClr val="111111"/>
-                          </a:solidFill>
-                          <a:latin typeface="AppleGothic"/>
-                          <a:ea typeface="AppleGothic"/>
-                        </a:rPr>
-                        <a:t>경계 + dual-scale → 0.751</a:t>
-                      </a:r>
-                    </a:p>
-                  </a:txBody>
-                  <a:tcPr anchor="ctr">
-                    <a:solidFill>
-                      <a:srgbClr val="FFFFFF"/>
-                    </a:solidFill>
-                  </a:tcPr>
-                </a:tc>
-              </a:tr>
-              <a:tr h="457200">
-                <a:tc>
-                  <a:txBody>
-                    <a:bodyPr/>
-                    <a:lstStyle/>
-                    <a:p>
-                      <a:pPr algn="l"/>
-                      <a:r>
-                        <a:rPr sz="1200" b="1">
-                          <a:solidFill>
-                            <a:srgbClr val="111111"/>
-                          </a:solidFill>
-                          <a:latin typeface="AppleGothic"/>
-                          <a:ea typeface="AppleGothic"/>
-                        </a:rPr>
-                        <a:t>XJTU</a:t>
-                      </a:r>
-                    </a:p>
-                  </a:txBody>
-                  <a:tcPr anchor="ctr">
-                    <a:solidFill>
-                      <a:srgbClr val="F2F2F0"/>
-                    </a:solidFill>
-                  </a:tcPr>
-                </a:tc>
-                <a:tc>
-                  <a:txBody>
-                    <a:bodyPr/>
-                    <a:lstStyle/>
-                    <a:p>
-                      <a:pPr algn="ctr"/>
-                      <a:r>
-                        <a:rPr sz="1200" b="1">
-                          <a:solidFill>
-                            <a:srgbClr val="9B1C1C"/>
-                          </a:solidFill>
-                          <a:latin typeface="AppleGothic"/>
-                          <a:ea typeface="AppleGothic"/>
-                        </a:rPr>
-                        <a:t>-1.229</a:t>
-                      </a:r>
-                    </a:p>
-                  </a:txBody>
-                  <a:tcPr anchor="ctr">
-                    <a:solidFill>
-                      <a:srgbClr val="F2F2F0"/>
-                    </a:solidFill>
-                  </a:tcPr>
-                </a:tc>
-                <a:tc>
-                  <a:txBody>
-                    <a:bodyPr/>
-                    <a:lstStyle/>
-                    <a:p>
-                      <a:pPr algn="l"/>
+                            <a:srgbClr val="222222"/>
+                          </a:solidFill>
+                          <a:latin typeface="Arial"/>
+                          <a:ea typeface="AppleGothic"/>
+                        </a:rPr>
+                        <a:t>메커니즘 전이 · unit 극소</a:t>
+                      </a:r>
+                    </a:p>
+                  </a:txBody>
+                  <a:tcPr anchor="ctr">
+                    <a:solidFill>
+                      <a:srgbClr val="F5F5F5"/>
+                    </a:solidFill>
+                  </a:tcPr>
+                </a:tc>
+                <a:tc>
+                  <a:txBody>
+                    <a:bodyPr/>
+                    <a:lstStyle/>
+                    <a:p>
+                      <a:pPr algn="ctr"/>
                       <a:r>
                         <a:rPr sz="1200" b="0">
                           <a:solidFill>
-                            <a:srgbClr val="111111"/>
-                          </a:solidFill>
-                          <a:latin typeface="AppleGothic"/>
-                          <a:ea typeface="AppleGothic"/>
-                        </a:rPr>
-                        <a:t>val/test 이동 반대</a:t>
-                      </a:r>
-                    </a:p>
-                  </a:txBody>
-                  <a:tcPr anchor="ctr">
-                    <a:solidFill>
-                      <a:srgbClr val="F2F2F0"/>
-                    </a:solidFill>
-                  </a:tcPr>
-                </a:tc>
-                <a:tc>
-                  <a:txBody>
-                    <a:bodyPr/>
-                    <a:lstStyle/>
-                    <a:p>
-                      <a:pPr algn="l"/>
-                      <a:r>
-                        <a:rPr sz="1200" b="0">
-                          <a:solidFill>
-                            <a:srgbClr val="111111"/>
-                          </a:solidFill>
-                          <a:latin typeface="AppleGothic"/>
-                          <a:ea typeface="AppleGothic"/>
-                        </a:rPr>
-                        <a:t>거절 / 옮기지 않음</a:t>
-                      </a:r>
-                    </a:p>
-                  </a:txBody>
-                  <a:tcPr anchor="ctr">
-                    <a:solidFill>
-                      <a:srgbClr val="F2F2F0"/>
-                    </a:solidFill>
-                  </a:tcPr>
-                </a:tc>
-              </a:tr>
-              <a:tr h="457200">
-                <a:tc>
-                  <a:txBody>
-                    <a:bodyPr/>
-                    <a:lstStyle/>
-                    <a:p>
-                      <a:pPr algn="l"/>
-                      <a:r>
-                        <a:rPr sz="1200" b="1">
-                          <a:solidFill>
-                            <a:srgbClr val="111111"/>
-                          </a:solidFill>
-                          <a:latin typeface="AppleGothic"/>
-                          <a:ea typeface="AppleGothic"/>
-                        </a:rPr>
-                        <a:t>FEMTO</a:t>
-                      </a:r>
-                    </a:p>
-                  </a:txBody>
-                  <a:tcPr anchor="ctr">
-                    <a:solidFill>
-                      <a:srgbClr val="FFFFFF"/>
-                    </a:solidFill>
-                  </a:tcPr>
-                </a:tc>
-                <a:tc>
-                  <a:txBody>
-                    <a:bodyPr/>
-                    <a:lstStyle/>
-                    <a:p>
-                      <a:pPr algn="ctr"/>
-                      <a:r>
-                        <a:rPr sz="1200" b="1">
-                          <a:solidFill>
-                            <a:srgbClr val="9B1C1C"/>
-                          </a:solidFill>
-                          <a:latin typeface="AppleGothic"/>
-                          <a:ea typeface="AppleGothic"/>
-                        </a:rPr>
-                        <a:t>-1.378</a:t>
-                      </a:r>
-                    </a:p>
-                  </a:txBody>
-                  <a:tcPr anchor="ctr">
-                    <a:solidFill>
-                      <a:srgbClr val="FFFFFF"/>
-                    </a:solidFill>
-                  </a:tcPr>
-                </a:tc>
-                <a:tc>
-                  <a:txBody>
-                    <a:bodyPr/>
-                    <a:lstStyle/>
-                    <a:p>
-                      <a:pPr algn="l"/>
-                      <a:r>
-                        <a:rPr sz="1200" b="0">
-                          <a:solidFill>
-                            <a:srgbClr val="111111"/>
-                          </a:solidFill>
-                          <a:latin typeface="AppleGothic"/>
-                          <a:ea typeface="AppleGothic"/>
-                        </a:rPr>
-                        <a:t>끝점 희소 · 채널 이슈</a:t>
-                      </a:r>
-                    </a:p>
-                  </a:txBody>
-                  <a:tcPr anchor="ctr">
-                    <a:solidFill>
-                      <a:srgbClr val="FFFFFF"/>
-                    </a:solidFill>
-                  </a:tcPr>
-                </a:tc>
-                <a:tc>
-                  <a:txBody>
-                    <a:bodyPr/>
-                    <a:lstStyle/>
-                    <a:p>
-                      <a:pPr algn="l"/>
-                      <a:r>
-                        <a:rPr sz="1200" b="0">
-                          <a:solidFill>
-                            <a:srgbClr val="111111"/>
-                          </a:solidFill>
-                          <a:latin typeface="AppleGothic"/>
-                          <a:ea typeface="AppleGothic"/>
-                        </a:rPr>
-                        <a:t>설계 미성숙 · 보류</a:t>
-                      </a:r>
-                    </a:p>
-                  </a:txBody>
-                  <a:tcPr anchor="ctr">
-                    <a:solidFill>
-                      <a:srgbClr val="FFFFFF"/>
-                    </a:solidFill>
-                  </a:tcPr>
-                </a:tc>
-              </a:tr>
-              <a:tr h="457200">
-                <a:tc>
-                  <a:txBody>
-                    <a:bodyPr/>
-                    <a:lstStyle/>
-                    <a:p>
-                      <a:pPr algn="l"/>
-                      <a:r>
-                        <a:rPr sz="1200" b="1">
-                          <a:solidFill>
-                            <a:srgbClr val="111111"/>
-                          </a:solidFill>
-                          <a:latin typeface="AppleGothic"/>
-                          <a:ea typeface="AppleGothic"/>
-                        </a:rPr>
-                        <a:t>NASA milling</a:t>
-                      </a:r>
-                    </a:p>
-                  </a:txBody>
-                  <a:tcPr anchor="ctr">
-                    <a:solidFill>
-                      <a:srgbClr val="F2F2F0"/>
-                    </a:solidFill>
-                  </a:tcPr>
-                </a:tc>
-                <a:tc>
-                  <a:txBody>
-                    <a:bodyPr/>
-                    <a:lstStyle/>
-                    <a:p>
-                      <a:pPr algn="ctr"/>
-                      <a:r>
-                        <a:rPr sz="1200" b="1">
-                          <a:solidFill>
-                            <a:srgbClr val="9B1C1C"/>
-                          </a:solidFill>
-                          <a:latin typeface="AppleGothic"/>
-                          <a:ea typeface="AppleGothic"/>
-                        </a:rPr>
-                        <a:t>-4.826</a:t>
-                      </a:r>
-                    </a:p>
-                  </a:txBody>
-                  <a:tcPr anchor="ctr">
-                    <a:solidFill>
-                      <a:srgbClr val="F2F2F0"/>
-                    </a:solidFill>
-                  </a:tcPr>
-                </a:tc>
-                <a:tc>
-                  <a:txBody>
-                    <a:bodyPr/>
-                    <a:lstStyle/>
-                    <a:p>
-                      <a:pPr algn="l"/>
-                      <a:r>
-                        <a:rPr sz="1200" b="0">
-                          <a:solidFill>
-                            <a:srgbClr val="111111"/>
-                          </a:solidFill>
-                          <a:latin typeface="AppleGothic"/>
-                          <a:ea typeface="AppleGothic"/>
-                        </a:rPr>
-                        <a:t>메커니즘 전이 · unit 극소</a:t>
-                      </a:r>
-                    </a:p>
-                  </a:txBody>
-                  <a:tcPr anchor="ctr">
-                    <a:solidFill>
-                      <a:srgbClr val="F2F2F0"/>
-                    </a:solidFill>
-                  </a:tcPr>
-                </a:tc>
-                <a:tc>
-                  <a:txBody>
-                    <a:bodyPr/>
-                    <a:lstStyle/>
-                    <a:p>
-                      <a:pPr algn="l"/>
-                      <a:r>
-                        <a:rPr sz="1200" b="0">
-                          <a:solidFill>
-                            <a:srgbClr val="111111"/>
-                          </a:solidFill>
-                          <a:latin typeface="AppleGothic"/>
+                            <a:srgbClr val="222222"/>
+                          </a:solidFill>
+                          <a:latin typeface="Arial"/>
                           <a:ea typeface="AppleGothic"/>
                         </a:rPr>
                         <a:t>사전 Fail / ABSTAIN</a:t>
@@ -4109,7 +4073,7 @@
                   </a:txBody>
                   <a:tcPr anchor="ctr">
                     <a:solidFill>
-                      <a:srgbClr val="F2F2F0"/>
+                      <a:srgbClr val="F5F5F5"/>
                     </a:solidFill>
                   </a:tcPr>
                 </a:tc>
@@ -4118,53 +4082,17 @@
           </a:graphicData>
         </a:graphic>
       </p:graphicFrame>
-      <p:sp>
-        <p:nvSpPr>
-          <p:cNvPr id="8" name="TextBox 7"/>
-          <p:cNvSpPr txBox="1"/>
-          <p:nvPr/>
-        </p:nvSpPr>
-        <p:spPr>
-          <a:xfrm>
-            <a:off x="457200" y="3714750"/>
-            <a:ext cx="5334000" cy="228600"/>
-          </a:xfrm>
-          <a:prstGeom prst="rect">
-            <a:avLst/>
-          </a:prstGeom>
-          <a:noFill/>
-        </p:spPr>
-        <p:txBody>
-          <a:bodyPr wrap="square">
-            <a:spAutoFit/>
-          </a:bodyPr>
-          <a:lstStyle/>
-          <a:p>
-            <a:pPr algn="l"/>
-            <a:r>
-              <a:rPr sz="1300" b="1">
-                <a:solidFill>
-                  <a:srgbClr val="0A5C5C"/>
-                </a:solidFill>
-                <a:latin typeface="AppleGothic"/>
-                <a:ea typeface="AppleGothic"/>
-              </a:rPr>
-              <a:t>주장하는 것</a:t>
-            </a:r>
-          </a:p>
-        </p:txBody>
-      </p:sp>
       <p:graphicFrame>
         <p:nvGraphicFramePr>
-          <p:cNvPr id="9" name="Table 8"/>
+          <p:cNvPr id="7" name="Table 6"/>
           <p:cNvGraphicFramePr>
             <a:graphicFrameLocks noGrp="1"/>
           </p:cNvGraphicFramePr>
           <p:nvPr/>
         </p:nvGraphicFramePr>
         <p:xfrm>
-          <a:off x="457200" y="4000500"/>
-          <a:ext cx="5334000" cy="1905000"/>
+          <a:off x="457200" y="3619500"/>
+          <a:ext cx="5524500" cy="2095500"/>
         </p:xfrm>
         <a:graphic>
           <a:graphicData uri="http://schemas.openxmlformats.org/drawingml/2006/table">
@@ -4173,75 +4101,75 @@
                 <a:tableStyleId>{5C22544A-7EE6-4342-B048-85BDC9FD1C3A}</a:tableStyleId>
               </a:tblPr>
               <a:tblGrid>
-                <a:gridCol w="2667000"/>
-                <a:gridCol w="2667000"/>
+                <a:gridCol w="2762250"/>
+                <a:gridCol w="2762250"/>
               </a:tblGrid>
-              <a:tr h="381000">
-                <a:tc>
-                  <a:txBody>
-                    <a:bodyPr/>
-                    <a:lstStyle/>
-                    <a:p>
-                      <a:pPr algn="ctr"/>
-                      <a:r>
-                        <a:rPr sz="1100" b="1">
+              <a:tr h="419100">
+                <a:tc>
+                  <a:txBody>
+                    <a:bodyPr/>
+                    <a:lstStyle/>
+                    <a:p>
+                      <a:pPr algn="ctr"/>
+                      <a:r>
+                        <a:rPr sz="1200" b="1">
                           <a:solidFill>
                             <a:srgbClr val="FFFFFF"/>
                           </a:solidFill>
-                          <a:latin typeface="AppleGothic"/>
-                          <a:ea typeface="AppleGothic"/>
-                        </a:rPr>
-                        <a:t>항목</a:t>
-                      </a:r>
-                    </a:p>
-                  </a:txBody>
-                  <a:tcPr anchor="ctr">
-                    <a:solidFill>
-                      <a:srgbClr val="111111"/>
-                    </a:solidFill>
-                  </a:tcPr>
-                </a:tc>
-                <a:tc>
-                  <a:txBody>
-                    <a:bodyPr/>
-                    <a:lstStyle/>
-                    <a:p>
-                      <a:pPr algn="ctr"/>
-                      <a:r>
-                        <a:rPr sz="1100" b="1">
+                          <a:latin typeface="Arial"/>
+                          <a:ea typeface="AppleGothic"/>
+                        </a:rPr>
+                        <a:t>Claim</a:t>
+                      </a:r>
+                    </a:p>
+                  </a:txBody>
+                  <a:tcPr anchor="ctr">
+                    <a:solidFill>
+                      <a:srgbClr val="222222"/>
+                    </a:solidFill>
+                  </a:tcPr>
+                </a:tc>
+                <a:tc>
+                  <a:txBody>
+                    <a:bodyPr/>
+                    <a:lstStyle/>
+                    <a:p>
+                      <a:pPr algn="ctr"/>
+                      <a:r>
+                        <a:rPr sz="1200" b="1">
                           <a:solidFill>
                             <a:srgbClr val="FFFFFF"/>
                           </a:solidFill>
-                          <a:latin typeface="AppleGothic"/>
-                          <a:ea typeface="AppleGothic"/>
-                        </a:rPr>
-                        <a:t>내용</a:t>
-                      </a:r>
-                    </a:p>
-                  </a:txBody>
-                  <a:tcPr anchor="ctr">
-                    <a:solidFill>
-                      <a:srgbClr val="111111"/>
+                          <a:latin typeface="Arial"/>
+                          <a:ea typeface="AppleGothic"/>
+                        </a:rPr>
+                        <a:t>Detail</a:t>
+                      </a:r>
+                    </a:p>
+                  </a:txBody>
+                  <a:tcPr anchor="ctr">
+                    <a:solidFill>
+                      <a:srgbClr val="222222"/>
                     </a:solidFill>
                   </a:tcPr>
                 </a:tc>
               </a:tr>
-              <a:tr h="381000">
-                <a:tc>
-                  <a:txBody>
-                    <a:bodyPr/>
-                    <a:lstStyle/>
-                    <a:p>
-                      <a:pPr algn="ctr"/>
-                      <a:r>
-                        <a:rPr sz="1100" b="1">
-                          <a:solidFill>
-                            <a:srgbClr val="111111"/>
-                          </a:solidFill>
-                          <a:latin typeface="AppleGothic"/>
-                          <a:ea typeface="AppleGothic"/>
-                        </a:rPr>
-                        <a:t>주표</a:t>
+              <a:tr h="419100">
+                <a:tc>
+                  <a:txBody>
+                    <a:bodyPr/>
+                    <a:lstStyle/>
+                    <a:p>
+                      <a:pPr algn="l"/>
+                      <a:r>
+                        <a:rPr sz="1200" b="1">
+                          <a:solidFill>
+                            <a:srgbClr val="222222"/>
+                          </a:solidFill>
+                          <a:latin typeface="Arial"/>
+                          <a:ea typeface="AppleGothic"/>
+                        </a:rPr>
+                        <a:t>Main scores</a:t>
                       </a:r>
                     </a:p>
                   </a:txBody>
@@ -4258,11 +4186,11 @@
                     <a:p>
                       <a:pPr algn="ctr"/>
                       <a:r>
-                        <a:rPr sz="1100" b="0">
-                          <a:solidFill>
-                            <a:srgbClr val="111111"/>
-                          </a:solidFill>
-                          <a:latin typeface="AppleGothic"/>
+                        <a:rPr sz="1200" b="0">
+                          <a:solidFill>
+                            <a:srgbClr val="222222"/>
+                          </a:solidFill>
+                          <a:latin typeface="Arial"/>
                           <a:ea typeface="AppleGothic"/>
                         </a:rPr>
                         <a:t>0.934 / 0.842 / 0.751</a:t>
@@ -4276,43 +4204,43 @@
                   </a:tcPr>
                 </a:tc>
               </a:tr>
-              <a:tr h="381000">
-                <a:tc>
-                  <a:txBody>
-                    <a:bodyPr/>
-                    <a:lstStyle/>
-                    <a:p>
-                      <a:pPr algn="ctr"/>
-                      <a:r>
-                        <a:rPr sz="1100" b="1">
-                          <a:solidFill>
-                            <a:srgbClr val="111111"/>
-                          </a:solidFill>
-                          <a:latin typeface="AppleGothic"/>
-                          <a:ea typeface="AppleGothic"/>
-                        </a:rPr>
-                        <a:t>범위</a:t>
-                      </a:r>
-                    </a:p>
-                  </a:txBody>
-                  <a:tcPr anchor="ctr">
-                    <a:solidFill>
-                      <a:srgbClr val="F2F2F0"/>
-                    </a:solidFill>
-                  </a:tcPr>
-                </a:tc>
-                <a:tc>
-                  <a:txBody>
-                    <a:bodyPr/>
-                    <a:lstStyle/>
-                    <a:p>
-                      <a:pPr algn="ctr"/>
-                      <a:r>
-                        <a:rPr sz="1100" b="0">
-                          <a:solidFill>
-                            <a:srgbClr val="111111"/>
-                          </a:solidFill>
-                          <a:latin typeface="AppleGothic"/>
+              <a:tr h="419100">
+                <a:tc>
+                  <a:txBody>
+                    <a:bodyPr/>
+                    <a:lstStyle/>
+                    <a:p>
+                      <a:pPr algn="l"/>
+                      <a:r>
+                        <a:rPr sz="1200" b="1">
+                          <a:solidFill>
+                            <a:srgbClr val="222222"/>
+                          </a:solidFill>
+                          <a:latin typeface="Arial"/>
+                          <a:ea typeface="AppleGothic"/>
+                        </a:rPr>
+                        <a:t>Scope</a:t>
+                      </a:r>
+                    </a:p>
+                  </a:txBody>
+                  <a:tcPr anchor="ctr">
+                    <a:solidFill>
+                      <a:srgbClr val="F5F5F5"/>
+                    </a:solidFill>
+                  </a:tcPr>
+                </a:tc>
+                <a:tc>
+                  <a:txBody>
+                    <a:bodyPr/>
+                    <a:lstStyle/>
+                    <a:p>
+                      <a:pPr algn="ctr"/>
+                      <a:r>
+                        <a:rPr sz="1200" b="0">
+                          <a:solidFill>
+                            <a:srgbClr val="222222"/>
+                          </a:solidFill>
+                          <a:latin typeface="Arial"/>
                           <a:ea typeface="AppleGothic"/>
                         </a:rPr>
                         <a:t>연속 열화 · unit-disjoint · hull-out</a:t>
@@ -4321,27 +4249,27 @@
                   </a:txBody>
                   <a:tcPr anchor="ctr">
                     <a:solidFill>
-                      <a:srgbClr val="F2F2F0"/>
+                      <a:srgbClr val="F5F5F5"/>
                     </a:solidFill>
                   </a:tcPr>
                 </a:tc>
               </a:tr>
-              <a:tr h="381000">
-                <a:tc>
-                  <a:txBody>
-                    <a:bodyPr/>
-                    <a:lstStyle/>
-                    <a:p>
-                      <a:pPr algn="ctr"/>
-                      <a:r>
-                        <a:rPr sz="1100" b="1">
-                          <a:solidFill>
-                            <a:srgbClr val="111111"/>
-                          </a:solidFill>
-                          <a:latin typeface="AppleGothic"/>
-                          <a:ea typeface="AppleGothic"/>
-                        </a:rPr>
-                        <a:t>방법</a:t>
+              <a:tr h="419100">
+                <a:tc>
+                  <a:txBody>
+                    <a:bodyPr/>
+                    <a:lstStyle/>
+                    <a:p>
+                      <a:pPr algn="l"/>
+                      <a:r>
+                        <a:rPr sz="1200" b="1">
+                          <a:solidFill>
+                            <a:srgbClr val="222222"/>
+                          </a:solidFill>
+                          <a:latin typeface="Arial"/>
+                          <a:ea typeface="AppleGothic"/>
+                        </a:rPr>
+                        <a:t>Method</a:t>
                       </a:r>
                     </a:p>
                   </a:txBody>
@@ -4358,14 +4286,14 @@
                     <a:p>
                       <a:pPr algn="ctr"/>
                       <a:r>
-                        <a:rPr sz="1100" b="0">
-                          <a:solidFill>
-                            <a:srgbClr val="111111"/>
-                          </a:solidFill>
-                          <a:latin typeface="AppleGothic"/>
-                          <a:ea typeface="AppleGothic"/>
-                        </a:rPr>
-                        <a:t>동결 affine + dual-scale residual</a:t>
+                        <a:rPr sz="1200" b="0">
+                          <a:solidFill>
+                            <a:srgbClr val="222222"/>
+                          </a:solidFill>
+                          <a:latin typeface="Arial"/>
+                          <a:ea typeface="AppleGothic"/>
+                        </a:rPr>
+                        <a:t>frozen affine + dual-scale residual</a:t>
                       </a:r>
                     </a:p>
                   </a:txBody>
@@ -4376,43 +4304,43 @@
                   </a:tcPr>
                 </a:tc>
               </a:tr>
-              <a:tr h="381000">
-                <a:tc>
-                  <a:txBody>
-                    <a:bodyPr/>
-                    <a:lstStyle/>
-                    <a:p>
-                      <a:pPr algn="ctr"/>
-                      <a:r>
-                        <a:rPr sz="1100" b="1">
-                          <a:solidFill>
-                            <a:srgbClr val="111111"/>
-                          </a:solidFill>
-                          <a:latin typeface="AppleGothic"/>
-                          <a:ea typeface="AppleGothic"/>
-                        </a:rPr>
-                        <a:t>타깃</a:t>
-                      </a:r>
-                    </a:p>
-                  </a:txBody>
-                  <a:tcPr anchor="ctr">
-                    <a:solidFill>
-                      <a:srgbClr val="F2F2F0"/>
-                    </a:solidFill>
-                  </a:tcPr>
-                </a:tc>
-                <a:tc>
-                  <a:txBody>
-                    <a:bodyPr/>
-                    <a:lstStyle/>
-                    <a:p>
-                      <a:pPr algn="ctr"/>
-                      <a:r>
-                        <a:rPr sz="1100" b="0">
-                          <a:solidFill>
-                            <a:srgbClr val="111111"/>
-                          </a:solidFill>
-                          <a:latin typeface="AppleGothic"/>
+              <a:tr h="419100">
+                <a:tc>
+                  <a:txBody>
+                    <a:bodyPr/>
+                    <a:lstStyle/>
+                    <a:p>
+                      <a:pPr algn="l"/>
+                      <a:r>
+                        <a:rPr sz="1200" b="1">
+                          <a:solidFill>
+                            <a:srgbClr val="222222"/>
+                          </a:solidFill>
+                          <a:latin typeface="Arial"/>
+                          <a:ea typeface="AppleGothic"/>
+                        </a:rPr>
+                        <a:t>Venue</a:t>
+                      </a:r>
+                    </a:p>
+                  </a:txBody>
+                  <a:tcPr anchor="ctr">
+                    <a:solidFill>
+                      <a:srgbClr val="F5F5F5"/>
+                    </a:solidFill>
+                  </a:tcPr>
+                </a:tc>
+                <a:tc>
+                  <a:txBody>
+                    <a:bodyPr/>
+                    <a:lstStyle/>
+                    <a:p>
+                      <a:pPr algn="ctr"/>
+                      <a:r>
+                        <a:rPr sz="1200" b="0">
+                          <a:solidFill>
+                            <a:srgbClr val="222222"/>
+                          </a:solidFill>
+                          <a:latin typeface="Arial"/>
                           <a:ea typeface="AppleGothic"/>
                         </a:rPr>
                         <a:t>분야 Q1–Q2</a:t>
@@ -4421,7 +4349,7 @@
                   </a:txBody>
                   <a:tcPr anchor="ctr">
                     <a:solidFill>
-                      <a:srgbClr val="F2F2F0"/>
+                      <a:srgbClr val="F5F5F5"/>
                     </a:solidFill>
                   </a:tcPr>
                 </a:tc>
@@ -4430,53 +4358,17 @@
           </a:graphicData>
         </a:graphic>
       </p:graphicFrame>
-      <p:sp>
-        <p:nvSpPr>
-          <p:cNvPr id="10" name="TextBox 9"/>
-          <p:cNvSpPr txBox="1"/>
-          <p:nvPr/>
-        </p:nvSpPr>
-        <p:spPr>
-          <a:xfrm>
-            <a:off x="6096000" y="3714750"/>
-            <a:ext cx="5334000" cy="228600"/>
-          </a:xfrm>
-          <a:prstGeom prst="rect">
-            <a:avLst/>
-          </a:prstGeom>
-          <a:noFill/>
-        </p:spPr>
-        <p:txBody>
-          <a:bodyPr wrap="square">
-            <a:spAutoFit/>
-          </a:bodyPr>
-          <a:lstStyle/>
-          <a:p>
-            <a:pPr algn="l"/>
-            <a:r>
-              <a:rPr sz="1300" b="1">
-                <a:solidFill>
-                  <a:srgbClr val="9B1C1C"/>
-                </a:solidFill>
-                <a:latin typeface="AppleGothic"/>
-                <a:ea typeface="AppleGothic"/>
-              </a:rPr>
-              <a:t>아직 주장하지 않는 것</a:t>
-            </a:r>
-          </a:p>
-        </p:txBody>
-      </p:sp>
       <p:graphicFrame>
         <p:nvGraphicFramePr>
-          <p:cNvPr id="11" name="Table 10"/>
+          <p:cNvPr id="8" name="Table 7"/>
           <p:cNvGraphicFramePr>
             <a:graphicFrameLocks noGrp="1"/>
           </p:cNvGraphicFramePr>
           <p:nvPr/>
         </p:nvGraphicFramePr>
         <p:xfrm>
-          <a:off x="6096000" y="4000500"/>
-          <a:ext cx="5638800" cy="1905000"/>
+          <a:off x="6286500" y="3619500"/>
+          <a:ext cx="5448300" cy="2095500"/>
         </p:xfrm>
         <a:graphic>
           <a:graphicData uri="http://schemas.openxmlformats.org/drawingml/2006/table">
@@ -4485,72 +4377,72 @@
                 <a:tableStyleId>{5C22544A-7EE6-4342-B048-85BDC9FD1C3A}</a:tableStyleId>
               </a:tblPr>
               <a:tblGrid>
-                <a:gridCol w="2819400"/>
-                <a:gridCol w="2819400"/>
+                <a:gridCol w="2724150"/>
+                <a:gridCol w="2724150"/>
               </a:tblGrid>
-              <a:tr h="381000">
-                <a:tc>
-                  <a:txBody>
-                    <a:bodyPr/>
-                    <a:lstStyle/>
-                    <a:p>
-                      <a:pPr algn="ctr"/>
-                      <a:r>
-                        <a:rPr sz="1100" b="1">
+              <a:tr h="419100">
+                <a:tc>
+                  <a:txBody>
+                    <a:bodyPr/>
+                    <a:lstStyle/>
+                    <a:p>
+                      <a:pPr algn="ctr"/>
+                      <a:r>
+                        <a:rPr sz="1200" b="1">
                           <a:solidFill>
                             <a:srgbClr val="FFFFFF"/>
                           </a:solidFill>
-                          <a:latin typeface="AppleGothic"/>
-                          <a:ea typeface="AppleGothic"/>
-                        </a:rPr>
-                        <a:t>항목</a:t>
-                      </a:r>
-                    </a:p>
-                  </a:txBody>
-                  <a:tcPr anchor="ctr">
-                    <a:solidFill>
-                      <a:srgbClr val="111111"/>
-                    </a:solidFill>
-                  </a:tcPr>
-                </a:tc>
-                <a:tc>
-                  <a:txBody>
-                    <a:bodyPr/>
-                    <a:lstStyle/>
-                    <a:p>
-                      <a:pPr algn="ctr"/>
-                      <a:r>
-                        <a:rPr sz="1100" b="1">
+                          <a:latin typeface="Arial"/>
+                          <a:ea typeface="AppleGothic"/>
+                        </a:rPr>
+                        <a:t>Not claimed</a:t>
+                      </a:r>
+                    </a:p>
+                  </a:txBody>
+                  <a:tcPr anchor="ctr">
+                    <a:solidFill>
+                      <a:srgbClr val="222222"/>
+                    </a:solidFill>
+                  </a:tcPr>
+                </a:tc>
+                <a:tc>
+                  <a:txBody>
+                    <a:bodyPr/>
+                    <a:lstStyle/>
+                    <a:p>
+                      <a:pPr algn="ctr"/>
+                      <a:r>
+                        <a:rPr sz="1200" b="1">
                           <a:solidFill>
                             <a:srgbClr val="FFFFFF"/>
                           </a:solidFill>
-                          <a:latin typeface="AppleGothic"/>
-                          <a:ea typeface="AppleGothic"/>
-                        </a:rPr>
-                        <a:t>내용</a:t>
-                      </a:r>
-                    </a:p>
-                  </a:txBody>
-                  <a:tcPr anchor="ctr">
-                    <a:solidFill>
-                      <a:srgbClr val="111111"/>
+                          <a:latin typeface="Arial"/>
+                          <a:ea typeface="AppleGothic"/>
+                        </a:rPr>
+                        <a:t>Detail</a:t>
+                      </a:r>
+                    </a:p>
+                  </a:txBody>
+                  <a:tcPr anchor="ctr">
+                    <a:solidFill>
+                      <a:srgbClr val="222222"/>
                     </a:solidFill>
                   </a:tcPr>
                 </a:tc>
               </a:tr>
-              <a:tr h="381000">
-                <a:tc>
-                  <a:txBody>
-                    <a:bodyPr/>
-                    <a:lstStyle/>
-                    <a:p>
-                      <a:pPr algn="ctr"/>
-                      <a:r>
-                        <a:rPr sz="1100" b="1">
-                          <a:solidFill>
-                            <a:srgbClr val="111111"/>
-                          </a:solidFill>
-                          <a:latin typeface="AppleGothic"/>
+              <a:tr h="419100">
+                <a:tc>
+                  <a:txBody>
+                    <a:bodyPr/>
+                    <a:lstStyle/>
+                    <a:p>
+                      <a:pPr algn="l"/>
+                      <a:r>
+                        <a:rPr sz="1200" b="1">
+                          <a:solidFill>
+                            <a:srgbClr val="222222"/>
+                          </a:solidFill>
+                          <a:latin typeface="Arial"/>
                           <a:ea typeface="AppleGothic"/>
                         </a:rPr>
                         <a:t>Zn / Na</a:t>
@@ -4570,11 +4462,11 @@
                     <a:p>
                       <a:pPr algn="ctr"/>
                       <a:r>
-                        <a:rPr sz="1100" b="0">
-                          <a:solidFill>
-                            <a:srgbClr val="111111"/>
-                          </a:solidFill>
-                          <a:latin typeface="AppleGothic"/>
+                        <a:rPr sz="1200" b="0">
+                          <a:solidFill>
+                            <a:srgbClr val="222222"/>
+                          </a:solidFill>
+                          <a:latin typeface="Arial"/>
                           <a:ea typeface="AppleGothic"/>
                         </a:rPr>
                         <a:t>사후 개발 — untouched 확증 아님</a:t>
@@ -4588,43 +4480,43 @@
                   </a:tcPr>
                 </a:tc>
               </a:tr>
-              <a:tr h="381000">
-                <a:tc>
-                  <a:txBody>
-                    <a:bodyPr/>
-                    <a:lstStyle/>
-                    <a:p>
-                      <a:pPr algn="ctr"/>
-                      <a:r>
-                        <a:rPr sz="1100" b="1">
-                          <a:solidFill>
-                            <a:srgbClr val="111111"/>
-                          </a:solidFill>
-                          <a:latin typeface="AppleGothic"/>
-                          <a:ea typeface="AppleGothic"/>
-                        </a:rPr>
-                        <a:t>교차도메인</a:t>
-                      </a:r>
-                    </a:p>
-                  </a:txBody>
-                  <a:tcPr anchor="ctr">
-                    <a:solidFill>
-                      <a:srgbClr val="F2F2F0"/>
-                    </a:solidFill>
-                  </a:tcPr>
-                </a:tc>
-                <a:tc>
-                  <a:txBody>
-                    <a:bodyPr/>
-                    <a:lstStyle/>
-                    <a:p>
-                      <a:pPr algn="ctr"/>
-                      <a:r>
-                        <a:rPr sz="1100" b="0">
-                          <a:solidFill>
-                            <a:srgbClr val="111111"/>
-                          </a:solidFill>
-                          <a:latin typeface="AppleGothic"/>
+              <a:tr h="419100">
+                <a:tc>
+                  <a:txBody>
+                    <a:bodyPr/>
+                    <a:lstStyle/>
+                    <a:p>
+                      <a:pPr algn="l"/>
+                      <a:r>
+                        <a:rPr sz="1200" b="1">
+                          <a:solidFill>
+                            <a:srgbClr val="222222"/>
+                          </a:solidFill>
+                          <a:latin typeface="Arial"/>
+                          <a:ea typeface="AppleGothic"/>
+                        </a:rPr>
+                        <a:t>Cross-domain</a:t>
+                      </a:r>
+                    </a:p>
+                  </a:txBody>
+                  <a:tcPr anchor="ctr">
+                    <a:solidFill>
+                      <a:srgbClr val="F5F5F5"/>
+                    </a:solidFill>
+                  </a:tcPr>
+                </a:tc>
+                <a:tc>
+                  <a:txBody>
+                    <a:bodyPr/>
+                    <a:lstStyle/>
+                    <a:p>
+                      <a:pPr algn="ctr"/>
+                      <a:r>
+                        <a:rPr sz="1200" b="0">
+                          <a:solidFill>
+                            <a:srgbClr val="222222"/>
+                          </a:solidFill>
+                          <a:latin typeface="Arial"/>
                           <a:ea typeface="AppleGothic"/>
                         </a:rPr>
                         <a:t>XJTU · FEMTO 우월성 전</a:t>
@@ -4633,24 +4525,24 @@
                   </a:txBody>
                   <a:tcPr anchor="ctr">
                     <a:solidFill>
-                      <a:srgbClr val="F2F2F0"/>
+                      <a:srgbClr val="F5F5F5"/>
                     </a:solidFill>
                   </a:tcPr>
                 </a:tc>
               </a:tr>
-              <a:tr h="381000">
-                <a:tc>
-                  <a:txBody>
-                    <a:bodyPr/>
-                    <a:lstStyle/>
-                    <a:p>
-                      <a:pPr algn="ctr"/>
-                      <a:r>
-                        <a:rPr sz="1100" b="1">
-                          <a:solidFill>
-                            <a:srgbClr val="111111"/>
-                          </a:solidFill>
-                          <a:latin typeface="AppleGothic"/>
+              <a:tr h="419100">
+                <a:tc>
+                  <a:txBody>
+                    <a:bodyPr/>
+                    <a:lstStyle/>
+                    <a:p>
+                      <a:pPr algn="l"/>
+                      <a:r>
+                        <a:rPr sz="1200" b="1">
+                          <a:solidFill>
+                            <a:srgbClr val="222222"/>
+                          </a:solidFill>
+                          <a:latin typeface="Arial"/>
                           <a:ea typeface="AppleGothic"/>
                         </a:rPr>
                         <a:t>PAE</a:t>
@@ -4670,14 +4562,14 @@
                     <a:p>
                       <a:pPr algn="ctr"/>
                       <a:r>
-                        <a:rPr sz="1100" b="0">
-                          <a:solidFill>
-                            <a:srgbClr val="111111"/>
-                          </a:solidFill>
-                          <a:latin typeface="AppleGothic"/>
-                          <a:ea typeface="AppleGothic"/>
-                        </a:rPr>
-                        <a:t>식 라우팅 실험 없음 · 표 분리</a:t>
+                        <a:rPr sz="1200" b="0">
+                          <a:solidFill>
+                            <a:srgbClr val="222222"/>
+                          </a:solidFill>
+                          <a:latin typeface="Arial"/>
+                          <a:ea typeface="AppleGothic"/>
+                        </a:rPr>
+                        <a:t>식 라우팅 실험 없음</a:t>
                       </a:r>
                     </a:p>
                   </a:txBody>
@@ -4688,43 +4580,43 @@
                   </a:tcPr>
                 </a:tc>
               </a:tr>
-              <a:tr h="381000">
-                <a:tc>
-                  <a:txBody>
-                    <a:bodyPr/>
-                    <a:lstStyle/>
-                    <a:p>
-                      <a:pPr algn="ctr"/>
-                      <a:r>
-                        <a:rPr sz="1100" b="1">
-                          <a:solidFill>
-                            <a:srgbClr val="111111"/>
-                          </a:solidFill>
-                          <a:latin typeface="AppleGothic"/>
-                          <a:ea typeface="AppleGothic"/>
-                        </a:rPr>
-                        <a:t>만능 SOTA</a:t>
-                      </a:r>
-                    </a:p>
-                  </a:txBody>
-                  <a:tcPr anchor="ctr">
-                    <a:solidFill>
-                      <a:srgbClr val="F2F2F0"/>
-                    </a:solidFill>
-                  </a:tcPr>
-                </a:tc>
-                <a:tc>
-                  <a:txBody>
-                    <a:bodyPr/>
-                    <a:lstStyle/>
-                    <a:p>
-                      <a:pPr algn="ctr"/>
-                      <a:r>
-                        <a:rPr sz="1100" b="0">
-                          <a:solidFill>
-                            <a:srgbClr val="111111"/>
-                          </a:solidFill>
-                          <a:latin typeface="AppleGothic"/>
+              <a:tr h="419100">
+                <a:tc>
+                  <a:txBody>
+                    <a:bodyPr/>
+                    <a:lstStyle/>
+                    <a:p>
+                      <a:pPr algn="l"/>
+                      <a:r>
+                        <a:rPr sz="1200" b="1">
+                          <a:solidFill>
+                            <a:srgbClr val="222222"/>
+                          </a:solidFill>
+                          <a:latin typeface="Arial"/>
+                          <a:ea typeface="AppleGothic"/>
+                        </a:rPr>
+                        <a:t>Universal SOTA</a:t>
+                      </a:r>
+                    </a:p>
+                  </a:txBody>
+                  <a:tcPr anchor="ctr">
+                    <a:solidFill>
+                      <a:srgbClr val="F5F5F5"/>
+                    </a:solidFill>
+                  </a:tcPr>
+                </a:tc>
+                <a:tc>
+                  <a:txBody>
+                    <a:bodyPr/>
+                    <a:lstStyle/>
+                    <a:p>
+                      <a:pPr algn="ctr"/>
+                      <a:r>
+                        <a:rPr sz="1200" b="0">
+                          <a:solidFill>
+                            <a:srgbClr val="222222"/>
+                          </a:solidFill>
+                          <a:latin typeface="Arial"/>
                           <a:ea typeface="AppleGothic"/>
                         </a:rPr>
                         <a:t>모든 OOD 1등 아님</a:t>
@@ -4733,7 +4625,7 @@
                   </a:txBody>
                   <a:tcPr anchor="ctr">
                     <a:solidFill>
-                      <a:srgbClr val="F2F2F0"/>
+                      <a:srgbClr val="F5F5F5"/>
                     </a:solidFill>
                   </a:tcPr>
                 </a:tc>
@@ -4744,7 +4636,7 @@
       </p:graphicFrame>
       <p:cxnSp>
         <p:nvCxnSpPr>
-          <p:cNvPr id="12" name="Connector 11"/>
+          <p:cNvPr id="9" name="Connector 8"/>
           <p:cNvCxnSpPr/>
           <p:nvPr/>
         </p:nvCxnSpPr>
@@ -4758,7 +4650,7 @@
           </a:prstGeom>
           <a:ln w="9525">
             <a:solidFill>
-              <a:srgbClr val="D0D0D0"/>
+              <a:srgbClr val="E8E8E8"/>
             </a:solidFill>
           </a:ln>
         </p:spPr>
@@ -4779,7 +4671,7 @@
       </p:cxnSp>
       <p:sp>
         <p:nvSpPr>
-          <p:cNvPr id="13" name="TextBox 12"/>
+          <p:cNvPr id="10" name="TextBox 9"/>
           <p:cNvSpPr txBox="1"/>
           <p:nvPr/>
         </p:nvSpPr>
@@ -4803,9 +4695,9 @@
             <a:r>
               <a:rPr sz="900" b="0">
                 <a:solidFill>
-                  <a:srgbClr val="555555"/>
+                  <a:srgbClr val="666666"/>
                 </a:solidFill>
-                <a:latin typeface="AppleGothic"/>
+                <a:latin typeface="Arial"/>
                 <a:ea typeface="AppleGothic"/>
               </a:rPr>
               <a:t>SPS Lab  ·  Assumption-Aware Extrapolation  ·  SAAR</a:t>
@@ -4815,7 +4707,7 @@
       </p:sp>
       <p:sp>
         <p:nvSpPr>
-          <p:cNvPr id="14" name="TextBox 13"/>
+          <p:cNvPr id="11" name="TextBox 10"/>
           <p:cNvSpPr txBox="1"/>
           <p:nvPr/>
         </p:nvSpPr>
@@ -4839,9 +4731,9 @@
             <a:r>
               <a:rPr sz="1000" b="1">
                 <a:solidFill>
-                  <a:srgbClr val="555555"/>
+                  <a:srgbClr val="666666"/>
                 </a:solidFill>
-                <a:latin typeface="AppleGothic"/>
+                <a:latin typeface="Arial"/>
                 <a:ea typeface="AppleGothic"/>
               </a:rPr>
               <a:t>10/11</a:t>
@@ -4919,13 +4811,13 @@
         <p:spPr>
           <a:xfrm>
             <a:off x="0" y="0"/>
-            <a:ext cx="12192000" cy="38100"/>
+            <a:ext cx="12192000" cy="28575"/>
           </a:xfrm>
           <a:prstGeom prst="rect">
             <a:avLst/>
           </a:prstGeom>
           <a:solidFill>
-            <a:srgbClr val="0A5C5C"/>
+            <a:srgbClr val="0072B2"/>
           </a:solidFill>
           <a:ln>
             <a:noFill/>
@@ -4962,7 +4854,7 @@
         <p:spPr>
           <a:xfrm>
             <a:off x="457200" y="209550"/>
-            <a:ext cx="11239500" cy="323850"/>
+            <a:ext cx="11239500" cy="304800"/>
           </a:xfrm>
           <a:prstGeom prst="rect">
             <a:avLst/>
@@ -4979,9 +4871,9 @@
             <a:r>
               <a:rPr sz="2200" b="1">
                 <a:solidFill>
-                  <a:srgbClr val="111111"/>
+                  <a:srgbClr val="222222"/>
                 </a:solidFill>
-                <a:latin typeface="AppleGothic"/>
+                <a:latin typeface="Arial"/>
                 <a:ea typeface="AppleGothic"/>
               </a:rPr>
               <a:t>경로와 한 줄</a:t>
@@ -4997,7 +4889,7 @@
         </p:nvSpPr>
         <p:spPr>
           <a:xfrm>
-            <a:off x="457200" y="533400"/>
+            <a:off x="457200" y="514350"/>
             <a:ext cx="11239500" cy="190500"/>
           </a:xfrm>
           <a:prstGeom prst="rect">
@@ -5015,40 +4907,413 @@
             <a:r>
               <a:rPr sz="1200" b="0">
                 <a:solidFill>
-                  <a:srgbClr val="555555"/>
+                  <a:srgbClr val="666666"/>
                 </a:solidFill>
-                <a:latin typeface="AppleGothic"/>
+                <a:latin typeface="Arial"/>
                 <a:ea typeface="AppleGothic"/>
               </a:rPr>
-              <a:t>PAE / SAAR  ·  오늘 가져갈 말</a:t>
+              <a:t>같은 외삽, 다른 입력</a:t>
             </a:r>
           </a:p>
         </p:txBody>
       </p:sp>
-      <p:pic>
-        <p:nvPicPr>
-          <p:cNvPr id="6" name="Picture 5" descr="pp_vs_pae_split.png"/>
-          <p:cNvPicPr>
-            <a:picLocks noChangeAspect="1"/>
-          </p:cNvPicPr>
+      <p:graphicFrame>
+        <p:nvGraphicFramePr>
+          <p:cNvPr id="6" name="Table 5"/>
+          <p:cNvGraphicFramePr>
+            <a:graphicFrameLocks noGrp="1"/>
+          </p:cNvGraphicFramePr>
           <p:nvPr/>
-        </p:nvPicPr>
-        <p:blipFill>
-          <a:blip r:embed="rId2"/>
-          <a:stretch>
-            <a:fillRect/>
-          </a:stretch>
-        </p:blipFill>
-        <p:spPr>
-          <a:xfrm>
-            <a:off x="381000" y="809625"/>
-            <a:ext cx="11430000" cy="3619500"/>
-          </a:xfrm>
-          <a:prstGeom prst="rect">
-            <a:avLst/>
-          </a:prstGeom>
-        </p:spPr>
-      </p:pic>
+        </p:nvGraphicFramePr>
+        <p:xfrm>
+          <a:off x="457200" y="1047750"/>
+          <a:ext cx="11277600" cy="2667000"/>
+        </p:xfrm>
+        <a:graphic>
+          <a:graphicData uri="http://schemas.openxmlformats.org/drawingml/2006/table">
+            <a:tbl>
+              <a:tblPr firstRow="1" bandRow="1">
+                <a:tableStyleId>{5C22544A-7EE6-4342-B048-85BDC9FD1C3A}</a:tableStyleId>
+              </a:tblPr>
+              <a:tblGrid>
+                <a:gridCol w="3759200"/>
+                <a:gridCol w="3759200"/>
+                <a:gridCol w="3759200"/>
+              </a:tblGrid>
+              <a:tr h="533400">
+                <a:tc>
+                  <a:txBody>
+                    <a:bodyPr/>
+                    <a:lstStyle/>
+                    <a:p>
+                      <a:pPr algn="ctr"/>
+                      <a:r>
+                        <a:rPr sz="1300" b="1">
+                          <a:solidFill>
+                            <a:srgbClr val="FFFFFF"/>
+                          </a:solidFill>
+                          <a:latin typeface="Arial"/>
+                          <a:ea typeface="AppleGothic"/>
+                        </a:rPr>
+                        <a:t/>
+                      </a:r>
+                    </a:p>
+                  </a:txBody>
+                  <a:tcPr anchor="ctr">
+                    <a:solidFill>
+                      <a:srgbClr val="222222"/>
+                    </a:solidFill>
+                  </a:tcPr>
+                </a:tc>
+                <a:tc>
+                  <a:txBody>
+                    <a:bodyPr/>
+                    <a:lstStyle/>
+                    <a:p>
+                      <a:pPr algn="ctr"/>
+                      <a:r>
+                        <a:rPr sz="1300" b="1">
+                          <a:solidFill>
+                            <a:srgbClr val="FFFFFF"/>
+                          </a:solidFill>
+                          <a:latin typeface="Arial"/>
+                          <a:ea typeface="AppleGothic"/>
+                        </a:rPr>
+                        <a:t>SAAR (equation-free)</a:t>
+                      </a:r>
+                    </a:p>
+                  </a:txBody>
+                  <a:tcPr anchor="ctr">
+                    <a:solidFill>
+                      <a:srgbClr val="222222"/>
+                    </a:solidFill>
+                  </a:tcPr>
+                </a:tc>
+                <a:tc>
+                  <a:txBody>
+                    <a:bodyPr/>
+                    <a:lstStyle/>
+                    <a:p>
+                      <a:pPr algn="ctr"/>
+                      <a:r>
+                        <a:rPr sz="1300" b="1">
+                          <a:solidFill>
+                            <a:srgbClr val="FFFFFF"/>
+                          </a:solidFill>
+                          <a:latin typeface="Arial"/>
+                          <a:ea typeface="AppleGothic"/>
+                        </a:rPr>
+                        <a:t>PAE (equation-aware)</a:t>
+                      </a:r>
+                    </a:p>
+                  </a:txBody>
+                  <a:tcPr anchor="ctr">
+                    <a:solidFill>
+                      <a:srgbClr val="222222"/>
+                    </a:solidFill>
+                  </a:tcPr>
+                </a:tc>
+              </a:tr>
+              <a:tr h="533400">
+                <a:tc>
+                  <a:txBody>
+                    <a:bodyPr/>
+                    <a:lstStyle/>
+                    <a:p>
+                      <a:pPr algn="l"/>
+                      <a:r>
+                        <a:rPr sz="1300" b="1">
+                          <a:solidFill>
+                            <a:srgbClr val="222222"/>
+                          </a:solidFill>
+                          <a:latin typeface="Arial"/>
+                          <a:ea typeface="AppleGothic"/>
+                        </a:rPr>
+                        <a:t>입력</a:t>
+                      </a:r>
+                    </a:p>
+                  </a:txBody>
+                  <a:tcPr anchor="ctr">
+                    <a:solidFill>
+                      <a:srgbClr val="FFFFFF"/>
+                    </a:solidFill>
+                  </a:tcPr>
+                </a:tc>
+                <a:tc>
+                  <a:txBody>
+                    <a:bodyPr/>
+                    <a:lstStyle/>
+                    <a:p>
+                      <a:pPr algn="ctr"/>
+                      <a:r>
+                        <a:rPr sz="1300" b="0">
+                          <a:solidFill>
+                            <a:srgbClr val="222222"/>
+                          </a:solidFill>
+                          <a:latin typeface="Arial"/>
+                          <a:ea typeface="AppleGothic"/>
+                        </a:rPr>
+                        <a:t>명시적 도메인 식 없음</a:t>
+                      </a:r>
+                    </a:p>
+                  </a:txBody>
+                  <a:tcPr anchor="ctr">
+                    <a:solidFill>
+                      <a:srgbClr val="FFFFFF"/>
+                    </a:solidFill>
+                  </a:tcPr>
+                </a:tc>
+                <a:tc>
+                  <a:txBody>
+                    <a:bodyPr/>
+                    <a:lstStyle/>
+                    <a:p>
+                      <a:pPr algn="ctr"/>
+                      <a:r>
+                        <a:rPr sz="1300" b="0">
+                          <a:solidFill>
+                            <a:srgbClr val="222222"/>
+                          </a:solidFill>
+                          <a:latin typeface="Arial"/>
+                          <a:ea typeface="AppleGothic"/>
+                        </a:rPr>
+                        <a:t>후보식 검증 후 사용</a:t>
+                      </a:r>
+                    </a:p>
+                  </a:txBody>
+                  <a:tcPr anchor="ctr">
+                    <a:solidFill>
+                      <a:srgbClr val="FFFFFF"/>
+                    </a:solidFill>
+                  </a:tcPr>
+                </a:tc>
+              </a:tr>
+              <a:tr h="533400">
+                <a:tc>
+                  <a:txBody>
+                    <a:bodyPr/>
+                    <a:lstStyle/>
+                    <a:p>
+                      <a:pPr algn="l"/>
+                      <a:r>
+                        <a:rPr sz="1300" b="1">
+                          <a:solidFill>
+                            <a:srgbClr val="222222"/>
+                          </a:solidFill>
+                          <a:latin typeface="Arial"/>
+                          <a:ea typeface="AppleGothic"/>
+                        </a:rPr>
+                        <a:t>구조</a:t>
+                      </a:r>
+                    </a:p>
+                  </a:txBody>
+                  <a:tcPr anchor="ctr">
+                    <a:solidFill>
+                      <a:srgbClr val="F5F5F5"/>
+                    </a:solidFill>
+                  </a:tcPr>
+                </a:tc>
+                <a:tc>
+                  <a:txBody>
+                    <a:bodyPr/>
+                    <a:lstStyle/>
+                    <a:p>
+                      <a:pPr algn="ctr"/>
+                      <a:r>
+                        <a:rPr sz="1300" b="0">
+                          <a:solidFill>
+                            <a:srgbClr val="222222"/>
+                          </a:solidFill>
+                          <a:latin typeface="Arial"/>
+                          <a:ea typeface="AppleGothic"/>
+                        </a:rPr>
+                        <a:t>동결 affine + dual-scale residual</a:t>
+                      </a:r>
+                    </a:p>
+                  </a:txBody>
+                  <a:tcPr anchor="ctr">
+                    <a:solidFill>
+                      <a:srgbClr val="F5F5F5"/>
+                    </a:solidFill>
+                  </a:tcPr>
+                </a:tc>
+                <a:tc>
+                  <a:txBody>
+                    <a:bodyPr/>
+                    <a:lstStyle/>
+                    <a:p>
+                      <a:pPr algn="ctr"/>
+                      <a:r>
+                        <a:rPr sz="1300" b="0">
+                          <a:solidFill>
+                            <a:srgbClr val="222222"/>
+                          </a:solidFill>
+                          <a:latin typeface="Arial"/>
+                          <a:ea typeface="AppleGothic"/>
+                        </a:rPr>
+                        <a:t>식 + 제한 NN</a:t>
+                      </a:r>
+                    </a:p>
+                  </a:txBody>
+                  <a:tcPr anchor="ctr">
+                    <a:solidFill>
+                      <a:srgbClr val="F5F5F5"/>
+                    </a:solidFill>
+                  </a:tcPr>
+                </a:tc>
+              </a:tr>
+              <a:tr h="533400">
+                <a:tc>
+                  <a:txBody>
+                    <a:bodyPr/>
+                    <a:lstStyle/>
+                    <a:p>
+                      <a:pPr algn="l"/>
+                      <a:r>
+                        <a:rPr sz="1300" b="1">
+                          <a:solidFill>
+                            <a:srgbClr val="222222"/>
+                          </a:solidFill>
+                          <a:latin typeface="Arial"/>
+                          <a:ea typeface="AppleGothic"/>
+                        </a:rPr>
+                        <a:t>실패 시</a:t>
+                      </a:r>
+                    </a:p>
+                  </a:txBody>
+                  <a:tcPr anchor="ctr">
+                    <a:solidFill>
+                      <a:srgbClr val="FFFFFF"/>
+                    </a:solidFill>
+                  </a:tcPr>
+                </a:tc>
+                <a:tc>
+                  <a:txBody>
+                    <a:bodyPr/>
+                    <a:lstStyle/>
+                    <a:p>
+                      <a:pPr algn="ctr"/>
+                      <a:r>
+                        <a:rPr sz="1300" b="0">
+                          <a:solidFill>
+                            <a:srgbClr val="222222"/>
+                          </a:solidFill>
+                          <a:latin typeface="Arial"/>
+                          <a:ea typeface="AppleGothic"/>
+                        </a:rPr>
+                        <a:t>거절 / identity</a:t>
+                      </a:r>
+                    </a:p>
+                  </a:txBody>
+                  <a:tcPr anchor="ctr">
+                    <a:solidFill>
+                      <a:srgbClr val="FFFFFF"/>
+                    </a:solidFill>
+                  </a:tcPr>
+                </a:tc>
+                <a:tc>
+                  <a:txBody>
+                    <a:bodyPr/>
+                    <a:lstStyle/>
+                    <a:p>
+                      <a:pPr algn="ctr"/>
+                      <a:r>
+                        <a:rPr sz="1300" b="0">
+                          <a:solidFill>
+                            <a:srgbClr val="222222"/>
+                          </a:solidFill>
+                          <a:latin typeface="Arial"/>
+                          <a:ea typeface="AppleGothic"/>
+                        </a:rPr>
+                        <a:t>끔 → SAAR fallback</a:t>
+                      </a:r>
+                    </a:p>
+                  </a:txBody>
+                  <a:tcPr anchor="ctr">
+                    <a:solidFill>
+                      <a:srgbClr val="FFFFFF"/>
+                    </a:solidFill>
+                  </a:tcPr>
+                </a:tc>
+              </a:tr>
+              <a:tr h="533400">
+                <a:tc>
+                  <a:txBody>
+                    <a:bodyPr/>
+                    <a:lstStyle/>
+                    <a:p>
+                      <a:pPr algn="l"/>
+                      <a:r>
+                        <a:rPr sz="1300" b="1">
+                          <a:solidFill>
+                            <a:srgbClr val="222222"/>
+                          </a:solidFill>
+                          <a:latin typeface="Arial"/>
+                          <a:ea typeface="AppleGothic"/>
+                        </a:rPr>
+                        <a:t>단계</a:t>
+                      </a:r>
+                    </a:p>
+                  </a:txBody>
+                  <a:tcPr anchor="ctr">
+                    <a:solidFill>
+                      <a:srgbClr val="F5F5F5"/>
+                    </a:solidFill>
+                  </a:tcPr>
+                </a:tc>
+                <a:tc>
+                  <a:txBody>
+                    <a:bodyPr/>
+                    <a:lstStyle/>
+                    <a:p>
+                      <a:pPr algn="ctr"/>
+                      <a:r>
+                        <a:rPr sz="1300" b="0">
+                          <a:solidFill>
+                            <a:srgbClr val="222222"/>
+                          </a:solidFill>
+                          <a:latin typeface="Arial"/>
+                          <a:ea typeface="AppleGothic"/>
+                        </a:rPr>
+                        <a:t>이번 발표 · 논문 1 주결과</a:t>
+                      </a:r>
+                    </a:p>
+                  </a:txBody>
+                  <a:tcPr anchor="ctr">
+                    <a:solidFill>
+                      <a:srgbClr val="F5F5F5"/>
+                    </a:solidFill>
+                  </a:tcPr>
+                </a:tc>
+                <a:tc>
+                  <a:txBody>
+                    <a:bodyPr/>
+                    <a:lstStyle/>
+                    <a:p>
+                      <a:pPr algn="ctr"/>
+                      <a:r>
+                        <a:rPr sz="1300" b="0">
+                          <a:solidFill>
+                            <a:srgbClr val="222222"/>
+                          </a:solidFill>
+                          <a:latin typeface="Arial"/>
+                          <a:ea typeface="AppleGothic"/>
+                        </a:rPr>
+                        <a:t>다음 논문 · 이번 표와 분리</a:t>
+                      </a:r>
+                    </a:p>
+                  </a:txBody>
+                  <a:tcPr anchor="ctr">
+                    <a:solidFill>
+                      <a:srgbClr val="F5F5F5"/>
+                    </a:solidFill>
+                  </a:tcPr>
+                </a:tc>
+              </a:tr>
+            </a:tbl>
+          </a:graphicData>
+        </a:graphic>
+      </p:graphicFrame>
       <p:sp>
         <p:nvSpPr>
           <p:cNvPr id="7" name="TextBox 6"/>
@@ -5057,8 +5322,8 @@
         </p:nvSpPr>
         <p:spPr>
           <a:xfrm>
-            <a:off x="533400" y="4667250"/>
-            <a:ext cx="11049000" cy="266700"/>
+            <a:off x="457200" y="4191000"/>
+            <a:ext cx="11239500" cy="266700"/>
           </a:xfrm>
           <a:prstGeom prst="rect">
             <a:avLst/>
@@ -5073,11 +5338,11 @@
           <a:p>
             <a:pPr algn="l"/>
             <a:r>
-              <a:rPr sz="1400" b="0">
+              <a:rPr sz="1500" b="0">
                 <a:solidFill>
-                  <a:srgbClr val="111111"/>
+                  <a:srgbClr val="222222"/>
                 </a:solidFill>
-                <a:latin typeface="AppleGothic"/>
+                <a:latin typeface="Arial"/>
                 <a:ea typeface="AppleGothic"/>
               </a:rPr>
               <a:t>1  밖을 지탱하는 것은 가정이지만, 식만 넣으면 답이 아니다.</a:t>
@@ -5093,8 +5358,8 @@
         </p:nvSpPr>
         <p:spPr>
           <a:xfrm>
-            <a:off x="533400" y="5048250"/>
-            <a:ext cx="11049000" cy="266700"/>
+            <a:off x="457200" y="4667250"/>
+            <a:ext cx="11239500" cy="266700"/>
           </a:xfrm>
           <a:prstGeom prst="rect">
             <a:avLst/>
@@ -5109,14 +5374,14 @@
           <a:p>
             <a:pPr algn="l"/>
             <a:r>
-              <a:rPr sz="1400" b="0">
+              <a:rPr sz="1500" b="0">
                 <a:solidFill>
-                  <a:srgbClr val="111111"/>
+                  <a:srgbClr val="222222"/>
                 </a:solidFill>
-                <a:latin typeface="AppleGothic"/>
+                <a:latin typeface="Arial"/>
                 <a:ea typeface="AppleGothic"/>
               </a:rPr>
-              <a:t>2  식이 없으면 SAAR — 동결 affine + 제한 residual.  주표 0.934 / 0.842 / 0.751.</a:t>
+              <a:t>2  식이 없으면 SAAR.  주표 0.934 / 0.842 / 0.751.</a:t>
             </a:r>
           </a:p>
         </p:txBody>
@@ -5129,8 +5394,8 @@
         </p:nvSpPr>
         <p:spPr>
           <a:xfrm>
-            <a:off x="533400" y="5429250"/>
-            <a:ext cx="11049000" cy="266700"/>
+            <a:off x="457200" y="5143500"/>
+            <a:ext cx="11239500" cy="266700"/>
           </a:xfrm>
           <a:prstGeom prst="rect">
             <a:avLst/>
@@ -5145,11 +5410,11 @@
           <a:p>
             <a:pPr algn="l"/>
             <a:r>
-              <a:rPr sz="1400" b="0">
+              <a:rPr sz="1500" b="0">
                 <a:solidFill>
-                  <a:srgbClr val="111111"/>
+                  <a:srgbClr val="222222"/>
                 </a:solidFill>
-                <a:latin typeface="AppleGothic"/>
+                <a:latin typeface="Arial"/>
                 <a:ea typeface="AppleGothic"/>
               </a:rPr>
               <a:t>3  실패·Zn·PAE는 한계/후속. 만능 SOTA를 주장하지 않는다.</a:t>
@@ -5173,7 +5438,7 @@
           </a:prstGeom>
           <a:ln w="9525">
             <a:solidFill>
-              <a:srgbClr val="D0D0D0"/>
+              <a:srgbClr val="E8E8E8"/>
             </a:solidFill>
           </a:ln>
         </p:spPr>
@@ -5218,9 +5483,9 @@
             <a:r>
               <a:rPr sz="900" b="0">
                 <a:solidFill>
-                  <a:srgbClr val="555555"/>
+                  <a:srgbClr val="666666"/>
                 </a:solidFill>
-                <a:latin typeface="AppleGothic"/>
+                <a:latin typeface="Arial"/>
                 <a:ea typeface="AppleGothic"/>
               </a:rPr>
               <a:t>SPS Lab  ·  Assumption-Aware Extrapolation  ·  SAAR</a:t>
@@ -5254,9 +5519,9 @@
             <a:r>
               <a:rPr sz="1000" b="1">
                 <a:solidFill>
-                  <a:srgbClr val="555555"/>
+                  <a:srgbClr val="666666"/>
                 </a:solidFill>
-                <a:latin typeface="AppleGothic"/>
+                <a:latin typeface="Arial"/>
                 <a:ea typeface="AppleGothic"/>
               </a:rPr>
               <a:t>11/11</a:t>
@@ -5334,13 +5599,13 @@
         <p:spPr>
           <a:xfrm>
             <a:off x="0" y="0"/>
-            <a:ext cx="12192000" cy="38100"/>
+            <a:ext cx="12192000" cy="28575"/>
           </a:xfrm>
           <a:prstGeom prst="rect">
             <a:avLst/>
           </a:prstGeom>
           <a:solidFill>
-            <a:srgbClr val="0A5C5C"/>
+            <a:srgbClr val="0072B2"/>
           </a:solidFill>
           <a:ln>
             <a:noFill/>
@@ -5377,7 +5642,7 @@
         <p:spPr>
           <a:xfrm>
             <a:off x="457200" y="209550"/>
-            <a:ext cx="11239500" cy="323850"/>
+            <a:ext cx="11239500" cy="304800"/>
           </a:xfrm>
           <a:prstGeom prst="rect">
             <a:avLst/>
@@ -5394,9 +5659,9 @@
             <a:r>
               <a:rPr sz="2200" b="1">
                 <a:solidFill>
-                  <a:srgbClr val="111111"/>
+                  <a:srgbClr val="222222"/>
                 </a:solidFill>
-                <a:latin typeface="AppleGothic"/>
+                <a:latin typeface="Arial"/>
                 <a:ea typeface="AppleGothic"/>
               </a:rPr>
               <a:t>연구 루트</a:t>
@@ -5412,7 +5677,7 @@
         </p:nvSpPr>
         <p:spPr>
           <a:xfrm>
-            <a:off x="457200" y="533400"/>
+            <a:off x="457200" y="514350"/>
             <a:ext cx="11239500" cy="190500"/>
           </a:xfrm>
           <a:prstGeom prst="rect">
@@ -5430,9 +5695,9 @@
             <a:r>
               <a:rPr sz="1200" b="0">
                 <a:solidFill>
-                  <a:srgbClr val="555555"/>
+                  <a:srgbClr val="666666"/>
                 </a:solidFill>
-                <a:latin typeface="AppleGothic"/>
+                <a:latin typeface="Arial"/>
                 <a:ea typeface="AppleGothic"/>
               </a:rPr>
               <a:t>외삽을 범용화하고, 식 유무로 경로만 가른다</a:t>
@@ -5440,33 +5705,475 @@
           </a:p>
         </p:txBody>
       </p:sp>
-      <p:pic>
-        <p:nvPicPr>
-          <p:cNvPr id="6" name="Picture 5" descr="research_route.png"/>
-          <p:cNvPicPr>
-            <a:picLocks noChangeAspect="1"/>
-          </p:cNvPicPr>
+      <p:sp>
+        <p:nvSpPr>
+          <p:cNvPr id="6" name="TextBox 5"/>
+          <p:cNvSpPr txBox="1"/>
           <p:nvPr/>
-        </p:nvPicPr>
-        <p:blipFill>
-          <a:blip r:embed="rId2"/>
-          <a:stretch>
-            <a:fillRect/>
-          </a:stretch>
-        </p:blipFill>
+        </p:nvSpPr>
         <p:spPr>
           <a:xfrm>
-            <a:off x="381000" y="857250"/>
-            <a:ext cx="11430000" cy="5143500"/>
+            <a:off x="457200" y="952500"/>
+            <a:ext cx="11239500" cy="266700"/>
           </a:xfrm>
           <a:prstGeom prst="rect">
             <a:avLst/>
           </a:prstGeom>
+          <a:noFill/>
         </p:spPr>
-      </p:pic>
+        <p:txBody>
+          <a:bodyPr wrap="square">
+            <a:spAutoFit/>
+          </a:bodyPr>
+          <a:lstStyle/>
+          <a:p>
+            <a:pPr algn="l"/>
+            <a:r>
+              <a:rPr sz="1600" b="1">
+                <a:solidFill>
+                  <a:srgbClr val="222222"/>
+                </a:solidFill>
+                <a:latin typeface="Arial"/>
+                <a:ea typeface="AppleGothic"/>
+              </a:rPr>
+              <a:t>밖을 지탱하는 것은 데이터가 아니라 가정이다.</a:t>
+            </a:r>
+          </a:p>
+        </p:txBody>
+      </p:sp>
+      <p:sp>
+        <p:nvSpPr>
+          <p:cNvPr id="7" name="TextBox 6"/>
+          <p:cNvSpPr txBox="1"/>
+          <p:nvPr/>
+        </p:nvSpPr>
+        <p:spPr>
+          <a:xfrm>
+            <a:off x="457200" y="1381125"/>
+            <a:ext cx="11239500" cy="228600"/>
+          </a:xfrm>
+          <a:prstGeom prst="rect">
+            <a:avLst/>
+          </a:prstGeom>
+          <a:noFill/>
+        </p:spPr>
+        <p:txBody>
+          <a:bodyPr wrap="square">
+            <a:spAutoFit/>
+          </a:bodyPr>
+          <a:lstStyle/>
+          <a:p>
+            <a:pPr algn="l"/>
+            <a:r>
+              <a:rPr sz="1400" b="0">
+                <a:solidFill>
+                  <a:srgbClr val="666666"/>
+                </a:solidFill>
+                <a:latin typeface="Arial"/>
+                <a:ea typeface="AppleGothic"/>
+              </a:rPr>
+              <a:t>입력: 관측  ·  경계  ·  도메인 지식</a:t>
+            </a:r>
+          </a:p>
+        </p:txBody>
+      </p:sp>
+      <p:sp>
+        <p:nvSpPr>
+          <p:cNvPr id="8" name="TextBox 7"/>
+          <p:cNvSpPr txBox="1"/>
+          <p:nvPr/>
+        </p:nvSpPr>
+        <p:spPr>
+          <a:xfrm>
+            <a:off x="457200" y="1809750"/>
+            <a:ext cx="11239500" cy="228600"/>
+          </a:xfrm>
+          <a:prstGeom prst="rect">
+            <a:avLst/>
+          </a:prstGeom>
+          <a:noFill/>
+        </p:spPr>
+        <p:txBody>
+          <a:bodyPr wrap="square">
+            <a:spAutoFit/>
+          </a:bodyPr>
+          <a:lstStyle/>
+          <a:p>
+            <a:pPr algn="l"/>
+            <a:r>
+              <a:rPr sz="1500" b="1">
+                <a:solidFill>
+                  <a:srgbClr val="222222"/>
+                </a:solidFill>
+                <a:latin typeface="Arial"/>
+                <a:ea typeface="AppleGothic"/>
+              </a:rPr>
+              <a:t>분기: 후보식이 정당화되는가?</a:t>
+            </a:r>
+          </a:p>
+        </p:txBody>
+      </p:sp>
+      <p:graphicFrame>
+        <p:nvGraphicFramePr>
+          <p:cNvPr id="9" name="Table 8"/>
+          <p:cNvGraphicFramePr>
+            <a:graphicFrameLocks noGrp="1"/>
+          </p:cNvGraphicFramePr>
+          <p:nvPr/>
+        </p:nvGraphicFramePr>
+        <p:xfrm>
+          <a:off x="457200" y="2286000"/>
+          <a:ext cx="11277600" cy="2095500"/>
+        </p:xfrm>
+        <a:graphic>
+          <a:graphicData uri="http://schemas.openxmlformats.org/drawingml/2006/table">
+            <a:tbl>
+              <a:tblPr firstRow="1" bandRow="1">
+                <a:tableStyleId>{5C22544A-7EE6-4342-B048-85BDC9FD1C3A}</a:tableStyleId>
+              </a:tblPr>
+              <a:tblGrid>
+                <a:gridCol w="2819400"/>
+                <a:gridCol w="2819400"/>
+                <a:gridCol w="2819400"/>
+                <a:gridCol w="2819400"/>
+              </a:tblGrid>
+              <a:tr h="698500">
+                <a:tc>
+                  <a:txBody>
+                    <a:bodyPr/>
+                    <a:lstStyle/>
+                    <a:p>
+                      <a:pPr algn="ctr"/>
+                      <a:r>
+                        <a:rPr sz="1300" b="1">
+                          <a:solidFill>
+                            <a:srgbClr val="FFFFFF"/>
+                          </a:solidFill>
+                          <a:latin typeface="Arial"/>
+                          <a:ea typeface="AppleGothic"/>
+                        </a:rPr>
+                        <a:t>분기</a:t>
+                      </a:r>
+                    </a:p>
+                  </a:txBody>
+                  <a:tcPr anchor="ctr">
+                    <a:solidFill>
+                      <a:srgbClr val="222222"/>
+                    </a:solidFill>
+                  </a:tcPr>
+                </a:tc>
+                <a:tc>
+                  <a:txBody>
+                    <a:bodyPr/>
+                    <a:lstStyle/>
+                    <a:p>
+                      <a:pPr algn="ctr"/>
+                      <a:r>
+                        <a:rPr sz="1300" b="1">
+                          <a:solidFill>
+                            <a:srgbClr val="FFFFFF"/>
+                          </a:solidFill>
+                          <a:latin typeface="Arial"/>
+                          <a:ea typeface="AppleGothic"/>
+                        </a:rPr>
+                        <a:t>경로</a:t>
+                      </a:r>
+                    </a:p>
+                  </a:txBody>
+                  <a:tcPr anchor="ctr">
+                    <a:solidFill>
+                      <a:srgbClr val="222222"/>
+                    </a:solidFill>
+                  </a:tcPr>
+                </a:tc>
+                <a:tc>
+                  <a:txBody>
+                    <a:bodyPr/>
+                    <a:lstStyle/>
+                    <a:p>
+                      <a:pPr algn="ctr"/>
+                      <a:r>
+                        <a:rPr sz="1300" b="1">
+                          <a:solidFill>
+                            <a:srgbClr val="FFFFFF"/>
+                          </a:solidFill>
+                          <a:latin typeface="Arial"/>
+                          <a:ea typeface="AppleGothic"/>
+                        </a:rPr>
+                        <a:t>내용</a:t>
+                      </a:r>
+                    </a:p>
+                  </a:txBody>
+                  <a:tcPr anchor="ctr">
+                    <a:solidFill>
+                      <a:srgbClr val="222222"/>
+                    </a:solidFill>
+                  </a:tcPr>
+                </a:tc>
+                <a:tc>
+                  <a:txBody>
+                    <a:bodyPr/>
+                    <a:lstStyle/>
+                    <a:p>
+                      <a:pPr algn="ctr"/>
+                      <a:r>
+                        <a:rPr sz="1300" b="1">
+                          <a:solidFill>
+                            <a:srgbClr val="FFFFFF"/>
+                          </a:solidFill>
+                          <a:latin typeface="Arial"/>
+                          <a:ea typeface="AppleGothic"/>
+                        </a:rPr>
+                        <a:t>단계</a:t>
+                      </a:r>
+                    </a:p>
+                  </a:txBody>
+                  <a:tcPr anchor="ctr">
+                    <a:solidFill>
+                      <a:srgbClr val="222222"/>
+                    </a:solidFill>
+                  </a:tcPr>
+                </a:tc>
+              </a:tr>
+              <a:tr h="698500">
+                <a:tc>
+                  <a:txBody>
+                    <a:bodyPr/>
+                    <a:lstStyle/>
+                    <a:p>
+                      <a:pPr algn="l"/>
+                      <a:r>
+                        <a:rPr sz="1300" b="1">
+                          <a:solidFill>
+                            <a:srgbClr val="222222"/>
+                          </a:solidFill>
+                          <a:latin typeface="Arial"/>
+                          <a:ea typeface="AppleGothic"/>
+                        </a:rPr>
+                        <a:t>YES</a:t>
+                      </a:r>
+                    </a:p>
+                  </a:txBody>
+                  <a:tcPr anchor="ctr">
+                    <a:solidFill>
+                      <a:srgbClr val="FFFFFF"/>
+                    </a:solidFill>
+                  </a:tcPr>
+                </a:tc>
+                <a:tc>
+                  <a:txBody>
+                    <a:bodyPr/>
+                    <a:lstStyle/>
+                    <a:p>
+                      <a:pPr algn="ctr"/>
+                      <a:r>
+                        <a:rPr sz="1300" b="0">
+                          <a:solidFill>
+                            <a:srgbClr val="222222"/>
+                          </a:solidFill>
+                          <a:latin typeface="Arial"/>
+                          <a:ea typeface="AppleGothic"/>
+                        </a:rPr>
+                        <a:t>PAE</a:t>
+                      </a:r>
+                    </a:p>
+                  </a:txBody>
+                  <a:tcPr anchor="ctr">
+                    <a:solidFill>
+                      <a:srgbClr val="FFFFFF"/>
+                    </a:solidFill>
+                  </a:tcPr>
+                </a:tc>
+                <a:tc>
+                  <a:txBody>
+                    <a:bodyPr/>
+                    <a:lstStyle/>
+                    <a:p>
+                      <a:pPr algn="ctr"/>
+                      <a:r>
+                        <a:rPr sz="1300" b="0">
+                          <a:solidFill>
+                            <a:srgbClr val="222222"/>
+                          </a:solidFill>
+                          <a:latin typeface="Arial"/>
+                          <a:ea typeface="AppleGothic"/>
+                        </a:rPr>
+                        <a:t>허용된 식 + 제한 NN</a:t>
+                      </a:r>
+                    </a:p>
+                  </a:txBody>
+                  <a:tcPr anchor="ctr">
+                    <a:solidFill>
+                      <a:srgbClr val="FFFFFF"/>
+                    </a:solidFill>
+                  </a:tcPr>
+                </a:tc>
+                <a:tc>
+                  <a:txBody>
+                    <a:bodyPr/>
+                    <a:lstStyle/>
+                    <a:p>
+                      <a:pPr algn="ctr"/>
+                      <a:r>
+                        <a:rPr sz="1300" b="0">
+                          <a:solidFill>
+                            <a:srgbClr val="222222"/>
+                          </a:solidFill>
+                          <a:latin typeface="Arial"/>
+                          <a:ea typeface="AppleGothic"/>
+                        </a:rPr>
+                        <a:t>다음 논문</a:t>
+                      </a:r>
+                    </a:p>
+                  </a:txBody>
+                  <a:tcPr anchor="ctr">
+                    <a:solidFill>
+                      <a:srgbClr val="FFFFFF"/>
+                    </a:solidFill>
+                  </a:tcPr>
+                </a:tc>
+              </a:tr>
+              <a:tr h="698500">
+                <a:tc>
+                  <a:txBody>
+                    <a:bodyPr/>
+                    <a:lstStyle/>
+                    <a:p>
+                      <a:pPr algn="l"/>
+                      <a:r>
+                        <a:rPr sz="1300" b="1">
+                          <a:solidFill>
+                            <a:srgbClr val="0072B2"/>
+                          </a:solidFill>
+                          <a:latin typeface="Arial"/>
+                          <a:ea typeface="AppleGothic"/>
+                        </a:rPr>
+                        <a:t>NO</a:t>
+                      </a:r>
+                    </a:p>
+                  </a:txBody>
+                  <a:tcPr anchor="ctr">
+                    <a:solidFill>
+                      <a:srgbClr val="E8F1F8"/>
+                    </a:solidFill>
+                  </a:tcPr>
+                </a:tc>
+                <a:tc>
+                  <a:txBody>
+                    <a:bodyPr/>
+                    <a:lstStyle/>
+                    <a:p>
+                      <a:pPr algn="ctr"/>
+                      <a:r>
+                        <a:rPr sz="1300" b="1">
+                          <a:solidFill>
+                            <a:srgbClr val="0072B2"/>
+                          </a:solidFill>
+                          <a:latin typeface="Arial"/>
+                          <a:ea typeface="AppleGothic"/>
+                        </a:rPr>
+                        <a:t>SAAR</a:t>
+                      </a:r>
+                    </a:p>
+                  </a:txBody>
+                  <a:tcPr anchor="ctr">
+                    <a:solidFill>
+                      <a:srgbClr val="E8F1F8"/>
+                    </a:solidFill>
+                  </a:tcPr>
+                </a:tc>
+                <a:tc>
+                  <a:txBody>
+                    <a:bodyPr/>
+                    <a:lstStyle/>
+                    <a:p>
+                      <a:pPr algn="ctr"/>
+                      <a:r>
+                        <a:rPr sz="1300" b="1">
+                          <a:solidFill>
+                            <a:srgbClr val="0072B2"/>
+                          </a:solidFill>
+                          <a:latin typeface="Arial"/>
+                          <a:ea typeface="AppleGothic"/>
+                        </a:rPr>
+                        <a:t>동결 affine + dual-scale residual</a:t>
+                      </a:r>
+                    </a:p>
+                  </a:txBody>
+                  <a:tcPr anchor="ctr">
+                    <a:solidFill>
+                      <a:srgbClr val="E8F1F8"/>
+                    </a:solidFill>
+                  </a:tcPr>
+                </a:tc>
+                <a:tc>
+                  <a:txBody>
+                    <a:bodyPr/>
+                    <a:lstStyle/>
+                    <a:p>
+                      <a:pPr algn="ctr"/>
+                      <a:r>
+                        <a:rPr sz="1300" b="1">
+                          <a:solidFill>
+                            <a:srgbClr val="0072B2"/>
+                          </a:solidFill>
+                          <a:latin typeface="Arial"/>
+                          <a:ea typeface="AppleGothic"/>
+                        </a:rPr>
+                        <a:t>이번 발표 / 논문 1</a:t>
+                      </a:r>
+                    </a:p>
+                  </a:txBody>
+                  <a:tcPr anchor="ctr">
+                    <a:solidFill>
+                      <a:srgbClr val="E8F1F8"/>
+                    </a:solidFill>
+                  </a:tcPr>
+                </a:tc>
+              </a:tr>
+            </a:tbl>
+          </a:graphicData>
+        </a:graphic>
+      </p:graphicFrame>
+      <p:sp>
+        <p:nvSpPr>
+          <p:cNvPr id="10" name="TextBox 9"/>
+          <p:cNvSpPr txBox="1"/>
+          <p:nvPr/>
+        </p:nvSpPr>
+        <p:spPr>
+          <a:xfrm>
+            <a:off x="457200" y="4762500"/>
+            <a:ext cx="11239500" cy="381000"/>
+          </a:xfrm>
+          <a:prstGeom prst="rect">
+            <a:avLst/>
+          </a:prstGeom>
+          <a:noFill/>
+        </p:spPr>
+        <p:txBody>
+          <a:bodyPr wrap="square">
+            <a:spAutoFit/>
+          </a:bodyPr>
+          <a:lstStyle/>
+          <a:p>
+            <a:pPr algn="l"/>
+            <a:r>
+              <a:rPr sz="1400" b="0">
+                <a:solidFill>
+                  <a:srgbClr val="666666"/>
+                </a:solidFill>
+                <a:latin typeface="Arial"/>
+                <a:ea typeface="AppleGothic"/>
+              </a:rPr>
+              <a:t>Assurance: 믿기 / 보류 / 거절  →  박사논문에서 두 경로 통합</a:t>
+            </a:r>
+          </a:p>
+        </p:txBody>
+      </p:sp>
       <p:cxnSp>
         <p:nvCxnSpPr>
-          <p:cNvPr id="7" name="Connector 6"/>
+          <p:cNvPr id="11" name="Connector 10"/>
           <p:cNvCxnSpPr/>
           <p:nvPr/>
         </p:nvCxnSpPr>
@@ -5480,7 +6187,7 @@
           </a:prstGeom>
           <a:ln w="9525">
             <a:solidFill>
-              <a:srgbClr val="D0D0D0"/>
+              <a:srgbClr val="E8E8E8"/>
             </a:solidFill>
           </a:ln>
         </p:spPr>
@@ -5501,7 +6208,7 @@
       </p:cxnSp>
       <p:sp>
         <p:nvSpPr>
-          <p:cNvPr id="8" name="TextBox 7"/>
+          <p:cNvPr id="12" name="TextBox 11"/>
           <p:cNvSpPr txBox="1"/>
           <p:nvPr/>
         </p:nvSpPr>
@@ -5525,9 +6232,9 @@
             <a:r>
               <a:rPr sz="900" b="0">
                 <a:solidFill>
-                  <a:srgbClr val="555555"/>
+                  <a:srgbClr val="666666"/>
                 </a:solidFill>
-                <a:latin typeface="AppleGothic"/>
+                <a:latin typeface="Arial"/>
                 <a:ea typeface="AppleGothic"/>
               </a:rPr>
               <a:t>SPS Lab  ·  Assumption-Aware Extrapolation  ·  SAAR</a:t>
@@ -5537,7 +6244,7 @@
       </p:sp>
       <p:sp>
         <p:nvSpPr>
-          <p:cNvPr id="9" name="TextBox 8"/>
+          <p:cNvPr id="13" name="TextBox 12"/>
           <p:cNvSpPr txBox="1"/>
           <p:nvPr/>
         </p:nvSpPr>
@@ -5561,9 +6268,9 @@
             <a:r>
               <a:rPr sz="1000" b="1">
                 <a:solidFill>
-                  <a:srgbClr val="555555"/>
+                  <a:srgbClr val="666666"/>
                 </a:solidFill>
-                <a:latin typeface="AppleGothic"/>
+                <a:latin typeface="Arial"/>
                 <a:ea typeface="AppleGothic"/>
               </a:rPr>
               <a:t>2/11</a:t>
@@ -5641,13 +6348,13 @@
         <p:spPr>
           <a:xfrm>
             <a:off x="0" y="0"/>
-            <a:ext cx="12192000" cy="38100"/>
+            <a:ext cx="12192000" cy="28575"/>
           </a:xfrm>
           <a:prstGeom prst="rect">
             <a:avLst/>
           </a:prstGeom>
           <a:solidFill>
-            <a:srgbClr val="0A5C5C"/>
+            <a:srgbClr val="0072B2"/>
           </a:solidFill>
           <a:ln>
             <a:noFill/>
@@ -5684,7 +6391,7 @@
         <p:spPr>
           <a:xfrm>
             <a:off x="457200" y="209550"/>
-            <a:ext cx="11239500" cy="323850"/>
+            <a:ext cx="11239500" cy="304800"/>
           </a:xfrm>
           <a:prstGeom prst="rect">
             <a:avLst/>
@@ -5701,9 +6408,9 @@
             <a:r>
               <a:rPr sz="2200" b="1">
                 <a:solidFill>
-                  <a:srgbClr val="111111"/>
+                  <a:srgbClr val="222222"/>
                 </a:solidFill>
-                <a:latin typeface="AppleGothic"/>
+                <a:latin typeface="Arial"/>
                 <a:ea typeface="AppleGothic"/>
               </a:rPr>
               <a:t>문제</a:t>
@@ -5719,7 +6426,7 @@
         </p:nvSpPr>
         <p:spPr>
           <a:xfrm>
-            <a:off x="457200" y="533400"/>
+            <a:off x="457200" y="514350"/>
             <a:ext cx="11239500" cy="190500"/>
           </a:xfrm>
           <a:prstGeom prst="rect">
@@ -5737,12 +6444,12 @@
             <a:r>
               <a:rPr sz="1200" b="0">
                 <a:solidFill>
-                  <a:srgbClr val="555555"/>
+                  <a:srgbClr val="666666"/>
                 </a:solidFill>
-                <a:latin typeface="AppleGothic"/>
+                <a:latin typeface="Arial"/>
                 <a:ea typeface="AppleGothic"/>
               </a:rPr>
-              <a:t>support 밖에서는 데이터가 아니라 가정이 방향을 정한다</a:t>
+              <a:t>support 밖에서는 가정이 예측을 가른다</a:t>
             </a:r>
           </a:p>
         </p:txBody>
@@ -5763,8 +6470,8 @@
         </p:blipFill>
         <p:spPr>
           <a:xfrm>
-            <a:off x="476250" y="857250"/>
-            <a:ext cx="11239500" cy="5143500"/>
+            <a:off x="762000" y="904875"/>
+            <a:ext cx="10477500" cy="4953000"/>
           </a:xfrm>
           <a:prstGeom prst="rect">
             <a:avLst/>
@@ -5787,7 +6494,7 @@
           </a:prstGeom>
           <a:ln w="9525">
             <a:solidFill>
-              <a:srgbClr val="D0D0D0"/>
+              <a:srgbClr val="E8E8E8"/>
             </a:solidFill>
           </a:ln>
         </p:spPr>
@@ -5832,9 +6539,9 @@
             <a:r>
               <a:rPr sz="900" b="0">
                 <a:solidFill>
-                  <a:srgbClr val="555555"/>
+                  <a:srgbClr val="666666"/>
                 </a:solidFill>
-                <a:latin typeface="AppleGothic"/>
+                <a:latin typeface="Arial"/>
                 <a:ea typeface="AppleGothic"/>
               </a:rPr>
               <a:t>SPS Lab  ·  Assumption-Aware Extrapolation  ·  SAAR</a:t>
@@ -5868,9 +6575,9 @@
             <a:r>
               <a:rPr sz="1000" b="1">
                 <a:solidFill>
-                  <a:srgbClr val="555555"/>
+                  <a:srgbClr val="666666"/>
                 </a:solidFill>
-                <a:latin typeface="AppleGothic"/>
+                <a:latin typeface="Arial"/>
                 <a:ea typeface="AppleGothic"/>
               </a:rPr>
               <a:t>3/11</a:t>
@@ -5948,13 +6655,13 @@
         <p:spPr>
           <a:xfrm>
             <a:off x="0" y="0"/>
-            <a:ext cx="12192000" cy="38100"/>
+            <a:ext cx="12192000" cy="28575"/>
           </a:xfrm>
           <a:prstGeom prst="rect">
             <a:avLst/>
           </a:prstGeom>
           <a:solidFill>
-            <a:srgbClr val="0A5C5C"/>
+            <a:srgbClr val="0072B2"/>
           </a:solidFill>
           <a:ln>
             <a:noFill/>
@@ -5991,7 +6698,7 @@
         <p:spPr>
           <a:xfrm>
             <a:off x="457200" y="209550"/>
-            <a:ext cx="11239500" cy="323850"/>
+            <a:ext cx="11239500" cy="304800"/>
           </a:xfrm>
           <a:prstGeom prst="rect">
             <a:avLst/>
@@ -6008,9 +6715,9 @@
             <a:r>
               <a:rPr sz="2200" b="1">
                 <a:solidFill>
-                  <a:srgbClr val="111111"/>
+                  <a:srgbClr val="222222"/>
                 </a:solidFill>
-                <a:latin typeface="AppleGothic"/>
+                <a:latin typeface="Arial"/>
                 <a:ea typeface="AppleGothic"/>
               </a:rPr>
               <a:t>방법 — SAAR</a:t>
@@ -6026,7 +6733,7 @@
         </p:nvSpPr>
         <p:spPr>
           <a:xfrm>
-            <a:off x="457200" y="533400"/>
+            <a:off x="457200" y="514350"/>
             <a:ext cx="11239500" cy="190500"/>
           </a:xfrm>
           <a:prstGeom prst="rect">
@@ -6044,43 +6751,367 @@
             <a:r>
               <a:rPr sz="1200" b="0">
                 <a:solidFill>
-                  <a:srgbClr val="555555"/>
+                  <a:srgbClr val="666666"/>
                 </a:solidFill>
-                <a:latin typeface="AppleGothic"/>
+                <a:latin typeface="Arial"/>
                 <a:ea typeface="AppleGothic"/>
               </a:rPr>
-              <a:t>동결 affine + dual-scale residual  ·  equation-free</a:t>
+              <a:t>equation-free  ·  Support-Aware Affine–Residual</a:t>
             </a:r>
           </a:p>
         </p:txBody>
       </p:sp>
-      <p:pic>
-        <p:nvPicPr>
-          <p:cNvPr id="6" name="Picture 5" descr="pp_equation_panel.png"/>
-          <p:cNvPicPr>
-            <a:picLocks noChangeAspect="1"/>
-          </p:cNvPicPr>
+      <p:sp>
+        <p:nvSpPr>
+          <p:cNvPr id="6" name="TextBox 5"/>
+          <p:cNvSpPr txBox="1"/>
           <p:nvPr/>
-        </p:nvPicPr>
-        <p:blipFill>
-          <a:blip r:embed="rId2"/>
-          <a:stretch>
-            <a:fillRect/>
-          </a:stretch>
-        </p:blipFill>
+        </p:nvSpPr>
         <p:spPr>
           <a:xfrm>
-            <a:off x="381000" y="857250"/>
-            <a:ext cx="11430000" cy="4953000"/>
+            <a:off x="457200" y="1047750"/>
+            <a:ext cx="11239500" cy="342900"/>
           </a:xfrm>
           <a:prstGeom prst="rect">
             <a:avLst/>
           </a:prstGeom>
+          <a:noFill/>
         </p:spPr>
-      </p:pic>
+        <p:txBody>
+          <a:bodyPr wrap="square">
+            <a:spAutoFit/>
+          </a:bodyPr>
+          <a:lstStyle/>
+          <a:p>
+            <a:pPr algn="ctr"/>
+            <a:r>
+              <a:rPr sz="2000" b="1">
+                <a:solidFill>
+                  <a:srgbClr val="222222"/>
+                </a:solidFill>
+                <a:latin typeface="Arial"/>
+                <a:ea typeface="AppleGothic"/>
+              </a:rPr>
+              <a:t>ŷ = m · softplus( ℓ(z) + cθ(z) )</a:t>
+            </a:r>
+          </a:p>
+        </p:txBody>
+      </p:sp>
+      <p:sp>
+        <p:nvSpPr>
+          <p:cNvPr id="7" name="TextBox 6"/>
+          <p:cNvSpPr txBox="1"/>
+          <p:nvPr/>
+        </p:nvSpPr>
+        <p:spPr>
+          <a:xfrm>
+            <a:off x="457200" y="1524000"/>
+            <a:ext cx="11239500" cy="266700"/>
+          </a:xfrm>
+          <a:prstGeom prst="rect">
+            <a:avLst/>
+          </a:prstGeom>
+          <a:noFill/>
+        </p:spPr>
+        <p:txBody>
+          <a:bodyPr wrap="square">
+            <a:spAutoFit/>
+          </a:bodyPr>
+          <a:lstStyle/>
+          <a:p>
+            <a:pPr algn="ctr"/>
+            <a:r>
+              <a:rPr sz="1400" b="0">
+                <a:solidFill>
+                  <a:srgbClr val="666666"/>
+                </a:solidFill>
+                <a:latin typeface="Arial"/>
+                <a:ea typeface="AppleGothic"/>
+              </a:rPr>
+              <a:t>cθ = w·B_L tanh(rθ) + (1−w)·B_H tanh(rθ/B_H)   ·   B_L=2, B_H=6</a:t>
+            </a:r>
+          </a:p>
+        </p:txBody>
+      </p:sp>
+      <p:graphicFrame>
+        <p:nvGraphicFramePr>
+          <p:cNvPr id="8" name="Table 7"/>
+          <p:cNvGraphicFramePr>
+            <a:graphicFrameLocks noGrp="1"/>
+          </p:cNvGraphicFramePr>
+          <p:nvPr/>
+        </p:nvGraphicFramePr>
+        <p:xfrm>
+          <a:off x="762000" y="2190750"/>
+          <a:ext cx="10668000" cy="3048000"/>
+        </p:xfrm>
+        <a:graphic>
+          <a:graphicData uri="http://schemas.openxmlformats.org/drawingml/2006/table">
+            <a:tbl>
+              <a:tblPr firstRow="1" bandRow="1">
+                <a:tableStyleId>{5C22544A-7EE6-4342-B048-85BDC9FD1C3A}</a:tableStyleId>
+              </a:tblPr>
+              <a:tblGrid>
+                <a:gridCol w="5334000"/>
+                <a:gridCol w="5334000"/>
+              </a:tblGrid>
+              <a:tr h="609600">
+                <a:tc>
+                  <a:txBody>
+                    <a:bodyPr/>
+                    <a:lstStyle/>
+                    <a:p>
+                      <a:pPr algn="ctr"/>
+                      <a:r>
+                        <a:rPr sz="1400" b="1">
+                          <a:solidFill>
+                            <a:srgbClr val="FFFFFF"/>
+                          </a:solidFill>
+                          <a:latin typeface="Arial"/>
+                          <a:ea typeface="AppleGothic"/>
+                        </a:rPr>
+                        <a:t>항</a:t>
+                      </a:r>
+                    </a:p>
+                  </a:txBody>
+                  <a:tcPr anchor="ctr">
+                    <a:solidFill>
+                      <a:srgbClr val="222222"/>
+                    </a:solidFill>
+                  </a:tcPr>
+                </a:tc>
+                <a:tc>
+                  <a:txBody>
+                    <a:bodyPr/>
+                    <a:lstStyle/>
+                    <a:p>
+                      <a:pPr algn="ctr"/>
+                      <a:r>
+                        <a:rPr sz="1400" b="1">
+                          <a:solidFill>
+                            <a:srgbClr val="FFFFFF"/>
+                          </a:solidFill>
+                          <a:latin typeface="Arial"/>
+                          <a:ea typeface="AppleGothic"/>
+                        </a:rPr>
+                        <a:t>역할</a:t>
+                      </a:r>
+                    </a:p>
+                  </a:txBody>
+                  <a:tcPr anchor="ctr">
+                    <a:solidFill>
+                      <a:srgbClr val="222222"/>
+                    </a:solidFill>
+                  </a:tcPr>
+                </a:tc>
+              </a:tr>
+              <a:tr h="609600">
+                <a:tc>
+                  <a:txBody>
+                    <a:bodyPr/>
+                    <a:lstStyle/>
+                    <a:p>
+                      <a:pPr algn="l"/>
+                      <a:r>
+                        <a:rPr sz="1400" b="1">
+                          <a:solidFill>
+                            <a:srgbClr val="222222"/>
+                          </a:solidFill>
+                          <a:latin typeface="Arial"/>
+                          <a:ea typeface="AppleGothic"/>
+                        </a:rPr>
+                        <a:t>m</a:t>
+                      </a:r>
+                    </a:p>
+                  </a:txBody>
+                  <a:tcPr anchor="ctr">
+                    <a:solidFill>
+                      <a:srgbClr val="FFFFFF"/>
+                    </a:solidFill>
+                  </a:tcPr>
+                </a:tc>
+                <a:tc>
+                  <a:txBody>
+                    <a:bodyPr/>
+                    <a:lstStyle/>
+                    <a:p>
+                      <a:pPr algn="ctr"/>
+                      <a:r>
+                        <a:rPr sz="1400" b="0">
+                          <a:solidFill>
+                            <a:srgbClr val="222222"/>
+                          </a:solidFill>
+                          <a:latin typeface="Arial"/>
+                          <a:ea typeface="AppleGothic"/>
+                        </a:rPr>
+                        <a:t>경계 / 스케일</a:t>
+                      </a:r>
+                    </a:p>
+                  </a:txBody>
+                  <a:tcPr anchor="ctr">
+                    <a:solidFill>
+                      <a:srgbClr val="FFFFFF"/>
+                    </a:solidFill>
+                  </a:tcPr>
+                </a:tc>
+              </a:tr>
+              <a:tr h="609600">
+                <a:tc>
+                  <a:txBody>
+                    <a:bodyPr/>
+                    <a:lstStyle/>
+                    <a:p>
+                      <a:pPr algn="l"/>
+                      <a:r>
+                        <a:rPr sz="1400" b="1">
+                          <a:solidFill>
+                            <a:srgbClr val="222222"/>
+                          </a:solidFill>
+                          <a:latin typeface="Arial"/>
+                          <a:ea typeface="AppleGothic"/>
+                        </a:rPr>
+                        <a:t>ℓ(z)</a:t>
+                      </a:r>
+                    </a:p>
+                  </a:txBody>
+                  <a:tcPr anchor="ctr">
+                    <a:solidFill>
+                      <a:srgbClr val="F5F5F5"/>
+                    </a:solidFill>
+                  </a:tcPr>
+                </a:tc>
+                <a:tc>
+                  <a:txBody>
+                    <a:bodyPr/>
+                    <a:lstStyle/>
+                    <a:p>
+                      <a:pPr algn="ctr"/>
+                      <a:r>
+                        <a:rPr sz="1400" b="0">
+                          <a:solidFill>
+                            <a:srgbClr val="222222"/>
+                          </a:solidFill>
+                          <a:latin typeface="Arial"/>
+                          <a:ea typeface="AppleGothic"/>
+                        </a:rPr>
+                        <a:t>동결 affine — 밖으로도 폭주하지 않는 기본 추세</a:t>
+                      </a:r>
+                    </a:p>
+                  </a:txBody>
+                  <a:tcPr anchor="ctr">
+                    <a:solidFill>
+                      <a:srgbClr val="F5F5F5"/>
+                    </a:solidFill>
+                  </a:tcPr>
+                </a:tc>
+              </a:tr>
+              <a:tr h="609600">
+                <a:tc>
+                  <a:txBody>
+                    <a:bodyPr/>
+                    <a:lstStyle/>
+                    <a:p>
+                      <a:pPr algn="l"/>
+                      <a:r>
+                        <a:rPr sz="1400" b="1">
+                          <a:solidFill>
+                            <a:srgbClr val="222222"/>
+                          </a:solidFill>
+                          <a:latin typeface="Arial"/>
+                          <a:ea typeface="AppleGothic"/>
+                        </a:rPr>
+                        <a:t>cθ</a:t>
+                      </a:r>
+                    </a:p>
+                  </a:txBody>
+                  <a:tcPr anchor="ctr">
+                    <a:solidFill>
+                      <a:srgbClr val="FFFFFF"/>
+                    </a:solidFill>
+                  </a:tcPr>
+                </a:tc>
+                <a:tc>
+                  <a:txBody>
+                    <a:bodyPr/>
+                    <a:lstStyle/>
+                    <a:p>
+                      <a:pPr algn="ctr"/>
+                      <a:r>
+                        <a:rPr sz="1400" b="0">
+                          <a:solidFill>
+                            <a:srgbClr val="222222"/>
+                          </a:solidFill>
+                          <a:latin typeface="Arial"/>
+                          <a:ea typeface="AppleGothic"/>
+                        </a:rPr>
+                        <a:t>dual-scale residual — 가까우면 세밀, 멀면 유한 포화</a:t>
+                      </a:r>
+                    </a:p>
+                  </a:txBody>
+                  <a:tcPr anchor="ctr">
+                    <a:solidFill>
+                      <a:srgbClr val="FFFFFF"/>
+                    </a:solidFill>
+                  </a:tcPr>
+                </a:tc>
+              </a:tr>
+              <a:tr h="609600">
+                <a:tc>
+                  <a:txBody>
+                    <a:bodyPr/>
+                    <a:lstStyle/>
+                    <a:p>
+                      <a:pPr algn="l"/>
+                      <a:r>
+                        <a:rPr sz="1400" b="1">
+                          <a:solidFill>
+                            <a:srgbClr val="222222"/>
+                          </a:solidFill>
+                          <a:latin typeface="Arial"/>
+                          <a:ea typeface="AppleGothic"/>
+                        </a:rPr>
+                        <a:t>w(d)</a:t>
+                      </a:r>
+                    </a:p>
+                  </a:txBody>
+                  <a:tcPr anchor="ctr">
+                    <a:solidFill>
+                      <a:srgbClr val="F5F5F5"/>
+                    </a:solidFill>
+                  </a:tcPr>
+                </a:tc>
+                <a:tc>
+                  <a:txBody>
+                    <a:bodyPr/>
+                    <a:lstStyle/>
+                    <a:p>
+                      <a:pPr algn="ctr"/>
+                      <a:r>
+                        <a:rPr sz="1400" b="0">
+                          <a:solidFill>
+                            <a:srgbClr val="222222"/>
+                          </a:solidFill>
+                          <a:latin typeface="Arial"/>
+                          <a:ea typeface="AppleGothic"/>
+                        </a:rPr>
+                        <a:t>support 거리 gate — 멀수록 NN 보정 감쇠</a:t>
+                      </a:r>
+                    </a:p>
+                  </a:txBody>
+                  <a:tcPr anchor="ctr">
+                    <a:solidFill>
+                      <a:srgbClr val="F5F5F5"/>
+                    </a:solidFill>
+                  </a:tcPr>
+                </a:tc>
+              </a:tr>
+            </a:tbl>
+          </a:graphicData>
+        </a:graphic>
+      </p:graphicFrame>
       <p:cxnSp>
         <p:nvCxnSpPr>
-          <p:cNvPr id="7" name="Connector 6"/>
+          <p:cNvPr id="9" name="Connector 8"/>
           <p:cNvCxnSpPr/>
           <p:nvPr/>
         </p:nvCxnSpPr>
@@ -6094,7 +7125,7 @@
           </a:prstGeom>
           <a:ln w="9525">
             <a:solidFill>
-              <a:srgbClr val="D0D0D0"/>
+              <a:srgbClr val="E8E8E8"/>
             </a:solidFill>
           </a:ln>
         </p:spPr>
@@ -6115,7 +7146,7 @@
       </p:cxnSp>
       <p:sp>
         <p:nvSpPr>
-          <p:cNvPr id="8" name="TextBox 7"/>
+          <p:cNvPr id="10" name="TextBox 9"/>
           <p:cNvSpPr txBox="1"/>
           <p:nvPr/>
         </p:nvSpPr>
@@ -6139,9 +7170,9 @@
             <a:r>
               <a:rPr sz="900" b="0">
                 <a:solidFill>
-                  <a:srgbClr val="555555"/>
+                  <a:srgbClr val="666666"/>
                 </a:solidFill>
-                <a:latin typeface="AppleGothic"/>
+                <a:latin typeface="Arial"/>
                 <a:ea typeface="AppleGothic"/>
               </a:rPr>
               <a:t>SPS Lab  ·  Assumption-Aware Extrapolation  ·  SAAR</a:t>
@@ -6151,7 +7182,7 @@
       </p:sp>
       <p:sp>
         <p:nvSpPr>
-          <p:cNvPr id="9" name="TextBox 8"/>
+          <p:cNvPr id="11" name="TextBox 10"/>
           <p:cNvSpPr txBox="1"/>
           <p:nvPr/>
         </p:nvSpPr>
@@ -6175,9 +7206,9 @@
             <a:r>
               <a:rPr sz="1000" b="1">
                 <a:solidFill>
-                  <a:srgbClr val="555555"/>
+                  <a:srgbClr val="666666"/>
                 </a:solidFill>
-                <a:latin typeface="AppleGothic"/>
+                <a:latin typeface="Arial"/>
                 <a:ea typeface="AppleGothic"/>
               </a:rPr>
               <a:t>4/11</a:t>
@@ -6255,13 +7286,13 @@
         <p:spPr>
           <a:xfrm>
             <a:off x="0" y="0"/>
-            <a:ext cx="12192000" cy="38100"/>
+            <a:ext cx="12192000" cy="28575"/>
           </a:xfrm>
           <a:prstGeom prst="rect">
             <a:avLst/>
           </a:prstGeom>
           <a:solidFill>
-            <a:srgbClr val="0A5C5C"/>
+            <a:srgbClr val="0072B2"/>
           </a:solidFill>
           <a:ln>
             <a:noFill/>
@@ -6298,7 +7329,7 @@
         <p:spPr>
           <a:xfrm>
             <a:off x="457200" y="209550"/>
-            <a:ext cx="11239500" cy="323850"/>
+            <a:ext cx="11239500" cy="304800"/>
           </a:xfrm>
           <a:prstGeom prst="rect">
             <a:avLst/>
@@ -6315,9 +7346,9 @@
             <a:r>
               <a:rPr sz="2200" b="1">
                 <a:solidFill>
-                  <a:srgbClr val="111111"/>
+                  <a:srgbClr val="222222"/>
                 </a:solidFill>
-                <a:latin typeface="AppleGothic"/>
+                <a:latin typeface="Arial"/>
                 <a:ea typeface="AppleGothic"/>
               </a:rPr>
               <a:t>지금 결론</a:t>
@@ -6333,7 +7364,7 @@
         </p:nvSpPr>
         <p:spPr>
           <a:xfrm>
-            <a:off x="457200" y="533400"/>
+            <a:off x="457200" y="514350"/>
             <a:ext cx="11239500" cy="190500"/>
           </a:xfrm>
           <a:prstGeom prst="rect">
@@ -6351,9 +7382,9 @@
             <a:r>
               <a:rPr sz="1200" b="0">
                 <a:solidFill>
-                  <a:srgbClr val="555555"/>
+                  <a:srgbClr val="666666"/>
                 </a:solidFill>
-                <a:latin typeface="AppleGothic"/>
+                <a:latin typeface="Arial"/>
                 <a:ea typeface="AppleGothic"/>
               </a:rPr>
               <a:t>개발 3배터리 주표</a:t>
@@ -6363,7 +7394,7 @@
       </p:sp>
       <p:pic>
         <p:nvPicPr>
-          <p:cNvPr id="6" name="Picture 5" descr="summary_executive.png"/>
+          <p:cNvPr id="6" name="Picture 5" descr="summary_bars.png"/>
           <p:cNvPicPr>
             <a:picLocks noChangeAspect="1"/>
           </p:cNvPicPr>
@@ -6377,8 +7408,8 @@
         </p:blipFill>
         <p:spPr>
           <a:xfrm>
-            <a:off x="381000" y="904875"/>
-            <a:ext cx="6667500" cy="4000500"/>
+            <a:off x="571500" y="1047750"/>
+            <a:ext cx="5905500" cy="4000500"/>
           </a:xfrm>
           <a:prstGeom prst="rect">
             <a:avLst/>
@@ -6394,8 +7425,8 @@
           <p:nvPr/>
         </p:nvGraphicFramePr>
         <p:xfrm>
-          <a:off x="7239000" y="1524000"/>
-          <a:ext cx="4381500" cy="2667000"/>
+          <a:off x="6858000" y="1524000"/>
+          <a:ext cx="4762500" cy="2667000"/>
         </p:xfrm>
         <a:graphic>
           <a:graphicData uri="http://schemas.openxmlformats.org/drawingml/2006/table">
@@ -6404,8 +7435,8 @@
                 <a:tableStyleId>{5C22544A-7EE6-4342-B048-85BDC9FD1C3A}</a:tableStyleId>
               </a:tblPr>
               <a:tblGrid>
-                <a:gridCol w="2190750"/>
-                <a:gridCol w="2190750"/>
+                <a:gridCol w="2381250"/>
+                <a:gridCol w="2381250"/>
               </a:tblGrid>
               <a:tr h="533400">
                 <a:tc>
@@ -6415,35 +7446,35 @@
                     <a:p>
                       <a:pPr algn="ctr"/>
                       <a:r>
-                        <a:rPr sz="1400" b="1">
+                        <a:rPr sz="1600" b="1">
                           <a:solidFill>
                             <a:srgbClr val="FFFFFF"/>
                           </a:solidFill>
-                          <a:latin typeface="AppleGothic"/>
-                          <a:ea typeface="AppleGothic"/>
-                        </a:rPr>
-                        <a:t>데이터</a:t>
-                      </a:r>
-                    </a:p>
-                  </a:txBody>
-                  <a:tcPr anchor="ctr">
-                    <a:solidFill>
-                      <a:srgbClr val="111111"/>
-                    </a:solidFill>
-                  </a:tcPr>
-                </a:tc>
-                <a:tc>
-                  <a:txBody>
-                    <a:bodyPr/>
-                    <a:lstStyle/>
-                    <a:p>
-                      <a:pPr algn="ctr"/>
-                      <a:r>
-                        <a:rPr sz="1400" b="1">
+                          <a:latin typeface="Arial"/>
+                          <a:ea typeface="AppleGothic"/>
+                        </a:rPr>
+                        <a:t>Dataset</a:t>
+                      </a:r>
+                    </a:p>
+                  </a:txBody>
+                  <a:tcPr anchor="ctr">
+                    <a:solidFill>
+                      <a:srgbClr val="222222"/>
+                    </a:solidFill>
+                  </a:tcPr>
+                </a:tc>
+                <a:tc>
+                  <a:txBody>
+                    <a:bodyPr/>
+                    <a:lstStyle/>
+                    <a:p>
+                      <a:pPr algn="ctr"/>
+                      <a:r>
+                        <a:rPr sz="1600" b="1">
                           <a:solidFill>
                             <a:srgbClr val="FFFFFF"/>
                           </a:solidFill>
-                          <a:latin typeface="AppleGothic"/>
+                          <a:latin typeface="Arial"/>
                           <a:ea typeface="AppleGothic"/>
                         </a:rPr>
                         <a:t>R²</a:t>
@@ -6452,7 +7483,7 @@
                   </a:txBody>
                   <a:tcPr anchor="ctr">
                     <a:solidFill>
-                      <a:srgbClr val="111111"/>
+                      <a:srgbClr val="222222"/>
                     </a:solidFill>
                   </a:tcPr>
                 </a:tc>
@@ -6463,13 +7494,13 @@
                     <a:bodyPr/>
                     <a:lstStyle/>
                     <a:p>
-                      <a:pPr algn="ctr"/>
-                      <a:r>
-                        <a:rPr sz="1400" b="1">
-                          <a:solidFill>
-                            <a:srgbClr val="111111"/>
-                          </a:solidFill>
-                          <a:latin typeface="AppleGothic"/>
+                      <a:pPr algn="l"/>
+                      <a:r>
+                        <a:rPr sz="1600" b="1">
+                          <a:solidFill>
+                            <a:srgbClr val="222222"/>
+                          </a:solidFill>
+                          <a:latin typeface="Arial"/>
                           <a:ea typeface="AppleGothic"/>
                         </a:rPr>
                         <a:t>Sunwoda</a:t>
@@ -6489,11 +7520,11 @@
                     <a:p>
                       <a:pPr algn="ctr"/>
                       <a:r>
-                        <a:rPr sz="1400" b="0">
-                          <a:solidFill>
-                            <a:srgbClr val="111111"/>
-                          </a:solidFill>
-                          <a:latin typeface="AppleGothic"/>
+                        <a:rPr sz="1600" b="0">
+                          <a:solidFill>
+                            <a:srgbClr val="222222"/>
+                          </a:solidFill>
+                          <a:latin typeface="Arial"/>
                           <a:ea typeface="AppleGothic"/>
                         </a:rPr>
                         <a:t>0.934</a:t>
@@ -6513,13 +7544,13 @@
                     <a:bodyPr/>
                     <a:lstStyle/>
                     <a:p>
-                      <a:pPr algn="ctr"/>
-                      <a:r>
-                        <a:rPr sz="1400" b="1">
-                          <a:solidFill>
-                            <a:srgbClr val="111111"/>
-                          </a:solidFill>
-                          <a:latin typeface="AppleGothic"/>
+                      <a:pPr algn="l"/>
+                      <a:r>
+                        <a:rPr sz="1600" b="1">
+                          <a:solidFill>
+                            <a:srgbClr val="222222"/>
+                          </a:solidFill>
+                          <a:latin typeface="Arial"/>
                           <a:ea typeface="AppleGothic"/>
                         </a:rPr>
                         <a:t>RWTH</a:t>
@@ -6528,22 +7559,22 @@
                   </a:txBody>
                   <a:tcPr anchor="ctr">
                     <a:solidFill>
-                      <a:srgbClr val="F2F2F0"/>
-                    </a:solidFill>
-                  </a:tcPr>
-                </a:tc>
-                <a:tc>
-                  <a:txBody>
-                    <a:bodyPr/>
-                    <a:lstStyle/>
-                    <a:p>
-                      <a:pPr algn="ctr"/>
-                      <a:r>
-                        <a:rPr sz="1400" b="0">
-                          <a:solidFill>
-                            <a:srgbClr val="111111"/>
-                          </a:solidFill>
-                          <a:latin typeface="AppleGothic"/>
+                      <a:srgbClr val="F5F5F5"/>
+                    </a:solidFill>
+                  </a:tcPr>
+                </a:tc>
+                <a:tc>
+                  <a:txBody>
+                    <a:bodyPr/>
+                    <a:lstStyle/>
+                    <a:p>
+                      <a:pPr algn="ctr"/>
+                      <a:r>
+                        <a:rPr sz="1600" b="0">
+                          <a:solidFill>
+                            <a:srgbClr val="222222"/>
+                          </a:solidFill>
+                          <a:latin typeface="Arial"/>
                           <a:ea typeface="AppleGothic"/>
                         </a:rPr>
                         <a:t>0.842</a:t>
@@ -6552,7 +7583,7 @@
                   </a:txBody>
                   <a:tcPr anchor="ctr">
                     <a:solidFill>
-                      <a:srgbClr val="F2F2F0"/>
+                      <a:srgbClr val="F5F5F5"/>
                     </a:solidFill>
                   </a:tcPr>
                 </a:tc>
@@ -6563,13 +7594,13 @@
                     <a:bodyPr/>
                     <a:lstStyle/>
                     <a:p>
-                      <a:pPr algn="ctr"/>
-                      <a:r>
-                        <a:rPr sz="1400" b="1">
-                          <a:solidFill>
-                            <a:srgbClr val="111111"/>
-                          </a:solidFill>
-                          <a:latin typeface="AppleGothic"/>
+                      <a:pPr algn="l"/>
+                      <a:r>
+                        <a:rPr sz="1600" b="1">
+                          <a:solidFill>
+                            <a:srgbClr val="222222"/>
+                          </a:solidFill>
+                          <a:latin typeface="Arial"/>
                           <a:ea typeface="AppleGothic"/>
                         </a:rPr>
                         <a:t>MICH</a:t>
@@ -6589,11 +7620,11 @@
                     <a:p>
                       <a:pPr algn="ctr"/>
                       <a:r>
-                        <a:rPr sz="1400" b="0">
-                          <a:solidFill>
-                            <a:srgbClr val="111111"/>
-                          </a:solidFill>
-                          <a:latin typeface="AppleGothic"/>
+                        <a:rPr sz="1600" b="0">
+                          <a:solidFill>
+                            <a:srgbClr val="222222"/>
+                          </a:solidFill>
+                          <a:latin typeface="Arial"/>
                           <a:ea typeface="AppleGothic"/>
                         </a:rPr>
                         <a:t>0.751</a:t>
@@ -6613,37 +7644,37 @@
                     <a:bodyPr/>
                     <a:lstStyle/>
                     <a:p>
-                      <a:pPr algn="ctr"/>
-                      <a:r>
-                        <a:rPr sz="1400" b="1">
-                          <a:solidFill>
-                            <a:srgbClr val="0A5C5C"/>
-                          </a:solidFill>
-                          <a:latin typeface="AppleGothic"/>
-                          <a:ea typeface="AppleGothic"/>
-                        </a:rPr>
-                        <a:t>평균</a:t>
-                      </a:r>
-                    </a:p>
-                  </a:txBody>
-                  <a:tcPr anchor="ctr">
-                    <a:solidFill>
-                      <a:srgbClr val="DCEBEB"/>
-                    </a:solidFill>
-                  </a:tcPr>
-                </a:tc>
-                <a:tc>
-                  <a:txBody>
-                    <a:bodyPr/>
-                    <a:lstStyle/>
-                    <a:p>
-                      <a:pPr algn="ctr"/>
-                      <a:r>
-                        <a:rPr sz="1400" b="1">
-                          <a:solidFill>
-                            <a:srgbClr val="0A5C5C"/>
-                          </a:solidFill>
-                          <a:latin typeface="AppleGothic"/>
+                      <a:pPr algn="l"/>
+                      <a:r>
+                        <a:rPr sz="1600" b="1">
+                          <a:solidFill>
+                            <a:srgbClr val="0072B2"/>
+                          </a:solidFill>
+                          <a:latin typeface="Arial"/>
+                          <a:ea typeface="AppleGothic"/>
+                        </a:rPr>
+                        <a:t>Mean</a:t>
+                      </a:r>
+                    </a:p>
+                  </a:txBody>
+                  <a:tcPr anchor="ctr">
+                    <a:solidFill>
+                      <a:srgbClr val="E8F1F8"/>
+                    </a:solidFill>
+                  </a:tcPr>
+                </a:tc>
+                <a:tc>
+                  <a:txBody>
+                    <a:bodyPr/>
+                    <a:lstStyle/>
+                    <a:p>
+                      <a:pPr algn="ctr"/>
+                      <a:r>
+                        <a:rPr sz="1600" b="1">
+                          <a:solidFill>
+                            <a:srgbClr val="0072B2"/>
+                          </a:solidFill>
+                          <a:latin typeface="Arial"/>
                           <a:ea typeface="AppleGothic"/>
                         </a:rPr>
                         <a:t>0.842</a:t>
@@ -6652,7 +7683,7 @@
                   </a:txBody>
                   <a:tcPr anchor="ctr">
                     <a:solidFill>
-                      <a:srgbClr val="DCEBEB"/>
+                      <a:srgbClr val="E8F1F8"/>
                     </a:solidFill>
                   </a:tcPr>
                 </a:tc>
@@ -6669,8 +7700,8 @@
         </p:nvSpPr>
         <p:spPr>
           <a:xfrm>
-            <a:off x="7239000" y="4381500"/>
-            <a:ext cx="4381500" cy="571500"/>
+            <a:off x="6858000" y="4476750"/>
+            <a:ext cx="4762500" cy="476250"/>
           </a:xfrm>
           <a:prstGeom prst="rect">
             <a:avLst/>
@@ -6687,12 +7718,12 @@
             <a:r>
               <a:rPr sz="1200" b="0">
                 <a:solidFill>
-                  <a:srgbClr val="555555"/>
+                  <a:srgbClr val="666666"/>
                 </a:solidFill>
-                <a:latin typeface="AppleGothic"/>
+                <a:latin typeface="Arial"/>
                 <a:ea typeface="AppleGothic"/>
               </a:rPr>
-              <a:t>만능 SOTA 아님  ·  PAE 결과는 이번 표에 없음</a:t>
+              <a:t>만능 SOTA 아님  ·  PAE는 이번 표에 없음</a:t>
             </a:r>
           </a:p>
         </p:txBody>
@@ -6713,7 +7744,7 @@
           </a:prstGeom>
           <a:ln w="9525">
             <a:solidFill>
-              <a:srgbClr val="D0D0D0"/>
+              <a:srgbClr val="E8E8E8"/>
             </a:solidFill>
           </a:ln>
         </p:spPr>
@@ -6758,9 +7789,9 @@
             <a:r>
               <a:rPr sz="900" b="0">
                 <a:solidFill>
-                  <a:srgbClr val="555555"/>
+                  <a:srgbClr val="666666"/>
                 </a:solidFill>
-                <a:latin typeface="AppleGothic"/>
+                <a:latin typeface="Arial"/>
                 <a:ea typeface="AppleGothic"/>
               </a:rPr>
               <a:t>SPS Lab  ·  Assumption-Aware Extrapolation  ·  SAAR</a:t>
@@ -6794,9 +7825,9 @@
             <a:r>
               <a:rPr sz="1000" b="1">
                 <a:solidFill>
-                  <a:srgbClr val="555555"/>
+                  <a:srgbClr val="666666"/>
                 </a:solidFill>
-                <a:latin typeface="AppleGothic"/>
+                <a:latin typeface="Arial"/>
                 <a:ea typeface="AppleGothic"/>
               </a:rPr>
               <a:t>5/11</a:t>
@@ -6874,13 +7905,13 @@
         <p:spPr>
           <a:xfrm>
             <a:off x="0" y="0"/>
-            <a:ext cx="12192000" cy="38100"/>
+            <a:ext cx="12192000" cy="28575"/>
           </a:xfrm>
           <a:prstGeom prst="rect">
             <a:avLst/>
           </a:prstGeom>
           <a:solidFill>
-            <a:srgbClr val="0A5C5C"/>
+            <a:srgbClr val="0072B2"/>
           </a:solidFill>
           <a:ln>
             <a:noFill/>
@@ -6917,7 +7948,7 @@
         <p:spPr>
           <a:xfrm>
             <a:off x="457200" y="209550"/>
-            <a:ext cx="11239500" cy="323850"/>
+            <a:ext cx="11239500" cy="304800"/>
           </a:xfrm>
           <a:prstGeom prst="rect">
             <a:avLst/>
@@ -6934,9 +7965,9 @@
             <a:r>
               <a:rPr sz="2200" b="1">
                 <a:solidFill>
-                  <a:srgbClr val="111111"/>
+                  <a:srgbClr val="222222"/>
                 </a:solidFill>
-                <a:latin typeface="AppleGothic"/>
+                <a:latin typeface="Arial"/>
                 <a:ea typeface="AppleGothic"/>
               </a:rPr>
               <a:t>주 결과</a:t>
@@ -6952,7 +7983,7 @@
         </p:nvSpPr>
         <p:spPr>
           <a:xfrm>
-            <a:off x="457200" y="533400"/>
+            <a:off x="457200" y="514350"/>
             <a:ext cx="11239500" cy="190500"/>
           </a:xfrm>
           <a:prstGeom prst="rect">
@@ -6970,9 +8001,9 @@
             <a:r>
               <a:rPr sz="1200" b="0">
                 <a:solidFill>
-                  <a:srgbClr val="555555"/>
+                  <a:srgbClr val="666666"/>
                 </a:solidFill>
-                <a:latin typeface="AppleGothic"/>
+                <a:latin typeface="Arial"/>
                 <a:ea typeface="AppleGothic"/>
               </a:rPr>
               <a:t>같은 구조 · Sunwoda / RWTH / MICH</a:t>
@@ -6996,8 +8027,8 @@
         </p:blipFill>
         <p:spPr>
           <a:xfrm>
-            <a:off x="285750" y="857250"/>
-            <a:ext cx="6858000" cy="4572000"/>
+            <a:off x="381000" y="904875"/>
+            <a:ext cx="6667500" cy="4572000"/>
           </a:xfrm>
           <a:prstGeom prst="rect">
             <a:avLst/>
@@ -7013,8 +8044,8 @@
           <p:nvPr/>
         </p:nvGraphicFramePr>
         <p:xfrm>
-          <a:off x="7239000" y="1143000"/>
-          <a:ext cx="4476750" cy="3048000"/>
+          <a:off x="7239000" y="1238250"/>
+          <a:ext cx="4476750" cy="2857500"/>
         </p:xfrm>
         <a:graphic>
           <a:graphicData uri="http://schemas.openxmlformats.org/drawingml/2006/table">
@@ -7030,7 +8061,7 @@
                 <a:gridCol w="746125"/>
                 <a:gridCol w="746125"/>
               </a:tblGrid>
-              <a:tr h="609600">
+              <a:tr h="571500">
                 <a:tc>
                   <a:txBody>
                     <a:bodyPr/>
@@ -7042,16 +8073,16 @@
                           <a:solidFill>
                             <a:srgbClr val="FFFFFF"/>
                           </a:solidFill>
-                          <a:latin typeface="AppleGothic"/>
-                          <a:ea typeface="AppleGothic"/>
-                        </a:rPr>
-                        <a:t>모형</a:t>
-                      </a:r>
-                    </a:p>
-                  </a:txBody>
-                  <a:tcPr anchor="ctr">
-                    <a:solidFill>
-                      <a:srgbClr val="111111"/>
+                          <a:latin typeface="Arial"/>
+                          <a:ea typeface="AppleGothic"/>
+                        </a:rPr>
+                        <a:t>Model</a:t>
+                      </a:r>
+                    </a:p>
+                  </a:txBody>
+                  <a:tcPr anchor="ctr">
+                    <a:solidFill>
+                      <a:srgbClr val="222222"/>
                     </a:solidFill>
                   </a:tcPr>
                 </a:tc>
@@ -7066,7 +8097,7 @@
                           <a:solidFill>
                             <a:srgbClr val="FFFFFF"/>
                           </a:solidFill>
-                          <a:latin typeface="AppleGothic"/>
+                          <a:latin typeface="Arial"/>
                           <a:ea typeface="AppleGothic"/>
                         </a:rPr>
                         <a:t>Sun</a:t>
@@ -7075,7 +8106,7 @@
                   </a:txBody>
                   <a:tcPr anchor="ctr">
                     <a:solidFill>
-                      <a:srgbClr val="111111"/>
+                      <a:srgbClr val="222222"/>
                     </a:solidFill>
                   </a:tcPr>
                 </a:tc>
@@ -7090,7 +8121,7 @@
                           <a:solidFill>
                             <a:srgbClr val="FFFFFF"/>
                           </a:solidFill>
-                          <a:latin typeface="AppleGothic"/>
+                          <a:latin typeface="Arial"/>
                           <a:ea typeface="AppleGothic"/>
                         </a:rPr>
                         <a:t>RWTH</a:t>
@@ -7099,7 +8130,7 @@
                   </a:txBody>
                   <a:tcPr anchor="ctr">
                     <a:solidFill>
-                      <a:srgbClr val="111111"/>
+                      <a:srgbClr val="222222"/>
                     </a:solidFill>
                   </a:tcPr>
                 </a:tc>
@@ -7114,7 +8145,7 @@
                           <a:solidFill>
                             <a:srgbClr val="FFFFFF"/>
                           </a:solidFill>
-                          <a:latin typeface="AppleGothic"/>
+                          <a:latin typeface="Arial"/>
                           <a:ea typeface="AppleGothic"/>
                         </a:rPr>
                         <a:t>MICH</a:t>
@@ -7123,7 +8154,7 @@
                   </a:txBody>
                   <a:tcPr anchor="ctr">
                     <a:solidFill>
-                      <a:srgbClr val="111111"/>
+                      <a:srgbClr val="222222"/>
                     </a:solidFill>
                   </a:tcPr>
                 </a:tc>
@@ -7138,16 +8169,16 @@
                           <a:solidFill>
                             <a:srgbClr val="FFFFFF"/>
                           </a:solidFill>
-                          <a:latin typeface="AppleGothic"/>
-                          <a:ea typeface="AppleGothic"/>
-                        </a:rPr>
-                        <a:t>평균</a:t>
-                      </a:r>
-                    </a:p>
-                  </a:txBody>
-                  <a:tcPr anchor="ctr">
-                    <a:solidFill>
-                      <a:srgbClr val="111111"/>
+                          <a:latin typeface="Arial"/>
+                          <a:ea typeface="AppleGothic"/>
+                        </a:rPr>
+                        <a:t>Mean</a:t>
+                      </a:r>
+                    </a:p>
+                  </a:txBody>
+                  <a:tcPr anchor="ctr">
+                    <a:solidFill>
+                      <a:srgbClr val="222222"/>
                     </a:solidFill>
                   </a:tcPr>
                 </a:tc>
@@ -7162,21 +8193,21 @@
                           <a:solidFill>
                             <a:srgbClr val="FFFFFF"/>
                           </a:solidFill>
-                          <a:latin typeface="AppleGothic"/>
-                          <a:ea typeface="AppleGothic"/>
-                        </a:rPr>
-                        <a:t>최저</a:t>
-                      </a:r>
-                    </a:p>
-                  </a:txBody>
-                  <a:tcPr anchor="ctr">
-                    <a:solidFill>
-                      <a:srgbClr val="111111"/>
+                          <a:latin typeface="Arial"/>
+                          <a:ea typeface="AppleGothic"/>
+                        </a:rPr>
+                        <a:t>Min</a:t>
+                      </a:r>
+                    </a:p>
+                  </a:txBody>
+                  <a:tcPr anchor="ctr">
+                    <a:solidFill>
+                      <a:srgbClr val="222222"/>
                     </a:solidFill>
                   </a:tcPr>
                 </a:tc>
               </a:tr>
-              <a:tr h="609600">
+              <a:tr h="571500">
                 <a:tc>
                   <a:txBody>
                     <a:bodyPr/>
@@ -7186,12 +8217,12 @@
                       <a:r>
                         <a:rPr sz="1100" b="1">
                           <a:solidFill>
-                            <a:srgbClr val="111111"/>
-                          </a:solidFill>
-                          <a:latin typeface="AppleGothic"/>
-                          <a:ea typeface="AppleGothic"/>
-                        </a:rPr>
-                        <a:t>고정 경계</a:t>
+                            <a:srgbClr val="222222"/>
+                          </a:solidFill>
+                          <a:latin typeface="Arial"/>
+                          <a:ea typeface="AppleGothic"/>
+                        </a:rPr>
+                        <a:t>Fixed</a:t>
                       </a:r>
                     </a:p>
                   </a:txBody>
@@ -7210,9 +8241,9 @@
                       <a:r>
                         <a:rPr sz="1100" b="0">
                           <a:solidFill>
-                            <a:srgbClr val="111111"/>
-                          </a:solidFill>
-                          <a:latin typeface="AppleGothic"/>
+                            <a:srgbClr val="222222"/>
+                          </a:solidFill>
+                          <a:latin typeface="Arial"/>
                           <a:ea typeface="AppleGothic"/>
                         </a:rPr>
                         <a:t>0.939</a:t>
@@ -7230,16 +8261,260 @@
                     <a:bodyPr/>
                     <a:lstStyle/>
                     <a:p>
+                      <a:pPr algn="ctr"/>
+                      <a:r>
+                        <a:rPr sz="1100" b="0">
+                          <a:solidFill>
+                            <a:srgbClr val="222222"/>
+                          </a:solidFill>
+                          <a:latin typeface="Arial"/>
+                          <a:ea typeface="AppleGothic"/>
+                        </a:rPr>
+                        <a:t>0.878</a:t>
+                      </a:r>
+                    </a:p>
+                  </a:txBody>
+                  <a:tcPr anchor="ctr">
+                    <a:solidFill>
+                      <a:srgbClr val="FFFFFF"/>
+                    </a:solidFill>
+                  </a:tcPr>
+                </a:tc>
+                <a:tc>
+                  <a:txBody>
+                    <a:bodyPr/>
+                    <a:lstStyle/>
+                    <a:p>
+                      <a:pPr algn="ctr"/>
+                      <a:r>
+                        <a:rPr sz="1100" b="0">
+                          <a:solidFill>
+                            <a:srgbClr val="222222"/>
+                          </a:solidFill>
+                          <a:latin typeface="Arial"/>
+                          <a:ea typeface="AppleGothic"/>
+                        </a:rPr>
+                        <a:t>0.468</a:t>
+                      </a:r>
+                    </a:p>
+                  </a:txBody>
+                  <a:tcPr anchor="ctr">
+                    <a:solidFill>
+                      <a:srgbClr val="FFFFFF"/>
+                    </a:solidFill>
+                  </a:tcPr>
+                </a:tc>
+                <a:tc>
+                  <a:txBody>
+                    <a:bodyPr/>
+                    <a:lstStyle/>
+                    <a:p>
+                      <a:pPr algn="ctr"/>
+                      <a:r>
+                        <a:rPr sz="1100" b="0">
+                          <a:solidFill>
+                            <a:srgbClr val="222222"/>
+                          </a:solidFill>
+                          <a:latin typeface="Arial"/>
+                          <a:ea typeface="AppleGothic"/>
+                        </a:rPr>
+                        <a:t>0.762</a:t>
+                      </a:r>
+                    </a:p>
+                  </a:txBody>
+                  <a:tcPr anchor="ctr">
+                    <a:solidFill>
+                      <a:srgbClr val="FFFFFF"/>
+                    </a:solidFill>
+                  </a:tcPr>
+                </a:tc>
+                <a:tc>
+                  <a:txBody>
+                    <a:bodyPr/>
+                    <a:lstStyle/>
+                    <a:p>
+                      <a:pPr algn="ctr"/>
+                      <a:r>
+                        <a:rPr sz="1100" b="0">
+                          <a:solidFill>
+                            <a:srgbClr val="222222"/>
+                          </a:solidFill>
+                          <a:latin typeface="Arial"/>
+                          <a:ea typeface="AppleGothic"/>
+                        </a:rPr>
+                        <a:t>0.468</a:t>
+                      </a:r>
+                    </a:p>
+                  </a:txBody>
+                  <a:tcPr anchor="ctr">
+                    <a:solidFill>
+                      <a:srgbClr val="FFFFFF"/>
+                    </a:solidFill>
+                  </a:tcPr>
+                </a:tc>
+              </a:tr>
+              <a:tr h="571500">
+                <a:tc>
+                  <a:txBody>
+                    <a:bodyPr/>
+                    <a:lstStyle/>
+                    <a:p>
                       <a:pPr algn="l"/>
                       <a:r>
+                        <a:rPr sz="1100" b="1">
+                          <a:solidFill>
+                            <a:srgbClr val="222222"/>
+                          </a:solidFill>
+                          <a:latin typeface="Arial"/>
+                          <a:ea typeface="AppleGothic"/>
+                        </a:rPr>
+                        <a:t>Unbounded</a:t>
+                      </a:r>
+                    </a:p>
+                  </a:txBody>
+                  <a:tcPr anchor="ctr">
+                    <a:solidFill>
+                      <a:srgbClr val="F5F5F5"/>
+                    </a:solidFill>
+                  </a:tcPr>
+                </a:tc>
+                <a:tc>
+                  <a:txBody>
+                    <a:bodyPr/>
+                    <a:lstStyle/>
+                    <a:p>
+                      <a:pPr algn="ctr"/>
+                      <a:r>
                         <a:rPr sz="1100" b="0">
                           <a:solidFill>
-                            <a:srgbClr val="111111"/>
-                          </a:solidFill>
-                          <a:latin typeface="AppleGothic"/>
-                          <a:ea typeface="AppleGothic"/>
-                        </a:rPr>
-                        <a:t>0.878</a:t>
+                            <a:srgbClr val="222222"/>
+                          </a:solidFill>
+                          <a:latin typeface="Arial"/>
+                          <a:ea typeface="AppleGothic"/>
+                        </a:rPr>
+                        <a:t>0.718</a:t>
+                      </a:r>
+                    </a:p>
+                  </a:txBody>
+                  <a:tcPr anchor="ctr">
+                    <a:solidFill>
+                      <a:srgbClr val="F5F5F5"/>
+                    </a:solidFill>
+                  </a:tcPr>
+                </a:tc>
+                <a:tc>
+                  <a:txBody>
+                    <a:bodyPr/>
+                    <a:lstStyle/>
+                    <a:p>
+                      <a:pPr algn="ctr"/>
+                      <a:r>
+                        <a:rPr sz="1100" b="0">
+                          <a:solidFill>
+                            <a:srgbClr val="222222"/>
+                          </a:solidFill>
+                          <a:latin typeface="Arial"/>
+                          <a:ea typeface="AppleGothic"/>
+                        </a:rPr>
+                        <a:t>0.788</a:t>
+                      </a:r>
+                    </a:p>
+                  </a:txBody>
+                  <a:tcPr anchor="ctr">
+                    <a:solidFill>
+                      <a:srgbClr val="F5F5F5"/>
+                    </a:solidFill>
+                  </a:tcPr>
+                </a:tc>
+                <a:tc>
+                  <a:txBody>
+                    <a:bodyPr/>
+                    <a:lstStyle/>
+                    <a:p>
+                      <a:pPr algn="ctr"/>
+                      <a:r>
+                        <a:rPr sz="1100" b="0">
+                          <a:solidFill>
+                            <a:srgbClr val="222222"/>
+                          </a:solidFill>
+                          <a:latin typeface="Arial"/>
+                          <a:ea typeface="AppleGothic"/>
+                        </a:rPr>
+                        <a:t>0.759</a:t>
+                      </a:r>
+                    </a:p>
+                  </a:txBody>
+                  <a:tcPr anchor="ctr">
+                    <a:solidFill>
+                      <a:srgbClr val="F5F5F5"/>
+                    </a:solidFill>
+                  </a:tcPr>
+                </a:tc>
+                <a:tc>
+                  <a:txBody>
+                    <a:bodyPr/>
+                    <a:lstStyle/>
+                    <a:p>
+                      <a:pPr algn="ctr"/>
+                      <a:r>
+                        <a:rPr sz="1100" b="0">
+                          <a:solidFill>
+                            <a:srgbClr val="222222"/>
+                          </a:solidFill>
+                          <a:latin typeface="Arial"/>
+                          <a:ea typeface="AppleGothic"/>
+                        </a:rPr>
+                        <a:t>0.755</a:t>
+                      </a:r>
+                    </a:p>
+                  </a:txBody>
+                  <a:tcPr anchor="ctr">
+                    <a:solidFill>
+                      <a:srgbClr val="F5F5F5"/>
+                    </a:solidFill>
+                  </a:tcPr>
+                </a:tc>
+                <a:tc>
+                  <a:txBody>
+                    <a:bodyPr/>
+                    <a:lstStyle/>
+                    <a:p>
+                      <a:pPr algn="ctr"/>
+                      <a:r>
+                        <a:rPr sz="1100" b="0">
+                          <a:solidFill>
+                            <a:srgbClr val="222222"/>
+                          </a:solidFill>
+                          <a:latin typeface="Arial"/>
+                          <a:ea typeface="AppleGothic"/>
+                        </a:rPr>
+                        <a:t>0.718</a:t>
+                      </a:r>
+                    </a:p>
+                  </a:txBody>
+                  <a:tcPr anchor="ctr">
+                    <a:solidFill>
+                      <a:srgbClr val="F5F5F5"/>
+                    </a:solidFill>
+                  </a:tcPr>
+                </a:tc>
+              </a:tr>
+              <a:tr h="571500">
+                <a:tc>
+                  <a:txBody>
+                    <a:bodyPr/>
+                    <a:lstStyle/>
+                    <a:p>
+                      <a:pPr algn="l"/>
+                      <a:r>
+                        <a:rPr sz="1100" b="1">
+                          <a:solidFill>
+                            <a:srgbClr val="222222"/>
+                          </a:solidFill>
+                          <a:latin typeface="Arial"/>
+                          <a:ea typeface="AppleGothic"/>
+                        </a:rPr>
+                        <a:t>Distance</a:t>
                       </a:r>
                     </a:p>
                   </a:txBody>
@@ -7254,388 +8529,192 @@
                     <a:bodyPr/>
                     <a:lstStyle/>
                     <a:p>
+                      <a:pPr algn="ctr"/>
+                      <a:r>
+                        <a:rPr sz="1100" b="0">
+                          <a:solidFill>
+                            <a:srgbClr val="222222"/>
+                          </a:solidFill>
+                          <a:latin typeface="Arial"/>
+                          <a:ea typeface="AppleGothic"/>
+                        </a:rPr>
+                        <a:t>0.894</a:t>
+                      </a:r>
+                    </a:p>
+                  </a:txBody>
+                  <a:tcPr anchor="ctr">
+                    <a:solidFill>
+                      <a:srgbClr val="FFFFFF"/>
+                    </a:solidFill>
+                  </a:tcPr>
+                </a:tc>
+                <a:tc>
+                  <a:txBody>
+                    <a:bodyPr/>
+                    <a:lstStyle/>
+                    <a:p>
+                      <a:pPr algn="ctr"/>
+                      <a:r>
+                        <a:rPr sz="1100" b="0">
+                          <a:solidFill>
+                            <a:srgbClr val="222222"/>
+                          </a:solidFill>
+                          <a:latin typeface="Arial"/>
+                          <a:ea typeface="AppleGothic"/>
+                        </a:rPr>
+                        <a:t>0.800</a:t>
+                      </a:r>
+                    </a:p>
+                  </a:txBody>
+                  <a:tcPr anchor="ctr">
+                    <a:solidFill>
+                      <a:srgbClr val="FFFFFF"/>
+                    </a:solidFill>
+                  </a:tcPr>
+                </a:tc>
+                <a:tc>
+                  <a:txBody>
+                    <a:bodyPr/>
+                    <a:lstStyle/>
+                    <a:p>
+                      <a:pPr algn="ctr"/>
+                      <a:r>
+                        <a:rPr sz="1100" b="0">
+                          <a:solidFill>
+                            <a:srgbClr val="222222"/>
+                          </a:solidFill>
+                          <a:latin typeface="Arial"/>
+                          <a:ea typeface="AppleGothic"/>
+                        </a:rPr>
+                        <a:t>0.736</a:t>
+                      </a:r>
+                    </a:p>
+                  </a:txBody>
+                  <a:tcPr anchor="ctr">
+                    <a:solidFill>
+                      <a:srgbClr val="FFFFFF"/>
+                    </a:solidFill>
+                  </a:tcPr>
+                </a:tc>
+                <a:tc>
+                  <a:txBody>
+                    <a:bodyPr/>
+                    <a:lstStyle/>
+                    <a:p>
+                      <a:pPr algn="ctr"/>
+                      <a:r>
+                        <a:rPr sz="1100" b="0">
+                          <a:solidFill>
+                            <a:srgbClr val="222222"/>
+                          </a:solidFill>
+                          <a:latin typeface="Arial"/>
+                          <a:ea typeface="AppleGothic"/>
+                        </a:rPr>
+                        <a:t>0.810</a:t>
+                      </a:r>
+                    </a:p>
+                  </a:txBody>
+                  <a:tcPr anchor="ctr">
+                    <a:solidFill>
+                      <a:srgbClr val="FFFFFF"/>
+                    </a:solidFill>
+                  </a:tcPr>
+                </a:tc>
+                <a:tc>
+                  <a:txBody>
+                    <a:bodyPr/>
+                    <a:lstStyle/>
+                    <a:p>
+                      <a:pPr algn="ctr"/>
+                      <a:r>
+                        <a:rPr sz="1100" b="0">
+                          <a:solidFill>
+                            <a:srgbClr val="222222"/>
+                          </a:solidFill>
+                          <a:latin typeface="Arial"/>
+                          <a:ea typeface="AppleGothic"/>
+                        </a:rPr>
+                        <a:t>0.736</a:t>
+                      </a:r>
+                    </a:p>
+                  </a:txBody>
+                  <a:tcPr anchor="ctr">
+                    <a:solidFill>
+                      <a:srgbClr val="FFFFFF"/>
+                    </a:solidFill>
+                  </a:tcPr>
+                </a:tc>
+              </a:tr>
+              <a:tr h="571500">
+                <a:tc>
+                  <a:txBody>
+                    <a:bodyPr/>
+                    <a:lstStyle/>
+                    <a:p>
                       <a:pPr algn="l"/>
                       <a:r>
-                        <a:rPr sz="1100" b="0">
-                          <a:solidFill>
-                            <a:srgbClr val="111111"/>
-                          </a:solidFill>
-                          <a:latin typeface="AppleGothic"/>
-                          <a:ea typeface="AppleGothic"/>
-                        </a:rPr>
-                        <a:t>0.468</a:t>
-                      </a:r>
-                    </a:p>
-                  </a:txBody>
-                  <a:tcPr anchor="ctr">
-                    <a:solidFill>
-                      <a:srgbClr val="FFFFFF"/>
-                    </a:solidFill>
-                  </a:tcPr>
-                </a:tc>
-                <a:tc>
-                  <a:txBody>
-                    <a:bodyPr/>
-                    <a:lstStyle/>
-                    <a:p>
-                      <a:pPr algn="ctr"/>
-                      <a:r>
-                        <a:rPr sz="1100" b="0">
-                          <a:solidFill>
-                            <a:srgbClr val="111111"/>
-                          </a:solidFill>
-                          <a:latin typeface="AppleGothic"/>
-                          <a:ea typeface="AppleGothic"/>
-                        </a:rPr>
-                        <a:t>0.762</a:t>
-                      </a:r>
-                    </a:p>
-                  </a:txBody>
-                  <a:tcPr anchor="ctr">
-                    <a:solidFill>
-                      <a:srgbClr val="FFFFFF"/>
-                    </a:solidFill>
-                  </a:tcPr>
-                </a:tc>
-                <a:tc>
-                  <a:txBody>
-                    <a:bodyPr/>
-                    <a:lstStyle/>
-                    <a:p>
-                      <a:pPr algn="ctr"/>
-                      <a:r>
-                        <a:rPr sz="1100" b="0">
-                          <a:solidFill>
-                            <a:srgbClr val="111111"/>
-                          </a:solidFill>
-                          <a:latin typeface="AppleGothic"/>
-                          <a:ea typeface="AppleGothic"/>
-                        </a:rPr>
-                        <a:t>0.468</a:t>
-                      </a:r>
-                    </a:p>
-                  </a:txBody>
-                  <a:tcPr anchor="ctr">
-                    <a:solidFill>
-                      <a:srgbClr val="FFFFFF"/>
-                    </a:solidFill>
-                  </a:tcPr>
-                </a:tc>
-              </a:tr>
-              <a:tr h="609600">
-                <a:tc>
-                  <a:txBody>
-                    <a:bodyPr/>
-                    <a:lstStyle/>
-                    <a:p>
-                      <a:pPr algn="l"/>
-                      <a:r>
                         <a:rPr sz="1100" b="1">
                           <a:solidFill>
-                            <a:srgbClr val="111111"/>
-                          </a:solidFill>
-                          <a:latin typeface="AppleGothic"/>
-                          <a:ea typeface="AppleGothic"/>
-                        </a:rPr>
-                        <a:t>무제한</a:t>
-                      </a:r>
-                    </a:p>
-                  </a:txBody>
-                  <a:tcPr anchor="ctr">
-                    <a:solidFill>
-                      <a:srgbClr val="F2F2F0"/>
-                    </a:solidFill>
-                  </a:tcPr>
-                </a:tc>
-                <a:tc>
-                  <a:txBody>
-                    <a:bodyPr/>
-                    <a:lstStyle/>
-                    <a:p>
-                      <a:pPr algn="ctr"/>
-                      <a:r>
-                        <a:rPr sz="1100" b="0">
-                          <a:solidFill>
-                            <a:srgbClr val="111111"/>
-                          </a:solidFill>
-                          <a:latin typeface="AppleGothic"/>
-                          <a:ea typeface="AppleGothic"/>
-                        </a:rPr>
-                        <a:t>0.718</a:t>
-                      </a:r>
-                    </a:p>
-                  </a:txBody>
-                  <a:tcPr anchor="ctr">
-                    <a:solidFill>
-                      <a:srgbClr val="F2F2F0"/>
-                    </a:solidFill>
-                  </a:tcPr>
-                </a:tc>
-                <a:tc>
-                  <a:txBody>
-                    <a:bodyPr/>
-                    <a:lstStyle/>
-                    <a:p>
-                      <a:pPr algn="l"/>
-                      <a:r>
-                        <a:rPr sz="1100" b="0">
-                          <a:solidFill>
-                            <a:srgbClr val="111111"/>
-                          </a:solidFill>
-                          <a:latin typeface="AppleGothic"/>
-                          <a:ea typeface="AppleGothic"/>
-                        </a:rPr>
-                        <a:t>0.788</a:t>
-                      </a:r>
-                    </a:p>
-                  </a:txBody>
-                  <a:tcPr anchor="ctr">
-                    <a:solidFill>
-                      <a:srgbClr val="F2F2F0"/>
-                    </a:solidFill>
-                  </a:tcPr>
-                </a:tc>
-                <a:tc>
-                  <a:txBody>
-                    <a:bodyPr/>
-                    <a:lstStyle/>
-                    <a:p>
-                      <a:pPr algn="l"/>
-                      <a:r>
-                        <a:rPr sz="1100" b="0">
-                          <a:solidFill>
-                            <a:srgbClr val="111111"/>
-                          </a:solidFill>
-                          <a:latin typeface="AppleGothic"/>
-                          <a:ea typeface="AppleGothic"/>
-                        </a:rPr>
-                        <a:t>0.759</a:t>
-                      </a:r>
-                    </a:p>
-                  </a:txBody>
-                  <a:tcPr anchor="ctr">
-                    <a:solidFill>
-                      <a:srgbClr val="F2F2F0"/>
-                    </a:solidFill>
-                  </a:tcPr>
-                </a:tc>
-                <a:tc>
-                  <a:txBody>
-                    <a:bodyPr/>
-                    <a:lstStyle/>
-                    <a:p>
-                      <a:pPr algn="ctr"/>
-                      <a:r>
-                        <a:rPr sz="1100" b="0">
-                          <a:solidFill>
-                            <a:srgbClr val="111111"/>
-                          </a:solidFill>
-                          <a:latin typeface="AppleGothic"/>
-                          <a:ea typeface="AppleGothic"/>
-                        </a:rPr>
-                        <a:t>0.755</a:t>
-                      </a:r>
-                    </a:p>
-                  </a:txBody>
-                  <a:tcPr anchor="ctr">
-                    <a:solidFill>
-                      <a:srgbClr val="F2F2F0"/>
-                    </a:solidFill>
-                  </a:tcPr>
-                </a:tc>
-                <a:tc>
-                  <a:txBody>
-                    <a:bodyPr/>
-                    <a:lstStyle/>
-                    <a:p>
-                      <a:pPr algn="ctr"/>
-                      <a:r>
-                        <a:rPr sz="1100" b="0">
-                          <a:solidFill>
-                            <a:srgbClr val="111111"/>
-                          </a:solidFill>
-                          <a:latin typeface="AppleGothic"/>
-                          <a:ea typeface="AppleGothic"/>
-                        </a:rPr>
-                        <a:t>0.718</a:t>
-                      </a:r>
-                    </a:p>
-                  </a:txBody>
-                  <a:tcPr anchor="ctr">
-                    <a:solidFill>
-                      <a:srgbClr val="F2F2F0"/>
-                    </a:solidFill>
-                  </a:tcPr>
-                </a:tc>
-              </a:tr>
-              <a:tr h="609600">
-                <a:tc>
-                  <a:txBody>
-                    <a:bodyPr/>
-                    <a:lstStyle/>
-                    <a:p>
-                      <a:pPr algn="l"/>
+                            <a:srgbClr val="0072B2"/>
+                          </a:solidFill>
+                          <a:latin typeface="Arial"/>
+                          <a:ea typeface="AppleGothic"/>
+                        </a:rPr>
+                        <a:t>SAAR</a:t>
+                      </a:r>
+                    </a:p>
+                  </a:txBody>
+                  <a:tcPr anchor="ctr">
+                    <a:solidFill>
+                      <a:srgbClr val="E8F1F8"/>
+                    </a:solidFill>
+                  </a:tcPr>
+                </a:tc>
+                <a:tc>
+                  <a:txBody>
+                    <a:bodyPr/>
+                    <a:lstStyle/>
+                    <a:p>
+                      <a:pPr algn="ctr"/>
                       <a:r>
                         <a:rPr sz="1100" b="1">
                           <a:solidFill>
-                            <a:srgbClr val="111111"/>
-                          </a:solidFill>
-                          <a:latin typeface="AppleGothic"/>
-                          <a:ea typeface="AppleGothic"/>
-                        </a:rPr>
-                        <a:t>거리보정</a:t>
-                      </a:r>
-                    </a:p>
-                  </a:txBody>
-                  <a:tcPr anchor="ctr">
-                    <a:solidFill>
-                      <a:srgbClr val="FFFFFF"/>
-                    </a:solidFill>
-                  </a:tcPr>
-                </a:tc>
-                <a:tc>
-                  <a:txBody>
-                    <a:bodyPr/>
-                    <a:lstStyle/>
-                    <a:p>
-                      <a:pPr algn="ctr"/>
-                      <a:r>
-                        <a:rPr sz="1100" b="0">
-                          <a:solidFill>
-                            <a:srgbClr val="111111"/>
-                          </a:solidFill>
-                          <a:latin typeface="AppleGothic"/>
-                          <a:ea typeface="AppleGothic"/>
-                        </a:rPr>
-                        <a:t>0.894</a:t>
-                      </a:r>
-                    </a:p>
-                  </a:txBody>
-                  <a:tcPr anchor="ctr">
-                    <a:solidFill>
-                      <a:srgbClr val="FFFFFF"/>
-                    </a:solidFill>
-                  </a:tcPr>
-                </a:tc>
-                <a:tc>
-                  <a:txBody>
-                    <a:bodyPr/>
-                    <a:lstStyle/>
-                    <a:p>
-                      <a:pPr algn="l"/>
-                      <a:r>
-                        <a:rPr sz="1100" b="0">
-                          <a:solidFill>
-                            <a:srgbClr val="111111"/>
-                          </a:solidFill>
-                          <a:latin typeface="AppleGothic"/>
-                          <a:ea typeface="AppleGothic"/>
-                        </a:rPr>
-                        <a:t>0.800</a:t>
-                      </a:r>
-                    </a:p>
-                  </a:txBody>
-                  <a:tcPr anchor="ctr">
-                    <a:solidFill>
-                      <a:srgbClr val="FFFFFF"/>
-                    </a:solidFill>
-                  </a:tcPr>
-                </a:tc>
-                <a:tc>
-                  <a:txBody>
-                    <a:bodyPr/>
-                    <a:lstStyle/>
-                    <a:p>
-                      <a:pPr algn="l"/>
-                      <a:r>
-                        <a:rPr sz="1100" b="0">
-                          <a:solidFill>
-                            <a:srgbClr val="111111"/>
-                          </a:solidFill>
-                          <a:latin typeface="AppleGothic"/>
-                          <a:ea typeface="AppleGothic"/>
-                        </a:rPr>
-                        <a:t>0.736</a:t>
-                      </a:r>
-                    </a:p>
-                  </a:txBody>
-                  <a:tcPr anchor="ctr">
-                    <a:solidFill>
-                      <a:srgbClr val="FFFFFF"/>
-                    </a:solidFill>
-                  </a:tcPr>
-                </a:tc>
-                <a:tc>
-                  <a:txBody>
-                    <a:bodyPr/>
-                    <a:lstStyle/>
-                    <a:p>
-                      <a:pPr algn="ctr"/>
-                      <a:r>
-                        <a:rPr sz="1100" b="0">
-                          <a:solidFill>
-                            <a:srgbClr val="111111"/>
-                          </a:solidFill>
-                          <a:latin typeface="AppleGothic"/>
-                          <a:ea typeface="AppleGothic"/>
-                        </a:rPr>
-                        <a:t>0.810</a:t>
-                      </a:r>
-                    </a:p>
-                  </a:txBody>
-                  <a:tcPr anchor="ctr">
-                    <a:solidFill>
-                      <a:srgbClr val="FFFFFF"/>
-                    </a:solidFill>
-                  </a:tcPr>
-                </a:tc>
-                <a:tc>
-                  <a:txBody>
-                    <a:bodyPr/>
-                    <a:lstStyle/>
-                    <a:p>
-                      <a:pPr algn="ctr"/>
-                      <a:r>
-                        <a:rPr sz="1100" b="0">
-                          <a:solidFill>
-                            <a:srgbClr val="111111"/>
-                          </a:solidFill>
-                          <a:latin typeface="AppleGothic"/>
-                          <a:ea typeface="AppleGothic"/>
-                        </a:rPr>
-                        <a:t>0.736</a:t>
-                      </a:r>
-                    </a:p>
-                  </a:txBody>
-                  <a:tcPr anchor="ctr">
-                    <a:solidFill>
-                      <a:srgbClr val="FFFFFF"/>
-                    </a:solidFill>
-                  </a:tcPr>
-                </a:tc>
-              </a:tr>
-              <a:tr h="609600">
-                <a:tc>
-                  <a:txBody>
-                    <a:bodyPr/>
-                    <a:lstStyle/>
-                    <a:p>
-                      <a:pPr algn="l"/>
+                            <a:srgbClr val="0072B2"/>
+                          </a:solidFill>
+                          <a:latin typeface="Arial"/>
+                          <a:ea typeface="AppleGothic"/>
+                        </a:rPr>
+                        <a:t>0.934</a:t>
+                      </a:r>
+                    </a:p>
+                  </a:txBody>
+                  <a:tcPr anchor="ctr">
+                    <a:solidFill>
+                      <a:srgbClr val="E8F1F8"/>
+                    </a:solidFill>
+                  </a:tcPr>
+                </a:tc>
+                <a:tc>
+                  <a:txBody>
+                    <a:bodyPr/>
+                    <a:lstStyle/>
+                    <a:p>
+                      <a:pPr algn="ctr"/>
                       <a:r>
                         <a:rPr sz="1100" b="1">
                           <a:solidFill>
-                            <a:srgbClr val="0A5C5C"/>
-                          </a:solidFill>
-                          <a:latin typeface="AppleGothic"/>
-                          <a:ea typeface="AppleGothic"/>
-                        </a:rPr>
-                        <a:t>SAAR</a:t>
-                      </a:r>
-                    </a:p>
-                  </a:txBody>
-                  <a:tcPr anchor="ctr">
-                    <a:solidFill>
-                      <a:srgbClr val="DCEBEB"/>
+                            <a:srgbClr val="0072B2"/>
+                          </a:solidFill>
+                          <a:latin typeface="Arial"/>
+                          <a:ea typeface="AppleGothic"/>
+                        </a:rPr>
+                        <a:t>0.842</a:t>
+                      </a:r>
+                    </a:p>
+                  </a:txBody>
+                  <a:tcPr anchor="ctr">
+                    <a:solidFill>
+                      <a:srgbClr val="E8F1F8"/>
                     </a:solidFill>
                   </a:tcPr>
                 </a:tc>
@@ -7648,33 +8727,33 @@
                       <a:r>
                         <a:rPr sz="1100" b="1">
                           <a:solidFill>
-                            <a:srgbClr val="0A5C5C"/>
-                          </a:solidFill>
-                          <a:latin typeface="AppleGothic"/>
-                          <a:ea typeface="AppleGothic"/>
-                        </a:rPr>
-                        <a:t>0.934</a:t>
-                      </a:r>
-                    </a:p>
-                  </a:txBody>
-                  <a:tcPr anchor="ctr">
-                    <a:solidFill>
-                      <a:srgbClr val="DCEBEB"/>
-                    </a:solidFill>
-                  </a:tcPr>
-                </a:tc>
-                <a:tc>
-                  <a:txBody>
-                    <a:bodyPr/>
-                    <a:lstStyle/>
-                    <a:p>
-                      <a:pPr algn="l"/>
+                            <a:srgbClr val="0072B2"/>
+                          </a:solidFill>
+                          <a:latin typeface="Arial"/>
+                          <a:ea typeface="AppleGothic"/>
+                        </a:rPr>
+                        <a:t>0.751</a:t>
+                      </a:r>
+                    </a:p>
+                  </a:txBody>
+                  <a:tcPr anchor="ctr">
+                    <a:solidFill>
+                      <a:srgbClr val="E8F1F8"/>
+                    </a:solidFill>
+                  </a:tcPr>
+                </a:tc>
+                <a:tc>
+                  <a:txBody>
+                    <a:bodyPr/>
+                    <a:lstStyle/>
+                    <a:p>
+                      <a:pPr algn="ctr"/>
                       <a:r>
                         <a:rPr sz="1100" b="1">
                           <a:solidFill>
-                            <a:srgbClr val="0A5C5C"/>
-                          </a:solidFill>
-                          <a:latin typeface="AppleGothic"/>
+                            <a:srgbClr val="0072B2"/>
+                          </a:solidFill>
+                          <a:latin typeface="Arial"/>
                           <a:ea typeface="AppleGothic"/>
                         </a:rPr>
                         <a:t>0.842</a:t>
@@ -7683,22 +8762,22 @@
                   </a:txBody>
                   <a:tcPr anchor="ctr">
                     <a:solidFill>
-                      <a:srgbClr val="DCEBEB"/>
-                    </a:solidFill>
-                  </a:tcPr>
-                </a:tc>
-                <a:tc>
-                  <a:txBody>
-                    <a:bodyPr/>
-                    <a:lstStyle/>
-                    <a:p>
-                      <a:pPr algn="l"/>
+                      <a:srgbClr val="E8F1F8"/>
+                    </a:solidFill>
+                  </a:tcPr>
+                </a:tc>
+                <a:tc>
+                  <a:txBody>
+                    <a:bodyPr/>
+                    <a:lstStyle/>
+                    <a:p>
+                      <a:pPr algn="ctr"/>
                       <a:r>
                         <a:rPr sz="1100" b="1">
                           <a:solidFill>
-                            <a:srgbClr val="0A5C5C"/>
-                          </a:solidFill>
-                          <a:latin typeface="AppleGothic"/>
+                            <a:srgbClr val="0072B2"/>
+                          </a:solidFill>
+                          <a:latin typeface="Arial"/>
                           <a:ea typeface="AppleGothic"/>
                         </a:rPr>
                         <a:t>0.751</a:t>
@@ -7707,55 +8786,7 @@
                   </a:txBody>
                   <a:tcPr anchor="ctr">
                     <a:solidFill>
-                      <a:srgbClr val="DCEBEB"/>
-                    </a:solidFill>
-                  </a:tcPr>
-                </a:tc>
-                <a:tc>
-                  <a:txBody>
-                    <a:bodyPr/>
-                    <a:lstStyle/>
-                    <a:p>
-                      <a:pPr algn="ctr"/>
-                      <a:r>
-                        <a:rPr sz="1100" b="1">
-                          <a:solidFill>
-                            <a:srgbClr val="0A5C5C"/>
-                          </a:solidFill>
-                          <a:latin typeface="AppleGothic"/>
-                          <a:ea typeface="AppleGothic"/>
-                        </a:rPr>
-                        <a:t>0.842</a:t>
-                      </a:r>
-                    </a:p>
-                  </a:txBody>
-                  <a:tcPr anchor="ctr">
-                    <a:solidFill>
-                      <a:srgbClr val="DCEBEB"/>
-                    </a:solidFill>
-                  </a:tcPr>
-                </a:tc>
-                <a:tc>
-                  <a:txBody>
-                    <a:bodyPr/>
-                    <a:lstStyle/>
-                    <a:p>
-                      <a:pPr algn="ctr"/>
-                      <a:r>
-                        <a:rPr sz="1100" b="1">
-                          <a:solidFill>
-                            <a:srgbClr val="0A5C5C"/>
-                          </a:solidFill>
-                          <a:latin typeface="AppleGothic"/>
-                          <a:ea typeface="AppleGothic"/>
-                        </a:rPr>
-                        <a:t>0.751</a:t>
-                      </a:r>
-                    </a:p>
-                  </a:txBody>
-                  <a:tcPr anchor="ctr">
-                    <a:solidFill>
-                      <a:srgbClr val="DCEBEB"/>
+                      <a:srgbClr val="E8F1F8"/>
                     </a:solidFill>
                   </a:tcPr>
                 </a:tc>
@@ -7773,7 +8804,7 @@
         <p:spPr>
           <a:xfrm>
             <a:off x="7239000" y="4381500"/>
-            <a:ext cx="4476750" cy="476250"/>
+            <a:ext cx="4476750" cy="381000"/>
           </a:xfrm>
           <a:prstGeom prst="rect">
             <a:avLst/>
@@ -7788,14 +8819,14 @@
           <a:p>
             <a:pPr algn="l"/>
             <a:r>
-              <a:rPr sz="1100" b="0">
+              <a:rPr sz="1200" b="0">
                 <a:solidFill>
-                  <a:srgbClr val="555555"/>
+                  <a:srgbClr val="666666"/>
                 </a:solidFill>
-                <a:latin typeface="AppleGothic"/>
+                <a:latin typeface="Arial"/>
                 <a:ea typeface="AppleGothic"/>
               </a:rPr>
-              <a:t>최저(MICH)를 살린 tradeoff  ·  확증 cohort 별도</a:t>
+              <a:t>최저(MICH)를 살린 tradeoff</a:t>
             </a:r>
           </a:p>
         </p:txBody>
@@ -7816,7 +8847,7 @@
           </a:prstGeom>
           <a:ln w="9525">
             <a:solidFill>
-              <a:srgbClr val="D0D0D0"/>
+              <a:srgbClr val="E8E8E8"/>
             </a:solidFill>
           </a:ln>
         </p:spPr>
@@ -7861,9 +8892,9 @@
             <a:r>
               <a:rPr sz="900" b="0">
                 <a:solidFill>
-                  <a:srgbClr val="555555"/>
+                  <a:srgbClr val="666666"/>
                 </a:solidFill>
-                <a:latin typeface="AppleGothic"/>
+                <a:latin typeface="Arial"/>
                 <a:ea typeface="AppleGothic"/>
               </a:rPr>
               <a:t>SPS Lab  ·  Assumption-Aware Extrapolation  ·  SAAR</a:t>
@@ -7897,9 +8928,9 @@
             <a:r>
               <a:rPr sz="1000" b="1">
                 <a:solidFill>
-                  <a:srgbClr val="555555"/>
+                  <a:srgbClr val="666666"/>
                 </a:solidFill>
-                <a:latin typeface="AppleGothic"/>
+                <a:latin typeface="Arial"/>
                 <a:ea typeface="AppleGothic"/>
               </a:rPr>
               <a:t>6/11</a:t>
@@ -7977,13 +9008,13 @@
         <p:spPr>
           <a:xfrm>
             <a:off x="0" y="0"/>
-            <a:ext cx="12192000" cy="38100"/>
+            <a:ext cx="12192000" cy="28575"/>
           </a:xfrm>
           <a:prstGeom prst="rect">
             <a:avLst/>
           </a:prstGeom>
           <a:solidFill>
-            <a:srgbClr val="0A5C5C"/>
+            <a:srgbClr val="0072B2"/>
           </a:solidFill>
           <a:ln>
             <a:noFill/>
@@ -8020,7 +9051,7 @@
         <p:spPr>
           <a:xfrm>
             <a:off x="457200" y="209550"/>
-            <a:ext cx="11239500" cy="323850"/>
+            <a:ext cx="11239500" cy="304800"/>
           </a:xfrm>
           <a:prstGeom prst="rect">
             <a:avLst/>
@@ -8037,9 +9068,9 @@
             <a:r>
               <a:rPr sz="2200" b="1">
                 <a:solidFill>
-                  <a:srgbClr val="111111"/>
+                  <a:srgbClr val="222222"/>
                 </a:solidFill>
-                <a:latin typeface="AppleGothic"/>
+                <a:latin typeface="Arial"/>
                 <a:ea typeface="AppleGothic"/>
               </a:rPr>
               <a:t>Ablation</a:t>
@@ -8055,7 +9086,7 @@
         </p:nvSpPr>
         <p:spPr>
           <a:xfrm>
-            <a:off x="457200" y="533400"/>
+            <a:off x="457200" y="514350"/>
             <a:ext cx="11239500" cy="190500"/>
           </a:xfrm>
           <a:prstGeom prst="rect">
@@ -8073,12 +9104,12 @@
             <a:r>
               <a:rPr sz="1200" b="0">
                 <a:solidFill>
-                  <a:srgbClr val="555555"/>
+                  <a:srgbClr val="666666"/>
                 </a:solidFill>
-                <a:latin typeface="AppleGothic"/>
+                <a:latin typeface="Arial"/>
                 <a:ea typeface="AppleGothic"/>
               </a:rPr>
-              <a:t>고정 경계 → SAAR 이동  ·  평균–최저 tradeoff</a:t>
+              <a:t>(a) Fixed→SAAR  ·  (b) mean–min tradeoff</a:t>
             </a:r>
           </a:p>
         </p:txBody>
@@ -8099,8 +9130,8 @@
         </p:blipFill>
         <p:spPr>
           <a:xfrm>
-            <a:off x="285750" y="809625"/>
-            <a:ext cx="11620500" cy="5238750"/>
+            <a:off x="476250" y="904875"/>
+            <a:ext cx="11239500" cy="4953000"/>
           </a:xfrm>
           <a:prstGeom prst="rect">
             <a:avLst/>
@@ -8123,7 +9154,7 @@
           </a:prstGeom>
           <a:ln w="9525">
             <a:solidFill>
-              <a:srgbClr val="D0D0D0"/>
+              <a:srgbClr val="E8E8E8"/>
             </a:solidFill>
           </a:ln>
         </p:spPr>
@@ -8168,9 +9199,9 @@
             <a:r>
               <a:rPr sz="900" b="0">
                 <a:solidFill>
-                  <a:srgbClr val="555555"/>
+                  <a:srgbClr val="666666"/>
                 </a:solidFill>
-                <a:latin typeface="AppleGothic"/>
+                <a:latin typeface="Arial"/>
                 <a:ea typeface="AppleGothic"/>
               </a:rPr>
               <a:t>SPS Lab  ·  Assumption-Aware Extrapolation  ·  SAAR</a:t>
@@ -8204,9 +9235,9 @@
             <a:r>
               <a:rPr sz="1000" b="1">
                 <a:solidFill>
-                  <a:srgbClr val="555555"/>
+                  <a:srgbClr val="666666"/>
                 </a:solidFill>
-                <a:latin typeface="AppleGothic"/>
+                <a:latin typeface="Arial"/>
                 <a:ea typeface="AppleGothic"/>
               </a:rPr>
               <a:t>7/11</a:t>
@@ -8284,13 +9315,13 @@
         <p:spPr>
           <a:xfrm>
             <a:off x="0" y="0"/>
-            <a:ext cx="12192000" cy="38100"/>
+            <a:ext cx="12192000" cy="28575"/>
           </a:xfrm>
           <a:prstGeom prst="rect">
             <a:avLst/>
           </a:prstGeom>
           <a:solidFill>
-            <a:srgbClr val="0A5C5C"/>
+            <a:srgbClr val="0072B2"/>
           </a:solidFill>
           <a:ln>
             <a:noFill/>
@@ -8327,7 +9358,7 @@
         <p:spPr>
           <a:xfrm>
             <a:off x="457200" y="209550"/>
-            <a:ext cx="11239500" cy="323850"/>
+            <a:ext cx="11239500" cy="304800"/>
           </a:xfrm>
           <a:prstGeom prst="rect">
             <a:avLst/>
@@ -8344,9 +9375,9 @@
             <a:r>
               <a:rPr sz="2200" b="1">
                 <a:solidFill>
-                  <a:srgbClr val="111111"/>
+                  <a:srgbClr val="222222"/>
                 </a:solidFill>
-                <a:latin typeface="AppleGothic"/>
+                <a:latin typeface="Arial"/>
                 <a:ea typeface="AppleGothic"/>
               </a:rPr>
               <a:t>비교</a:t>
@@ -8362,7 +9393,7 @@
         </p:nvSpPr>
         <p:spPr>
           <a:xfrm>
-            <a:off x="457200" y="533400"/>
+            <a:off x="457200" y="514350"/>
             <a:ext cx="11239500" cy="190500"/>
           </a:xfrm>
           <a:prstGeom prst="rect">
@@ -8380,12 +9411,12 @@
             <a:r>
               <a:rPr sz="1200" b="0">
                 <a:solidFill>
-                  <a:srgbClr val="555555"/>
+                  <a:srgbClr val="666666"/>
                 </a:solidFill>
-                <a:latin typeface="AppleGothic"/>
+                <a:latin typeface="Arial"/>
                 <a:ea typeface="AppleGothic"/>
               </a:rPr>
-              <a:t>(a) heatmap  ·  (b) SAAR vs TabPFN vs others  ·  아래는 동일 수치 표</a:t>
+              <a:t>(a) heatmap  ·  (b) SAAR vs TabPFN vs others</a:t>
             </a:r>
           </a:p>
         </p:txBody>
@@ -8455,7 +9486,7 @@
                           <a:solidFill>
                             <a:srgbClr val="FFFFFF"/>
                           </a:solidFill>
-                          <a:latin typeface="AppleGothic"/>
+                          <a:latin typeface="Arial"/>
                           <a:ea typeface="AppleGothic"/>
                         </a:rPr>
                         <a:t>Dataset</a:t>
@@ -8464,7 +9495,7 @@
                   </a:txBody>
                   <a:tcPr anchor="ctr">
                     <a:solidFill>
-                      <a:srgbClr val="111111"/>
+                      <a:srgbClr val="222222"/>
                     </a:solidFill>
                   </a:tcPr>
                 </a:tc>
@@ -8479,7 +9510,7 @@
                           <a:solidFill>
                             <a:srgbClr val="FFFFFF"/>
                           </a:solidFill>
-                          <a:latin typeface="AppleGothic"/>
+                          <a:latin typeface="Arial"/>
                           <a:ea typeface="AppleGothic"/>
                         </a:rPr>
                         <a:t>SAAR</a:t>
@@ -8488,7 +9519,7 @@
                   </a:txBody>
                   <a:tcPr anchor="ctr">
                     <a:solidFill>
-                      <a:srgbClr val="111111"/>
+                      <a:srgbClr val="222222"/>
                     </a:solidFill>
                   </a:tcPr>
                 </a:tc>
@@ -8503,7 +9534,7 @@
                           <a:solidFill>
                             <a:srgbClr val="FFFFFF"/>
                           </a:solidFill>
-                          <a:latin typeface="AppleGothic"/>
+                          <a:latin typeface="Arial"/>
                           <a:ea typeface="AppleGothic"/>
                         </a:rPr>
                         <a:t>V-REx</a:t>
@@ -8512,7 +9543,7 @@
                   </a:txBody>
                   <a:tcPr anchor="ctr">
                     <a:solidFill>
-                      <a:srgbClr val="111111"/>
+                      <a:srgbClr val="222222"/>
                     </a:solidFill>
                   </a:tcPr>
                 </a:tc>
@@ -8527,7 +9558,7 @@
                           <a:solidFill>
                             <a:srgbClr val="FFFFFF"/>
                           </a:solidFill>
-                          <a:latin typeface="AppleGothic"/>
+                          <a:latin typeface="Arial"/>
                           <a:ea typeface="AppleGothic"/>
                         </a:rPr>
                         <a:t>G-DRO</a:t>
@@ -8536,7 +9567,7 @@
                   </a:txBody>
                   <a:tcPr anchor="ctr">
                     <a:solidFill>
-                      <a:srgbClr val="111111"/>
+                      <a:srgbClr val="222222"/>
                     </a:solidFill>
                   </a:tcPr>
                 </a:tc>
@@ -8551,7 +9582,7 @@
                           <a:solidFill>
                             <a:srgbClr val="FFFFFF"/>
                           </a:solidFill>
-                          <a:latin typeface="AppleGothic"/>
+                          <a:latin typeface="Arial"/>
                           <a:ea typeface="AppleGothic"/>
                         </a:rPr>
                         <a:t>Mono</a:t>
@@ -8560,7 +9591,7 @@
                   </a:txBody>
                   <a:tcPr anchor="ctr">
                     <a:solidFill>
-                      <a:srgbClr val="111111"/>
+                      <a:srgbClr val="222222"/>
                     </a:solidFill>
                   </a:tcPr>
                 </a:tc>
@@ -8575,7 +9606,7 @@
                           <a:solidFill>
                             <a:srgbClr val="FFFFFF"/>
                           </a:solidFill>
-                          <a:latin typeface="AppleGothic"/>
+                          <a:latin typeface="Arial"/>
                           <a:ea typeface="AppleGothic"/>
                         </a:rPr>
                         <a:t>LinRBF</a:t>
@@ -8584,7 +9615,7 @@
                   </a:txBody>
                   <a:tcPr anchor="ctr">
                     <a:solidFill>
-                      <a:srgbClr val="111111"/>
+                      <a:srgbClr val="222222"/>
                     </a:solidFill>
                   </a:tcPr>
                 </a:tc>
@@ -8599,7 +9630,7 @@
                           <a:solidFill>
                             <a:srgbClr val="FFFFFF"/>
                           </a:solidFill>
-                          <a:latin typeface="AppleGothic"/>
+                          <a:latin typeface="Arial"/>
                           <a:ea typeface="AppleGothic"/>
                         </a:rPr>
                         <a:t>Engr.</a:t>
@@ -8608,7 +9639,7 @@
                   </a:txBody>
                   <a:tcPr anchor="ctr">
                     <a:solidFill>
-                      <a:srgbClr val="111111"/>
+                      <a:srgbClr val="222222"/>
                     </a:solidFill>
                   </a:tcPr>
                 </a:tc>
@@ -8623,7 +9654,7 @@
                           <a:solidFill>
                             <a:srgbClr val="FFFFFF"/>
                           </a:solidFill>
-                          <a:latin typeface="AppleGothic"/>
+                          <a:latin typeface="Arial"/>
                           <a:ea typeface="AppleGothic"/>
                         </a:rPr>
                         <a:t>GP</a:t>
@@ -8632,7 +9663,7 @@
                   </a:txBody>
                   <a:tcPr anchor="ctr">
                     <a:solidFill>
-                      <a:srgbClr val="111111"/>
+                      <a:srgbClr val="222222"/>
                     </a:solidFill>
                   </a:tcPr>
                 </a:tc>
@@ -8647,7 +9678,7 @@
                           <a:solidFill>
                             <a:srgbClr val="FFFFFF"/>
                           </a:solidFill>
-                          <a:latin typeface="AppleGothic"/>
+                          <a:latin typeface="Arial"/>
                           <a:ea typeface="AppleGothic"/>
                         </a:rPr>
                         <a:t>TabPFN</a:t>
@@ -8656,7 +9687,7 @@
                   </a:txBody>
                   <a:tcPr anchor="ctr">
                     <a:solidFill>
-                      <a:srgbClr val="111111"/>
+                      <a:srgbClr val="222222"/>
                     </a:solidFill>
                   </a:tcPr>
                 </a:tc>
@@ -8671,9 +9702,9 @@
                       <a:r>
                         <a:rPr sz="900" b="1">
                           <a:solidFill>
-                            <a:srgbClr val="111111"/>
-                          </a:solidFill>
-                          <a:latin typeface="AppleGothic"/>
+                            <a:srgbClr val="222222"/>
+                          </a:solidFill>
+                          <a:latin typeface="Arial"/>
                           <a:ea typeface="AppleGothic"/>
                         </a:rPr>
                         <a:t>HUST</a:t>
@@ -8695,9 +9726,9 @@
                       <a:r>
                         <a:rPr sz="900" b="0">
                           <a:solidFill>
-                            <a:srgbClr val="111111"/>
-                          </a:solidFill>
-                          <a:latin typeface="AppleGothic"/>
+                            <a:srgbClr val="222222"/>
+                          </a:solidFill>
+                          <a:latin typeface="Arial"/>
                           <a:ea typeface="AppleGothic"/>
                         </a:rPr>
                         <a:t>0.958</a:t>
@@ -8715,13 +9746,13 @@
                     <a:bodyPr/>
                     <a:lstStyle/>
                     <a:p>
-                      <a:pPr algn="l"/>
+                      <a:pPr algn="ctr"/>
                       <a:r>
                         <a:rPr sz="900" b="0">
                           <a:solidFill>
-                            <a:srgbClr val="111111"/>
-                          </a:solidFill>
-                          <a:latin typeface="AppleGothic"/>
+                            <a:srgbClr val="222222"/>
+                          </a:solidFill>
+                          <a:latin typeface="Arial"/>
                           <a:ea typeface="AppleGothic"/>
                         </a:rPr>
                         <a:t>0.809</a:t>
@@ -8739,13 +9770,13 @@
                     <a:bodyPr/>
                     <a:lstStyle/>
                     <a:p>
-                      <a:pPr algn="l"/>
+                      <a:pPr algn="ctr"/>
                       <a:r>
                         <a:rPr sz="900" b="0">
                           <a:solidFill>
-                            <a:srgbClr val="111111"/>
-                          </a:solidFill>
-                          <a:latin typeface="AppleGothic"/>
+                            <a:srgbClr val="222222"/>
+                          </a:solidFill>
+                          <a:latin typeface="Arial"/>
                           <a:ea typeface="AppleGothic"/>
                         </a:rPr>
                         <a:t>0.934</a:t>
@@ -8767,9 +9798,9 @@
                       <a:r>
                         <a:rPr sz="900" b="0">
                           <a:solidFill>
-                            <a:srgbClr val="111111"/>
-                          </a:solidFill>
-                          <a:latin typeface="AppleGothic"/>
+                            <a:srgbClr val="222222"/>
+                          </a:solidFill>
+                          <a:latin typeface="Arial"/>
                           <a:ea typeface="AppleGothic"/>
                         </a:rPr>
                         <a:t>0.822</a:t>
@@ -8791,9 +9822,9 @@
                       <a:r>
                         <a:rPr sz="900" b="0">
                           <a:solidFill>
-                            <a:srgbClr val="111111"/>
-                          </a:solidFill>
-                          <a:latin typeface="AppleGothic"/>
+                            <a:srgbClr val="222222"/>
+                          </a:solidFill>
+                          <a:latin typeface="Arial"/>
                           <a:ea typeface="AppleGothic"/>
                         </a:rPr>
                         <a:t>0.710</a:t>
@@ -8815,9 +9846,9 @@
                       <a:r>
                         <a:rPr sz="900" b="0">
                           <a:solidFill>
-                            <a:srgbClr val="111111"/>
-                          </a:solidFill>
-                          <a:latin typeface="AppleGothic"/>
+                            <a:srgbClr val="222222"/>
+                          </a:solidFill>
+                          <a:latin typeface="Arial"/>
                           <a:ea typeface="AppleGothic"/>
                         </a:rPr>
                         <a:t>0.878</a:t>
@@ -8839,9 +9870,9 @@
                       <a:r>
                         <a:rPr sz="900" b="0">
                           <a:solidFill>
-                            <a:srgbClr val="111111"/>
-                          </a:solidFill>
-                          <a:latin typeface="AppleGothic"/>
+                            <a:srgbClr val="222222"/>
+                          </a:solidFill>
+                          <a:latin typeface="Arial"/>
                           <a:ea typeface="AppleGothic"/>
                         </a:rPr>
                         <a:t>-0.32</a:t>
@@ -8863,9 +9894,9 @@
                       <a:r>
                         <a:rPr sz="900" b="0">
                           <a:solidFill>
-                            <a:srgbClr val="111111"/>
-                          </a:solidFill>
-                          <a:latin typeface="AppleGothic"/>
+                            <a:srgbClr val="222222"/>
+                          </a:solidFill>
+                          <a:latin typeface="Arial"/>
                           <a:ea typeface="AppleGothic"/>
                         </a:rPr>
                         <a:t>0.218</a:t>
@@ -8889,9 +9920,9 @@
                       <a:r>
                         <a:rPr sz="900" b="1">
                           <a:solidFill>
-                            <a:srgbClr val="111111"/>
-                          </a:solidFill>
-                          <a:latin typeface="AppleGothic"/>
+                            <a:srgbClr val="222222"/>
+                          </a:solidFill>
+                          <a:latin typeface="Arial"/>
                           <a:ea typeface="AppleGothic"/>
                         </a:rPr>
                         <a:t>Virkler</a:t>
@@ -8900,7 +9931,7 @@
                   </a:txBody>
                   <a:tcPr anchor="ctr">
                     <a:solidFill>
-                      <a:srgbClr val="F2F2F0"/>
+                      <a:srgbClr val="F5F5F5"/>
                     </a:solidFill>
                   </a:tcPr>
                 </a:tc>
@@ -8913,9 +9944,9 @@
                       <a:r>
                         <a:rPr sz="900" b="0">
                           <a:solidFill>
-                            <a:srgbClr val="111111"/>
-                          </a:solidFill>
-                          <a:latin typeface="AppleGothic"/>
+                            <a:srgbClr val="222222"/>
+                          </a:solidFill>
+                          <a:latin typeface="Arial"/>
                           <a:ea typeface="AppleGothic"/>
                         </a:rPr>
                         <a:t>0.888</a:t>
@@ -8924,22 +9955,22 @@
                   </a:txBody>
                   <a:tcPr anchor="ctr">
                     <a:solidFill>
-                      <a:srgbClr val="F2F2F0"/>
-                    </a:solidFill>
-                  </a:tcPr>
-                </a:tc>
-                <a:tc>
-                  <a:txBody>
-                    <a:bodyPr/>
-                    <a:lstStyle/>
-                    <a:p>
-                      <a:pPr algn="l"/>
+                      <a:srgbClr val="F5F5F5"/>
+                    </a:solidFill>
+                  </a:tcPr>
+                </a:tc>
+                <a:tc>
+                  <a:txBody>
+                    <a:bodyPr/>
+                    <a:lstStyle/>
+                    <a:p>
+                      <a:pPr algn="ctr"/>
                       <a:r>
                         <a:rPr sz="900" b="0">
                           <a:solidFill>
-                            <a:srgbClr val="111111"/>
-                          </a:solidFill>
-                          <a:latin typeface="AppleGothic"/>
+                            <a:srgbClr val="222222"/>
+                          </a:solidFill>
+                          <a:latin typeface="Arial"/>
                           <a:ea typeface="AppleGothic"/>
                         </a:rPr>
                         <a:t>0.583</a:t>
@@ -8948,22 +9979,22 @@
                   </a:txBody>
                   <a:tcPr anchor="ctr">
                     <a:solidFill>
-                      <a:srgbClr val="F2F2F0"/>
-                    </a:solidFill>
-                  </a:tcPr>
-                </a:tc>
-                <a:tc>
-                  <a:txBody>
-                    <a:bodyPr/>
-                    <a:lstStyle/>
-                    <a:p>
-                      <a:pPr algn="l"/>
+                      <a:srgbClr val="F5F5F5"/>
+                    </a:solidFill>
+                  </a:tcPr>
+                </a:tc>
+                <a:tc>
+                  <a:txBody>
+                    <a:bodyPr/>
+                    <a:lstStyle/>
+                    <a:p>
+                      <a:pPr algn="ctr"/>
                       <a:r>
                         <a:rPr sz="900" b="0">
                           <a:solidFill>
-                            <a:srgbClr val="111111"/>
-                          </a:solidFill>
-                          <a:latin typeface="AppleGothic"/>
+                            <a:srgbClr val="222222"/>
+                          </a:solidFill>
+                          <a:latin typeface="Arial"/>
                           <a:ea typeface="AppleGothic"/>
                         </a:rPr>
                         <a:t>0.554</a:t>
@@ -8972,7 +10003,7 @@
                   </a:txBody>
                   <a:tcPr anchor="ctr">
                     <a:solidFill>
-                      <a:srgbClr val="F2F2F0"/>
+                      <a:srgbClr val="F5F5F5"/>
                     </a:solidFill>
                   </a:tcPr>
                 </a:tc>
@@ -8985,9 +10016,9 @@
                       <a:r>
                         <a:rPr sz="900" b="0">
                           <a:solidFill>
-                            <a:srgbClr val="111111"/>
-                          </a:solidFill>
-                          <a:latin typeface="AppleGothic"/>
+                            <a:srgbClr val="222222"/>
+                          </a:solidFill>
+                          <a:latin typeface="Arial"/>
                           <a:ea typeface="AppleGothic"/>
                         </a:rPr>
                         <a:t>0.565</a:t>
@@ -8996,7 +10027,7 @@
                   </a:txBody>
                   <a:tcPr anchor="ctr">
                     <a:solidFill>
-                      <a:srgbClr val="F2F2F0"/>
+                      <a:srgbClr val="F5F5F5"/>
                     </a:solidFill>
                   </a:tcPr>
                 </a:tc>
@@ -9009,9 +10040,9 @@
                       <a:r>
                         <a:rPr sz="900" b="0">
                           <a:solidFill>
-                            <a:srgbClr val="111111"/>
-                          </a:solidFill>
-                          <a:latin typeface="AppleGothic"/>
+                            <a:srgbClr val="222222"/>
+                          </a:solidFill>
+                          <a:latin typeface="Arial"/>
                           <a:ea typeface="AppleGothic"/>
                         </a:rPr>
                         <a:t>0.805</a:t>
@@ -9020,7 +10051,7 @@
                   </a:txBody>
                   <a:tcPr anchor="ctr">
                     <a:solidFill>
-                      <a:srgbClr val="F2F2F0"/>
+                      <a:srgbClr val="F5F5F5"/>
                     </a:solidFill>
                   </a:tcPr>
                 </a:tc>
@@ -9033,9 +10064,9 @@
                       <a:r>
                         <a:rPr sz="900" b="0">
                           <a:solidFill>
-                            <a:srgbClr val="111111"/>
-                          </a:solidFill>
-                          <a:latin typeface="AppleGothic"/>
+                            <a:srgbClr val="222222"/>
+                          </a:solidFill>
+                          <a:latin typeface="Arial"/>
                           <a:ea typeface="AppleGothic"/>
                         </a:rPr>
                         <a:t>0.552</a:t>
@@ -9044,7 +10075,7 @@
                   </a:txBody>
                   <a:tcPr anchor="ctr">
                     <a:solidFill>
-                      <a:srgbClr val="F2F2F0"/>
+                      <a:srgbClr val="F5F5F5"/>
                     </a:solidFill>
                   </a:tcPr>
                 </a:tc>
@@ -9057,9 +10088,9 @@
                       <a:r>
                         <a:rPr sz="900" b="0">
                           <a:solidFill>
-                            <a:srgbClr val="111111"/>
-                          </a:solidFill>
-                          <a:latin typeface="AppleGothic"/>
+                            <a:srgbClr val="222222"/>
+                          </a:solidFill>
+                          <a:latin typeface="Arial"/>
                           <a:ea typeface="AppleGothic"/>
                         </a:rPr>
                         <a:t>0.54</a:t>
@@ -9068,7 +10099,7 @@
                   </a:txBody>
                   <a:tcPr anchor="ctr">
                     <a:solidFill>
-                      <a:srgbClr val="F2F2F0"/>
+                      <a:srgbClr val="F5F5F5"/>
                     </a:solidFill>
                   </a:tcPr>
                 </a:tc>
@@ -9081,9 +10112,9 @@
                       <a:r>
                         <a:rPr sz="900" b="0">
                           <a:solidFill>
-                            <a:srgbClr val="111111"/>
-                          </a:solidFill>
-                          <a:latin typeface="AppleGothic"/>
+                            <a:srgbClr val="222222"/>
+                          </a:solidFill>
+                          <a:latin typeface="Arial"/>
                           <a:ea typeface="AppleGothic"/>
                         </a:rPr>
                         <a:t>0.621</a:t>
@@ -9092,7 +10123,7 @@
                   </a:txBody>
                   <a:tcPr anchor="ctr">
                     <a:solidFill>
-                      <a:srgbClr val="F2F2F0"/>
+                      <a:srgbClr val="F5F5F5"/>
                     </a:solidFill>
                   </a:tcPr>
                 </a:tc>
@@ -9107,9 +10138,9 @@
                       <a:r>
                         <a:rPr sz="900" b="1">
                           <a:solidFill>
-                            <a:srgbClr val="111111"/>
-                          </a:solidFill>
-                          <a:latin typeface="AppleGothic"/>
+                            <a:srgbClr val="222222"/>
+                          </a:solidFill>
+                          <a:latin typeface="Arial"/>
                           <a:ea typeface="AppleGothic"/>
                         </a:rPr>
                         <a:t>NASA</a:t>
@@ -9131,9 +10162,9 @@
                       <a:r>
                         <a:rPr sz="900" b="0">
                           <a:solidFill>
-                            <a:srgbClr val="111111"/>
-                          </a:solidFill>
-                          <a:latin typeface="AppleGothic"/>
+                            <a:srgbClr val="222222"/>
+                          </a:solidFill>
+                          <a:latin typeface="Arial"/>
                           <a:ea typeface="AppleGothic"/>
                         </a:rPr>
                         <a:t>0.584</a:t>
@@ -9151,13 +10182,13 @@
                     <a:bodyPr/>
                     <a:lstStyle/>
                     <a:p>
-                      <a:pPr algn="l"/>
+                      <a:pPr algn="ctr"/>
                       <a:r>
                         <a:rPr sz="900" b="0">
                           <a:solidFill>
-                            <a:srgbClr val="111111"/>
-                          </a:solidFill>
-                          <a:latin typeface="AppleGothic"/>
+                            <a:srgbClr val="222222"/>
+                          </a:solidFill>
+                          <a:latin typeface="Arial"/>
                           <a:ea typeface="AppleGothic"/>
                         </a:rPr>
                         <a:t>0.285</a:t>
@@ -9175,13 +10206,13 @@
                     <a:bodyPr/>
                     <a:lstStyle/>
                     <a:p>
-                      <a:pPr algn="l"/>
+                      <a:pPr algn="ctr"/>
                       <a:r>
                         <a:rPr sz="900" b="0">
                           <a:solidFill>
-                            <a:srgbClr val="111111"/>
-                          </a:solidFill>
-                          <a:latin typeface="AppleGothic"/>
+                            <a:srgbClr val="222222"/>
+                          </a:solidFill>
+                          <a:latin typeface="Arial"/>
                           <a:ea typeface="AppleGothic"/>
                         </a:rPr>
                         <a:t>0.286</a:t>
@@ -9203,9 +10234,9 @@
                       <a:r>
                         <a:rPr sz="900" b="0">
                           <a:solidFill>
-                            <a:srgbClr val="111111"/>
-                          </a:solidFill>
-                          <a:latin typeface="AppleGothic"/>
+                            <a:srgbClr val="222222"/>
+                          </a:solidFill>
+                          <a:latin typeface="Arial"/>
                           <a:ea typeface="AppleGothic"/>
                         </a:rPr>
                         <a:t>0.283</a:t>
@@ -9227,9 +10258,9 @@
                       <a:r>
                         <a:rPr sz="900" b="0">
                           <a:solidFill>
-                            <a:srgbClr val="111111"/>
-                          </a:solidFill>
-                          <a:latin typeface="AppleGothic"/>
+                            <a:srgbClr val="222222"/>
+                          </a:solidFill>
+                          <a:latin typeface="Arial"/>
                           <a:ea typeface="AppleGothic"/>
                         </a:rPr>
                         <a:t>0.550</a:t>
@@ -9251,9 +10282,9 @@
                       <a:r>
                         <a:rPr sz="900" b="0">
                           <a:solidFill>
-                            <a:srgbClr val="111111"/>
-                          </a:solidFill>
-                          <a:latin typeface="AppleGothic"/>
+                            <a:srgbClr val="222222"/>
+                          </a:solidFill>
+                          <a:latin typeface="Arial"/>
                           <a:ea typeface="AppleGothic"/>
                         </a:rPr>
                         <a:t>0.549</a:t>
@@ -9275,9 +10306,9 @@
                       <a:r>
                         <a:rPr sz="900" b="0">
                           <a:solidFill>
-                            <a:srgbClr val="111111"/>
-                          </a:solidFill>
-                          <a:latin typeface="AppleGothic"/>
+                            <a:srgbClr val="222222"/>
+                          </a:solidFill>
+                          <a:latin typeface="Arial"/>
                           <a:ea typeface="AppleGothic"/>
                         </a:rPr>
                         <a:t>0.44</a:t>
@@ -9299,9 +10330,9 @@
                       <a:r>
                         <a:rPr sz="900" b="0">
                           <a:solidFill>
-                            <a:srgbClr val="111111"/>
-                          </a:solidFill>
-                          <a:latin typeface="AppleGothic"/>
+                            <a:srgbClr val="222222"/>
+                          </a:solidFill>
+                          <a:latin typeface="Arial"/>
                           <a:ea typeface="AppleGothic"/>
                         </a:rPr>
                         <a:t>-0.69</a:t>
@@ -9325,9 +10356,9 @@
                       <a:r>
                         <a:rPr sz="900" b="1">
                           <a:solidFill>
-                            <a:srgbClr val="111111"/>
-                          </a:solidFill>
-                          <a:latin typeface="AppleGothic"/>
+                            <a:srgbClr val="222222"/>
+                          </a:solidFill>
+                          <a:latin typeface="Arial"/>
                           <a:ea typeface="AppleGothic"/>
                         </a:rPr>
                         <a:t>Sunwoda</a:t>
@@ -9336,7 +10367,7 @@
                   </a:txBody>
                   <a:tcPr anchor="ctr">
                     <a:solidFill>
-                      <a:srgbClr val="F2F2F0"/>
+                      <a:srgbClr val="F5F5F5"/>
                     </a:solidFill>
                   </a:tcPr>
                 </a:tc>
@@ -9349,9 +10380,9 @@
                       <a:r>
                         <a:rPr sz="900" b="0">
                           <a:solidFill>
-                            <a:srgbClr val="111111"/>
-                          </a:solidFill>
-                          <a:latin typeface="AppleGothic"/>
+                            <a:srgbClr val="222222"/>
+                          </a:solidFill>
+                          <a:latin typeface="Arial"/>
                           <a:ea typeface="AppleGothic"/>
                         </a:rPr>
                         <a:t>0.865</a:t>
@@ -9360,22 +10391,22 @@
                   </a:txBody>
                   <a:tcPr anchor="ctr">
                     <a:solidFill>
-                      <a:srgbClr val="F2F2F0"/>
-                    </a:solidFill>
-                  </a:tcPr>
-                </a:tc>
-                <a:tc>
-                  <a:txBody>
-                    <a:bodyPr/>
-                    <a:lstStyle/>
-                    <a:p>
-                      <a:pPr algn="l"/>
+                      <a:srgbClr val="F5F5F5"/>
+                    </a:solidFill>
+                  </a:tcPr>
+                </a:tc>
+                <a:tc>
+                  <a:txBody>
+                    <a:bodyPr/>
+                    <a:lstStyle/>
+                    <a:p>
+                      <a:pPr algn="ctr"/>
                       <a:r>
                         <a:rPr sz="900" b="0">
                           <a:solidFill>
-                            <a:srgbClr val="111111"/>
-                          </a:solidFill>
-                          <a:latin typeface="AppleGothic"/>
+                            <a:srgbClr val="222222"/>
+                          </a:solidFill>
+                          <a:latin typeface="Arial"/>
                           <a:ea typeface="AppleGothic"/>
                         </a:rPr>
                         <a:t>-0.24</a:t>
@@ -9384,22 +10415,22 @@
                   </a:txBody>
                   <a:tcPr anchor="ctr">
                     <a:solidFill>
-                      <a:srgbClr val="F2F2F0"/>
-                    </a:solidFill>
-                  </a:tcPr>
-                </a:tc>
-                <a:tc>
-                  <a:txBody>
-                    <a:bodyPr/>
-                    <a:lstStyle/>
-                    <a:p>
-                      <a:pPr algn="l"/>
+                      <a:srgbClr val="F5F5F5"/>
+                    </a:solidFill>
+                  </a:tcPr>
+                </a:tc>
+                <a:tc>
+                  <a:txBody>
+                    <a:bodyPr/>
+                    <a:lstStyle/>
+                    <a:p>
+                      <a:pPr algn="ctr"/>
                       <a:r>
                         <a:rPr sz="900" b="0">
                           <a:solidFill>
-                            <a:srgbClr val="111111"/>
-                          </a:solidFill>
-                          <a:latin typeface="AppleGothic"/>
+                            <a:srgbClr val="222222"/>
+                          </a:solidFill>
+                          <a:latin typeface="Arial"/>
                           <a:ea typeface="AppleGothic"/>
                         </a:rPr>
                         <a:t>-0.30</a:t>
@@ -9408,7 +10439,7 @@
                   </a:txBody>
                   <a:tcPr anchor="ctr">
                     <a:solidFill>
-                      <a:srgbClr val="F2F2F0"/>
+                      <a:srgbClr val="F5F5F5"/>
                     </a:solidFill>
                   </a:tcPr>
                 </a:tc>
@@ -9421,9 +10452,9 @@
                       <a:r>
                         <a:rPr sz="900" b="0">
                           <a:solidFill>
-                            <a:srgbClr val="111111"/>
-                          </a:solidFill>
-                          <a:latin typeface="AppleGothic"/>
+                            <a:srgbClr val="222222"/>
+                          </a:solidFill>
+                          <a:latin typeface="Arial"/>
                           <a:ea typeface="AppleGothic"/>
                         </a:rPr>
                         <a:t>-0.05</a:t>
@@ -9432,7 +10463,7 @@
                   </a:txBody>
                   <a:tcPr anchor="ctr">
                     <a:solidFill>
-                      <a:srgbClr val="F2F2F0"/>
+                      <a:srgbClr val="F5F5F5"/>
                     </a:solidFill>
                   </a:tcPr>
                 </a:tc>
@@ -9445,9 +10476,9 @@
                       <a:r>
                         <a:rPr sz="900" b="0">
                           <a:solidFill>
-                            <a:srgbClr val="111111"/>
-                          </a:solidFill>
-                          <a:latin typeface="AppleGothic"/>
+                            <a:srgbClr val="222222"/>
+                          </a:solidFill>
+                          <a:latin typeface="Arial"/>
                           <a:ea typeface="AppleGothic"/>
                         </a:rPr>
                         <a:t>0.838</a:t>
@@ -9456,7 +10487,7 @@
                   </a:txBody>
                   <a:tcPr anchor="ctr">
                     <a:solidFill>
-                      <a:srgbClr val="F2F2F0"/>
+                      <a:srgbClr val="F5F5F5"/>
                     </a:solidFill>
                   </a:tcPr>
                 </a:tc>
@@ -9469,9 +10500,9 @@
                       <a:r>
                         <a:rPr sz="900" b="0">
                           <a:solidFill>
-                            <a:srgbClr val="111111"/>
-                          </a:solidFill>
-                          <a:latin typeface="AppleGothic"/>
+                            <a:srgbClr val="222222"/>
+                          </a:solidFill>
+                          <a:latin typeface="Arial"/>
                           <a:ea typeface="AppleGothic"/>
                         </a:rPr>
                         <a:t>0.619</a:t>
@@ -9480,7 +10511,7 @@
                   </a:txBody>
                   <a:tcPr anchor="ctr">
                     <a:solidFill>
-                      <a:srgbClr val="F2F2F0"/>
+                      <a:srgbClr val="F5F5F5"/>
                     </a:solidFill>
                   </a:tcPr>
                 </a:tc>
@@ -9493,9 +10524,9 @@
                       <a:r>
                         <a:rPr sz="900" b="0">
                           <a:solidFill>
-                            <a:srgbClr val="111111"/>
-                          </a:solidFill>
-                          <a:latin typeface="AppleGothic"/>
+                            <a:srgbClr val="222222"/>
+                          </a:solidFill>
+                          <a:latin typeface="Arial"/>
                           <a:ea typeface="AppleGothic"/>
                         </a:rPr>
                         <a:t>-1.60</a:t>
@@ -9504,7 +10535,7 @@
                   </a:txBody>
                   <a:tcPr anchor="ctr">
                     <a:solidFill>
-                      <a:srgbClr val="F2F2F0"/>
+                      <a:srgbClr val="F5F5F5"/>
                     </a:solidFill>
                   </a:tcPr>
                 </a:tc>
@@ -9517,9 +10548,9 @@
                       <a:r>
                         <a:rPr sz="900" b="0">
                           <a:solidFill>
-                            <a:srgbClr val="111111"/>
-                          </a:solidFill>
-                          <a:latin typeface="AppleGothic"/>
+                            <a:srgbClr val="222222"/>
+                          </a:solidFill>
+                          <a:latin typeface="Arial"/>
                           <a:ea typeface="AppleGothic"/>
                         </a:rPr>
                         <a:t>-0.89</a:t>
@@ -9528,7 +10559,7 @@
                   </a:txBody>
                   <a:tcPr anchor="ctr">
                     <a:solidFill>
-                      <a:srgbClr val="F2F2F0"/>
+                      <a:srgbClr val="F5F5F5"/>
                     </a:solidFill>
                   </a:tcPr>
                 </a:tc>
@@ -9543,9 +10574,9 @@
                       <a:r>
                         <a:rPr sz="900" b="1">
                           <a:solidFill>
-                            <a:srgbClr val="111111"/>
-                          </a:solidFill>
-                          <a:latin typeface="AppleGothic"/>
+                            <a:srgbClr val="222222"/>
+                          </a:solidFill>
+                          <a:latin typeface="Arial"/>
                           <a:ea typeface="AppleGothic"/>
                         </a:rPr>
                         <a:t>RWTH</a:t>
@@ -9567,9 +10598,9 @@
                       <a:r>
                         <a:rPr sz="900" b="0">
                           <a:solidFill>
-                            <a:srgbClr val="111111"/>
-                          </a:solidFill>
-                          <a:latin typeface="AppleGothic"/>
+                            <a:srgbClr val="222222"/>
+                          </a:solidFill>
+                          <a:latin typeface="Arial"/>
                           <a:ea typeface="AppleGothic"/>
                         </a:rPr>
                         <a:t>0.743</a:t>
@@ -9587,13 +10618,13 @@
                     <a:bodyPr/>
                     <a:lstStyle/>
                     <a:p>
-                      <a:pPr algn="l"/>
+                      <a:pPr algn="ctr"/>
                       <a:r>
                         <a:rPr sz="900" b="0">
                           <a:solidFill>
-                            <a:srgbClr val="111111"/>
-                          </a:solidFill>
-                          <a:latin typeface="AppleGothic"/>
+                            <a:srgbClr val="222222"/>
+                          </a:solidFill>
+                          <a:latin typeface="Arial"/>
                           <a:ea typeface="AppleGothic"/>
                         </a:rPr>
                         <a:t>0.645</a:t>
@@ -9611,13 +10642,13 @@
                     <a:bodyPr/>
                     <a:lstStyle/>
                     <a:p>
-                      <a:pPr algn="l"/>
+                      <a:pPr algn="ctr"/>
                       <a:r>
                         <a:rPr sz="900" b="0">
                           <a:solidFill>
-                            <a:srgbClr val="111111"/>
-                          </a:solidFill>
-                          <a:latin typeface="AppleGothic"/>
+                            <a:srgbClr val="222222"/>
+                          </a:solidFill>
+                          <a:latin typeface="Arial"/>
                           <a:ea typeface="AppleGothic"/>
                         </a:rPr>
                         <a:t>0.602</a:t>
@@ -9639,9 +10670,9 @@
                       <a:r>
                         <a:rPr sz="900" b="0">
                           <a:solidFill>
-                            <a:srgbClr val="111111"/>
-                          </a:solidFill>
-                          <a:latin typeface="AppleGothic"/>
+                            <a:srgbClr val="222222"/>
+                          </a:solidFill>
+                          <a:latin typeface="Arial"/>
                           <a:ea typeface="AppleGothic"/>
                         </a:rPr>
                         <a:t>-0.01</a:t>
@@ -9663,9 +10694,9 @@
                       <a:r>
                         <a:rPr sz="900" b="0">
                           <a:solidFill>
-                            <a:srgbClr val="111111"/>
-                          </a:solidFill>
-                          <a:latin typeface="AppleGothic"/>
+                            <a:srgbClr val="222222"/>
+                          </a:solidFill>
+                          <a:latin typeface="Arial"/>
                           <a:ea typeface="AppleGothic"/>
                         </a:rPr>
                         <a:t>0.385</a:t>
@@ -9687,9 +10718,9 @@
                       <a:r>
                         <a:rPr sz="900" b="0">
                           <a:solidFill>
-                            <a:srgbClr val="111111"/>
-                          </a:solidFill>
-                          <a:latin typeface="AppleGothic"/>
+                            <a:srgbClr val="222222"/>
+                          </a:solidFill>
+                          <a:latin typeface="Arial"/>
                           <a:ea typeface="AppleGothic"/>
                         </a:rPr>
                         <a:t>0.526</a:t>
@@ -9711,9 +10742,9 @@
                       <a:r>
                         <a:rPr sz="900" b="0">
                           <a:solidFill>
-                            <a:srgbClr val="111111"/>
-                          </a:solidFill>
-                          <a:latin typeface="AppleGothic"/>
+                            <a:srgbClr val="222222"/>
+                          </a:solidFill>
+                          <a:latin typeface="Arial"/>
                           <a:ea typeface="AppleGothic"/>
                         </a:rPr>
                         <a:t>-0.47</a:t>
@@ -9735,9 +10766,9 @@
                       <a:r>
                         <a:rPr sz="900" b="0">
                           <a:solidFill>
-                            <a:srgbClr val="111111"/>
-                          </a:solidFill>
-                          <a:latin typeface="AppleGothic"/>
+                            <a:srgbClr val="222222"/>
+                          </a:solidFill>
+                          <a:latin typeface="Arial"/>
                           <a:ea typeface="AppleGothic"/>
                         </a:rPr>
                         <a:t>-2.18</a:t>
@@ -9761,9 +10792,9 @@
                       <a:r>
                         <a:rPr sz="900" b="1">
                           <a:solidFill>
-                            <a:srgbClr val="111111"/>
-                          </a:solidFill>
-                          <a:latin typeface="AppleGothic"/>
+                            <a:srgbClr val="222222"/>
+                          </a:solidFill>
+                          <a:latin typeface="Arial"/>
                           <a:ea typeface="AppleGothic"/>
                         </a:rPr>
                         <a:t>MATR19</a:t>
@@ -9772,7 +10803,7 @@
                   </a:txBody>
                   <a:tcPr anchor="ctr">
                     <a:solidFill>
-                      <a:srgbClr val="F2F2F0"/>
+                      <a:srgbClr val="F5F5F5"/>
                     </a:solidFill>
                   </a:tcPr>
                 </a:tc>
@@ -9785,9 +10816,9 @@
                       <a:r>
                         <a:rPr sz="900" b="0">
                           <a:solidFill>
-                            <a:srgbClr val="111111"/>
-                          </a:solidFill>
-                          <a:latin typeface="AppleGothic"/>
+                            <a:srgbClr val="222222"/>
+                          </a:solidFill>
+                          <a:latin typeface="Arial"/>
                           <a:ea typeface="AppleGothic"/>
                         </a:rPr>
                         <a:t>0.466</a:t>
@@ -9796,22 +10827,22 @@
                   </a:txBody>
                   <a:tcPr anchor="ctr">
                     <a:solidFill>
-                      <a:srgbClr val="F2F2F0"/>
-                    </a:solidFill>
-                  </a:tcPr>
-                </a:tc>
-                <a:tc>
-                  <a:txBody>
-                    <a:bodyPr/>
-                    <a:lstStyle/>
-                    <a:p>
-                      <a:pPr algn="l"/>
+                      <a:srgbClr val="F5F5F5"/>
+                    </a:solidFill>
+                  </a:tcPr>
+                </a:tc>
+                <a:tc>
+                  <a:txBody>
+                    <a:bodyPr/>
+                    <a:lstStyle/>
+                    <a:p>
+                      <a:pPr algn="ctr"/>
                       <a:r>
                         <a:rPr sz="900" b="0">
                           <a:solidFill>
-                            <a:srgbClr val="111111"/>
-                          </a:solidFill>
-                          <a:latin typeface="AppleGothic"/>
+                            <a:srgbClr val="222222"/>
+                          </a:solidFill>
+                          <a:latin typeface="Arial"/>
                           <a:ea typeface="AppleGothic"/>
                         </a:rPr>
                         <a:t>0.044</a:t>
@@ -9820,22 +10851,22 @@
                   </a:txBody>
                   <a:tcPr anchor="ctr">
                     <a:solidFill>
-                      <a:srgbClr val="F2F2F0"/>
-                    </a:solidFill>
-                  </a:tcPr>
-                </a:tc>
-                <a:tc>
-                  <a:txBody>
-                    <a:bodyPr/>
-                    <a:lstStyle/>
-                    <a:p>
-                      <a:pPr algn="l"/>
+                      <a:srgbClr val="F5F5F5"/>
+                    </a:solidFill>
+                  </a:tcPr>
+                </a:tc>
+                <a:tc>
+                  <a:txBody>
+                    <a:bodyPr/>
+                    <a:lstStyle/>
+                    <a:p>
+                      <a:pPr algn="ctr"/>
                       <a:r>
                         <a:rPr sz="900" b="0">
                           <a:solidFill>
-                            <a:srgbClr val="111111"/>
-                          </a:solidFill>
-                          <a:latin typeface="AppleGothic"/>
+                            <a:srgbClr val="222222"/>
+                          </a:solidFill>
+                          <a:latin typeface="Arial"/>
                           <a:ea typeface="AppleGothic"/>
                         </a:rPr>
                         <a:t>0.272</a:t>
@@ -9844,7 +10875,7 @@
                   </a:txBody>
                   <a:tcPr anchor="ctr">
                     <a:solidFill>
-                      <a:srgbClr val="F2F2F0"/>
+                      <a:srgbClr val="F5F5F5"/>
                     </a:solidFill>
                   </a:tcPr>
                 </a:tc>
@@ -9857,9 +10888,9 @@
                       <a:r>
                         <a:rPr sz="900" b="0">
                           <a:solidFill>
-                            <a:srgbClr val="111111"/>
-                          </a:solidFill>
-                          <a:latin typeface="AppleGothic"/>
+                            <a:srgbClr val="222222"/>
+                          </a:solidFill>
+                          <a:latin typeface="Arial"/>
                           <a:ea typeface="AppleGothic"/>
                         </a:rPr>
                         <a:t>0.018</a:t>
@@ -9868,7 +10899,7 @@
                   </a:txBody>
                   <a:tcPr anchor="ctr">
                     <a:solidFill>
-                      <a:srgbClr val="F2F2F0"/>
+                      <a:srgbClr val="F5F5F5"/>
                     </a:solidFill>
                   </a:tcPr>
                 </a:tc>
@@ -9881,9 +10912,9 @@
                       <a:r>
                         <a:rPr sz="900" b="0">
                           <a:solidFill>
-                            <a:srgbClr val="111111"/>
-                          </a:solidFill>
-                          <a:latin typeface="AppleGothic"/>
+                            <a:srgbClr val="222222"/>
+                          </a:solidFill>
+                          <a:latin typeface="Arial"/>
                           <a:ea typeface="AppleGothic"/>
                         </a:rPr>
                         <a:t>-2.64</a:t>
@@ -9892,7 +10923,7 @@
                   </a:txBody>
                   <a:tcPr anchor="ctr">
                     <a:solidFill>
-                      <a:srgbClr val="F2F2F0"/>
+                      <a:srgbClr val="F5F5F5"/>
                     </a:solidFill>
                   </a:tcPr>
                 </a:tc>
@@ -9905,9 +10936,9 @@
                       <a:r>
                         <a:rPr sz="900" b="0">
                           <a:solidFill>
-                            <a:srgbClr val="111111"/>
-                          </a:solidFill>
-                          <a:latin typeface="AppleGothic"/>
+                            <a:srgbClr val="222222"/>
+                          </a:solidFill>
+                          <a:latin typeface="Arial"/>
                           <a:ea typeface="AppleGothic"/>
                         </a:rPr>
                         <a:t>-0.73</a:t>
@@ -9916,7 +10947,7 @@
                   </a:txBody>
                   <a:tcPr anchor="ctr">
                     <a:solidFill>
-                      <a:srgbClr val="F2F2F0"/>
+                      <a:srgbClr val="F5F5F5"/>
                     </a:solidFill>
                   </a:tcPr>
                 </a:tc>
@@ -9929,9 +10960,9 @@
                       <a:r>
                         <a:rPr sz="900" b="0">
                           <a:solidFill>
-                            <a:srgbClr val="111111"/>
-                          </a:solidFill>
-                          <a:latin typeface="AppleGothic"/>
+                            <a:srgbClr val="222222"/>
+                          </a:solidFill>
+                          <a:latin typeface="Arial"/>
                           <a:ea typeface="AppleGothic"/>
                         </a:rPr>
                         <a:t>-2.46</a:t>
@@ -9940,7 +10971,7 @@
                   </a:txBody>
                   <a:tcPr anchor="ctr">
                     <a:solidFill>
-                      <a:srgbClr val="F2F2F0"/>
+                      <a:srgbClr val="F5F5F5"/>
                     </a:solidFill>
                   </a:tcPr>
                 </a:tc>
@@ -9953,9 +10984,9 @@
                       <a:r>
                         <a:rPr sz="900" b="0">
                           <a:solidFill>
-                            <a:srgbClr val="111111"/>
-                          </a:solidFill>
-                          <a:latin typeface="AppleGothic"/>
+                            <a:srgbClr val="222222"/>
+                          </a:solidFill>
+                          <a:latin typeface="Arial"/>
                           <a:ea typeface="AppleGothic"/>
                         </a:rPr>
                         <a:t>0.202</a:t>
@@ -9964,7 +10995,7 @@
                   </a:txBody>
                   <a:tcPr anchor="ctr">
                     <a:solidFill>
-                      <a:srgbClr val="F2F2F0"/>
+                      <a:srgbClr val="F5F5F5"/>
                     </a:solidFill>
                   </a:tcPr>
                 </a:tc>
@@ -9979,9 +11010,9 @@
                       <a:r>
                         <a:rPr sz="900" b="1">
                           <a:solidFill>
-                            <a:srgbClr val="111111"/>
-                          </a:solidFill>
-                          <a:latin typeface="AppleGothic"/>
+                            <a:srgbClr val="222222"/>
+                          </a:solidFill>
+                          <a:latin typeface="Arial"/>
                           <a:ea typeface="AppleGothic"/>
                         </a:rPr>
                         <a:t>MATRb2</a:t>
@@ -10003,9 +11034,9 @@
                       <a:r>
                         <a:rPr sz="900" b="0">
                           <a:solidFill>
-                            <a:srgbClr val="111111"/>
-                          </a:solidFill>
-                          <a:latin typeface="AppleGothic"/>
+                            <a:srgbClr val="222222"/>
+                          </a:solidFill>
+                          <a:latin typeface="Arial"/>
                           <a:ea typeface="AppleGothic"/>
                         </a:rPr>
                         <a:t>0.862</a:t>
@@ -10023,13 +11054,13 @@
                     <a:bodyPr/>
                     <a:lstStyle/>
                     <a:p>
-                      <a:pPr algn="l"/>
+                      <a:pPr algn="ctr"/>
                       <a:r>
                         <a:rPr sz="900" b="0">
                           <a:solidFill>
-                            <a:srgbClr val="111111"/>
-                          </a:solidFill>
-                          <a:latin typeface="AppleGothic"/>
+                            <a:srgbClr val="222222"/>
+                          </a:solidFill>
+                          <a:latin typeface="Arial"/>
                           <a:ea typeface="AppleGothic"/>
                         </a:rPr>
                         <a:t>0.850</a:t>
@@ -10047,13 +11078,13 @@
                     <a:bodyPr/>
                     <a:lstStyle/>
                     <a:p>
-                      <a:pPr algn="l"/>
+                      <a:pPr algn="ctr"/>
                       <a:r>
                         <a:rPr sz="900" b="0">
                           <a:solidFill>
-                            <a:srgbClr val="111111"/>
-                          </a:solidFill>
-                          <a:latin typeface="AppleGothic"/>
+                            <a:srgbClr val="222222"/>
+                          </a:solidFill>
+                          <a:latin typeface="Arial"/>
                           <a:ea typeface="AppleGothic"/>
                         </a:rPr>
                         <a:t>0.777</a:t>
@@ -10075,9 +11106,9 @@
                       <a:r>
                         <a:rPr sz="900" b="0">
                           <a:solidFill>
-                            <a:srgbClr val="111111"/>
-                          </a:solidFill>
-                          <a:latin typeface="AppleGothic"/>
+                            <a:srgbClr val="222222"/>
+                          </a:solidFill>
+                          <a:latin typeface="Arial"/>
                           <a:ea typeface="AppleGothic"/>
                         </a:rPr>
                         <a:t>0.674</a:t>
@@ -10099,9 +11130,9 @@
                       <a:r>
                         <a:rPr sz="900" b="0">
                           <a:solidFill>
-                            <a:srgbClr val="111111"/>
-                          </a:solidFill>
-                          <a:latin typeface="AppleGothic"/>
+                            <a:srgbClr val="222222"/>
+                          </a:solidFill>
+                          <a:latin typeface="Arial"/>
                           <a:ea typeface="AppleGothic"/>
                         </a:rPr>
                         <a:t>-0.78</a:t>
@@ -10123,9 +11154,9 @@
                       <a:r>
                         <a:rPr sz="900" b="0">
                           <a:solidFill>
-                            <a:srgbClr val="111111"/>
-                          </a:solidFill>
-                          <a:latin typeface="AppleGothic"/>
+                            <a:srgbClr val="222222"/>
+                          </a:solidFill>
+                          <a:latin typeface="Arial"/>
                           <a:ea typeface="AppleGothic"/>
                         </a:rPr>
                         <a:t>0.739</a:t>
@@ -10147,9 +11178,9 @@
                       <a:r>
                         <a:rPr sz="900" b="0">
                           <a:solidFill>
-                            <a:srgbClr val="111111"/>
-                          </a:solidFill>
-                          <a:latin typeface="AppleGothic"/>
+                            <a:srgbClr val="222222"/>
+                          </a:solidFill>
+                          <a:latin typeface="Arial"/>
                           <a:ea typeface="AppleGothic"/>
                         </a:rPr>
                         <a:t>0.21</a:t>
@@ -10171,9 +11202,9 @@
                       <a:r>
                         <a:rPr sz="900" b="0">
                           <a:solidFill>
-                            <a:srgbClr val="111111"/>
-                          </a:solidFill>
-                          <a:latin typeface="AppleGothic"/>
+                            <a:srgbClr val="222222"/>
+                          </a:solidFill>
+                          <a:latin typeface="Arial"/>
                           <a:ea typeface="AppleGothic"/>
                         </a:rPr>
                         <a:t>0.618</a:t>
@@ -10197,9 +11228,9 @@
                       <a:r>
                         <a:rPr sz="900" b="1">
                           <a:solidFill>
-                            <a:srgbClr val="111111"/>
-                          </a:solidFill>
-                          <a:latin typeface="AppleGothic"/>
+                            <a:srgbClr val="222222"/>
+                          </a:solidFill>
+                          <a:latin typeface="Arial"/>
                           <a:ea typeface="AppleGothic"/>
                         </a:rPr>
                         <a:t>NCMAPSS</a:t>
@@ -10208,7 +11239,7 @@
                   </a:txBody>
                   <a:tcPr anchor="ctr">
                     <a:solidFill>
-                      <a:srgbClr val="F2F2F0"/>
+                      <a:srgbClr val="F5F5F5"/>
                     </a:solidFill>
                   </a:tcPr>
                 </a:tc>
@@ -10221,9 +11252,9 @@
                       <a:r>
                         <a:rPr sz="900" b="0">
                           <a:solidFill>
-                            <a:srgbClr val="111111"/>
-                          </a:solidFill>
-                          <a:latin typeface="AppleGothic"/>
+                            <a:srgbClr val="222222"/>
+                          </a:solidFill>
+                          <a:latin typeface="Arial"/>
                           <a:ea typeface="AppleGothic"/>
                         </a:rPr>
                         <a:t>0.937</a:t>
@@ -10232,22 +11263,22 @@
                   </a:txBody>
                   <a:tcPr anchor="ctr">
                     <a:solidFill>
-                      <a:srgbClr val="F2F2F0"/>
-                    </a:solidFill>
-                  </a:tcPr>
-                </a:tc>
-                <a:tc>
-                  <a:txBody>
-                    <a:bodyPr/>
-                    <a:lstStyle/>
-                    <a:p>
-                      <a:pPr algn="l"/>
+                      <a:srgbClr val="F5F5F5"/>
+                    </a:solidFill>
+                  </a:tcPr>
+                </a:tc>
+                <a:tc>
+                  <a:txBody>
+                    <a:bodyPr/>
+                    <a:lstStyle/>
+                    <a:p>
+                      <a:pPr algn="ctr"/>
                       <a:r>
                         <a:rPr sz="900" b="0">
                           <a:solidFill>
-                            <a:srgbClr val="111111"/>
-                          </a:solidFill>
-                          <a:latin typeface="AppleGothic"/>
+                            <a:srgbClr val="222222"/>
+                          </a:solidFill>
+                          <a:latin typeface="Arial"/>
                           <a:ea typeface="AppleGothic"/>
                         </a:rPr>
                         <a:t>0.883</a:t>
@@ -10256,22 +11287,22 @@
                   </a:txBody>
                   <a:tcPr anchor="ctr">
                     <a:solidFill>
-                      <a:srgbClr val="F2F2F0"/>
-                    </a:solidFill>
-                  </a:tcPr>
-                </a:tc>
-                <a:tc>
-                  <a:txBody>
-                    <a:bodyPr/>
-                    <a:lstStyle/>
-                    <a:p>
-                      <a:pPr algn="l"/>
+                      <a:srgbClr val="F5F5F5"/>
+                    </a:solidFill>
+                  </a:tcPr>
+                </a:tc>
+                <a:tc>
+                  <a:txBody>
+                    <a:bodyPr/>
+                    <a:lstStyle/>
+                    <a:p>
+                      <a:pPr algn="ctr"/>
                       <a:r>
                         <a:rPr sz="900" b="0">
                           <a:solidFill>
-                            <a:srgbClr val="111111"/>
-                          </a:solidFill>
-                          <a:latin typeface="AppleGothic"/>
+                            <a:srgbClr val="222222"/>
+                          </a:solidFill>
+                          <a:latin typeface="Arial"/>
                           <a:ea typeface="AppleGothic"/>
                         </a:rPr>
                         <a:t>0.880</a:t>
@@ -10280,7 +11311,7 @@
                   </a:txBody>
                   <a:tcPr anchor="ctr">
                     <a:solidFill>
-                      <a:srgbClr val="F2F2F0"/>
+                      <a:srgbClr val="F5F5F5"/>
                     </a:solidFill>
                   </a:tcPr>
                 </a:tc>
@@ -10293,9 +11324,9 @@
                       <a:r>
                         <a:rPr sz="900" b="0">
                           <a:solidFill>
-                            <a:srgbClr val="111111"/>
-                          </a:solidFill>
-                          <a:latin typeface="AppleGothic"/>
+                            <a:srgbClr val="222222"/>
+                          </a:solidFill>
+                          <a:latin typeface="Arial"/>
                           <a:ea typeface="AppleGothic"/>
                         </a:rPr>
                         <a:t>0.892</a:t>
@@ -10304,7 +11335,7 @@
                   </a:txBody>
                   <a:tcPr anchor="ctr">
                     <a:solidFill>
-                      <a:srgbClr val="F2F2F0"/>
+                      <a:srgbClr val="F5F5F5"/>
                     </a:solidFill>
                   </a:tcPr>
                 </a:tc>
@@ -10317,9 +11348,9 @@
                       <a:r>
                         <a:rPr sz="900" b="0">
                           <a:solidFill>
-                            <a:srgbClr val="111111"/>
-                          </a:solidFill>
-                          <a:latin typeface="AppleGothic"/>
+                            <a:srgbClr val="222222"/>
+                          </a:solidFill>
+                          <a:latin typeface="Arial"/>
                           <a:ea typeface="AppleGothic"/>
                         </a:rPr>
                         <a:t>0.819</a:t>
@@ -10328,7 +11359,7 @@
                   </a:txBody>
                   <a:tcPr anchor="ctr">
                     <a:solidFill>
-                      <a:srgbClr val="F2F2F0"/>
+                      <a:srgbClr val="F5F5F5"/>
                     </a:solidFill>
                   </a:tcPr>
                 </a:tc>
@@ -10341,9 +11372,9 @@
                       <a:r>
                         <a:rPr sz="900" b="0">
                           <a:solidFill>
-                            <a:srgbClr val="111111"/>
-                          </a:solidFill>
-                          <a:latin typeface="AppleGothic"/>
+                            <a:srgbClr val="222222"/>
+                          </a:solidFill>
+                          <a:latin typeface="Arial"/>
                           <a:ea typeface="AppleGothic"/>
                         </a:rPr>
                         <a:t>0.932</a:t>
@@ -10352,7 +11383,7 @@
                   </a:txBody>
                   <a:tcPr anchor="ctr">
                     <a:solidFill>
-                      <a:srgbClr val="F2F2F0"/>
+                      <a:srgbClr val="F5F5F5"/>
                     </a:solidFill>
                   </a:tcPr>
                 </a:tc>
@@ -10365,9 +11396,9 @@
                       <a:r>
                         <a:rPr sz="900" b="0">
                           <a:solidFill>
-                            <a:srgbClr val="111111"/>
-                          </a:solidFill>
-                          <a:latin typeface="AppleGothic"/>
+                            <a:srgbClr val="222222"/>
+                          </a:solidFill>
+                          <a:latin typeface="Arial"/>
                           <a:ea typeface="AppleGothic"/>
                         </a:rPr>
                         <a:t>0.80</a:t>
@@ -10376,7 +11407,7 @@
                   </a:txBody>
                   <a:tcPr anchor="ctr">
                     <a:solidFill>
-                      <a:srgbClr val="F2F2F0"/>
+                      <a:srgbClr val="F5F5F5"/>
                     </a:solidFill>
                   </a:tcPr>
                 </a:tc>
@@ -10389,9 +11420,9 @@
                       <a:r>
                         <a:rPr sz="900" b="0">
                           <a:solidFill>
-                            <a:srgbClr val="111111"/>
-                          </a:solidFill>
-                          <a:latin typeface="AppleGothic"/>
+                            <a:srgbClr val="222222"/>
+                          </a:solidFill>
+                          <a:latin typeface="Arial"/>
                           <a:ea typeface="AppleGothic"/>
                         </a:rPr>
                         <a:t>0.934</a:t>
@@ -10400,7 +11431,7 @@
                   </a:txBody>
                   <a:tcPr anchor="ctr">
                     <a:solidFill>
-                      <a:srgbClr val="F2F2F0"/>
+                      <a:srgbClr val="F5F5F5"/>
                     </a:solidFill>
                   </a:tcPr>
                 </a:tc>
@@ -10425,7 +11456,7 @@
           </a:prstGeom>
           <a:ln w="9525">
             <a:solidFill>
-              <a:srgbClr val="D0D0D0"/>
+              <a:srgbClr val="E8E8E8"/>
             </a:solidFill>
           </a:ln>
         </p:spPr>
@@ -10470,9 +11501,9 @@
             <a:r>
               <a:rPr sz="900" b="0">
                 <a:solidFill>
-                  <a:srgbClr val="555555"/>
+                  <a:srgbClr val="666666"/>
                 </a:solidFill>
-                <a:latin typeface="AppleGothic"/>
+                <a:latin typeface="Arial"/>
                 <a:ea typeface="AppleGothic"/>
               </a:rPr>
               <a:t>SPS Lab  ·  Assumption-Aware Extrapolation  ·  SAAR</a:t>
@@ -10506,9 +11537,9 @@
             <a:r>
               <a:rPr sz="1000" b="1">
                 <a:solidFill>
-                  <a:srgbClr val="555555"/>
+                  <a:srgbClr val="666666"/>
                 </a:solidFill>
-                <a:latin typeface="AppleGothic"/>
+                <a:latin typeface="Arial"/>
                 <a:ea typeface="AppleGothic"/>
               </a:rPr>
               <a:t>8/11</a:t>
@@ -10586,13 +11617,13 @@
         <p:spPr>
           <a:xfrm>
             <a:off x="0" y="0"/>
-            <a:ext cx="12192000" cy="38100"/>
+            <a:ext cx="12192000" cy="28575"/>
           </a:xfrm>
           <a:prstGeom prst="rect">
             <a:avLst/>
           </a:prstGeom>
           <a:solidFill>
-            <a:srgbClr val="0A5C5C"/>
+            <a:srgbClr val="0072B2"/>
           </a:solidFill>
           <a:ln>
             <a:noFill/>
@@ -10629,7 +11660,7 @@
         <p:spPr>
           <a:xfrm>
             <a:off x="457200" y="209550"/>
-            <a:ext cx="11239500" cy="323850"/>
+            <a:ext cx="11239500" cy="304800"/>
           </a:xfrm>
           <a:prstGeom prst="rect">
             <a:avLst/>
@@ -10646,9 +11677,9 @@
             <a:r>
               <a:rPr sz="2200" b="1">
                 <a:solidFill>
-                  <a:srgbClr val="111111"/>
+                  <a:srgbClr val="222222"/>
                 </a:solidFill>
-                <a:latin typeface="AppleGothic"/>
+                <a:latin typeface="Arial"/>
                 <a:ea typeface="AppleGothic"/>
               </a:rPr>
               <a:t>안정성</a:t>
@@ -10664,7 +11695,7 @@
         </p:nvSpPr>
         <p:spPr>
           <a:xfrm>
-            <a:off x="457200" y="533400"/>
+            <a:off x="457200" y="514350"/>
             <a:ext cx="11239500" cy="190500"/>
           </a:xfrm>
           <a:prstGeom prst="rect">
@@ -10682,12 +11713,12 @@
             <a:r>
               <a:rPr sz="1200" b="0">
                 <a:solidFill>
-                  <a:srgbClr val="555555"/>
+                  <a:srgbClr val="666666"/>
                 </a:solidFill>
-                <a:latin typeface="AppleGothic"/>
+                <a:latin typeface="Arial"/>
                 <a:ea typeface="AppleGothic"/>
               </a:rPr>
-              <a:t>bootstrap CI  ·  MICH unit R²</a:t>
+              <a:t>(a) bootstrap CI  ·  (b) MICH unit R²</a:t>
             </a:r>
           </a:p>
         </p:txBody>
@@ -10708,8 +11739,8 @@
         </p:blipFill>
         <p:spPr>
           <a:xfrm>
-            <a:off x="285750" y="857250"/>
-            <a:ext cx="11620500" cy="5048250"/>
+            <a:off x="476250" y="952500"/>
+            <a:ext cx="11239500" cy="4762500"/>
           </a:xfrm>
           <a:prstGeom prst="rect">
             <a:avLst/>
@@ -10732,7 +11763,7 @@
           </a:prstGeom>
           <a:ln w="9525">
             <a:solidFill>
-              <a:srgbClr val="D0D0D0"/>
+              <a:srgbClr val="E8E8E8"/>
             </a:solidFill>
           </a:ln>
         </p:spPr>
@@ -10777,9 +11808,9 @@
             <a:r>
               <a:rPr sz="900" b="0">
                 <a:solidFill>
-                  <a:srgbClr val="555555"/>
+                  <a:srgbClr val="666666"/>
                 </a:solidFill>
-                <a:latin typeface="AppleGothic"/>
+                <a:latin typeface="Arial"/>
                 <a:ea typeface="AppleGothic"/>
               </a:rPr>
               <a:t>SPS Lab  ·  Assumption-Aware Extrapolation  ·  SAAR</a:t>
@@ -10813,9 +11844,9 @@
             <a:r>
               <a:rPr sz="1000" b="1">
                 <a:solidFill>
-                  <a:srgbClr val="555555"/>
+                  <a:srgbClr val="666666"/>
                 </a:solidFill>
-                <a:latin typeface="AppleGothic"/>
+                <a:latin typeface="Arial"/>
                 <a:ea typeface="AppleGothic"/>
               </a:rPr>
               <a:t>9/11</a:t>

--- a/output/PP_Research_Detailed_v2.pptx
+++ b/output/PP_Research_Detailed_v2.pptx
@@ -24167,7 +24167,7 @@
                 <a:latin typeface="Arial"/>
                 <a:ea typeface="AppleGothic"/>
               </a:rPr>
-              <a:t>모델링 의도 · research gap</a:t>
+              <a:t>왜 PP-X가 필요한가</a:t>
             </a:r>
           </a:p>
         </p:txBody>
@@ -24203,7 +24203,7 @@
                 <a:latin typeface="Arial"/>
                 <a:ea typeface="AppleGothic"/>
               </a:rPr>
-              <a:t>외삽을 test-independent structural assumption approval 문제로 다시 정의한다</a:t>
+              <a:t>외삽에서는 예측기보다 먼저 구조 가정의 사용 자격을 검증해야 한다</a:t>
             </a:r>
           </a:p>
         </p:txBody>
@@ -24232,14 +24232,14 @@
           <a:p>
             <a:pPr algn="ctr"/>
             <a:r>
-              <a:rPr sz="1900" b="1">
+              <a:rPr sz="1800" b="1">
                 <a:solidFill>
                   <a:srgbClr val="0072B2"/>
                 </a:solidFill>
                 <a:latin typeface="Arial"/>
                 <a:ea typeface="AppleGothic"/>
               </a:rPr>
-              <a:t>PP-X treats extrapolation as test-independent approval/rejection of structural assumptions.</a:t>
+              <a:t>관측 범위 밖에서는 데이터만으로 답을 정할 수 없다. PP-X는 구조 가정을 사전 선언하고, 검증된 가정만 실행한다.</a:t>
             </a:r>
           </a:p>
         </p:txBody>
@@ -24665,14 +24665,14 @@
           <a:p>
             <a:pPr algn="ctr"/>
             <a:r>
-              <a:rPr sz="1400" b="1">
+              <a:rPr sz="1500" b="1">
                 <a:solidFill>
                   <a:srgbClr val="222222"/>
                 </a:solidFill>
                 <a:latin typeface="Arial"/>
                 <a:ea typeface="AppleGothic"/>
               </a:rPr>
-              <a:t>연구 gap은 affine+NN, hard boundary, gate 각각의 최초성이 아니다. typed admissibility + prior-centered residual authority + predeployment unit-risk approval/fallback을 하나의 실행 계약으로 결합하는 데 있다.</a:t>
+              <a:t>핵심 전환: test에서 잘 맞는 모델을 고르는 것이 아니라, test를 보기 전에 구조 가정의 사용 권한을 승인하거나 거절한다.</a:t>
             </a:r>
           </a:p>
         </p:txBody>
@@ -24708,7 +24708,7 @@
                 <a:latin typeface="Arial"/>
                 <a:ea typeface="AppleGothic"/>
               </a:rPr>
-              <a:t>목표: test sample별로 잘 맞는 모델을 고르는 것이 아니라, test를 보기 전에 구조 가정의 사용 권한을 승인하거나 거절한다.</a:t>
+              <a:t>PP-X = Declare assumptions → Learn constrained residual → Approve with validation evidence → Decline to fallback</a:t>
             </a:r>
           </a:p>
         </p:txBody>
@@ -30776,7 +30776,7 @@
                 <a:latin typeface="Arial"/>
                 <a:ea typeface="AppleGothic"/>
               </a:rPr>
-              <a:t>본 연구의 기여 3개 · evidence mapping</a:t>
+              <a:t>PP-X의 세 가지 기여</a:t>
             </a:r>
           </a:p>
         </p:txBody>
@@ -30812,7 +30812,7 @@
                 <a:latin typeface="Arial"/>
                 <a:ea typeface="AppleGothic"/>
               </a:rPr>
-              <a:t>각 기여는 지지 증거와 반례를 함께 제시한다</a:t>
+              <a:t>가정을 선언하고 · prior의 권한을 보존하며 · 근거가 없으면 실행하지 않는다</a:t>
             </a:r>
           </a:p>
         </p:txBody>
@@ -31184,7 +31184,7 @@
                 <a:latin typeface="Arial"/>
                 <a:ea typeface="AppleGothic"/>
               </a:rPr>
-              <a:t>기여의 단위는 ‘새 부품’이 아니라 선언–권한–승인–거절이 연결된 실행 규율이다.</a:t>
+              <a:t>핵심 기여는 새 부품 하나가 아니라, 외삽 가정을 통제하는 선언–학습–승인–거절의 end-to-end 규율이다.</a:t>
             </a:r>
           </a:p>
         </p:txBody>
@@ -31431,7 +31431,7 @@
                 <a:latin typeface="Arial"/>
                 <a:ea typeface="AppleGothic"/>
               </a:rPr>
-              <a:t>Novelty positioning matrix</a:t>
+              <a:t>무엇이 새로운가</a:t>
             </a:r>
           </a:p>
         </p:txBody>
@@ -31467,7 +31467,7 @@
                 <a:latin typeface="Arial"/>
                 <a:ea typeface="AppleGothic"/>
               </a:rPr>
-              <a:t>인접 방법과의 차이를 좁고 방어 가능하게 진술한다</a:t>
+              <a:t>새 prior나 gate 자체가 아니라 네 요소를 하나의 검증 가능한 실행 계약으로 결합했다</a:t>
             </a:r>
           </a:p>
         </p:txBody>
@@ -32119,7 +32119,7 @@
                 <a:latin typeface="Arial"/>
                 <a:ea typeface="AppleGothic"/>
               </a:rPr>
-              <a:t>Novelty claim: typed admissibility + prior-centered residual authority + predeployment unit-risk approval/fallback의 결합.</a:t>
+              <a:t>Novelty = typed contract + frozen-prior residual authority + validation-only approval + exact fallback/abstention.</a:t>
             </a:r>
           </a:p>
         </p:txBody>
@@ -32366,7 +32366,7 @@
                 <a:latin typeface="Arial"/>
                 <a:ea typeface="AppleGothic"/>
               </a:rPr>
-              <a:t>Claim–evidence–limitation · reviewer defense</a:t>
+              <a:t>어디까지 주장할 수 있는가</a:t>
             </a:r>
           </a:p>
         </p:txBody>
@@ -32402,7 +32402,7 @@
                 <a:latin typeface="Arial"/>
                 <a:ea typeface="AppleGothic"/>
               </a:rPr>
-              <a:t>세 evidence tier를 합치지 않고 투고 주장을 제한한다</a:t>
+              <a:t>회고적 우세 · 동일예산 재검증 · prospective 결과를 분리해 과장을 막는다</a:t>
             </a:r>
           </a:p>
         </p:txBody>
@@ -32915,7 +32915,7 @@
                 <a:latin typeface="Arial"/>
                 <a:ea typeface="AppleGothic"/>
               </a:rPr>
-              <a:t>투고 bottleneck: 독립 prospective predictive superiority 1개 추가 필요. 현재는 route-selection validity와 retrospective breadth를 주장하고, prospective superiority는 주장하지 않는다.</a:t>
+              <a:t>현재 결론: PP-X의 구조적 필요성과 회고적 일관성은 지지된다. 다만 독립 prospective 예측 우월성은 아직 확증되지 않았다.</a:t>
             </a:r>
           </a:p>
         </p:txBody>

--- a/output/PP_Research_Detailed_v2.pptx
+++ b/output/PP_Research_Detailed_v2.pptx
@@ -23745,7 +23745,7 @@
                 <a:latin typeface="Arial"/>
                 <a:ea typeface="AppleGothic"/>
               </a:rPr>
-              <a:t>관측 범위 밖에서는 데이터만으로 답을 정할 수 없다. PP-X는 구조 가정을 사전 선언하고, 검증된 가정만 실행한다.</a:t>
+              <a:t>관측 범위를 벗어나면 데이터만으로 예측 곡선의 형태를 정하기 어렵다. 따라서 어떤 구조 가정을 사용할지 먼저 판단해야 한다.</a:t>
             </a:r>
           </a:p>
         </p:txBody>
@@ -24218,7 +24218,7 @@
                 <a:latin typeface="Arial"/>
                 <a:ea typeface="AppleGothic"/>
               </a:rPr>
-              <a:t>핵심 전환  test에서 잘 맞는 모델을 고르는 것이 아니라, test를 보기 전에 구조 가정의 사용 권한을 승인하거나 거절한다.</a:t>
+              <a:t>PP-X는 시험 결과를 보고 유리한 모델을 고르지 않는다. 학습과 검증 단계에서 사용할 가정과 실행 경로를 정하고, 시험 단계에서는 이를 그대로 적용한다.</a:t>
             </a:r>
           </a:p>
         </p:txBody>
@@ -24254,7 +24254,7 @@
                 <a:latin typeface="Arial"/>
                 <a:ea typeface="AppleGothic"/>
               </a:rPr>
-              <a:t>PP-X = Declare assumptions → Learn constrained residual → Approve with validation evidence → Decline to fallback</a:t>
+              <a:t>가정 선언  ·  제한된 residual 학습  ·  검증자료 기반 승인  ·  미승인 시 대체 경로 적용</a:t>
             </a:r>
           </a:p>
         </p:txBody>
@@ -31635,7 +31635,7 @@
                 <a:latin typeface="Arial"/>
                 <a:ea typeface="AppleGothic"/>
               </a:rPr>
-              <a:t>PP-X의 세 가지 기여</a:t>
+              <a:t>본 연구의 기여</a:t>
             </a:r>
           </a:p>
         </p:txBody>
@@ -31671,7 +31671,7 @@
                 <a:latin typeface="Arial"/>
                 <a:ea typeface="AppleGothic"/>
               </a:rPr>
-              <a:t>가정을 선언하고 · prior의 권한을 보존하며 · 근거가 없으면 실행하지 않는다</a:t>
+              <a:t>PP-X는 구조 가정의 선언, 학습 범위, 승인 기준을 하나의 절차로 정리한다</a:t>
             </a:r>
           </a:p>
         </p:txBody>
@@ -32556,7 +32556,7 @@
                 <a:latin typeface="Arial"/>
                 <a:ea typeface="AppleGothic"/>
               </a:rPr>
-              <a:t>연구 기여 = 새 부품 하나가 아니라, 외삽 가정을 통제하는 선언–학습–승인–거절의 end-to-end 규율</a:t>
+              <a:t>개별 모듈보다 중요한 기여는 구조 가정의 선언부터 승인 또는 거절까지를 재현 가능한 절차로 정식화했다는 점이다.</a:t>
             </a:r>
           </a:p>
         </p:txBody>
@@ -32803,7 +32803,7 @@
                 <a:latin typeface="Arial"/>
                 <a:ea typeface="AppleGothic"/>
               </a:rPr>
-              <a:t>무엇이 새로운가</a:t>
+              <a:t>기존 방법과의 차이</a:t>
             </a:r>
           </a:p>
         </p:txBody>
@@ -32839,7 +32839,7 @@
                 <a:latin typeface="Arial"/>
                 <a:ea typeface="AppleGothic"/>
               </a:rPr>
-              <a:t>새 prior나 gate 자체가 아니라 네 요소를 하나의 검증 가능한 실행 계약으로 결합했다</a:t>
+              <a:t>구조 가정의 허용 범위와 승인 절차를 명시했다는 점에서 기존 방법과 구분된다</a:t>
             </a:r>
           </a:p>
         </p:txBody>
@@ -32915,14 +32915,14 @@
           <a:p>
             <a:pPr algn="ctr"/>
             <a:r>
-              <a:rPr sz="1700" b="1">
+              <a:rPr sz="1600" b="1">
                 <a:solidFill>
                   <a:srgbClr val="0072B2"/>
                 </a:solidFill>
                 <a:latin typeface="Arial"/>
                 <a:ea typeface="AppleGothic"/>
               </a:rPr>
-              <a:t>Typed contract  +  frozen-prior residual authority  +  validation-only approval  +  exact fallback</a:t>
+              <a:t>Typed contract · frozen prior 주변의 residual 학습 · validation-only 승인 · 사전 지정 fallback</a:t>
             </a:r>
           </a:p>
         </p:txBody>
@@ -33778,7 +33778,7 @@
                 <a:latin typeface="Arial"/>
                 <a:ea typeface="AppleGothic"/>
               </a:rPr>
-              <a:t>주장하지 않음  최초의 physics hybrid · 최초의 affine+NN · 새로운 MoE gate · universal/literature SOTA</a:t>
+              <a:t>개별 모듈의 최초성이나 모든 외삽 문제에서의 우월성은 주장하지 않는다.</a:t>
             </a:r>
           </a:p>
         </p:txBody>
@@ -34025,7 +34025,7 @@
                 <a:latin typeface="Arial"/>
                 <a:ea typeface="AppleGothic"/>
               </a:rPr>
-              <a:t>어디까지 주장할 수 있는가</a:t>
+              <a:t>결과의 해석 범위</a:t>
             </a:r>
           </a:p>
         </p:txBody>
@@ -34061,7 +34061,7 @@
                 <a:latin typeface="Arial"/>
                 <a:ea typeface="AppleGothic"/>
               </a:rPr>
-              <a:t>회고적 우세 · 동일예산 재검증 · prospective 결과를 분리해 과장을 막는다</a:t>
+              <a:t>회고 분석, 동일예산 재검증, prospective 평가를 구분해 해석한다</a:t>
             </a:r>
           </a:p>
         </p:txBody>
@@ -34924,7 +34924,7 @@
                 <a:latin typeface="Arial"/>
                 <a:ea typeface="AppleGothic"/>
               </a:rPr>
-              <a:t>현재 결론  PP-X의 구조적 필요성과 회고적 일관성은 지지된다. 독립 prospective 예측 우월성은 아직 확증되지 않았다.</a:t>
+              <a:t>PP-X의 구조적 필요성과 회고 분석에서의 일관성은 확인되었다. 다만 독립 prospective 평가에서의 예측 우월성은 아직 확증되지 않았다.</a:t>
             </a:r>
           </a:p>
         </p:txBody>
@@ -34960,7 +34960,7 @@
                 <a:latin typeface="Arial"/>
                 <a:ea typeface="AppleGothic"/>
               </a:rPr>
-              <a:t>금지: universal/literature SOTA · safety guarantee · 최초의 hybrid/PINN · prospective superiority.</a:t>
+              <a:t>논문의 주장 범위: strict-tail 외삽에서의 구조 검증과 조건부 실행. 보편적 SOTA나 안전 보장은 포함하지 않는다.</a:t>
             </a:r>
           </a:p>
         </p:txBody>
@@ -37088,7 +37088,7 @@
                 <a:latin typeface="Arial"/>
                 <a:ea typeface="AppleGothic"/>
               </a:rPr>
-              <a:t>PP-X 한눈에 보기</a:t>
+              <a:t>PP-X 개요</a:t>
             </a:r>
           </a:p>
         </p:txBody>
@@ -37124,7 +37124,7 @@
                 <a:latin typeface="Arial"/>
                 <a:ea typeface="AppleGothic"/>
               </a:rPr>
-              <a:t>검증이 허용한 구조 가정만 사용하고, 허용되지 않으면 사전 고정 경로로 돌아간다</a:t>
+              <a:t>검증자료가 지지하는 구조만 사용하고, 그렇지 않으면 미리 정한 대체 경로를 적용한다</a:t>
             </a:r>
           </a:p>
         </p:txBody>
@@ -37231,7 +37231,7 @@
                 <a:latin typeface="Arial"/>
                 <a:ea typeface="AppleGothic"/>
               </a:rPr>
-              <a:t>한 줄 정의  PP-X는 test sample을 보고 expert를 고르는 모델이 아니다. 배포 전에 typed contract를 선언하고, validation evidence로 executor의 사용 권한을 동결하는 외삽 프레임워크다.</a:t>
+              <a:t>PP-X는 시험 표본마다 모델을 바꾸지 않는다. 학습 전에 구조 가정과 대체 경로를 선언하고, 검증자료로 사용할 실행 구조를 결정한 뒤 시험 단계에서는 이를 고정한다.</a:t>
             </a:r>
           </a:p>
         </p:txBody>
@@ -37267,7 +37267,7 @@
                 <a:latin typeface="Arial"/>
                 <a:ea typeface="AppleGothic"/>
               </a:rPr>
-              <a:t>출력: approved executor의 예측  |  승인 실패: exact frozen fallback 또는 abstention</a:t>
+              <a:t>승인된 경우 해당 executor를 사용하고, 승인되지 않으면 사전 지정 fallback을 사용하거나 예측을 보류한다.</a:t>
             </a:r>
           </a:p>
         </p:txBody>
